--- a/docs/ecostats_lectures/lecture_05/05_01_lecture_powerpoint.pptx
+++ b/docs/ecostats_lectures/lecture_05/05_01_lecture_powerpoint.pptx
@@ -48,6 +48,9 @@
     <p:sldId id="296" r:id="rId42"/>
     <p:sldId id="297" r:id="rId43"/>
     <p:sldId id="298" r:id="rId44"/>
+    <p:sldId id="299" r:id="rId45"/>
+    <p:sldId id="300" r:id="rId46"/>
+    <p:sldId id="301" r:id="rId47"/>
   </p:sldIdLst>
   <p:sldSz cx="9144000" cy="5143500" type="screen16x9"/>
   <p:notesSz cx="6858000" cy="9144000"/>
@@ -3575,7 +3578,7 @@
             </a:pPr>
             <a:r>
               <a:rPr/>
-              <a:t>H₀: μ = 240 (The mean fish length in I3 is 240mm)</a:t>
+              <a:t>H₀: μ = 15 (The mean needle length on shade side is 15mm)</a:t>
             </a:r>
           </a:p>
           <a:p>
@@ -3584,7 +3587,7 @@
             </a:pPr>
             <a:r>
               <a:rPr/>
-              <a:t>H₁: μ ≠ 240 (The mean fish length in I3 is not 240mm)</a:t>
+              <a:t>H₁: μ ≠ 15 (The mean needle length on shade side is not 240mm)</a:t>
             </a:r>
           </a:p>
           <a:p>
@@ -3763,7 +3766,7 @@
                 </a:solidFill>
                 <a:latin typeface="Courier"/>
               </a:rPr>
-              <a:t>(i3_df</a:t>
+              <a:t>(ps_df</a:t>
             </a:r>
             <a:r>
               <a:rPr>
@@ -3818,7 +3821,7 @@
                 </a:solidFill>
                 <a:latin typeface="Courier"/>
               </a:rPr>
-              <a:t>"QQ Plot for length of Grayling"</a:t>
+              <a:t>"QQ Plot for length of pine needles"</a:t>
             </a:r>
             <a:r>
               <a:rPr>
@@ -3952,7 +3955,7 @@
               <a:rPr>
                 <a:latin typeface="Courier"/>
               </a:rPr>
-              <a:t>[1] 53 35</a:t>
+              <a:t>[1]  8 11</a:t>
             </a:r>
           </a:p>
         </p:txBody>
@@ -4065,7 +4068,7 @@
                 </a:solidFill>
                 <a:latin typeface="Courier"/>
               </a:rPr>
-              <a:t>(i3_df</a:t>
+              <a:t>(ps_df</a:t>
             </a:r>
             <a:r>
               <a:rPr>
@@ -4096,8 +4099,8 @@
               </a:rPr>
               <a:t>
     Shapiro-Wilk normality test
-data:  i3_df$length_mm
-W = 0.91051, p-value = 0.0001623</a:t>
+data:  ps_df$length_mm
+W = 0.92754, p-value = 0.2228</a:t>
             </a:r>
           </a:p>
         </p:txBody>
@@ -4199,7 +4202,7 @@
                 </a:solidFill>
                 <a:latin typeface="Courier"/>
               </a:rPr>
-              <a:t>i3_df </a:t>
+              <a:t>ps_df </a:t>
             </a:r>
             <a:r>
               <a:rPr>
@@ -4253,7 +4256,7 @@
                 </a:solidFill>
                 <a:latin typeface="Courier"/>
               </a:rPr>
-              <a:t>(lake, length_mm))</a:t>
+              <a:t>(side, length_mm))</a:t>
             </a:r>
             <a:r>
               <a:rPr>
@@ -4287,7 +4290,7 @@
       </p:sp>
       <p:pic>
         <p:nvPicPr>
-          <p:cNvPr descr="05_01_lecture_powerpoint_files/figure-pptx/unnamed-chunk-4-1.png" id="0" name="Picture 1"/>
+          <p:cNvPr descr="05_01_lecture_powerpoint_files/figure-pptx/unnamed-chunk-5-1.png" id="0" name="Picture 1"/>
           <p:cNvPicPr>
             <a:picLocks noGrp="1" noChangeAspect="1"/>
           </p:cNvPicPr>
@@ -4396,7 +4399,7 @@
             </a:pPr>
             <a:r>
               <a:rPr sz="2000"/>
-              <a:t>Let’s perform a one-sample t-test to determine if the mean fish length in I3 Lake differs from 240 mm:</a:t>
+              <a:t>Let’s perform a one-sample t-test to determine if the mean fish length in I3 Lake differs from 15 mm:</a:t>
             </a:r>
           </a:p>
           <a:p>
@@ -4411,301 +4414,311 @@
                 <a:latin typeface="Courier"/>
               </a:rPr>
               <a:t># what is the mean</a:t>
-            </a:r>
-            <a:br/>
-            <a:r>
-              <a:rPr>
-                <a:solidFill>
-                  <a:srgbClr val="003B4F"/>
-                </a:solidFill>
-                <a:latin typeface="Courier"/>
-              </a:rPr>
-              <a:t>i3_mean &lt;- </a:t>
-            </a:r>
-            <a:r>
-              <a:rPr>
-                <a:solidFill>
-                  <a:srgbClr val="4758AB"/>
-                </a:solidFill>
-                <a:latin typeface="Courier"/>
-              </a:rPr>
-              <a:t>mean</a:t>
-            </a:r>
-            <a:r>
-              <a:rPr>
-                <a:solidFill>
-                  <a:srgbClr val="003B4F"/>
-                </a:solidFill>
-                <a:latin typeface="Courier"/>
-              </a:rPr>
-              <a:t>(i3_df</a:t>
-            </a:r>
-            <a:r>
-              <a:rPr>
-                <a:solidFill>
-                  <a:srgbClr val="5E5E5E"/>
-                </a:solidFill>
-                <a:latin typeface="Courier"/>
-              </a:rPr>
-              <a:t>$</a:t>
-            </a:r>
-            <a:r>
-              <a:rPr>
-                <a:solidFill>
-                  <a:srgbClr val="003B4F"/>
-                </a:solidFill>
-                <a:latin typeface="Courier"/>
-              </a:rPr>
-              <a:t>length_mm, </a:t>
-            </a:r>
-            <a:r>
-              <a:rPr>
-                <a:solidFill>
-                  <a:srgbClr val="657422"/>
-                </a:solidFill>
-                <a:latin typeface="Courier"/>
-              </a:rPr>
-              <a:t>na.rm=</a:t>
-            </a:r>
-            <a:r>
-              <a:rPr>
-                <a:solidFill>
-                  <a:srgbClr val="8F5902"/>
-                </a:solidFill>
-                <a:latin typeface="Courier"/>
-              </a:rPr>
-              <a:t>TRUE</a:t>
-            </a:r>
-            <a:r>
-              <a:rPr>
-                <a:solidFill>
-                  <a:srgbClr val="003B4F"/>
-                </a:solidFill>
-                <a:latin typeface="Courier"/>
-              </a:rPr>
-              <a:t>)</a:t>
-            </a:r>
-            <a:br/>
-            <a:r>
-              <a:rPr>
-                <a:solidFill>
-                  <a:srgbClr val="4758AB"/>
-                </a:solidFill>
-                <a:latin typeface="Courier"/>
-              </a:rPr>
-              <a:t>cat</a:t>
-            </a:r>
-            <a:r>
-              <a:rPr>
-                <a:solidFill>
-                  <a:srgbClr val="003B4F"/>
-                </a:solidFill>
-                <a:latin typeface="Courier"/>
-              </a:rPr>
-              <a:t>(</a:t>
-            </a:r>
-            <a:r>
-              <a:rPr>
-                <a:solidFill>
-                  <a:srgbClr val="20794D"/>
-                </a:solidFill>
-                <a:latin typeface="Courier"/>
-              </a:rPr>
-              <a:t>"Mean:"</a:t>
-            </a:r>
-            <a:r>
-              <a:rPr>
-                <a:solidFill>
-                  <a:srgbClr val="003B4F"/>
-                </a:solidFill>
-                <a:latin typeface="Courier"/>
-              </a:rPr>
-              <a:t>, </a:t>
-            </a:r>
-            <a:r>
-              <a:rPr>
-                <a:solidFill>
-                  <a:srgbClr val="4758AB"/>
-                </a:solidFill>
-                <a:latin typeface="Courier"/>
-              </a:rPr>
-              <a:t>round</a:t>
-            </a:r>
-            <a:r>
-              <a:rPr>
-                <a:solidFill>
-                  <a:srgbClr val="003B4F"/>
-                </a:solidFill>
-                <a:latin typeface="Courier"/>
-              </a:rPr>
-              <a:t>(i3_mean, </a:t>
-            </a:r>
-            <a:r>
-              <a:rPr>
-                <a:solidFill>
-                  <a:srgbClr val="AD0000"/>
-                </a:solidFill>
-                <a:latin typeface="Courier"/>
-              </a:rPr>
-              <a:t>1</a:t>
-            </a:r>
-            <a:r>
-              <a:rPr>
-                <a:solidFill>
-                  <a:srgbClr val="003B4F"/>
-                </a:solidFill>
-                <a:latin typeface="Courier"/>
-              </a:rPr>
-              <a:t>), </a:t>
-            </a:r>
-            <a:r>
-              <a:rPr>
-                <a:solidFill>
-                  <a:srgbClr val="20794D"/>
-                </a:solidFill>
-                <a:latin typeface="Courier"/>
-              </a:rPr>
-              <a:t>"mm</a:t>
-            </a:r>
-            <a:r>
-              <a:rPr>
-                <a:solidFill>
-                  <a:srgbClr val="5E5E5E"/>
-                </a:solidFill>
-                <a:latin typeface="Courier"/>
-              </a:rPr>
-              <a:t>\n</a:t>
-            </a:r>
-            <a:r>
-              <a:rPr>
-                <a:solidFill>
-                  <a:srgbClr val="20794D"/>
-                </a:solidFill>
-                <a:latin typeface="Courier"/>
-              </a:rPr>
-              <a:t>"</a:t>
-            </a:r>
-            <a:r>
-              <a:rPr>
-                <a:solidFill>
-                  <a:srgbClr val="003B4F"/>
-                </a:solidFill>
-                <a:latin typeface="Courier"/>
-              </a:rPr>
-              <a:t>)</a:t>
-            </a:r>
-          </a:p>
-          <a:p>
-            <a:pPr lvl="0" indent="0">
-              <a:buNone/>
-            </a:pPr>
-            <a:r>
-              <a:rPr sz="2000">
-                <a:latin typeface="Courier"/>
-              </a:rPr>
-              <a:t>Mean: 265.6 mm</a:t>
-            </a:r>
-          </a:p>
-          <a:p>
-            <a:pPr lvl="0" indent="0">
-              <a:buNone/>
-            </a:pPr>
-            <a:r>
-              <a:rPr>
-                <a:solidFill>
-                  <a:srgbClr val="5E5E5E"/>
-                </a:solidFill>
-                <a:latin typeface="Courier"/>
-              </a:rPr>
-              <a:t># Perform a one-sample t-test</a:t>
-            </a:r>
-            <a:br/>
-            <a:r>
-              <a:rPr>
-                <a:solidFill>
-                  <a:srgbClr val="003B4F"/>
-                </a:solidFill>
-                <a:latin typeface="Courier"/>
-              </a:rPr>
-              <a:t>t_test_result &lt;- </a:t>
-            </a:r>
-            <a:r>
-              <a:rPr>
-                <a:solidFill>
-                  <a:srgbClr val="4758AB"/>
-                </a:solidFill>
-                <a:latin typeface="Courier"/>
-              </a:rPr>
-              <a:t>t.test</a:t>
-            </a:r>
-            <a:r>
-              <a:rPr>
-                <a:solidFill>
-                  <a:srgbClr val="003B4F"/>
-                </a:solidFill>
-                <a:latin typeface="Courier"/>
-              </a:rPr>
-              <a:t>(i3_df</a:t>
-            </a:r>
-            <a:r>
-              <a:rPr>
-                <a:solidFill>
-                  <a:srgbClr val="5E5E5E"/>
-                </a:solidFill>
-                <a:latin typeface="Courier"/>
-              </a:rPr>
-              <a:t>$</a:t>
-            </a:r>
-            <a:r>
-              <a:rPr>
-                <a:solidFill>
-                  <a:srgbClr val="003B4F"/>
-                </a:solidFill>
-                <a:latin typeface="Courier"/>
-              </a:rPr>
-              <a:t>length_mm, </a:t>
-            </a:r>
-            <a:r>
-              <a:rPr>
-                <a:solidFill>
-                  <a:srgbClr val="657422"/>
-                </a:solidFill>
-                <a:latin typeface="Courier"/>
-              </a:rPr>
-              <a:t>mu =</a:t>
-            </a:r>
-            <a:r>
-              <a:rPr>
-                <a:solidFill>
-                  <a:srgbClr val="003B4F"/>
-                </a:solidFill>
-                <a:latin typeface="Courier"/>
-              </a:rPr>
-              <a:t> </a:t>
-            </a:r>
-            <a:r>
-              <a:rPr>
-                <a:solidFill>
-                  <a:srgbClr val="AD0000"/>
-                </a:solidFill>
-                <a:latin typeface="Courier"/>
-              </a:rPr>
-              <a:t>240</a:t>
-            </a:r>
-            <a:r>
-              <a:rPr>
-                <a:solidFill>
-                  <a:srgbClr val="003B4F"/>
-                </a:solidFill>
-                <a:latin typeface="Courier"/>
-              </a:rPr>
-              <a:t>)</a:t>
             </a:r>
             <a:br/>
             <a:br/>
             <a:r>
               <a:rPr>
                 <a:solidFill>
+                  <a:srgbClr val="003B4F"/>
+                </a:solidFill>
+                <a:latin typeface="Courier"/>
+              </a:rPr>
+              <a:t>ps_shade_mean &lt;- </a:t>
+            </a:r>
+            <a:r>
+              <a:rPr>
+                <a:solidFill>
+                  <a:srgbClr val="4758AB"/>
+                </a:solidFill>
+                <a:latin typeface="Courier"/>
+              </a:rPr>
+              <a:t>mean</a:t>
+            </a:r>
+            <a:r>
+              <a:rPr>
+                <a:solidFill>
+                  <a:srgbClr val="003B4F"/>
+                </a:solidFill>
+                <a:latin typeface="Courier"/>
+              </a:rPr>
+              <a:t>(ps_shady_df</a:t>
+            </a:r>
+            <a:r>
+              <a:rPr>
+                <a:solidFill>
+                  <a:srgbClr val="5E5E5E"/>
+                </a:solidFill>
+                <a:latin typeface="Courier"/>
+              </a:rPr>
+              <a:t>$</a:t>
+            </a:r>
+            <a:r>
+              <a:rPr>
+                <a:solidFill>
+                  <a:srgbClr val="003B4F"/>
+                </a:solidFill>
+                <a:latin typeface="Courier"/>
+              </a:rPr>
+              <a:t>length_mm, </a:t>
+            </a:r>
+            <a:r>
+              <a:rPr>
+                <a:solidFill>
+                  <a:srgbClr val="657422"/>
+                </a:solidFill>
+                <a:latin typeface="Courier"/>
+              </a:rPr>
+              <a:t>na.rm =</a:t>
+            </a:r>
+            <a:r>
+              <a:rPr>
+                <a:solidFill>
+                  <a:srgbClr val="003B4F"/>
+                </a:solidFill>
+                <a:latin typeface="Courier"/>
+              </a:rPr>
+              <a:t> </a:t>
+            </a:r>
+            <a:r>
+              <a:rPr>
+                <a:solidFill>
+                  <a:srgbClr val="8F5902"/>
+                </a:solidFill>
+                <a:latin typeface="Courier"/>
+              </a:rPr>
+              <a:t>TRUE</a:t>
+            </a:r>
+            <a:r>
+              <a:rPr>
+                <a:solidFill>
+                  <a:srgbClr val="003B4F"/>
+                </a:solidFill>
+                <a:latin typeface="Courier"/>
+              </a:rPr>
+              <a:t>)</a:t>
+            </a:r>
+            <a:br/>
+            <a:r>
+              <a:rPr>
+                <a:solidFill>
+                  <a:srgbClr val="4758AB"/>
+                </a:solidFill>
+                <a:latin typeface="Courier"/>
+              </a:rPr>
+              <a:t>cat</a:t>
+            </a:r>
+            <a:r>
+              <a:rPr>
+                <a:solidFill>
+                  <a:srgbClr val="003B4F"/>
+                </a:solidFill>
+                <a:latin typeface="Courier"/>
+              </a:rPr>
+              <a:t>(</a:t>
+            </a:r>
+            <a:r>
+              <a:rPr>
+                <a:solidFill>
+                  <a:srgbClr val="20794D"/>
+                </a:solidFill>
+                <a:latin typeface="Courier"/>
+              </a:rPr>
+              <a:t>"Mean:"</a:t>
+            </a:r>
+            <a:r>
+              <a:rPr>
+                <a:solidFill>
+                  <a:srgbClr val="003B4F"/>
+                </a:solidFill>
+                <a:latin typeface="Courier"/>
+              </a:rPr>
+              <a:t>, </a:t>
+            </a:r>
+            <a:r>
+              <a:rPr>
+                <a:solidFill>
+                  <a:srgbClr val="4758AB"/>
+                </a:solidFill>
+                <a:latin typeface="Courier"/>
+              </a:rPr>
+              <a:t>round</a:t>
+            </a:r>
+            <a:r>
+              <a:rPr>
+                <a:solidFill>
+                  <a:srgbClr val="003B4F"/>
+                </a:solidFill>
+                <a:latin typeface="Courier"/>
+              </a:rPr>
+              <a:t>(ps_shade_mean, </a:t>
+            </a:r>
+            <a:r>
+              <a:rPr>
+                <a:solidFill>
+                  <a:srgbClr val="AD0000"/>
+                </a:solidFill>
+                <a:latin typeface="Courier"/>
+              </a:rPr>
+              <a:t>1</a:t>
+            </a:r>
+            <a:r>
+              <a:rPr>
+                <a:solidFill>
+                  <a:srgbClr val="003B4F"/>
+                </a:solidFill>
+                <a:latin typeface="Courier"/>
+              </a:rPr>
+              <a:t>), </a:t>
+            </a:r>
+            <a:r>
+              <a:rPr>
+                <a:solidFill>
+                  <a:srgbClr val="20794D"/>
+                </a:solidFill>
+                <a:latin typeface="Courier"/>
+              </a:rPr>
+              <a:t>"mm</a:t>
+            </a:r>
+            <a:r>
+              <a:rPr>
+                <a:solidFill>
+                  <a:srgbClr val="5E5E5E"/>
+                </a:solidFill>
+                <a:latin typeface="Courier"/>
+              </a:rPr>
+              <a:t>\n</a:t>
+            </a:r>
+            <a:r>
+              <a:rPr>
+                <a:solidFill>
+                  <a:srgbClr val="20794D"/>
+                </a:solidFill>
+                <a:latin typeface="Courier"/>
+              </a:rPr>
+              <a:t>"</a:t>
+            </a:r>
+            <a:r>
+              <a:rPr>
+                <a:solidFill>
+                  <a:srgbClr val="003B4F"/>
+                </a:solidFill>
+                <a:latin typeface="Courier"/>
+              </a:rPr>
+              <a:t>)</a:t>
+            </a:r>
+          </a:p>
+          <a:p>
+            <a:pPr lvl="0" indent="0">
+              <a:buNone/>
+            </a:pPr>
+            <a:r>
+              <a:rPr sz="2000">
+                <a:latin typeface="Courier"/>
+              </a:rPr>
+              <a:t>Mean: 17.6 mm</a:t>
+            </a:r>
+          </a:p>
+          <a:p>
+            <a:pPr lvl="0" indent="0">
+              <a:buNone/>
+            </a:pPr>
+            <a:r>
+              <a:rPr>
+                <a:solidFill>
+                  <a:srgbClr val="5E5E5E"/>
+                </a:solidFill>
+                <a:latin typeface="Courier"/>
+              </a:rPr>
+              <a:t># Perform a one-sample t-test</a:t>
+            </a:r>
+            <a:br/>
+            <a:r>
+              <a:rPr>
+                <a:solidFill>
+                  <a:srgbClr val="003B4F"/>
+                </a:solidFill>
+                <a:latin typeface="Courier"/>
+              </a:rPr>
+              <a:t>t_test_result &lt;- </a:t>
+            </a:r>
+            <a:r>
+              <a:rPr>
+                <a:solidFill>
+                  <a:srgbClr val="4758AB"/>
+                </a:solidFill>
+                <a:latin typeface="Courier"/>
+              </a:rPr>
+              <a:t>t.test</a:t>
+            </a:r>
+            <a:r>
+              <a:rPr>
+                <a:solidFill>
+                  <a:srgbClr val="003B4F"/>
+                </a:solidFill>
+                <a:latin typeface="Courier"/>
+              </a:rPr>
+              <a:t>(ps_shady_df</a:t>
+            </a:r>
+            <a:r>
+              <a:rPr>
+                <a:solidFill>
+                  <a:srgbClr val="5E5E5E"/>
+                </a:solidFill>
+                <a:latin typeface="Courier"/>
+              </a:rPr>
+              <a:t>$</a:t>
+            </a:r>
+            <a:r>
+              <a:rPr>
+                <a:solidFill>
+                  <a:srgbClr val="003B4F"/>
+                </a:solidFill>
+                <a:latin typeface="Courier"/>
+              </a:rPr>
+              <a:t>length_mm, </a:t>
+            </a:r>
+            <a:r>
+              <a:rPr>
+                <a:solidFill>
+                  <a:srgbClr val="657422"/>
+                </a:solidFill>
+                <a:latin typeface="Courier"/>
+              </a:rPr>
+              <a:t>mu =</a:t>
+            </a:r>
+            <a:r>
+              <a:rPr>
+                <a:solidFill>
+                  <a:srgbClr val="003B4F"/>
+                </a:solidFill>
+                <a:latin typeface="Courier"/>
+              </a:rPr>
+              <a:t> </a:t>
+            </a:r>
+            <a:r>
+              <a:rPr>
+                <a:solidFill>
+                  <a:srgbClr val="AD0000"/>
+                </a:solidFill>
+                <a:latin typeface="Courier"/>
+              </a:rPr>
+              <a:t>15</a:t>
+            </a:r>
+            <a:r>
+              <a:rPr>
+                <a:solidFill>
+                  <a:srgbClr val="003B4F"/>
+                </a:solidFill>
+                <a:latin typeface="Courier"/>
+              </a:rPr>
+              <a:t>)</a:t>
+            </a:r>
+            <a:br/>
+            <a:br/>
+            <a:r>
+              <a:rPr>
+                <a:solidFill>
                   <a:srgbClr val="5E5E5E"/>
                 </a:solidFill>
                 <a:latin typeface="Courier"/>
@@ -4733,14 +4746,14 @@
               </a:rPr>
               <a:t>
     One Sample t-test
-data:  i3_df$length_mm
-t = 7.3497, df = 65, p-value = 4.17e-10
-alternative hypothesis: true mean is not equal to 240
+data:  ps_shady_df$length_mm
+t = 2.9414, df = 7, p-value = 0.02167
+alternative hypothesis: true mean is not equal to 15
 95 percent confidence interval:
- 258.6481 272.5640
+ 15.51092 19.70030
 sample estimates:
 mean of x 
- 265.6061 </a:t>
+ 17.60561 </a:t>
             </a:r>
           </a:p>
           <a:p>
@@ -4972,7 +4985,7 @@
       </p:sp>
       <p:pic>
         <p:nvPicPr>
-          <p:cNvPr descr="05_01_lecture_powerpoint_files/figure-pptx/unnamed-chunk-6-1.png" id="0" name="Picture 1"/>
+          <p:cNvPr descr="05_01_lecture_powerpoint_files/figure-pptx/unnamed-chunk-7-1.png" id="0" name="Picture 1"/>
           <p:cNvPicPr>
             <a:picLocks noGrp="1" noChangeAspect="1"/>
           </p:cNvPicPr>
@@ -5173,7 +5186,7 @@
       </p:sp>
       <p:pic>
         <p:nvPicPr>
-          <p:cNvPr descr="05_01_lecture_powerpoint_files/figure-pptx/unnamed-chunk-7-1.png" id="0" name="Picture 1"/>
+          <p:cNvPr descr="05_01_lecture_powerpoint_files/figure-pptx/unnamed-chunk-8-1.png" id="0" name="Picture 1"/>
           <p:cNvPicPr>
             <a:picLocks noGrp="1" noChangeAspect="1"/>
           </p:cNvPicPr>
@@ -5305,7 +5318,7 @@
             </a:pPr>
             <a:r>
               <a:rPr/>
-              <a:t>“A one-sample t-test at α=0.05 showed that the mean fish length (… mm, SD = …) [was/was not] significantly different from the expected 240 mm, t(…) = …, p = …”</a:t>
+              <a:t>“A one-sample t-test at α=0.05 showed that the mean needle length (… mm, SD = …) [was/was not] significantly different from the expected 15 mm, t(…) = …, p = …”</a:t>
             </a:r>
           </a:p>
         </p:txBody>
@@ -5576,36 +5589,31 @@
           </a:p>
         </p:txBody>
       </p:sp>
-      <p:pic>
-        <p:nvPicPr>
-          <p:cNvPr descr="images/slimy_sculpin_cottus_cognatus.jpg" id="0" name="Picture 1"/>
-          <p:cNvPicPr>
-            <a:picLocks noGrp="1" noChangeAspect="1"/>
-          </p:cNvPicPr>
-          <p:nvPr/>
-        </p:nvPicPr>
-        <p:blipFill>
-          <a:blip r:embed="rId2"/>
-          <a:stretch>
-            <a:fillRect/>
-          </a:stretch>
-        </p:blipFill>
-        <p:spPr bwMode="auto">
-          <a:xfrm>
-            <a:off x="6121400" y="2349500"/>
-            <a:ext cx="2781300" cy="1104900"/>
-          </a:xfrm>
-          <a:prstGeom prst="rect">
-            <a:avLst/>
-          </a:prstGeom>
-          <a:noFill/>
-          <a:ln w="9525">
-            <a:noFill/>
-            <a:headEnd/>
-            <a:tailEnd/>
-          </a:ln>
-        </p:spPr>
-      </p:pic>
+      <p:sp>
+        <p:nvSpPr>
+          <p:cNvPr id="4" name="Content Placeholder 3"/>
+          <p:cNvSpPr>
+            <a:spLocks noGrp="1"/>
+          </p:cNvSpPr>
+          <p:nvPr>
+            <p:ph idx="2" sz="half"/>
+          </p:nvPr>
+        </p:nvSpPr>
+        <p:spPr/>
+        <p:txBody>
+          <a:bodyPr/>
+          <a:lstStyle/>
+          <a:p>
+            <a:pPr lvl="0" indent="0" marL="0">
+              <a:buNone/>
+            </a:pPr>
+            <a:r>
+              <a:rPr/>
+              <a:t>xxxxx  xxx</a:t>
+            </a:r>
+          </a:p>
+        </p:txBody>
+      </p:sp>
     </p:spTree>
   </p:cSld>
 </p:sld>
@@ -5750,7 +5758,7 @@
                 </a:solidFill>
                 <a:latin typeface="Courier"/>
               </a:rPr>
-              <a:t>i3_i8_plot &lt;- grayling_df </a:t>
+              <a:t>shady_sunny_plot &lt;- ps_df </a:t>
             </a:r>
             <a:r>
               <a:rPr>
@@ -5823,7 +5831,7 @@
                 </a:solidFill>
                 <a:latin typeface="Courier"/>
               </a:rPr>
-              <a:t> lake, </a:t>
+              <a:t> side, </a:t>
             </a:r>
             <a:r>
               <a:rPr>
@@ -5859,7 +5867,7 @@
                 </a:solidFill>
                 <a:latin typeface="Courier"/>
               </a:rPr>
-              <a:t> lake)) </a:t>
+              <a:t> side)) </a:t>
             </a:r>
             <a:r>
               <a:rPr>
@@ -5970,7 +5978,7 @@
                 </a:solidFill>
                 <a:latin typeface="Courier"/>
               </a:rPr>
-              <a:t>"lake"</a:t>
+              <a:t>"side"</a:t>
             </a:r>
             <a:r>
               <a:rPr>
@@ -6062,7 +6070,7 @@
                 </a:solidFill>
                 <a:latin typeface="Courier"/>
               </a:rPr>
-              <a:t>"Lake"</a:t>
+              <a:t>"side"</a:t>
             </a:r>
             <a:r>
               <a:rPr>
@@ -6081,14 +6089,14 @@
                 </a:solidFill>
                 <a:latin typeface="Courier"/>
               </a:rPr>
-              <a:t>i3_i8_plot</a:t>
+              <a:t>shady_sunny_plot</a:t>
             </a:r>
           </a:p>
         </p:txBody>
       </p:sp>
       <p:pic>
         <p:nvPicPr>
-          <p:cNvPr descr="05_01_lecture_powerpoint_files/figure-pptx/unnamed-chunk-8-1.png" id="0" name="Picture 1"/>
+          <p:cNvPr descr="05_01_lecture_powerpoint_files/figure-pptx/unnamed-chunk-9-1.png" id="0" name="Picture 1"/>
           <p:cNvPicPr>
             <a:picLocks noGrp="1" noChangeAspect="1"/>
           </p:cNvPicPr>
@@ -6247,7 +6255,7 @@
             </a:pPr>
             <a:r>
               <a:rPr sz="2000"/>
-              <a:t>For the following research questions about fish lenghts write the null and alternative hypotheses:</a:t>
+              <a:t>For the following research questions about fish lengths write the null and alternative hypotheses:</a:t>
             </a:r>
           </a:p>
           <a:p>
@@ -6256,7 +6264,7 @@
             </a:pPr>
             <a:r>
               <a:rPr sz="2000"/>
-              <a:t>Are fish lengths in lake I3 and I8 different?</a:t>
+              <a:t>Are needle lengths ion shady and sunny sides different?</a:t>
             </a:r>
           </a:p>
           <a:p>
@@ -6366,7 +6374,7 @@
                 </a:pPr>
                 <a:r>
                   <a:rPr/>
-                  <a:t>Now, let’s compare fish lengths from the two lakes</a:t>
+                  <a:t>Now, let’s compare needles lengths from the two sides</a:t>
                 </a:r>
               </a:p>
               <a:p>
@@ -6379,7 +6387,7 @@
                 </a:r>
                 <a:r>
                   <a:rPr b="1"/>
-                  <a:t>Is there a significant difference in fish length between the lakes?</a:t>
+                  <a:t>Is there a significant difference in neele length between the sides?</a:t>
                 </a:r>
               </a:p>
               <a:p>
@@ -6764,7 +6772,7 @@
                 </a:solidFill>
                 <a:latin typeface="Courier"/>
               </a:rPr>
-              <a:t>group_summary &lt;- grayling_df </a:t>
+              <a:t>group_summary &lt;- ps_df </a:t>
             </a:r>
             <a:r>
               <a:rPr>
@@ -6801,7 +6809,7 @@
                 </a:solidFill>
                 <a:latin typeface="Courier"/>
               </a:rPr>
-              <a:t>(lake) </a:t>
+              <a:t>(side) </a:t>
             </a:r>
             <a:r>
               <a:rPr>
@@ -7082,10 +7090,10 @@
                 <a:latin typeface="Courier"/>
               </a:rPr>
               <a:t># A tibble: 2 × 5
-  lake  mean_length sd_length     n se_length
+  side  mean_length sd_length     n se_length
   &lt;chr&gt;       &lt;dbl&gt;     &lt;dbl&gt; &lt;int&gt;     &lt;dbl&gt;
-1 I3           266.      28.3    66      3.48
-2 I8           363.      52.3   102      5.18</a:t>
+1 shady        17.6      2.51     8     0.886
+2 sunny        16.2      2.64     8     0.934</a:t>
             </a:r>
           </a:p>
         </p:txBody>
@@ -7177,14 +7185,14 @@
                 </a:solidFill>
                 <a:latin typeface="Courier"/>
               </a:rPr>
-              <a:t>i3_i8_plot</a:t>
+              <a:t>shady_sunny_plot</a:t>
             </a:r>
           </a:p>
         </p:txBody>
       </p:sp>
       <p:pic>
         <p:nvPicPr>
-          <p:cNvPr descr="05_01_lecture_powerpoint_files/figure-pptx/unnamed-chunk-10-1.png" id="0" name="Picture 1"/>
+          <p:cNvPr descr="05_01_lecture_powerpoint_files/figure-pptx/unnamed-chunk-11-1.png" id="0" name="Picture 1"/>
           <p:cNvPicPr>
             <a:picLocks noGrp="1" noChangeAspect="1"/>
           </p:cNvPicPr>
@@ -7372,7 +7380,7 @@
                 </a:solidFill>
                 <a:latin typeface="Courier"/>
               </a:rPr>
-              <a:t> mean_length[lake </a:t>
+              <a:t> mean_length[side </a:t>
             </a:r>
             <a:r>
               <a:rPr>
@@ -7399,7 +7407,7 @@
                 </a:solidFill>
                 <a:latin typeface="Courier"/>
               </a:rPr>
-              <a:t>"I8"</a:t>
+              <a:t>"shady"</a:t>
             </a:r>
             <a:r>
               <a:rPr>
@@ -7426,7 +7434,7 @@
                 </a:solidFill>
                 <a:latin typeface="Courier"/>
               </a:rPr>
-              <a:t> mean_length[lake </a:t>
+              <a:t> mean_length[side </a:t>
             </a:r>
             <a:r>
               <a:rPr>
@@ -7453,7 +7461,7 @@
                 </a:solidFill>
                 <a:latin typeface="Courier"/>
               </a:rPr>
-              <a:t>"I3"</a:t>
+              <a:t>"sunny"</a:t>
             </a:r>
             <a:r>
               <a:rPr>
@@ -7476,7 +7484,7 @@
               <a:t># A tibble: 1 × 1
   difference
        &lt;dbl&gt;
-1       97.0</a:t>
+1       1.45</a:t>
             </a:r>
           </a:p>
         </p:txBody>
@@ -7586,7 +7594,7 @@
                 </a:solidFill>
                 <a:latin typeface="Courier"/>
               </a:rPr>
-              <a:t>fish_mean_se_plot &lt;- </a:t>
+              <a:t>neelde_mean_se_plot &lt;- </a:t>
             </a:r>
             <a:r>
               <a:rPr>
@@ -7604,7 +7612,7 @@
                 </a:solidFill>
                 <a:latin typeface="Courier"/>
               </a:rPr>
-              <a:t>(grayling_df, </a:t>
+              <a:t>(ps_df, </a:t>
             </a:r>
             <a:r>
               <a:rPr>
@@ -7640,7 +7648,7 @@
                 </a:solidFill>
                 <a:latin typeface="Courier"/>
               </a:rPr>
-              <a:t> lake, </a:t>
+              <a:t> side, </a:t>
             </a:r>
             <a:r>
               <a:rPr>
@@ -7676,7 +7684,7 @@
                 </a:solidFill>
                 <a:latin typeface="Courier"/>
               </a:rPr>
-              <a:t> lake)) </a:t>
+              <a:t> side)) </a:t>
             </a:r>
             <a:r>
               <a:rPr>
@@ -7968,7 +7976,7 @@
                 </a:solidFill>
                 <a:latin typeface="Courier"/>
               </a:rPr>
-              <a:t>"lake"</a:t>
+              <a:t>"side"</a:t>
             </a:r>
             <a:r>
               <a:rPr>
@@ -8070,7 +8078,7 @@
                 </a:solidFill>
                 <a:latin typeface="Courier"/>
               </a:rPr>
-              <a:t>fish_mean_se_plot</a:t>
+              <a:t>neelde_mean_se_plot</a:t>
             </a:r>
           </a:p>
           <a:p>
@@ -8325,7 +8333,7 @@
                 </a:solidFill>
                 <a:latin typeface="Courier"/>
               </a:rPr>
-              <a:t>fish_mean_se_plot</a:t>
+              <a:t>neelde_mean_se_plot</a:t>
             </a:r>
           </a:p>
           <a:p>
@@ -8612,112 +8620,46 @@
             <a:r>
               <a:rPr>
                 <a:solidFill>
-                  <a:srgbClr val="003B4F"/>
-                </a:solidFill>
-                <a:latin typeface="Courier"/>
-              </a:rPr>
-              <a:t>i3_data &lt;- grayling_df </a:t>
-            </a:r>
-            <a:r>
-              <a:rPr>
-                <a:solidFill>
-                  <a:srgbClr val="5E5E5E"/>
-                </a:solidFill>
-                <a:latin typeface="Courier"/>
-              </a:rPr>
-              <a:t>%&gt;%</a:t>
-            </a:r>
-            <a:r>
-              <a:rPr>
-                <a:solidFill>
-                  <a:srgbClr val="003B4F"/>
-                </a:solidFill>
-                <a:latin typeface="Courier"/>
-              </a:rPr>
-              <a:t> </a:t>
-            </a:r>
-            <a:r>
-              <a:rPr>
-                <a:solidFill>
                   <a:srgbClr val="4758AB"/>
                 </a:solidFill>
                 <a:latin typeface="Courier"/>
               </a:rPr>
-              <a:t>filter</a:t>
-            </a:r>
-            <a:r>
-              <a:rPr>
-                <a:solidFill>
-                  <a:srgbClr val="003B4F"/>
-                </a:solidFill>
-                <a:latin typeface="Courier"/>
-              </a:rPr>
-              <a:t>(lake </a:t>
-            </a:r>
-            <a:r>
-              <a:rPr>
-                <a:solidFill>
-                  <a:srgbClr val="5E5E5E"/>
-                </a:solidFill>
-                <a:latin typeface="Courier"/>
-              </a:rPr>
-              <a:t>==</a:t>
-            </a:r>
-            <a:r>
-              <a:rPr>
-                <a:solidFill>
-                  <a:srgbClr val="003B4F"/>
-                </a:solidFill>
-                <a:latin typeface="Courier"/>
-              </a:rPr>
-              <a:t> </a:t>
-            </a:r>
-            <a:r>
-              <a:rPr>
-                <a:solidFill>
-                  <a:srgbClr val="20794D"/>
-                </a:solidFill>
-                <a:latin typeface="Courier"/>
-              </a:rPr>
-              <a:t>"I3"</a:t>
-            </a:r>
-            <a:r>
-              <a:rPr>
-                <a:solidFill>
-                  <a:srgbClr val="003B4F"/>
-                </a:solidFill>
-                <a:latin typeface="Courier"/>
-              </a:rPr>
-              <a:t>)</a:t>
-            </a:r>
-            <a:br/>
-            <a:r>
-              <a:rPr>
-                <a:solidFill>
-                  <a:srgbClr val="003B4F"/>
-                </a:solidFill>
-                <a:latin typeface="Courier"/>
-              </a:rPr>
-              <a:t>i8_data &lt;- grayling_df </a:t>
-            </a:r>
-            <a:r>
-              <a:rPr>
-                <a:solidFill>
-                  <a:srgbClr val="5E5E5E"/>
-                </a:solidFill>
-                <a:latin typeface="Courier"/>
-              </a:rPr>
-              <a:t>%&gt;%</a:t>
-            </a:r>
-            <a:r>
-              <a:rPr>
-                <a:solidFill>
-                  <a:srgbClr val="003B4F"/>
-                </a:solidFill>
-                <a:latin typeface="Courier"/>
-              </a:rPr>
-              <a:t> </a:t>
-            </a:r>
+              <a:t>head</a:t>
+            </a:r>
+            <a:r>
+              <a:rPr>
+                <a:solidFill>
+                  <a:srgbClr val="003B4F"/>
+                </a:solidFill>
+                <a:latin typeface="Courier"/>
+              </a:rPr>
+              <a:t>(ps_shady_df)</a:t>
+            </a:r>
+          </a:p>
+          <a:p>
+            <a:pPr lvl="0" indent="0">
+              <a:buNone/>
+            </a:pPr>
+            <a:r>
+              <a:rPr sz="2000">
+                <a:latin typeface="Courier"/>
+              </a:rPr>
+              <a:t># A tibble: 6 × 5
+# Groups:   group, tree_no, tree_char [6]
+  group                      tree_no tree_char side  length_mm
+  &lt;chr&gt;                        &lt;dbl&gt; &lt;chr&gt;     &lt;chr&gt;     &lt;dbl&gt;
+1 big_fat_fecund_female_fish       2 tree_2    shady      15.4
+2 bill                             3 tree_3    shady      16.7
+3 ciabatta                         5 tree_5    shady      19.1
+4 fake_data                        8 tree_8    shady      17.4
+5 five                             1 tree_1    shady      20.3
+6 moose_walkin                     7 tree_7    shady      20.7</a:t>
+            </a:r>
+          </a:p>
+          <a:p>
+            <a:pPr lvl="0" indent="0">
+              <a:buNone/>
+            </a:pPr>
             <a:r>
               <a:rPr>
                 <a:solidFill>
@@ -8725,61 +8667,6 @@
                 </a:solidFill>
                 <a:latin typeface="Courier"/>
               </a:rPr>
-              <a:t>filter</a:t>
-            </a:r>
-            <a:r>
-              <a:rPr>
-                <a:solidFill>
-                  <a:srgbClr val="003B4F"/>
-                </a:solidFill>
-                <a:latin typeface="Courier"/>
-              </a:rPr>
-              <a:t>(lake </a:t>
-            </a:r>
-            <a:r>
-              <a:rPr>
-                <a:solidFill>
-                  <a:srgbClr val="5E5E5E"/>
-                </a:solidFill>
-                <a:latin typeface="Courier"/>
-              </a:rPr>
-              <a:t>==</a:t>
-            </a:r>
-            <a:r>
-              <a:rPr>
-                <a:solidFill>
-                  <a:srgbClr val="003B4F"/>
-                </a:solidFill>
-                <a:latin typeface="Courier"/>
-              </a:rPr>
-              <a:t> </a:t>
-            </a:r>
-            <a:r>
-              <a:rPr>
-                <a:solidFill>
-                  <a:srgbClr val="20794D"/>
-                </a:solidFill>
-                <a:latin typeface="Courier"/>
-              </a:rPr>
-              <a:t>"I8"</a:t>
-            </a:r>
-            <a:r>
-              <a:rPr>
-                <a:solidFill>
-                  <a:srgbClr val="003B4F"/>
-                </a:solidFill>
-                <a:latin typeface="Courier"/>
-              </a:rPr>
-              <a:t>)</a:t>
-            </a:r>
-            <a:br/>
-            <a:r>
-              <a:rPr>
-                <a:solidFill>
-                  <a:srgbClr val="4758AB"/>
-                </a:solidFill>
-                <a:latin typeface="Courier"/>
-              </a:rPr>
               <a:t>head</a:t>
             </a:r>
             <a:r>
@@ -8789,7 +8676,7 @@
                 </a:solidFill>
                 <a:latin typeface="Courier"/>
               </a:rPr>
-              <a:t>(i8_data)</a:t>
+              <a:t>(ps_sunny_df)</a:t>
             </a:r>
           </a:p>
           <a:p>
@@ -8801,14 +8688,15 @@
                 <a:latin typeface="Courier"/>
               </a:rPr>
               <a:t># A tibble: 6 × 5
-   site lake  species         length_mm mass_g
-  &lt;dbl&gt; &lt;chr&gt; &lt;chr&gt;               &lt;dbl&gt;  &lt;dbl&gt;
-1   118 I8    arctic grayling       345    375
-2   118 I8    arctic grayling       376    485
-3   118 I8    arctic grayling       417    600
-4   118 I8    arctic grayling       369    445
-5   118 I8    arctic grayling       419    625
-6   118 I8    arctic grayling       365    430</a:t>
+# Groups:   group, tree_no, tree_char [6]
+  group                      tree_no tree_char side  length_mm
+  &lt;chr&gt;                        &lt;dbl&gt; &lt;chr&gt;     &lt;chr&gt;     &lt;dbl&gt;
+1 big_fat_fecund_female_fish       2 tree_2    sunny      13.2
+2 bill                             3 tree_3    sunny      16.0
+3 ciabatta                         5 tree_5    sunny      17.7
+4 fake_data                        8 tree_8    sunny      13.0
+5 five                             1 tree_1    sunny      19.9
+6 moose_walkin                     7 tree_7    sunny      18.4</a:t>
             </a:r>
           </a:p>
         </p:txBody>
@@ -8860,7 +8748,7 @@
             </a:pPr>
             <a:r>
               <a:rPr/>
-              <a:t>Practice Exercise 8: QQ Plot for Windward Data</a:t>
+              <a:t>Practice Exercise 8: QQ Plot for Sunny Data</a:t>
             </a:r>
           </a:p>
         </p:txBody>
@@ -8936,7 +8824,7 @@
                 </a:solidFill>
                 <a:latin typeface="Courier"/>
               </a:rPr>
-              <a:t>(i8_data</a:t>
+              <a:t>(ps_sunny_df</a:t>
             </a:r>
             <a:r>
               <a:rPr>
@@ -8991,7 +8879,7 @@
                 </a:solidFill>
                 <a:latin typeface="Courier"/>
               </a:rPr>
-              <a:t>"QQ Plot for I8 fish length"</a:t>
+              <a:t>"QQ Plot for sunny needle length"</a:t>
             </a:r>
             <a:r>
               <a:rPr>
@@ -9062,7 +8950,7 @@
               <a:rPr sz="2000">
                 <a:latin typeface="Courier"/>
               </a:rPr>
-              <a:t>[1] 79 62</a:t>
+              <a:t>[1] 5 4</a:t>
             </a:r>
           </a:p>
         </p:txBody>
@@ -9190,7 +9078,7 @@
                 </a:solidFill>
                 <a:latin typeface="Courier"/>
               </a:rPr>
-              <a:t>(i8_data</a:t>
+              <a:t>(ps_sunny_df</a:t>
             </a:r>
             <a:r>
               <a:rPr>
@@ -9221,8 +9109,8 @@
               </a:rPr>
               <a:t>
     Shapiro-Wilk normality test
-data:  i8_data$length_mm
-W = 0.91962, p-value = 1.119e-05</a:t>
+data:  ps_sunny_df$length_mm
+W = 0.89994, p-value = 0.2886</a:t>
             </a:r>
           </a:p>
         </p:txBody>
@@ -9274,7 +9162,7 @@
             </a:pPr>
             <a:r>
               <a:rPr/>
-              <a:t>Practice Exercise 10: QQ Plot for I3</a:t>
+              <a:t>Practice Exercise 10: QQ Plot for Shady</a:t>
             </a:r>
           </a:p>
         </p:txBody>
@@ -9299,7 +9187,7 @@
             </a:pPr>
             <a:r>
               <a:rPr sz="2000" b="1"/>
-              <a:t>Practice Exercise 10: Test normality of I3 lengths</a:t>
+              <a:t>Practice Exercise 10: Test normality of shady lengths</a:t>
             </a:r>
           </a:p>
           <a:p>
@@ -9360,7 +9248,7 @@
                 </a:solidFill>
                 <a:latin typeface="Courier"/>
               </a:rPr>
-              <a:t>(i3_data</a:t>
+              <a:t>(ps_shady_df</a:t>
             </a:r>
             <a:r>
               <a:rPr>
@@ -9415,7 +9303,7 @@
                 </a:solidFill>
                 <a:latin typeface="Courier"/>
               </a:rPr>
-              <a:t>"QQ Plot for I3"</a:t>
+              <a:t>"QQ Plot for shady needle length"</a:t>
             </a:r>
             <a:r>
               <a:rPr>
@@ -9486,7 +9374,7 @@
               <a:rPr sz="2000">
                 <a:latin typeface="Courier"/>
               </a:rPr>
-              <a:t>[1] 53 35</a:t>
+              <a:t>[1] 7 6</a:t>
             </a:r>
           </a:p>
         </p:txBody>
@@ -9538,7 +9426,7 @@
             </a:pPr>
             <a:r>
               <a:rPr/>
-              <a:t>Practice Exercise 11: Shapiro-Wilk for i3</a:t>
+              <a:t>Practice Exercise 11: Shapiro-Wilk for Shady</a:t>
             </a:r>
           </a:p>
         </p:txBody>
@@ -9563,7 +9451,7 @@
             </a:pPr>
             <a:r>
               <a:rPr sz="2000" b="1"/>
-              <a:t>Practice Exercise 11: Test normality of i3 lengths</a:t>
+              <a:t>Practice Exercise 11: Test normality of shady lengths</a:t>
             </a:r>
           </a:p>
           <a:p>
@@ -9623,7 +9511,7 @@
                 </a:solidFill>
                 <a:latin typeface="Courier"/>
               </a:rPr>
-              <a:t>(i3_data</a:t>
+              <a:t>(ps_shady_df</a:t>
             </a:r>
             <a:r>
               <a:rPr>
@@ -9654,8 +9542,8 @@
               </a:rPr>
               <a:t>
     Shapiro-Wilk normality test
-data:  i3_data$length_mm
-W = 0.91051, p-value = 0.0001623</a:t>
+data:  ps_shady_df$length_mm
+W = 0.96639, p-value = 0.8683</a:t>
             </a:r>
           </a:p>
         </p:txBody>
@@ -9785,7 +9673,7 @@
                 </a:solidFill>
                 <a:latin typeface="Courier"/>
               </a:rPr>
-              <a:t>normality_results &lt;- grayling_df </a:t>
+              <a:t>normality_results &lt;- ps_df </a:t>
             </a:r>
             <a:r>
               <a:rPr>
@@ -9822,7 +9710,7 @@
                 </a:solidFill>
                 <a:latin typeface="Courier"/>
               </a:rPr>
-              <a:t>(lake) </a:t>
+              <a:t>(side) </a:t>
             </a:r>
             <a:r>
               <a:rPr>
@@ -10157,10 +10045,10 @@
                 <a:latin typeface="Courier"/>
               </a:rPr>
               <a:t># A tibble: 2 × 4
-  lake  shapiro_stat shapiro_p_value normal_distribution
+  side  shapiro_stat shapiro_p_value normal_distribution
   &lt;chr&gt;        &lt;dbl&gt;           &lt;dbl&gt; &lt;chr&gt;              
-1 I3           0.911       0.000162  Non-normal         
-2 I8           0.920       0.0000112 Non-normal         </a:t>
+1 shady        0.966           0.868 Normal             
+2 sunny        0.900           0.289 Normal             </a:t>
             </a:r>
           </a:p>
         </p:txBody>
@@ -10316,7 +10204,7 @@
                 </a:solidFill>
                 <a:latin typeface="Courier"/>
               </a:rPr>
-              <a:t> lake, </a:t>
+              <a:t> side, </a:t>
             </a:r>
             <a:r>
               <a:rPr>
@@ -10334,7 +10222,7 @@
                 </a:solidFill>
                 <a:latin typeface="Courier"/>
               </a:rPr>
-              <a:t> grayling_df)</a:t>
+              <a:t> ps_df)</a:t>
             </a:r>
             <a:br/>
             <a:r>
@@ -10417,11 +10305,9 @@
                 <a:latin typeface="Courier"/>
               </a:rPr>
               <a:t>Levene's Test for Homogeneity of Variance (center = median)
-       Df F value    Pr(&gt;F)    
-group   1  13.705 0.0002907 ***
-      166                      
----
-Signif. codes:  0 '***' 0.001 '**' 0.01 '*' 0.05 '.' 0.1 ' ' 1</a:t>
+      Df F value Pr(&gt;F)
+group  1  0.2062 0.6567
+      14               </a:t>
             </a:r>
           </a:p>
         </p:txBody>
@@ -10505,7 +10391,7 @@
             </a:pPr>
             <a:r>
               <a:rPr/>
-              <a:t>Now we can compare the mean fish lengths between i3 and i8.</a:t>
+              <a:t>Now we can compare the mean fish lengths between shady and sunny sides.</a:t>
             </a:r>
           </a:p>
           <a:p>
@@ -10514,7 +10400,7 @@
             </a:pPr>
             <a:r>
               <a:rPr/>
-              <a:t>Ho: μ₁ = μ₂ (The fish lengths do not differ)</a:t>
+              <a:t>Ho: μ₁ = μ₂ (The needle lengths do not differ)</a:t>
             </a:r>
           </a:p>
           <a:p>
@@ -10523,7 +10409,7 @@
             </a:pPr>
             <a:r>
               <a:rPr/>
-              <a:t>Ha: μ₁ ≠ μ₂ (The mean fish lengths differ - direction is not specified)</a:t>
+              <a:t>Ha: μ₁ ≠ μ₂ (The mean needle lengths differ - direction is not specified)</a:t>
             </a:r>
           </a:p>
           <a:p>
@@ -10583,11 +10469,9 @@
                 <a:latin typeface="Courier"/>
               </a:rPr>
               <a:t>Levene's Test for Homogeneity of Variance (center = median)
-       Df F value    Pr(&gt;F)    
-group   1  13.705 0.0002907 ***
-      166                      
----
-Signif. codes:  0 '***' 0.001 '**' 0.01 '*' 0.05 '.' 0.1 ' ' 1</a:t>
+      Df F value Pr(&gt;F)
+group  1  0.2062 0.6567
+      14               </a:t>
             </a:r>
           </a:p>
         </p:txBody>
@@ -10699,35 +10583,6 @@
             </a:r>
           </a:p>
           <a:p>
-            <a:pPr lvl="0" indent="0">
-              <a:buNone/>
-            </a:pPr>
-            <a:r>
-              <a:rPr>
-                <a:solidFill>
-                  <a:srgbClr val="003B4F"/>
-                </a:solidFill>
-                <a:latin typeface="Courier"/>
-              </a:rPr>
-              <a:t>grayling_summary</a:t>
-            </a:r>
-          </a:p>
-          <a:p>
-            <a:pPr lvl="0" indent="0">
-              <a:buNone/>
-            </a:pPr>
-            <a:r>
-              <a:rPr>
-                <a:latin typeface="Courier"/>
-              </a:rPr>
-              <a:t># A tibble: 2 × 5
-  lake  mean_length sd_length se_length count
-  &lt;chr&gt;       &lt;dbl&gt;     &lt;dbl&gt;     &lt;dbl&gt; &lt;int&gt;
-1 I3           266.      28.3      3.48    66
-2 I8           363.      52.3      5.18   102</a:t>
-            </a:r>
-          </a:p>
-          <a:p>
             <a:pPr lvl="0" indent="0" marL="1270000">
               <a:buNone/>
             </a:pPr>
@@ -10832,7 +10687,7 @@
                 </a:solidFill>
                 <a:latin typeface="Courier"/>
               </a:rPr>
-              <a:t> lake, </a:t>
+              <a:t> side, </a:t>
             </a:r>
             <a:r>
               <a:rPr>
@@ -10850,7 +10705,7 @@
                 </a:solidFill>
                 <a:latin typeface="Courier"/>
               </a:rPr>
-              <a:t> grayling_df, </a:t>
+              <a:t> ps_df, </a:t>
             </a:r>
             <a:r>
               <a:rPr>
@@ -10970,14 +10825,14 @@
               </a:rPr>
               <a:t>
     Two Sample t-test
-data:  length_mm by lake
-t = -13.797, df = 166, p-value &lt; 2.2e-16
-alternative hypothesis: true difference in means between group I3 and group I8 is not equal to 0
+data:  length_mm by side
+t = 1.1279, df = 14, p-value = 0.2783
+alternative hypothesis: true difference in means between group shady and group sunny is not equal to 0
 95 percent confidence interval:
- -110.87187  -83.11208
+ -1.309330  4.214005
 sample estimates:
-mean in group I3 mean in group I8 
-        265.6061         362.5980 </a:t>
+mean in group shady mean in group sunny 
+           17.60561            16.15328 </a:t>
             </a:r>
           </a:p>
           <a:p>
@@ -11057,7 +10912,7 @@
             </a:r>
             <a:r>
               <a:rPr/>
-              <a:t> Difference between a Two-Sample T and Welch’s T Test</a:t>
+              <a:t> Running the Two-Sample T-Test</a:t>
             </a:r>
           </a:p>
         </p:txBody>
@@ -11078,145 +10933,315 @@
           <a:lstStyle/>
           <a:p>
             <a:pPr lvl="0" indent="0" marL="0">
-              <a:spcBef>
-                <a:spcPts val="3000"/>
-              </a:spcBef>
-              <a:buNone/>
-            </a:pPr>
-            <a:r>
-              <a:rPr b="1"/>
-              <a:t>Standard t-test (Student’s t-test)</a:t>
-            </a:r>
-          </a:p>
-          <a:p>
-            <a:pPr lvl="0"/>
-            <a:r>
-              <a:rPr b="1"/>
-              <a:t>Assumes equal variances</a:t>
-            </a:r>
-            <a:r>
-              <a:rPr/>
-              <a:t> between the two groups being compared</a:t>
-            </a:r>
-          </a:p>
-          <a:p>
-            <a:pPr lvl="0"/>
-            <a:r>
-              <a:rPr/>
-              <a:t>Uses a </a:t>
-            </a:r>
-            <a:r>
-              <a:rPr b="1"/>
-              <a:t>pooled variance estimate</a:t>
-            </a:r>
-            <a:r>
-              <a:rPr/>
-              <a:t> that combines data from both group</a:t>
-            </a:r>
-          </a:p>
-          <a:p>
-            <a:pPr lvl="0"/>
-            <a:r>
-              <a:rPr/>
-              <a:t>Has </a:t>
-            </a:r>
-            <a:r>
-              <a:rPr b="1"/>
-              <a:t>higher statistical power</a:t>
-            </a:r>
-            <a:r>
-              <a:rPr/>
-              <a:t> when the equal variance assumption is met</a:t>
-            </a:r>
-          </a:p>
-          <a:p>
-            <a:pPr lvl="0"/>
-            <a:r>
-              <a:rPr b="1"/>
-              <a:t>Degrees of freedom</a:t>
-            </a:r>
-            <a:r>
-              <a:rPr/>
-              <a:t> = n₁ + n₂ - 2</a:t>
+              <a:buNone/>
+            </a:pPr>
+            <a:r>
+              <a:rPr/>
+              <a:t>Now we can do a two sample TTEST</a:t>
             </a:r>
           </a:p>
           <a:p>
             <a:pPr lvl="0" indent="0" marL="0">
-              <a:spcBef>
-                <a:spcPts val="3000"/>
-              </a:spcBef>
-              <a:buNone/>
-            </a:pPr>
-            <a:r>
-              <a:rPr b="1"/>
-              <a:t>Welch’s t-test</a:t>
-            </a:r>
-          </a:p>
-          <a:p>
-            <a:pPr lvl="0"/>
-            <a:r>
-              <a:rPr b="1"/>
-              <a:t>Does not assume equal variances</a:t>
-            </a:r>
-            <a:r>
-              <a:rPr/>
-              <a:t> between groups (also called the “unequal variances t-test”)</a:t>
-            </a:r>
-          </a:p>
-          <a:p>
-            <a:pPr lvl="0"/>
-            <a:r>
-              <a:rPr/>
-              <a:t>Uses </a:t>
-            </a:r>
-            <a:r>
-              <a:rPr b="1"/>
-              <a:t>separate variance estimates</a:t>
-            </a:r>
-            <a:r>
-              <a:rPr/>
-              <a:t> for each group</a:t>
-            </a:r>
-          </a:p>
-          <a:p>
-            <a:pPr lvl="0"/>
-            <a:r>
-              <a:rPr/>
-              <a:t>More </a:t>
-            </a:r>
-            <a:r>
-              <a:rPr b="1"/>
-              <a:t>robust</a:t>
-            </a:r>
-            <a:r>
-              <a:rPr/>
-              <a:t> when group variances are different</a:t>
-            </a:r>
-          </a:p>
-          <a:p>
-            <a:pPr lvl="0"/>
-            <a:r>
-              <a:rPr/>
-              <a:t>Uses a more complex </a:t>
-            </a:r>
-            <a:r>
-              <a:rPr b="1"/>
-              <a:t>degrees of freedom calculation</a:t>
-            </a:r>
-            <a:r>
-              <a:rPr/>
-              <a:t> (Welch-Satterthwaite equation)</a:t>
-            </a:r>
-          </a:p>
-          <a:p>
-            <a:pPr lvl="0"/>
-            <a:r>
-              <a:rPr b="1"/>
-              <a:t>Degrees of freedom</a:t>
-            </a:r>
-            <a:r>
-              <a:rPr/>
-              <a:t> are typically non-integer and usually smaller than the standard t-test</a:t>
+              <a:buNone/>
+            </a:pPr>
+            <a:r>
+              <a:rPr/>
+              <a:t>Calculate t-statistic manually (optional)</a:t>
+            </a:r>
+          </a:p>
+          <a:p>
+            <a:pPr lvl="0" indent="0" marL="0">
+              <a:buNone/>
+            </a:pPr>
+            <a:r>
+              <a:rPr/>
+              <a:t>YOUR CODE HERE:</a:t>
+            </a:r>
+          </a:p>
+          <a:p>
+            <a:pPr lvl="0" indent="0" marL="0">
+              <a:buNone/>
+            </a:pPr>
+            <a:r>
+              <a:rPr/>
+              <a:t>t = (mean1 - mean2) / sqrt((s1^2/n1) + (s2^2/n2))</a:t>
+            </a:r>
+          </a:p>
+          <a:p>
+            <a:pPr lvl="0" indent="0" marL="1270000">
+              <a:buNone/>
+            </a:pPr>
+            <a:r>
+              <a:rPr sz="2000" b="1"/>
+              <a:t>Tip</a:t>
+            </a:r>
+          </a:p>
+          <a:p>
+            <a:pPr lvl="0" indent="0">
+              <a:buNone/>
+            </a:pPr>
+            <a:r>
+              <a:rPr>
+                <a:solidFill>
+                  <a:srgbClr val="5E5E5E"/>
+                </a:solidFill>
+                <a:latin typeface="Courier"/>
+              </a:rPr>
+              <a:t># YOUR </a:t>
+            </a:r>
+            <a:r>
+              <a:rPr>
+                <a:solidFill>
+                  <a:srgbClr val="AD0000"/>
+                </a:solidFill>
+                <a:latin typeface="Courier"/>
+              </a:rPr>
+              <a:t>TASK</a:t>
+            </a:r>
+            <a:r>
+              <a:rPr>
+                <a:solidFill>
+                  <a:srgbClr val="5E5E5E"/>
+                </a:solidFill>
+                <a:latin typeface="Courier"/>
+              </a:rPr>
+              <a:t>: Conduct a two-sample t-test</a:t>
+            </a:r>
+            <a:br/>
+            <a:r>
+              <a:rPr>
+                <a:solidFill>
+                  <a:srgbClr val="5E5E5E"/>
+                </a:solidFill>
+                <a:latin typeface="Courier"/>
+              </a:rPr>
+              <a:t># Use var.equal=TRUE for standard t-test or var.equal=FALSE for Welch's t-test</a:t>
+            </a:r>
+            <a:br/>
+            <a:br/>
+            <a:r>
+              <a:rPr>
+                <a:solidFill>
+                  <a:srgbClr val="5E5E5E"/>
+                </a:solidFill>
+                <a:latin typeface="Courier"/>
+              </a:rPr>
+              <a:t># Standard t-test (if variances are equal)</a:t>
+            </a:r>
+            <a:br/>
+            <a:r>
+              <a:rPr>
+                <a:solidFill>
+                  <a:srgbClr val="003B4F"/>
+                </a:solidFill>
+                <a:latin typeface="Courier"/>
+              </a:rPr>
+              <a:t>t_test_result &lt;- </a:t>
+            </a:r>
+            <a:r>
+              <a:rPr>
+                <a:solidFill>
+                  <a:srgbClr val="4758AB"/>
+                </a:solidFill>
+                <a:latin typeface="Courier"/>
+              </a:rPr>
+              <a:t>t.test</a:t>
+            </a:r>
+            <a:r>
+              <a:rPr>
+                <a:solidFill>
+                  <a:srgbClr val="003B4F"/>
+                </a:solidFill>
+                <a:latin typeface="Courier"/>
+              </a:rPr>
+              <a:t>(length_mm </a:t>
+            </a:r>
+            <a:r>
+              <a:rPr>
+                <a:solidFill>
+                  <a:srgbClr val="5E5E5E"/>
+                </a:solidFill>
+                <a:latin typeface="Courier"/>
+              </a:rPr>
+              <a:t>~</a:t>
+            </a:r>
+            <a:r>
+              <a:rPr>
+                <a:solidFill>
+                  <a:srgbClr val="003B4F"/>
+                </a:solidFill>
+                <a:latin typeface="Courier"/>
+              </a:rPr>
+              <a:t> side, </a:t>
+            </a:r>
+            <a:r>
+              <a:rPr>
+                <a:solidFill>
+                  <a:srgbClr val="657422"/>
+                </a:solidFill>
+                <a:latin typeface="Courier"/>
+              </a:rPr>
+              <a:t>data =</a:t>
+            </a:r>
+            <a:r>
+              <a:rPr>
+                <a:solidFill>
+                  <a:srgbClr val="003B4F"/>
+                </a:solidFill>
+                <a:latin typeface="Courier"/>
+              </a:rPr>
+              <a:t> ps_df, </a:t>
+            </a:r>
+            <a:r>
+              <a:rPr>
+                <a:solidFill>
+                  <a:srgbClr val="657422"/>
+                </a:solidFill>
+                <a:latin typeface="Courier"/>
+              </a:rPr>
+              <a:t>var.equal =</a:t>
+            </a:r>
+            <a:r>
+              <a:rPr>
+                <a:solidFill>
+                  <a:srgbClr val="003B4F"/>
+                </a:solidFill>
+                <a:latin typeface="Courier"/>
+              </a:rPr>
+              <a:t> </a:t>
+            </a:r>
+            <a:r>
+              <a:rPr>
+                <a:solidFill>
+                  <a:srgbClr val="8F5902"/>
+                </a:solidFill>
+                <a:latin typeface="Courier"/>
+              </a:rPr>
+              <a:t>FALSE</a:t>
+            </a:r>
+            <a:r>
+              <a:rPr>
+                <a:solidFill>
+                  <a:srgbClr val="003B4F"/>
+                </a:solidFill>
+                <a:latin typeface="Courier"/>
+              </a:rPr>
+              <a:t>)</a:t>
+            </a:r>
+            <a:br/>
+            <a:r>
+              <a:rPr>
+                <a:solidFill>
+                  <a:srgbClr val="4758AB"/>
+                </a:solidFill>
+                <a:latin typeface="Courier"/>
+              </a:rPr>
+              <a:t>print</a:t>
+            </a:r>
+            <a:r>
+              <a:rPr>
+                <a:solidFill>
+                  <a:srgbClr val="003B4F"/>
+                </a:solidFill>
+                <a:latin typeface="Courier"/>
+              </a:rPr>
+              <a:t>(</a:t>
+            </a:r>
+            <a:r>
+              <a:rPr>
+                <a:solidFill>
+                  <a:srgbClr val="20794D"/>
+                </a:solidFill>
+                <a:latin typeface="Courier"/>
+              </a:rPr>
+              <a:t>"Standard two-sample t-test:"</a:t>
+            </a:r>
+            <a:r>
+              <a:rPr>
+                <a:solidFill>
+                  <a:srgbClr val="003B4F"/>
+                </a:solidFill>
+                <a:latin typeface="Courier"/>
+              </a:rPr>
+              <a:t>)</a:t>
+            </a:r>
+          </a:p>
+          <a:p>
+            <a:pPr lvl="0" indent="0">
+              <a:buNone/>
+            </a:pPr>
+            <a:r>
+              <a:rPr sz="2000">
+                <a:latin typeface="Courier"/>
+              </a:rPr>
+              <a:t>[1] "Standard two-sample t-test:"</a:t>
+            </a:r>
+          </a:p>
+          <a:p>
+            <a:pPr lvl="0" indent="0">
+              <a:buNone/>
+            </a:pPr>
+            <a:r>
+              <a:rPr>
+                <a:solidFill>
+                  <a:srgbClr val="4758AB"/>
+                </a:solidFill>
+                <a:latin typeface="Courier"/>
+              </a:rPr>
+              <a:t>print</a:t>
+            </a:r>
+            <a:r>
+              <a:rPr>
+                <a:solidFill>
+                  <a:srgbClr val="003B4F"/>
+                </a:solidFill>
+                <a:latin typeface="Courier"/>
+              </a:rPr>
+              <a:t>(t_test_result)</a:t>
+            </a:r>
+          </a:p>
+          <a:p>
+            <a:pPr lvl="0" indent="0">
+              <a:buNone/>
+            </a:pPr>
+            <a:r>
+              <a:rPr sz="2000">
+                <a:latin typeface="Courier"/>
+              </a:rPr>
+              <a:t>
+    Welch Two Sample t-test
+data:  length_mm by side
+t = 1.1279, df = 13.96, p-value = 0.2784
+alternative hypothesis: true difference in means between group shady and group sunny is not equal to 0
+95 percent confidence interval:
+ -1.310069  4.214743
+sample estimates:
+mean in group shady mean in group sunny 
+           17.60561            16.15328 </a:t>
+            </a:r>
+          </a:p>
+          <a:p>
+            <a:pPr lvl="0" indent="0">
+              <a:buNone/>
+            </a:pPr>
+            <a:r>
+              <a:rPr>
+                <a:solidFill>
+                  <a:srgbClr val="5E5E5E"/>
+                </a:solidFill>
+                <a:latin typeface="Courier"/>
+              </a:rPr>
+              <a:t># Welch's t-test (if variances are unequal)</a:t>
+            </a:r>
+            <a:br/>
+            <a:r>
+              <a:rPr>
+                <a:solidFill>
+                  <a:srgbClr val="5E5E5E"/>
+                </a:solidFill>
+                <a:latin typeface="Courier"/>
+              </a:rPr>
+              <a:t># YOUR CODE HERE</a:t>
             </a:r>
           </a:p>
         </p:txBody>
@@ -11344,6 +11369,13 @@
             </a:r>
           </a:p>
           <a:p>
+            <a:pPr lvl="0"/>
+            <a:r>
+              <a:rPr/>
+              <a:t>for two sample T tests the df = n1+ n2 -2 = 8+8-2=14</a:t>
+            </a:r>
+          </a:p>
+          <a:p>
             <a:pPr lvl="0" indent="0">
               <a:buNone/>
             </a:pPr>
@@ -11352,10 +11384,10 @@
                 <a:latin typeface="Courier"/>
               </a:rPr>
               <a:t># A tibble: 2 × 5
-  lake  mean_length sd_length se_length count
+  side  mean_length sd_length se_length count
   &lt;chr&gt;       &lt;dbl&gt;     &lt;dbl&gt;     &lt;dbl&gt; &lt;int&gt;
-1 I3           266.      28.3      3.48    66
-2 I8           363.      52.3      5.18   102</a:t>
+1 shady        17.6      2.51     0.886     8
+2 sunny        16.2      2.64     0.934     8</a:t>
             </a:r>
           </a:p>
         </p:txBody>
@@ -11395,6 +11427,229 @@
         <p:spPr>
           <a:xfrm>
             <a:off x="0" y="0"/>
+            <a:ext cx="9144000" cy="582780"/>
+          </a:xfrm>
+        </p:spPr>
+        <p:txBody>
+          <a:bodyPr/>
+          <a:lstStyle/>
+          <a:p>
+            <a:pPr lvl="0" indent="0" marL="0">
+              <a:buNone/>
+            </a:pPr>
+            <a:r>
+              <a:rPr b="1"/>
+              <a:t>Lecture 5:</a:t>
+            </a:r>
+            <a:r>
+              <a:rPr/>
+              <a:t> Difference between a Two-Sample T and Welch’s T Test</a:t>
+            </a:r>
+          </a:p>
+        </p:txBody>
+      </p:sp>
+      <p:sp>
+        <p:nvSpPr>
+          <p:cNvPr id="3" name="Content Placeholder 2"/>
+          <p:cNvSpPr>
+            <a:spLocks noGrp="1"/>
+          </p:cNvSpPr>
+          <p:nvPr>
+            <p:ph idx="1"/>
+          </p:nvPr>
+        </p:nvSpPr>
+        <p:spPr/>
+        <p:txBody>
+          <a:bodyPr/>
+          <a:lstStyle/>
+          <a:p>
+            <a:pPr lvl="0" indent="0" marL="0">
+              <a:spcBef>
+                <a:spcPts val="3000"/>
+              </a:spcBef>
+              <a:buNone/>
+            </a:pPr>
+            <a:r>
+              <a:rPr b="1"/>
+              <a:t>Standard t-test (Student’s t-test)</a:t>
+            </a:r>
+          </a:p>
+          <a:p>
+            <a:pPr lvl="0"/>
+            <a:r>
+              <a:rPr b="1"/>
+              <a:t>Assumes equal variances</a:t>
+            </a:r>
+            <a:r>
+              <a:rPr/>
+              <a:t> between the two groups being compared</a:t>
+            </a:r>
+          </a:p>
+          <a:p>
+            <a:pPr lvl="0"/>
+            <a:r>
+              <a:rPr/>
+              <a:t>Uses a </a:t>
+            </a:r>
+            <a:r>
+              <a:rPr b="1"/>
+              <a:t>pooled variance estimate</a:t>
+            </a:r>
+            <a:r>
+              <a:rPr/>
+              <a:t> that combines data from both group</a:t>
+            </a:r>
+          </a:p>
+          <a:p>
+            <a:pPr lvl="0"/>
+            <a:r>
+              <a:rPr/>
+              <a:t>Has </a:t>
+            </a:r>
+            <a:r>
+              <a:rPr b="1"/>
+              <a:t>higher statistical power</a:t>
+            </a:r>
+            <a:r>
+              <a:rPr/>
+              <a:t> when the equal variance assumption is met</a:t>
+            </a:r>
+          </a:p>
+          <a:p>
+            <a:pPr lvl="0"/>
+            <a:r>
+              <a:rPr b="1"/>
+              <a:t>Degrees of freedom</a:t>
+            </a:r>
+            <a:r>
+              <a:rPr/>
+              <a:t> = n₁ + n₂ - 2</a:t>
+            </a:r>
+          </a:p>
+          <a:p>
+            <a:pPr lvl="0" indent="0" marL="0">
+              <a:spcBef>
+                <a:spcPts val="3000"/>
+              </a:spcBef>
+              <a:buNone/>
+            </a:pPr>
+            <a:r>
+              <a:rPr b="1"/>
+              <a:t>Welch’s t-test</a:t>
+            </a:r>
+          </a:p>
+          <a:p>
+            <a:pPr lvl="0"/>
+            <a:r>
+              <a:rPr b="1"/>
+              <a:t>Does not assume equal variances</a:t>
+            </a:r>
+            <a:r>
+              <a:rPr/>
+              <a:t> between groups (also called the “unequal variances t-test”)</a:t>
+            </a:r>
+          </a:p>
+          <a:p>
+            <a:pPr lvl="0"/>
+            <a:r>
+              <a:rPr/>
+              <a:t>Uses </a:t>
+            </a:r>
+            <a:r>
+              <a:rPr b="1"/>
+              <a:t>separate variance estimates</a:t>
+            </a:r>
+            <a:r>
+              <a:rPr/>
+              <a:t> for each group</a:t>
+            </a:r>
+          </a:p>
+          <a:p>
+            <a:pPr lvl="0"/>
+            <a:r>
+              <a:rPr/>
+              <a:t>More </a:t>
+            </a:r>
+            <a:r>
+              <a:rPr b="1"/>
+              <a:t>robust</a:t>
+            </a:r>
+            <a:r>
+              <a:rPr/>
+              <a:t> when group variances are different</a:t>
+            </a:r>
+          </a:p>
+          <a:p>
+            <a:pPr lvl="0"/>
+            <a:r>
+              <a:rPr/>
+              <a:t>Uses a more complex </a:t>
+            </a:r>
+            <a:r>
+              <a:rPr b="1"/>
+              <a:t>degrees of freedom calculation</a:t>
+            </a:r>
+            <a:r>
+              <a:rPr/>
+              <a:t> (</a:t>
+            </a:r>
+            <a:r>
+              <a:rPr b="1"/>
+              <a:t>Welch-Satterthwaite equation</a:t>
+            </a:r>
+            <a:r>
+              <a:rPr/>
+              <a:t>) and decimal!!!</a:t>
+            </a:r>
+          </a:p>
+          <a:p>
+            <a:pPr lvl="0"/>
+            <a:r>
+              <a:rPr b="1"/>
+              <a:t>Degrees of freedom</a:t>
+            </a:r>
+            <a:r>
+              <a:rPr/>
+              <a:t> are typically non-integer and usually smaller than the standard t-test</a:t>
+            </a:r>
+          </a:p>
+        </p:txBody>
+      </p:sp>
+    </p:spTree>
+  </p:cSld>
+</p:sld>
+</file>
+
+<file path=ppt/slides/slide41.xml><?xml version="1.0" encoding="utf-8"?>
+<p:sld xmlns:a="http://schemas.openxmlformats.org/drawingml/2006/main" xmlns:r="http://schemas.openxmlformats.org/officeDocument/2006/relationships" xmlns:p="http://schemas.openxmlformats.org/presentationml/2006/main">
+  <p:cSld>
+    <p:spTree>
+      <p:nvGrpSpPr>
+        <p:cNvPr id="1" name=""/>
+        <p:cNvGrpSpPr/>
+        <p:nvPr/>
+      </p:nvGrpSpPr>
+      <p:grpSpPr>
+        <a:xfrm>
+          <a:off x="0" y="0"/>
+          <a:ext cx="0" cy="0"/>
+          <a:chOff x="0" y="0"/>
+          <a:chExt cx="0" cy="0"/>
+        </a:xfrm>
+      </p:grpSpPr>
+      <p:sp>
+        <p:nvSpPr>
+          <p:cNvPr id="2" name="Title 1"/>
+          <p:cNvSpPr>
+            <a:spLocks noGrp="1"/>
+          </p:cNvSpPr>
+          <p:nvPr>
+            <p:ph type="title"/>
+          </p:nvPr>
+        </p:nvSpPr>
+        <p:spPr>
+          <a:xfrm>
+            <a:off x="0" y="0"/>
             <a:ext cx="9144000" cy="602780"/>
           </a:xfrm>
           <a:solidFill>
@@ -11448,7 +11703,7 @@
             </a:pPr>
             <a:r>
               <a:rPr/>
-              <a:t>What can we conclude about the needle lengths on windward vs. leeward sides?</a:t>
+              <a:t>What can we conclude about the needle lengths on sunny vs shady sides?</a:t>
             </a:r>
           </a:p>
           <a:p>
@@ -11506,7 +11761,7 @@
 </p:sld>
 </file>
 
-<file path=ppt/slides/slide41.xml><?xml version="1.0" encoding="utf-8"?>
+<file path=ppt/slides/slide42.xml><?xml version="1.0" encoding="utf-8"?>
 <p:sld xmlns:a="http://schemas.openxmlformats.org/drawingml/2006/main" xmlns:r="http://schemas.openxmlformats.org/officeDocument/2006/relationships" xmlns:p="http://schemas.openxmlformats.org/presentationml/2006/main">
   <p:cSld>
     <p:spTree>
@@ -11589,7 +11844,7 @@
             </a:pPr>
             <a:r>
               <a:rPr/>
-              <a:t>What can we conclude about the needle lengths on windward vs. leeward sides?</a:t>
+              <a:t>What can we conclude about the needle lengths on sunny vs shady sides?</a:t>
             </a:r>
           </a:p>
           <a:p>
@@ -11647,7 +11902,7 @@
 </p:sld>
 </file>
 
-<file path=ppt/slides/slide42.xml><?xml version="1.0" encoding="utf-8"?>
+<file path=ppt/slides/slide43.xml><?xml version="1.0" encoding="utf-8"?>
 <p:sld xmlns:a="http://schemas.openxmlformats.org/drawingml/2006/main" xmlns:r="http://schemas.openxmlformats.org/officeDocument/2006/relationships" xmlns:p="http://schemas.openxmlformats.org/presentationml/2006/main">
   <p:cSld>
     <p:spTree>
@@ -11693,7 +11948,7 @@
             </a:r>
             <a:r>
               <a:rPr/>
-              <a:t> Assumptions of Parametric Tests</a:t>
+              <a:t> Now what does a paired T test tell us</a:t>
             </a:r>
           </a:p>
         </p:txBody>
@@ -11717,83 +11972,409 @@
               <a:buNone/>
             </a:pPr>
             <a:r>
-              <a:rPr b="1"/>
-              <a:t>Common assumptions for t-tests:</a:t>
-            </a:r>
-          </a:p>
-          <a:p>
-            <a:pPr lvl="0" indent="-342900" marL="342900">
-              <a:buAutoNum type="arabicPeriod"/>
-            </a:pPr>
-            <a:r>
-              <a:rPr/>
-              <a:t>Normality: Data comes from normally distributed populations</a:t>
-            </a:r>
-          </a:p>
-          <a:p>
-            <a:pPr lvl="0" indent="-342900" marL="342900">
-              <a:buAutoNum type="arabicPeriod"/>
-            </a:pPr>
-            <a:r>
-              <a:rPr/>
-              <a:t>Equal variances (for two-sample tests)</a:t>
-            </a:r>
-          </a:p>
-          <a:p>
-            <a:pPr lvl="0" indent="-342900" marL="342900">
-              <a:buAutoNum type="arabicPeriod"/>
-            </a:pPr>
-            <a:r>
-              <a:rPr/>
-              <a:t>Independence: Observations are independent</a:t>
-            </a:r>
-          </a:p>
-          <a:p>
-            <a:pPr lvl="0" indent="-342900" marL="342900">
-              <a:buAutoNum type="arabicPeriod"/>
-            </a:pPr>
-            <a:r>
-              <a:rPr/>
-              <a:t>No outliers: Extreme values can influence results</a:t>
-            </a:r>
-          </a:p>
-          <a:p>
-            <a:pPr lvl="0" indent="0" marL="0">
-              <a:buNone/>
-            </a:pPr>
-            <a:r>
-              <a:rPr/>
-              <a:t>What can we do if our data violates these assumptions?</a:t>
-            </a:r>
-          </a:p>
-          <a:p>
-            <a:pPr lvl="0" indent="0" marL="0">
-              <a:buNone/>
-            </a:pPr>
-            <a:r>
-              <a:rPr/>
-              <a:t>Alternatives when assumptions are violated:</a:t>
-            </a:r>
-          </a:p>
-          <a:p>
-            <a:pPr lvl="0"/>
-            <a:r>
-              <a:rPr/>
-              <a:t>Data transformation (log, square root, etc.)</a:t>
-            </a:r>
-          </a:p>
-          <a:p>
-            <a:pPr lvl="0"/>
-            <a:r>
-              <a:rPr/>
-              <a:t>Non-parametric tests</a:t>
-            </a:r>
-          </a:p>
-          <a:p>
-            <a:pPr lvl="0"/>
-            <a:r>
-              <a:rPr/>
-              <a:t>Robust statistical methods</a:t>
+              <a:rPr/>
+              <a:t>Why do a paired T test</a:t>
+            </a:r>
+          </a:p>
+          <a:p>
+            <a:pPr lvl="0" indent="0">
+              <a:buNone/>
+            </a:pPr>
+            <a:r>
+              <a:rPr>
+                <a:solidFill>
+                  <a:srgbClr val="5E5E5E"/>
+                </a:solidFill>
+                <a:latin typeface="Courier"/>
+              </a:rPr>
+              <a:t># YOUR </a:t>
+            </a:r>
+            <a:r>
+              <a:rPr>
+                <a:solidFill>
+                  <a:srgbClr val="AD0000"/>
+                </a:solidFill>
+                <a:latin typeface="Courier"/>
+              </a:rPr>
+              <a:t>TASK</a:t>
+            </a:r>
+            <a:r>
+              <a:rPr>
+                <a:solidFill>
+                  <a:srgbClr val="5E5E5E"/>
+                </a:solidFill>
+                <a:latin typeface="Courier"/>
+              </a:rPr>
+              <a:t>: Conduct a two-sample t-test</a:t>
+            </a:r>
+            <a:br/>
+            <a:r>
+              <a:rPr>
+                <a:solidFill>
+                  <a:srgbClr val="5E5E5E"/>
+                </a:solidFill>
+                <a:latin typeface="Courier"/>
+              </a:rPr>
+              <a:t># Use var.equal=TRUE for standard t-test or var.equal=FALSE for Welch's t-test</a:t>
+            </a:r>
+            <a:br/>
+            <a:br/>
+            <a:r>
+              <a:rPr>
+                <a:solidFill>
+                  <a:srgbClr val="003B4F"/>
+                </a:solidFill>
+                <a:latin typeface="Courier"/>
+              </a:rPr>
+              <a:t>ps_wide_df &lt;- ps_df </a:t>
+            </a:r>
+            <a:r>
+              <a:rPr>
+                <a:solidFill>
+                  <a:srgbClr val="5E5E5E"/>
+                </a:solidFill>
+                <a:latin typeface="Courier"/>
+              </a:rPr>
+              <a:t>%&gt;%</a:t>
+            </a:r>
+            <a:br/>
+            <a:r>
+              <a:rPr>
+                <a:solidFill>
+                  <a:srgbClr val="003B4F"/>
+                </a:solidFill>
+                <a:latin typeface="Courier"/>
+              </a:rPr>
+              <a:t>  </a:t>
+            </a:r>
+            <a:r>
+              <a:rPr>
+                <a:solidFill>
+                  <a:srgbClr val="4758AB"/>
+                </a:solidFill>
+                <a:latin typeface="Courier"/>
+              </a:rPr>
+              <a:t>pivot_wider</a:t>
+            </a:r>
+            <a:r>
+              <a:rPr>
+                <a:solidFill>
+                  <a:srgbClr val="003B4F"/>
+                </a:solidFill>
+                <a:latin typeface="Courier"/>
+              </a:rPr>
+              <a:t>(</a:t>
+            </a:r>
+            <a:br/>
+            <a:r>
+              <a:rPr>
+                <a:solidFill>
+                  <a:srgbClr val="003B4F"/>
+                </a:solidFill>
+                <a:latin typeface="Courier"/>
+              </a:rPr>
+              <a:t>    </a:t>
+            </a:r>
+            <a:r>
+              <a:rPr>
+                <a:solidFill>
+                  <a:srgbClr val="657422"/>
+                </a:solidFill>
+                <a:latin typeface="Courier"/>
+              </a:rPr>
+              <a:t>names_from =</a:t>
+            </a:r>
+            <a:r>
+              <a:rPr>
+                <a:solidFill>
+                  <a:srgbClr val="003B4F"/>
+                </a:solidFill>
+                <a:latin typeface="Courier"/>
+              </a:rPr>
+              <a:t> </a:t>
+            </a:r>
+            <a:r>
+              <a:rPr>
+                <a:solidFill>
+                  <a:srgbClr val="20794D"/>
+                </a:solidFill>
+                <a:latin typeface="Courier"/>
+              </a:rPr>
+              <a:t>"side"</a:t>
+            </a:r>
+            <a:r>
+              <a:rPr>
+                <a:solidFill>
+                  <a:srgbClr val="003B4F"/>
+                </a:solidFill>
+                <a:latin typeface="Courier"/>
+              </a:rPr>
+              <a:t>,</a:t>
+            </a:r>
+            <a:br/>
+            <a:r>
+              <a:rPr>
+                <a:solidFill>
+                  <a:srgbClr val="003B4F"/>
+                </a:solidFill>
+                <a:latin typeface="Courier"/>
+              </a:rPr>
+              <a:t>    </a:t>
+            </a:r>
+            <a:r>
+              <a:rPr>
+                <a:solidFill>
+                  <a:srgbClr val="657422"/>
+                </a:solidFill>
+                <a:latin typeface="Courier"/>
+              </a:rPr>
+              <a:t>values_from =</a:t>
+            </a:r>
+            <a:r>
+              <a:rPr>
+                <a:solidFill>
+                  <a:srgbClr val="003B4F"/>
+                </a:solidFill>
+                <a:latin typeface="Courier"/>
+              </a:rPr>
+              <a:t> length_mm</a:t>
+            </a:r>
+            <a:br/>
+            <a:r>
+              <a:rPr>
+                <a:solidFill>
+                  <a:srgbClr val="003B4F"/>
+                </a:solidFill>
+                <a:latin typeface="Courier"/>
+              </a:rPr>
+              <a:t>  )</a:t>
+            </a:r>
+            <a:br/>
+            <a:br/>
+            <a:br/>
+            <a:r>
+              <a:rPr>
+                <a:solidFill>
+                  <a:srgbClr val="5E5E5E"/>
+                </a:solidFill>
+                <a:latin typeface="Courier"/>
+              </a:rPr>
+              <a:t># Standard t-test (if variances are equal)</a:t>
+            </a:r>
+            <a:br/>
+            <a:r>
+              <a:rPr>
+                <a:solidFill>
+                  <a:srgbClr val="003B4F"/>
+                </a:solidFill>
+                <a:latin typeface="Courier"/>
+              </a:rPr>
+              <a:t>paired_t_test_result &lt;- </a:t>
+            </a:r>
+            <a:r>
+              <a:rPr>
+                <a:solidFill>
+                  <a:srgbClr val="4758AB"/>
+                </a:solidFill>
+                <a:latin typeface="Courier"/>
+              </a:rPr>
+              <a:t>t.test</a:t>
+            </a:r>
+            <a:r>
+              <a:rPr>
+                <a:solidFill>
+                  <a:srgbClr val="003B4F"/>
+                </a:solidFill>
+                <a:latin typeface="Courier"/>
+              </a:rPr>
+              <a:t>(ps_wide_df</a:t>
+            </a:r>
+            <a:r>
+              <a:rPr>
+                <a:solidFill>
+                  <a:srgbClr val="5E5E5E"/>
+                </a:solidFill>
+                <a:latin typeface="Courier"/>
+              </a:rPr>
+              <a:t>$</a:t>
+            </a:r>
+            <a:r>
+              <a:rPr>
+                <a:solidFill>
+                  <a:srgbClr val="003B4F"/>
+                </a:solidFill>
+                <a:latin typeface="Courier"/>
+              </a:rPr>
+              <a:t>sunny, ps_wide_df</a:t>
+            </a:r>
+            <a:r>
+              <a:rPr>
+                <a:solidFill>
+                  <a:srgbClr val="5E5E5E"/>
+                </a:solidFill>
+                <a:latin typeface="Courier"/>
+              </a:rPr>
+              <a:t>$</a:t>
+            </a:r>
+            <a:r>
+              <a:rPr>
+                <a:solidFill>
+                  <a:srgbClr val="003B4F"/>
+                </a:solidFill>
+                <a:latin typeface="Courier"/>
+              </a:rPr>
+              <a:t>shady, </a:t>
+            </a:r>
+            <a:r>
+              <a:rPr>
+                <a:solidFill>
+                  <a:srgbClr val="657422"/>
+                </a:solidFill>
+                <a:latin typeface="Courier"/>
+              </a:rPr>
+              <a:t>paired =</a:t>
+            </a:r>
+            <a:r>
+              <a:rPr>
+                <a:solidFill>
+                  <a:srgbClr val="003B4F"/>
+                </a:solidFill>
+                <a:latin typeface="Courier"/>
+              </a:rPr>
+              <a:t> </a:t>
+            </a:r>
+            <a:r>
+              <a:rPr>
+                <a:solidFill>
+                  <a:srgbClr val="8F5902"/>
+                </a:solidFill>
+                <a:latin typeface="Courier"/>
+              </a:rPr>
+              <a:t>TRUE</a:t>
+            </a:r>
+            <a:r>
+              <a:rPr>
+                <a:solidFill>
+                  <a:srgbClr val="003B4F"/>
+                </a:solidFill>
+                <a:latin typeface="Courier"/>
+              </a:rPr>
+              <a:t>)</a:t>
+            </a:r>
+            <a:br/>
+            <a:r>
+              <a:rPr>
+                <a:solidFill>
+                  <a:srgbClr val="4758AB"/>
+                </a:solidFill>
+                <a:latin typeface="Courier"/>
+              </a:rPr>
+              <a:t>print</a:t>
+            </a:r>
+            <a:r>
+              <a:rPr>
+                <a:solidFill>
+                  <a:srgbClr val="003B4F"/>
+                </a:solidFill>
+                <a:latin typeface="Courier"/>
+              </a:rPr>
+              <a:t>(</a:t>
+            </a:r>
+            <a:r>
+              <a:rPr>
+                <a:solidFill>
+                  <a:srgbClr val="20794D"/>
+                </a:solidFill>
+                <a:latin typeface="Courier"/>
+              </a:rPr>
+              <a:t>"Standard two-sample t-test:"</a:t>
+            </a:r>
+            <a:r>
+              <a:rPr>
+                <a:solidFill>
+                  <a:srgbClr val="003B4F"/>
+                </a:solidFill>
+                <a:latin typeface="Courier"/>
+              </a:rPr>
+              <a:t>)</a:t>
+            </a:r>
+          </a:p>
+          <a:p>
+            <a:pPr lvl="0" indent="0">
+              <a:buNone/>
+            </a:pPr>
+            <a:r>
+              <a:rPr>
+                <a:latin typeface="Courier"/>
+              </a:rPr>
+              <a:t>[1] "Standard two-sample t-test:"</a:t>
+            </a:r>
+          </a:p>
+          <a:p>
+            <a:pPr lvl="0" indent="0">
+              <a:buNone/>
+            </a:pPr>
+            <a:r>
+              <a:rPr>
+                <a:solidFill>
+                  <a:srgbClr val="4758AB"/>
+                </a:solidFill>
+                <a:latin typeface="Courier"/>
+              </a:rPr>
+              <a:t>print</a:t>
+            </a:r>
+            <a:r>
+              <a:rPr>
+                <a:solidFill>
+                  <a:srgbClr val="003B4F"/>
+                </a:solidFill>
+                <a:latin typeface="Courier"/>
+              </a:rPr>
+              <a:t>(paired_t_test_result)</a:t>
+            </a:r>
+          </a:p>
+          <a:p>
+            <a:pPr lvl="0" indent="0">
+              <a:buNone/>
+            </a:pPr>
+            <a:r>
+              <a:rPr>
+                <a:latin typeface="Courier"/>
+              </a:rPr>
+              <a:t>
+    Paired t-test
+data:  ps_wide_df$sunny and ps_wide_df$shady
+t = -2.7818, df = 7, p-value = 0.02723
+alternative hypothesis: true mean difference is not equal to 0
+95 percent confidence interval:
+ -2.6868652 -0.2178092
+sample estimates:
+mean difference 
+      -1.452337 </a:t>
+            </a:r>
+          </a:p>
+          <a:p>
+            <a:pPr lvl="0" indent="0">
+              <a:buNone/>
+            </a:pPr>
+            <a:r>
+              <a:rPr>
+                <a:solidFill>
+                  <a:srgbClr val="5E5E5E"/>
+                </a:solidFill>
+                <a:latin typeface="Courier"/>
+              </a:rPr>
+              <a:t># Welch's t-test (if variances are unequal)</a:t>
+            </a:r>
+            <a:br/>
+            <a:r>
+              <a:rPr>
+                <a:solidFill>
+                  <a:srgbClr val="5E5E5E"/>
+                </a:solidFill>
+                <a:latin typeface="Courier"/>
+              </a:rPr>
+              <a:t># YOUR CODE HERE</a:t>
             </a:r>
           </a:p>
         </p:txBody>
@@ -11803,7 +12384,284 @@
 </p:sld>
 </file>
 
-<file path=ppt/slides/slide43.xml><?xml version="1.0" encoding="utf-8"?>
+<file path=ppt/slides/slide44.xml><?xml version="1.0" encoding="utf-8"?>
+<p:sld xmlns:a="http://schemas.openxmlformats.org/drawingml/2006/main" xmlns:r="http://schemas.openxmlformats.org/officeDocument/2006/relationships" xmlns:p="http://schemas.openxmlformats.org/presentationml/2006/main">
+  <p:cSld>
+    <p:spTree>
+      <p:nvGrpSpPr>
+        <p:cNvPr id="1" name=""/>
+        <p:cNvGrpSpPr/>
+        <p:nvPr/>
+      </p:nvGrpSpPr>
+      <p:grpSpPr>
+        <a:xfrm>
+          <a:off x="0" y="0"/>
+          <a:ext cx="0" cy="0"/>
+          <a:chOff x="0" y="0"/>
+          <a:chExt cx="0" cy="0"/>
+        </a:xfrm>
+      </p:grpSpPr>
+      <p:sp>
+        <p:nvSpPr>
+          <p:cNvPr id="2" name="Title 1"/>
+          <p:cNvSpPr>
+            <a:spLocks noGrp="1"/>
+          </p:cNvSpPr>
+          <p:nvPr>
+            <p:ph type="title"/>
+          </p:nvPr>
+        </p:nvSpPr>
+        <p:spPr>
+          <a:xfrm>
+            <a:off x="0" y="0"/>
+            <a:ext cx="9144000" cy="871538"/>
+          </a:xfrm>
+        </p:spPr>
+        <p:txBody>
+          <a:bodyPr/>
+          <a:lstStyle/>
+          <a:p>
+            <a:pPr lvl="0" indent="0" marL="0">
+              <a:buNone/>
+            </a:pPr>
+            <a:r>
+              <a:rPr/>
+              <a:t>Lecture 5: What is going on??</a:t>
+            </a:r>
+          </a:p>
+        </p:txBody>
+      </p:sp>
+      <p:sp>
+        <p:nvSpPr>
+          <p:cNvPr id="4" name="Text Placeholder 3"/>
+          <p:cNvSpPr>
+            <a:spLocks noGrp="1"/>
+          </p:cNvSpPr>
+          <p:nvPr>
+            <p:ph idx="2" sz="half" type="body"/>
+          </p:nvPr>
+        </p:nvSpPr>
+        <p:spPr/>
+        <p:txBody>
+          <a:bodyPr/>
+          <a:lstStyle/>
+          <a:p>
+            <a:pPr lvl="0" indent="0" marL="0">
+              <a:buNone/>
+            </a:pPr>
+            <a:r>
+              <a:rPr/>
+              <a:t>Note that thee is a lot of variation within trees but the trend is the same</a:t>
+            </a:r>
+          </a:p>
+          <a:p>
+            <a:pPr lvl="0" indent="0">
+              <a:buNone/>
+            </a:pPr>
+            <a:r>
+              <a:rPr>
+                <a:solidFill>
+                  <a:srgbClr val="003B4F"/>
+                </a:solidFill>
+                <a:latin typeface="Courier"/>
+              </a:rPr>
+              <a:t>ps_plot</a:t>
+            </a:r>
+          </a:p>
+        </p:txBody>
+      </p:sp>
+      <p:pic>
+        <p:nvPicPr>
+          <p:cNvPr descr="05_01_lecture_powerpoint_files/figure-pptx/unnamed-chunk-26-1.png" id="0" name="Picture 1"/>
+          <p:cNvPicPr>
+            <a:picLocks noGrp="1" noChangeAspect="1"/>
+          </p:cNvPicPr>
+          <p:nvPr/>
+        </p:nvPicPr>
+        <p:blipFill>
+          <a:blip r:embed="rId2"/>
+          <a:stretch>
+            <a:fillRect/>
+          </a:stretch>
+        </p:blipFill>
+        <p:spPr bwMode="auto">
+          <a:xfrm>
+            <a:off x="3657600" y="1244600"/>
+            <a:ext cx="5232400" cy="3225800"/>
+          </a:xfrm>
+          <a:prstGeom prst="rect">
+            <a:avLst/>
+          </a:prstGeom>
+          <a:noFill/>
+          <a:ln w="9525">
+            <a:noFill/>
+            <a:headEnd/>
+            <a:tailEnd/>
+          </a:ln>
+        </p:spPr>
+      </p:pic>
+    </p:spTree>
+  </p:cSld>
+</p:sld>
+</file>
+
+<file path=ppt/slides/slide45.xml><?xml version="1.0" encoding="utf-8"?>
+<p:sld xmlns:a="http://schemas.openxmlformats.org/drawingml/2006/main" xmlns:r="http://schemas.openxmlformats.org/officeDocument/2006/relationships" xmlns:p="http://schemas.openxmlformats.org/presentationml/2006/main">
+  <p:cSld>
+    <p:spTree>
+      <p:nvGrpSpPr>
+        <p:cNvPr id="1" name=""/>
+        <p:cNvGrpSpPr/>
+        <p:nvPr/>
+      </p:nvGrpSpPr>
+      <p:grpSpPr>
+        <a:xfrm>
+          <a:off x="0" y="0"/>
+          <a:ext cx="0" cy="0"/>
+          <a:chOff x="0" y="0"/>
+          <a:chExt cx="0" cy="0"/>
+        </a:xfrm>
+      </p:grpSpPr>
+      <p:sp>
+        <p:nvSpPr>
+          <p:cNvPr id="2" name="Title 1"/>
+          <p:cNvSpPr>
+            <a:spLocks noGrp="1"/>
+          </p:cNvSpPr>
+          <p:nvPr>
+            <p:ph type="title"/>
+          </p:nvPr>
+        </p:nvSpPr>
+        <p:spPr>
+          <a:xfrm>
+            <a:off x="0" y="0"/>
+            <a:ext cx="9144000" cy="582780"/>
+          </a:xfrm>
+        </p:spPr>
+        <p:txBody>
+          <a:bodyPr/>
+          <a:lstStyle/>
+          <a:p>
+            <a:pPr lvl="0" indent="0" marL="0">
+              <a:buNone/>
+            </a:pPr>
+            <a:r>
+              <a:rPr b="1"/>
+              <a:t>Lecture 5:</a:t>
+            </a:r>
+            <a:r>
+              <a:rPr/>
+              <a:t> Assumptions of Parametric Tests</a:t>
+            </a:r>
+          </a:p>
+        </p:txBody>
+      </p:sp>
+      <p:sp>
+        <p:nvSpPr>
+          <p:cNvPr id="3" name="Content Placeholder 2"/>
+          <p:cNvSpPr>
+            <a:spLocks noGrp="1"/>
+          </p:cNvSpPr>
+          <p:nvPr>
+            <p:ph idx="1"/>
+          </p:nvPr>
+        </p:nvSpPr>
+        <p:spPr/>
+        <p:txBody>
+          <a:bodyPr/>
+          <a:lstStyle/>
+          <a:p>
+            <a:pPr lvl="0" indent="0" marL="0">
+              <a:buNone/>
+            </a:pPr>
+            <a:r>
+              <a:rPr b="1"/>
+              <a:t>Common assumptions for t-tests:</a:t>
+            </a:r>
+          </a:p>
+          <a:p>
+            <a:pPr lvl="0" indent="-342900" marL="342900">
+              <a:buAutoNum type="arabicPeriod"/>
+            </a:pPr>
+            <a:r>
+              <a:rPr/>
+              <a:t>Normality: Data comes from normally distributed populations</a:t>
+            </a:r>
+          </a:p>
+          <a:p>
+            <a:pPr lvl="0" indent="-342900" marL="342900">
+              <a:buAutoNum type="arabicPeriod"/>
+            </a:pPr>
+            <a:r>
+              <a:rPr/>
+              <a:t>Equal variances (for two-sample tests)</a:t>
+            </a:r>
+          </a:p>
+          <a:p>
+            <a:pPr lvl="0" indent="-342900" marL="342900">
+              <a:buAutoNum type="arabicPeriod"/>
+            </a:pPr>
+            <a:r>
+              <a:rPr/>
+              <a:t>Independence: Observations are independent</a:t>
+            </a:r>
+          </a:p>
+          <a:p>
+            <a:pPr lvl="0" indent="-342900" marL="342900">
+              <a:buAutoNum type="arabicPeriod"/>
+            </a:pPr>
+            <a:r>
+              <a:rPr/>
+              <a:t>No outliers: Extreme values can influence results</a:t>
+            </a:r>
+          </a:p>
+          <a:p>
+            <a:pPr lvl="0" indent="0" marL="0">
+              <a:buNone/>
+            </a:pPr>
+            <a:r>
+              <a:rPr/>
+              <a:t>What can we do if our data violates these assumptions?</a:t>
+            </a:r>
+          </a:p>
+          <a:p>
+            <a:pPr lvl="0" indent="0" marL="0">
+              <a:buNone/>
+            </a:pPr>
+            <a:r>
+              <a:rPr/>
+              <a:t>Alternatives when assumptions are violated:</a:t>
+            </a:r>
+          </a:p>
+          <a:p>
+            <a:pPr lvl="0"/>
+            <a:r>
+              <a:rPr/>
+              <a:t>Data transformation (log, square root, etc.)</a:t>
+            </a:r>
+          </a:p>
+          <a:p>
+            <a:pPr lvl="0"/>
+            <a:r>
+              <a:rPr/>
+              <a:t>Non-parametric tests</a:t>
+            </a:r>
+          </a:p>
+          <a:p>
+            <a:pPr lvl="0"/>
+            <a:r>
+              <a:rPr/>
+              <a:t>Robust statistical methods</a:t>
+            </a:r>
+          </a:p>
+        </p:txBody>
+      </p:sp>
+    </p:spTree>
+  </p:cSld>
+</p:sld>
+</file>
+
+<file path=ppt/slides/slide46.xml><?xml version="1.0" encoding="utf-8"?>
 <p:sld xmlns:a="http://schemas.openxmlformats.org/drawingml/2006/main" xmlns:r="http://schemas.openxmlformats.org/officeDocument/2006/relationships" xmlns:p="http://schemas.openxmlformats.org/presentationml/2006/main">
   <p:cSld>
     <p:spTree>
@@ -12032,10 +12890,13 @@
           <a:lstStyle/>
           <a:p>
             <a:pPr lvl="0" indent="0" marL="0">
-              <a:buNone/>
-            </a:pPr>
-            <a:r>
-              <a:rPr/>
+              <a:spcBef>
+                <a:spcPts val="3000"/>
+              </a:spcBef>
+              <a:buNone/>
+            </a:pPr>
+            <a:r>
+              <a:rPr b="1"/>
               <a:t>The goals for today</a:t>
             </a:r>
           </a:p>
@@ -12156,11 +13017,7 @@
             </a:pPr>
             <a:r>
               <a:rPr b="1"/>
-              <a:t>Lecture 5:</a:t>
-            </a:r>
-            <a:r>
-              <a:rPr/>
-              <a:t> Student’s t-distribution Table</a:t>
+              <a:t>Lecture 5: Probability and Statistical Inference</a:t>
             </a:r>
           </a:p>
         </p:txBody>
@@ -12185,42 +13042,49 @@
             </a:pPr>
             <a:r>
               <a:rPr/>
-              <a:t>Here is a t-table</a:t>
+              <a:t>The goals for today</a:t>
             </a:r>
           </a:p>
           <a:p>
             <a:pPr lvl="0"/>
             <a:r>
               <a:rPr/>
-              <a:t>Values of t that correspond to probabilities</a:t>
+              <a:t>Statistical inference fundamentals</a:t>
             </a:r>
           </a:p>
           <a:p>
             <a:pPr lvl="0"/>
             <a:r>
               <a:rPr/>
-              <a:t>Probabilities listed along top</a:t>
+              <a:t>Hypothesis testing principles</a:t>
             </a:r>
           </a:p>
           <a:p>
             <a:pPr lvl="0"/>
             <a:r>
               <a:rPr/>
-              <a:t>Sample dfs are listed in the left-most column</a:t>
+              <a:t>T Distributions</a:t>
             </a:r>
           </a:p>
           <a:p>
             <a:pPr lvl="0"/>
             <a:r>
               <a:rPr/>
-              <a:t>Probabilities are given for one-tailed and two-tailed “questions”</a:t>
+              <a:t>One sample T Tests</a:t>
+            </a:r>
+          </a:p>
+          <a:p>
+            <a:pPr lvl="0"/>
+            <a:r>
+              <a:rPr/>
+              <a:t>Two sample T Test</a:t>
             </a:r>
           </a:p>
         </p:txBody>
       </p:sp>
       <p:pic>
         <p:nvPicPr>
-          <p:cNvPr descr="images/clipboard-3203878802.png" id="0" name="Picture 1"/>
+          <p:cNvPr descr="05_01_lecture_powerpoint_files/figure-pptx/unnamed-chunk-3-1.png" id="0" name="Picture 1"/>
           <p:cNvPicPr>
             <a:picLocks noGrp="1" noChangeAspect="1"/>
           </p:cNvPicPr>
@@ -12234,8 +13098,8 @@
         </p:blipFill>
         <p:spPr bwMode="auto">
           <a:xfrm>
-            <a:off x="6121400" y="1562100"/>
-            <a:ext cx="2781300" cy="2667000"/>
+            <a:off x="6121400" y="1778000"/>
+            <a:ext cx="2781300" cy="2222500"/>
           </a:xfrm>
           <a:prstGeom prst="rect">
             <a:avLst/>
@@ -12324,21 +13188,21 @@
             </a:pPr>
             <a:r>
               <a:rPr/>
-              <a:t>One-tailed questions: area of distribution left or (right) of a certain value</a:t>
+              <a:t>One-tailed questions: area of distribution left or (right) of a certain value for a one sample test</a:t>
             </a:r>
           </a:p>
           <a:p>
             <a:pPr lvl="0"/>
             <a:r>
               <a:rPr/>
-              <a:t>n=20 (df=19) - 90% of the observations found left</a:t>
+              <a:t>n=8 (df=7) - 95% of the observations found left</a:t>
             </a:r>
           </a:p>
           <a:p>
             <a:pPr lvl="0"/>
             <a:r>
               <a:rPr/>
-              <a:t>t= 1.328 (10% are outside)</a:t>
+              <a:t>t= 1.761 (5% are outside)</a:t>
             </a:r>
           </a:p>
         </p:txBody>
@@ -12375,7 +13239,7 @@
       </p:pic>
       <p:pic>
         <p:nvPicPr>
-          <p:cNvPr descr="images/clipboard-641796945.png" id="0" name="Picture 1"/>
+          <p:cNvPr descr="images/clipboard-4103165911.png" id="0" name="Picture 1"/>
           <p:cNvPicPr>
             <a:picLocks noGrp="1" noChangeAspect="1"/>
           </p:cNvPicPr>
@@ -12389,8 +13253,8 @@
         </p:blipFill>
         <p:spPr bwMode="auto">
           <a:xfrm>
-            <a:off x="5067300" y="1295400"/>
-            <a:ext cx="3403600" cy="3276600"/>
+            <a:off x="4749800" y="1651000"/>
+            <a:ext cx="4038600" cy="2578100"/>
           </a:xfrm>
           <a:prstGeom prst="rect">
             <a:avLst/>
@@ -12530,7 +13394,7 @@
       </p:pic>
       <p:pic>
         <p:nvPicPr>
-          <p:cNvPr descr="images/clipboard-1734806681.png" id="0" name="Picture 1"/>
+          <p:cNvPr descr="images/clipboard-1746531278.png" id="0" name="Picture 1"/>
           <p:cNvPicPr>
             <a:picLocks noGrp="1" noChangeAspect="1"/>
           </p:cNvPicPr>
@@ -12544,8 +13408,8 @@
         </p:blipFill>
         <p:spPr bwMode="auto">
           <a:xfrm>
-            <a:off x="5067300" y="1295400"/>
-            <a:ext cx="3403600" cy="3276600"/>
+            <a:off x="4749800" y="1651000"/>
+            <a:ext cx="4038600" cy="2565400"/>
           </a:xfrm>
           <a:prstGeom prst="rect">
             <a:avLst/>
@@ -12558,6 +13422,31 @@
           </a:ln>
         </p:spPr>
       </p:pic>
+      <p:sp>
+        <p:nvSpPr>
+          <p:cNvPr id="6" name="Content Placeholder 5"/>
+          <p:cNvSpPr>
+            <a:spLocks noGrp="1"/>
+          </p:cNvSpPr>
+          <p:nvPr>
+            <p:ph idx="4" sz="quarter"/>
+          </p:nvPr>
+        </p:nvSpPr>
+        <p:spPr/>
+        <p:txBody>
+          <a:bodyPr/>
+          <a:lstStyle/>
+          <a:p>
+            <a:pPr lvl="0" indent="0" marL="0">
+              <a:buNone/>
+            </a:pPr>
+            <a:r>
+              <a:rPr/>
+              <a:t>xxxxx</a:t>
+            </a:r>
+          </a:p>
+        </p:txBody>
+      </p:sp>
     </p:spTree>
   </p:cSld>
 </p:sld>
@@ -12723,21 +13612,21 @@
                 <a:pPr lvl="0"/>
                 <a:r>
                   <a:rPr/>
-                  <a:t>95% CI Sample A: = 272.8 ± 2.262 * (37.81/(10^0.5)) = 27.05</a:t>
+                  <a:t>95% CI Sample A: = 17.6 ± 2.365 * (2.51/(8^0.5)) = +/- 2.098746</a:t>
                 </a:r>
               </a:p>
               <a:p>
                 <a:pPr lvl="0"/>
                 <a:r>
                   <a:rPr/>
-                  <a:t>The 95% CI is between 245.8 and 299.8</a:t>
+                  <a:t>The 95% CI is between 15.50 and 19.70</a:t>
                 </a:r>
               </a:p>
               <a:p>
                 <a:pPr lvl="0"/>
                 <a:r>
                   <a:rPr/>
-                  <a:t>“The 95% CI for the population mean from sample A is 272.8 ± 27.05</a:t>
+                  <a:t>“The 95% CI for the population mean from sample A is 17.6 ± 2.1</a:t>
                 </a:r>
               </a:p>
             </p:txBody>
@@ -12746,7 +13635,7 @@
       </mc:AlternateContent>
       <p:pic>
         <p:nvPicPr>
-          <p:cNvPr descr="images/clipboard-3203878802.png" id="0" name="Picture 1"/>
+          <p:cNvPr descr="images/clipboard-1746531278.png" id="0" name="Picture 1"/>
           <p:cNvPicPr>
             <a:picLocks noGrp="1" noChangeAspect="1"/>
           </p:cNvPicPr>
@@ -12760,8 +13649,8 @@
         </p:blipFill>
         <p:spPr bwMode="auto">
           <a:xfrm>
-            <a:off x="6121400" y="1562100"/>
-            <a:ext cx="2781300" cy="2667000"/>
+            <a:off x="6121400" y="2019300"/>
+            <a:ext cx="2781300" cy="1765300"/>
           </a:xfrm>
           <a:prstGeom prst="rect">
             <a:avLst/>

--- a/docs/ecostats_lectures/lecture_05/05_01_lecture_powerpoint.pptx
+++ b/docs/ecostats_lectures/lecture_05/05_01_lecture_powerpoint.pptx
@@ -3472,14 +3472,24 @@
             <a:pPr lvl="1"/>
             <a:r>
               <a:rPr/>
-              <a:t>“What is probability of getting sample with mean = ȳ from population with mean = µ?” (1 sample t-test)</a:t>
+              <a:t>“What is probability of getting sample with mean = ȳ</a:t>
+            </a:r>
+            <a:br/>
+            <a:r>
+              <a:rPr/>
+              <a:t>from population with mean = µ?” (1 sample t-test)</a:t>
             </a:r>
           </a:p>
           <a:p>
             <a:pPr lvl="1"/>
             <a:r>
               <a:rPr/>
-              <a:t>“What is the probability that two samples came from same population?” (2 sample t-test)</a:t>
+              <a:t>“What is the probability that two samples came from</a:t>
+            </a:r>
+            <a:br/>
+            <a:r>
+              <a:rPr/>
+              <a:t>the same population?” (2 sample t-test)</a:t>
             </a:r>
           </a:p>
         </p:txBody>
@@ -3565,6 +3575,9 @@
           </a:p>
           <a:p>
             <a:pPr lvl="0" indent="0" marL="0">
+              <a:spcBef>
+                <a:spcPts val="3000"/>
+              </a:spcBef>
               <a:buNone/>
             </a:pPr>
             <a:r>
@@ -4416,24 +4429,239 @@
               <a:t># what is the mean</a:t>
             </a:r>
             <a:br/>
+            <a:r>
+              <a:rPr>
+                <a:solidFill>
+                  <a:srgbClr val="003B4F"/>
+                </a:solidFill>
+                <a:latin typeface="Courier"/>
+              </a:rPr>
+              <a:t>ps_shade_mean &lt;- </a:t>
+            </a:r>
+            <a:r>
+              <a:rPr>
+                <a:solidFill>
+                  <a:srgbClr val="4758AB"/>
+                </a:solidFill>
+                <a:latin typeface="Courier"/>
+              </a:rPr>
+              <a:t>mean</a:t>
+            </a:r>
+            <a:r>
+              <a:rPr>
+                <a:solidFill>
+                  <a:srgbClr val="003B4F"/>
+                </a:solidFill>
+                <a:latin typeface="Courier"/>
+              </a:rPr>
+              <a:t>(ps_shady_df</a:t>
+            </a:r>
+            <a:r>
+              <a:rPr>
+                <a:solidFill>
+                  <a:srgbClr val="5E5E5E"/>
+                </a:solidFill>
+                <a:latin typeface="Courier"/>
+              </a:rPr>
+              <a:t>$</a:t>
+            </a:r>
+            <a:r>
+              <a:rPr>
+                <a:solidFill>
+                  <a:srgbClr val="003B4F"/>
+                </a:solidFill>
+                <a:latin typeface="Courier"/>
+              </a:rPr>
+              <a:t>length_mm, </a:t>
+            </a:r>
+            <a:r>
+              <a:rPr>
+                <a:solidFill>
+                  <a:srgbClr val="657422"/>
+                </a:solidFill>
+                <a:latin typeface="Courier"/>
+              </a:rPr>
+              <a:t>na.rm =</a:t>
+            </a:r>
+            <a:r>
+              <a:rPr>
+                <a:solidFill>
+                  <a:srgbClr val="003B4F"/>
+                </a:solidFill>
+                <a:latin typeface="Courier"/>
+              </a:rPr>
+              <a:t> </a:t>
+            </a:r>
+            <a:r>
+              <a:rPr>
+                <a:solidFill>
+                  <a:srgbClr val="8F5902"/>
+                </a:solidFill>
+                <a:latin typeface="Courier"/>
+              </a:rPr>
+              <a:t>TRUE</a:t>
+            </a:r>
+            <a:r>
+              <a:rPr>
+                <a:solidFill>
+                  <a:srgbClr val="003B4F"/>
+                </a:solidFill>
+                <a:latin typeface="Courier"/>
+              </a:rPr>
+              <a:t>)</a:t>
+            </a:r>
             <a:br/>
             <a:r>
               <a:rPr>
                 <a:solidFill>
-                  <a:srgbClr val="003B4F"/>
-                </a:solidFill>
-                <a:latin typeface="Courier"/>
-              </a:rPr>
-              <a:t>ps_shade_mean &lt;- </a:t>
-            </a:r>
-            <a:r>
-              <a:rPr>
-                <a:solidFill>
                   <a:srgbClr val="4758AB"/>
                 </a:solidFill>
                 <a:latin typeface="Courier"/>
               </a:rPr>
-              <a:t>mean</a:t>
+              <a:t>cat</a:t>
+            </a:r>
+            <a:r>
+              <a:rPr>
+                <a:solidFill>
+                  <a:srgbClr val="003B4F"/>
+                </a:solidFill>
+                <a:latin typeface="Courier"/>
+              </a:rPr>
+              <a:t>(</a:t>
+            </a:r>
+            <a:r>
+              <a:rPr>
+                <a:solidFill>
+                  <a:srgbClr val="20794D"/>
+                </a:solidFill>
+                <a:latin typeface="Courier"/>
+              </a:rPr>
+              <a:t>"Mean:"</a:t>
+            </a:r>
+            <a:r>
+              <a:rPr>
+                <a:solidFill>
+                  <a:srgbClr val="003B4F"/>
+                </a:solidFill>
+                <a:latin typeface="Courier"/>
+              </a:rPr>
+              <a:t>, </a:t>
+            </a:r>
+            <a:r>
+              <a:rPr>
+                <a:solidFill>
+                  <a:srgbClr val="4758AB"/>
+                </a:solidFill>
+                <a:latin typeface="Courier"/>
+              </a:rPr>
+              <a:t>round</a:t>
+            </a:r>
+            <a:r>
+              <a:rPr>
+                <a:solidFill>
+                  <a:srgbClr val="003B4F"/>
+                </a:solidFill>
+                <a:latin typeface="Courier"/>
+              </a:rPr>
+              <a:t>(ps_shade_mean, </a:t>
+            </a:r>
+            <a:r>
+              <a:rPr>
+                <a:solidFill>
+                  <a:srgbClr val="AD0000"/>
+                </a:solidFill>
+                <a:latin typeface="Courier"/>
+              </a:rPr>
+              <a:t>1</a:t>
+            </a:r>
+            <a:r>
+              <a:rPr>
+                <a:solidFill>
+                  <a:srgbClr val="003B4F"/>
+                </a:solidFill>
+                <a:latin typeface="Courier"/>
+              </a:rPr>
+              <a:t>), </a:t>
+            </a:r>
+            <a:r>
+              <a:rPr>
+                <a:solidFill>
+                  <a:srgbClr val="20794D"/>
+                </a:solidFill>
+                <a:latin typeface="Courier"/>
+              </a:rPr>
+              <a:t>"mm</a:t>
+            </a:r>
+            <a:r>
+              <a:rPr>
+                <a:solidFill>
+                  <a:srgbClr val="5E5E5E"/>
+                </a:solidFill>
+                <a:latin typeface="Courier"/>
+              </a:rPr>
+              <a:t>\n</a:t>
+            </a:r>
+            <a:r>
+              <a:rPr>
+                <a:solidFill>
+                  <a:srgbClr val="20794D"/>
+                </a:solidFill>
+                <a:latin typeface="Courier"/>
+              </a:rPr>
+              <a:t>"</a:t>
+            </a:r>
+            <a:r>
+              <a:rPr>
+                <a:solidFill>
+                  <a:srgbClr val="003B4F"/>
+                </a:solidFill>
+                <a:latin typeface="Courier"/>
+              </a:rPr>
+              <a:t>)</a:t>
+            </a:r>
+          </a:p>
+          <a:p>
+            <a:pPr lvl="0" indent="0">
+              <a:buNone/>
+            </a:pPr>
+            <a:r>
+              <a:rPr sz="2000">
+                <a:latin typeface="Courier"/>
+              </a:rPr>
+              <a:t>Mean: 17.6 mm</a:t>
+            </a:r>
+          </a:p>
+          <a:p>
+            <a:pPr lvl="0" indent="0">
+              <a:buNone/>
+            </a:pPr>
+            <a:r>
+              <a:rPr>
+                <a:solidFill>
+                  <a:srgbClr val="5E5E5E"/>
+                </a:solidFill>
+                <a:latin typeface="Courier"/>
+              </a:rPr>
+              <a:t># Perform a one-sample t-test</a:t>
+            </a:r>
+            <a:br/>
+            <a:r>
+              <a:rPr>
+                <a:solidFill>
+                  <a:srgbClr val="003B4F"/>
+                </a:solidFill>
+                <a:latin typeface="Courier"/>
+              </a:rPr>
+              <a:t>t_test_result &lt;- </a:t>
+            </a:r>
+            <a:r>
+              <a:rPr>
+                <a:solidFill>
+                  <a:srgbClr val="4758AB"/>
+                </a:solidFill>
+                <a:latin typeface="Courier"/>
+              </a:rPr>
+              <a:t>t.test</a:t>
             </a:r>
             <a:r>
               <a:rPr>
@@ -4469,7 +4697,7 @@
                 </a:solidFill>
                 <a:latin typeface="Courier"/>
               </a:rPr>
-              <a:t>na.rm =</a:t>
+              <a:t>mu =</a:t>
             </a:r>
             <a:r>
               <a:rPr>
@@ -4483,11 +4711,11 @@
             <a:r>
               <a:rPr>
                 <a:solidFill>
-                  <a:srgbClr val="8F5902"/>
-                </a:solidFill>
-                <a:latin typeface="Courier"/>
-              </a:rPr>
-              <a:t>TRUE</a:t>
+                  <a:srgbClr val="AD0000"/>
+                </a:solidFill>
+                <a:latin typeface="Courier"/>
+              </a:rPr>
+              <a:t>15</a:t>
             </a:r>
             <a:r>
               <a:rPr>
@@ -4497,233 +4725,6 @@
                 <a:latin typeface="Courier"/>
               </a:rPr>
               <a:t>)</a:t>
-            </a:r>
-            <a:br/>
-            <a:r>
-              <a:rPr>
-                <a:solidFill>
-                  <a:srgbClr val="4758AB"/>
-                </a:solidFill>
-                <a:latin typeface="Courier"/>
-              </a:rPr>
-              <a:t>cat</a:t>
-            </a:r>
-            <a:r>
-              <a:rPr>
-                <a:solidFill>
-                  <a:srgbClr val="003B4F"/>
-                </a:solidFill>
-                <a:latin typeface="Courier"/>
-              </a:rPr>
-              <a:t>(</a:t>
-            </a:r>
-            <a:r>
-              <a:rPr>
-                <a:solidFill>
-                  <a:srgbClr val="20794D"/>
-                </a:solidFill>
-                <a:latin typeface="Courier"/>
-              </a:rPr>
-              <a:t>"Mean:"</a:t>
-            </a:r>
-            <a:r>
-              <a:rPr>
-                <a:solidFill>
-                  <a:srgbClr val="003B4F"/>
-                </a:solidFill>
-                <a:latin typeface="Courier"/>
-              </a:rPr>
-              <a:t>, </a:t>
-            </a:r>
-            <a:r>
-              <a:rPr>
-                <a:solidFill>
-                  <a:srgbClr val="4758AB"/>
-                </a:solidFill>
-                <a:latin typeface="Courier"/>
-              </a:rPr>
-              <a:t>round</a:t>
-            </a:r>
-            <a:r>
-              <a:rPr>
-                <a:solidFill>
-                  <a:srgbClr val="003B4F"/>
-                </a:solidFill>
-                <a:latin typeface="Courier"/>
-              </a:rPr>
-              <a:t>(ps_shade_mean, </a:t>
-            </a:r>
-            <a:r>
-              <a:rPr>
-                <a:solidFill>
-                  <a:srgbClr val="AD0000"/>
-                </a:solidFill>
-                <a:latin typeface="Courier"/>
-              </a:rPr>
-              <a:t>1</a:t>
-            </a:r>
-            <a:r>
-              <a:rPr>
-                <a:solidFill>
-                  <a:srgbClr val="003B4F"/>
-                </a:solidFill>
-                <a:latin typeface="Courier"/>
-              </a:rPr>
-              <a:t>), </a:t>
-            </a:r>
-            <a:r>
-              <a:rPr>
-                <a:solidFill>
-                  <a:srgbClr val="20794D"/>
-                </a:solidFill>
-                <a:latin typeface="Courier"/>
-              </a:rPr>
-              <a:t>"mm</a:t>
-            </a:r>
-            <a:r>
-              <a:rPr>
-                <a:solidFill>
-                  <a:srgbClr val="5E5E5E"/>
-                </a:solidFill>
-                <a:latin typeface="Courier"/>
-              </a:rPr>
-              <a:t>\n</a:t>
-            </a:r>
-            <a:r>
-              <a:rPr>
-                <a:solidFill>
-                  <a:srgbClr val="20794D"/>
-                </a:solidFill>
-                <a:latin typeface="Courier"/>
-              </a:rPr>
-              <a:t>"</a:t>
-            </a:r>
-            <a:r>
-              <a:rPr>
-                <a:solidFill>
-                  <a:srgbClr val="003B4F"/>
-                </a:solidFill>
-                <a:latin typeface="Courier"/>
-              </a:rPr>
-              <a:t>)</a:t>
-            </a:r>
-          </a:p>
-          <a:p>
-            <a:pPr lvl="0" indent="0">
-              <a:buNone/>
-            </a:pPr>
-            <a:r>
-              <a:rPr sz="2000">
-                <a:latin typeface="Courier"/>
-              </a:rPr>
-              <a:t>Mean: 17.6 mm</a:t>
-            </a:r>
-          </a:p>
-          <a:p>
-            <a:pPr lvl="0" indent="0">
-              <a:buNone/>
-            </a:pPr>
-            <a:r>
-              <a:rPr>
-                <a:solidFill>
-                  <a:srgbClr val="5E5E5E"/>
-                </a:solidFill>
-                <a:latin typeface="Courier"/>
-              </a:rPr>
-              <a:t># Perform a one-sample t-test</a:t>
-            </a:r>
-            <a:br/>
-            <a:r>
-              <a:rPr>
-                <a:solidFill>
-                  <a:srgbClr val="003B4F"/>
-                </a:solidFill>
-                <a:latin typeface="Courier"/>
-              </a:rPr>
-              <a:t>t_test_result &lt;- </a:t>
-            </a:r>
-            <a:r>
-              <a:rPr>
-                <a:solidFill>
-                  <a:srgbClr val="4758AB"/>
-                </a:solidFill>
-                <a:latin typeface="Courier"/>
-              </a:rPr>
-              <a:t>t.test</a:t>
-            </a:r>
-            <a:r>
-              <a:rPr>
-                <a:solidFill>
-                  <a:srgbClr val="003B4F"/>
-                </a:solidFill>
-                <a:latin typeface="Courier"/>
-              </a:rPr>
-              <a:t>(ps_shady_df</a:t>
-            </a:r>
-            <a:r>
-              <a:rPr>
-                <a:solidFill>
-                  <a:srgbClr val="5E5E5E"/>
-                </a:solidFill>
-                <a:latin typeface="Courier"/>
-              </a:rPr>
-              <a:t>$</a:t>
-            </a:r>
-            <a:r>
-              <a:rPr>
-                <a:solidFill>
-                  <a:srgbClr val="003B4F"/>
-                </a:solidFill>
-                <a:latin typeface="Courier"/>
-              </a:rPr>
-              <a:t>length_mm, </a:t>
-            </a:r>
-            <a:r>
-              <a:rPr>
-                <a:solidFill>
-                  <a:srgbClr val="657422"/>
-                </a:solidFill>
-                <a:latin typeface="Courier"/>
-              </a:rPr>
-              <a:t>mu =</a:t>
-            </a:r>
-            <a:r>
-              <a:rPr>
-                <a:solidFill>
-                  <a:srgbClr val="003B4F"/>
-                </a:solidFill>
-                <a:latin typeface="Courier"/>
-              </a:rPr>
-              <a:t> </a:t>
-            </a:r>
-            <a:r>
-              <a:rPr>
-                <a:solidFill>
-                  <a:srgbClr val="AD0000"/>
-                </a:solidFill>
-                <a:latin typeface="Courier"/>
-              </a:rPr>
-              <a:t>15</a:t>
-            </a:r>
-            <a:r>
-              <a:rPr>
-                <a:solidFill>
-                  <a:srgbClr val="003B4F"/>
-                </a:solidFill>
-                <a:latin typeface="Courier"/>
-              </a:rPr>
-              <a:t>)</a:t>
-            </a:r>
-            <a:br/>
-            <a:br/>
-            <a:r>
-              <a:rPr>
-                <a:solidFill>
-                  <a:srgbClr val="5E5E5E"/>
-                </a:solidFill>
-                <a:latin typeface="Courier"/>
-              </a:rPr>
-              <a:t># View the test results</a:t>
             </a:r>
             <a:br/>
             <a:r>
@@ -5589,31 +5590,36 @@
           </a:p>
         </p:txBody>
       </p:sp>
-      <p:sp>
-        <p:nvSpPr>
-          <p:cNvPr id="4" name="Content Placeholder 3"/>
-          <p:cNvSpPr>
-            <a:spLocks noGrp="1"/>
-          </p:cNvSpPr>
-          <p:nvPr>
-            <p:ph idx="2" sz="half"/>
-          </p:nvPr>
-        </p:nvSpPr>
-        <p:spPr/>
-        <p:txBody>
-          <a:bodyPr/>
-          <a:lstStyle/>
-          <a:p>
-            <a:pPr lvl="0" indent="0" marL="0">
-              <a:buNone/>
-            </a:pPr>
-            <a:r>
-              <a:rPr/>
-              <a:t>xxxxx  xxx</a:t>
-            </a:r>
-          </a:p>
-        </p:txBody>
-      </p:sp>
+      <p:pic>
+        <p:nvPicPr>
+          <p:cNvPr descr="images/two_branches.jpg" id="0" name="Picture 1"/>
+          <p:cNvPicPr>
+            <a:picLocks noGrp="1" noChangeAspect="1"/>
+          </p:cNvPicPr>
+          <p:nvPr/>
+        </p:nvPicPr>
+        <p:blipFill>
+          <a:blip r:embed="rId2"/>
+          <a:stretch>
+            <a:fillRect/>
+          </a:stretch>
+        </p:blipFill>
+        <p:spPr bwMode="auto">
+          <a:xfrm>
+            <a:off x="6121400" y="1498600"/>
+            <a:ext cx="2781300" cy="2781300"/>
+          </a:xfrm>
+          <a:prstGeom prst="rect">
+            <a:avLst/>
+          </a:prstGeom>
+          <a:noFill/>
+          <a:ln w="9525">
+            <a:noFill/>
+            <a:headEnd/>
+            <a:tailEnd/>
+          </a:ln>
+        </p:spPr>
+      </p:pic>
     </p:spTree>
   </p:cSld>
 </p:sld>
@@ -8416,35 +8422,21 @@
             <a:pPr lvl="0"/>
             <a:r>
               <a:rPr/>
-              <a:t>Introduction to histograms or frequency distributions</a:t>
+              <a:t>Probability Distribution Functions (PDF)</a:t>
+            </a:r>
+          </a:p>
+          <a:p>
+            <a:pPr lvl="1"/>
+            <a:r>
+              <a:rPr/>
+              <a:t>Z scores and T scores</a:t>
             </a:r>
           </a:p>
           <a:p>
             <a:pPr lvl="0"/>
             <a:r>
               <a:rPr/>
-              <a:t>Probability Distribution Functions (PDF)</a:t>
-            </a:r>
-          </a:p>
-          <a:p>
-            <a:pPr lvl="0"/>
-            <a:r>
-              <a:rPr/>
-              <a:t>Descriptive Statistics</a:t>
-            </a:r>
-          </a:p>
-          <a:p>
-            <a:pPr lvl="1"/>
-            <a:r>
-              <a:rPr/>
-              <a:t>Center - mean, median, mode</a:t>
-            </a:r>
-          </a:p>
-          <a:p>
-            <a:pPr lvl="1"/>
-            <a:r>
-              <a:rPr/>
-              <a:t>Spread - range, variance, standard deviation</a:t>
+              <a:t>Hypothesis testing</a:t>
             </a:r>
           </a:p>
           <a:p>
@@ -11316,41 +11308,6 @@
             <a:pPr lvl="0"/>
             <a:r>
               <a:rPr/>
-              <a:t>Introduction to histograms or frequency distributions</a:t>
-            </a:r>
-          </a:p>
-          <a:p>
-            <a:pPr lvl="0"/>
-            <a:r>
-              <a:rPr/>
-              <a:t>Probability Distribution Functions (PDF)</a:t>
-            </a:r>
-          </a:p>
-          <a:p>
-            <a:pPr lvl="0"/>
-            <a:r>
-              <a:rPr/>
-              <a:t>Descriptive Statistics</a:t>
-            </a:r>
-          </a:p>
-          <a:p>
-            <a:pPr lvl="1"/>
-            <a:r>
-              <a:rPr/>
-              <a:t>Center - mean, median, mode</a:t>
-            </a:r>
-          </a:p>
-          <a:p>
-            <a:pPr lvl="1"/>
-            <a:r>
-              <a:rPr/>
-              <a:t>Spread - range, variance, standard deviation</a:t>
-            </a:r>
-          </a:p>
-          <a:p>
-            <a:pPr lvl="0"/>
-            <a:r>
-              <a:rPr/>
               <a:t>Tests of means using T-Tests</a:t>
             </a:r>
           </a:p>
@@ -12935,6 +12892,13 @@
               <a:t>Two sample T Test</a:t>
             </a:r>
           </a:p>
+          <a:p>
+            <a:pPr lvl="0"/>
+            <a:r>
+              <a:rPr/>
+              <a:t>Assumption tests</a:t>
+            </a:r>
+          </a:p>
         </p:txBody>
       </p:sp>
       <p:pic>
@@ -13202,7 +13166,7 @@
             <a:pPr lvl="0"/>
             <a:r>
               <a:rPr/>
-              <a:t>t= 1.761 (5% are outside)</a:t>
+              <a:t>t= 1.895 (5% are outside)</a:t>
             </a:r>
           </a:p>
         </p:txBody>
@@ -13350,14 +13314,21 @@
             <a:pPr lvl="0"/>
             <a:r>
               <a:rPr/>
-              <a:t>n= 20 (df=19), 90% of the observations are between</a:t>
+              <a:t>n= 8 (df=7), 95% of the observations are between</a:t>
             </a:r>
           </a:p>
           <a:p>
             <a:pPr lvl="0"/>
             <a:r>
               <a:rPr/>
-              <a:t>t=-1.729 and t=1.729 (10% are outside)</a:t>
+              <a:t>t=-2.365 and t=2.365 (2.5% are outside on each side)</a:t>
+            </a:r>
+          </a:p>
+          <a:p>
+            <a:pPr lvl="0"/>
+            <a:r>
+              <a:rPr/>
+              <a:t>One tailed was t= 1.895 (5% are outside)</a:t>
             </a:r>
           </a:p>
         </p:txBody>

--- a/docs/ecostats_lectures/lecture_05/05_01_lecture_powerpoint.pptx
+++ b/docs/ecostats_lectures/lecture_05/05_01_lecture_powerpoint.pptx
@@ -50,7 +50,6 @@
     <p:sldId id="298" r:id="rId44"/>
     <p:sldId id="299" r:id="rId45"/>
     <p:sldId id="300" r:id="rId46"/>
-    <p:sldId id="301" r:id="rId47"/>
   </p:sldIdLst>
   <p:sldSz cx="9144000" cy="5143500" type="screen16x9"/>
   <p:notesSz cx="6858000" cy="9144000"/>
@@ -3426,7 +3425,7 @@
             </a:r>
             <a:r>
               <a:rPr/>
-              <a:t> Applications of t-distribution</a:t>
+              <a:t> One Sample T-Test</a:t>
             </a:r>
           </a:p>
         </p:txBody>
@@ -3451,45 +3450,76 @@
             </a:pPr>
             <a:r>
               <a:rPr/>
-              <a:t>So:</a:t>
-            </a:r>
-          </a:p>
-          <a:p>
-            <a:pPr lvl="0"/>
-            <a:r>
-              <a:rPr/>
-              <a:t>Can assess confidence that population mean is within a certain range</a:t>
-            </a:r>
-          </a:p>
-          <a:p>
-            <a:pPr lvl="0"/>
-            <a:r>
-              <a:rPr/>
-              <a:t>Can use t distribution to ask questions like:</a:t>
-            </a:r>
-          </a:p>
-          <a:p>
-            <a:pPr lvl="1"/>
-            <a:r>
-              <a:rPr/>
-              <a:t>“What is probability of getting sample with mean = ȳ</a:t>
-            </a:r>
-            <a:br/>
-            <a:r>
-              <a:rPr/>
-              <a:t>from population with mean = µ?” (1 sample t-test)</a:t>
-            </a:r>
-          </a:p>
-          <a:p>
-            <a:pPr lvl="1"/>
-            <a:r>
-              <a:rPr/>
-              <a:t>“What is the probability that two samples came from</a:t>
-            </a:r>
-            <a:br/>
-            <a:r>
-              <a:rPr/>
-              <a:t>the same population?” (2 sample t-test)</a:t>
+              <a:t>We want to test if the mean needle length on one side differs from 15mm.</a:t>
+            </a:r>
+          </a:p>
+          <a:p>
+            <a:pPr lvl="0" indent="0" marL="0">
+              <a:spcBef>
+                <a:spcPts val="3000"/>
+              </a:spcBef>
+              <a:buNone/>
+            </a:pPr>
+            <a:r>
+              <a:rPr b="1"/>
+              <a:t>Activity: Define hypotheses and identify assumptions</a:t>
+            </a:r>
+          </a:p>
+          <a:p>
+            <a:pPr lvl="0" indent="0" marL="0">
+              <a:buNone/>
+            </a:pPr>
+            <a:r>
+              <a:rPr/>
+              <a:t>H₀: μ = 15 (The mean needle length on shade side is 15mm)</a:t>
+            </a:r>
+          </a:p>
+          <a:p>
+            <a:pPr lvl="0" indent="0" marL="0">
+              <a:buNone/>
+            </a:pPr>
+            <a:r>
+              <a:rPr/>
+              <a:t>H₁: μ ≠ 15 (The mean needle length on shade side is not 240mm)</a:t>
+            </a:r>
+          </a:p>
+          <a:p>
+            <a:pPr lvl="0" indent="0" marL="0">
+              <a:spcBef>
+                <a:spcPts val="3000"/>
+              </a:spcBef>
+              <a:buNone/>
+            </a:pPr>
+            <a:r>
+              <a:rPr b="1"/>
+              <a:t>Assumptions for t-test:</a:t>
+            </a:r>
+          </a:p>
+          <a:p>
+            <a:pPr lvl="0" indent="-342900" marL="342900">
+              <a:buAutoNum type="arabicPeriod"/>
+            </a:pPr>
+            <a:r>
+              <a:rPr/>
+              <a:t>Data is normally distributed</a:t>
+            </a:r>
+          </a:p>
+          <a:p>
+            <a:pPr lvl="0" indent="-342900" marL="342900">
+              <a:buAutoNum type="arabicPeriod"/>
+            </a:pPr>
+            <a:r>
+              <a:rPr/>
+              <a:t>Observations are independent</a:t>
+            </a:r>
+          </a:p>
+          <a:p>
+            <a:pPr lvl="0" indent="-342900" marL="342900">
+              <a:buAutoNum type="arabicPeriod"/>
+            </a:pPr>
+            <a:r>
+              <a:rPr/>
+              <a:t>No significant outliers</a:t>
             </a:r>
           </a:p>
         </p:txBody>
@@ -3529,156 +3559,6 @@
         <p:spPr>
           <a:xfrm>
             <a:off x="0" y="0"/>
-            <a:ext cx="9144000" cy="582780"/>
-          </a:xfrm>
-        </p:spPr>
-        <p:txBody>
-          <a:bodyPr/>
-          <a:lstStyle/>
-          <a:p>
-            <a:pPr lvl="0" indent="0" marL="0">
-              <a:buNone/>
-            </a:pPr>
-            <a:r>
-              <a:rPr b="1"/>
-              <a:t>Lecture 5:</a:t>
-            </a:r>
-            <a:r>
-              <a:rPr/>
-              <a:t> Single Sample T-Test</a:t>
-            </a:r>
-          </a:p>
-        </p:txBody>
-      </p:sp>
-      <p:sp>
-        <p:nvSpPr>
-          <p:cNvPr id="3" name="Content Placeholder 2"/>
-          <p:cNvSpPr>
-            <a:spLocks noGrp="1"/>
-          </p:cNvSpPr>
-          <p:nvPr>
-            <p:ph idx="1"/>
-          </p:nvPr>
-        </p:nvSpPr>
-        <p:spPr/>
-        <p:txBody>
-          <a:bodyPr/>
-          <a:lstStyle/>
-          <a:p>
-            <a:pPr lvl="0" indent="0" marL="0">
-              <a:buNone/>
-            </a:pPr>
-            <a:r>
-              <a:rPr/>
-              <a:t>We want to test if the mean fish length in I3 differs from 240mm.</a:t>
-            </a:r>
-          </a:p>
-          <a:p>
-            <a:pPr lvl="0" indent="0" marL="0">
-              <a:spcBef>
-                <a:spcPts val="3000"/>
-              </a:spcBef>
-              <a:buNone/>
-            </a:pPr>
-            <a:r>
-              <a:rPr b="1"/>
-              <a:t>Activity: Define hypotheses and identify assumptions</a:t>
-            </a:r>
-          </a:p>
-          <a:p>
-            <a:pPr lvl="0" indent="0" marL="0">
-              <a:buNone/>
-            </a:pPr>
-            <a:r>
-              <a:rPr/>
-              <a:t>H₀: μ = 15 (The mean needle length on shade side is 15mm)</a:t>
-            </a:r>
-          </a:p>
-          <a:p>
-            <a:pPr lvl="0" indent="0" marL="0">
-              <a:buNone/>
-            </a:pPr>
-            <a:r>
-              <a:rPr/>
-              <a:t>H₁: μ ≠ 15 (The mean needle length on shade side is not 240mm)</a:t>
-            </a:r>
-          </a:p>
-          <a:p>
-            <a:pPr lvl="0" indent="0" marL="0">
-              <a:spcBef>
-                <a:spcPts val="3000"/>
-              </a:spcBef>
-              <a:buNone/>
-            </a:pPr>
-            <a:r>
-              <a:rPr b="1"/>
-              <a:t>Assumptions for t-test:</a:t>
-            </a:r>
-          </a:p>
-          <a:p>
-            <a:pPr lvl="0" indent="-342900" marL="342900">
-              <a:buAutoNum type="arabicPeriod"/>
-            </a:pPr>
-            <a:r>
-              <a:rPr/>
-              <a:t>Data is normally distributed</a:t>
-            </a:r>
-          </a:p>
-          <a:p>
-            <a:pPr lvl="0" indent="-342900" marL="342900">
-              <a:buAutoNum type="arabicPeriod"/>
-            </a:pPr>
-            <a:r>
-              <a:rPr/>
-              <a:t>Observations are independent</a:t>
-            </a:r>
-          </a:p>
-          <a:p>
-            <a:pPr lvl="0" indent="-342900" marL="342900">
-              <a:buAutoNum type="arabicPeriod"/>
-            </a:pPr>
-            <a:r>
-              <a:rPr/>
-              <a:t>No significant outliers</a:t>
-            </a:r>
-          </a:p>
-        </p:txBody>
-      </p:sp>
-    </p:spTree>
-  </p:cSld>
-</p:sld>
-</file>
-
-<file path=ppt/slides/slide12.xml><?xml version="1.0" encoding="utf-8"?>
-<p:sld xmlns:a="http://schemas.openxmlformats.org/drawingml/2006/main" xmlns:r="http://schemas.openxmlformats.org/officeDocument/2006/relationships" xmlns:p="http://schemas.openxmlformats.org/presentationml/2006/main">
-  <p:cSld>
-    <p:spTree>
-      <p:nvGrpSpPr>
-        <p:cNvPr id="1" name=""/>
-        <p:cNvGrpSpPr/>
-        <p:nvPr/>
-      </p:nvGrpSpPr>
-      <p:grpSpPr>
-        <a:xfrm>
-          <a:off x="0" y="0"/>
-          <a:ext cx="0" cy="0"/>
-          <a:chOff x="0" y="0"/>
-          <a:chExt cx="0" cy="0"/>
-        </a:xfrm>
-      </p:grpSpPr>
-      <p:sp>
-        <p:nvSpPr>
-          <p:cNvPr id="2" name="Title 1"/>
-          <p:cNvSpPr>
-            <a:spLocks noGrp="1"/>
-          </p:cNvSpPr>
-          <p:nvPr>
-            <p:ph type="title"/>
-          </p:nvPr>
-        </p:nvSpPr>
-        <p:spPr>
-          <a:xfrm>
-            <a:off x="0" y="0"/>
             <a:ext cx="9144000" cy="871538"/>
           </a:xfrm>
         </p:spPr>
@@ -3721,10 +3601,17 @@
                 </a:solidFill>
                 <a:latin typeface="Courier"/>
               </a:rPr>
-              <a:t># Filter for just windward side needles</a:t>
-            </a:r>
-            <a:br/>
-            <a:br/>
+              <a:t># YOUR </a:t>
+            </a:r>
+            <a:r>
+              <a:rPr>
+                <a:solidFill>
+                  <a:srgbClr val="AD0000"/>
+                </a:solidFill>
+                <a:latin typeface="Courier"/>
+              </a:rPr>
+              <a:t>TASK</a:t>
+            </a:r>
             <a:r>
               <a:rPr>
                 <a:solidFill>
@@ -3732,25 +3619,7 @@
                 </a:solidFill>
                 <a:latin typeface="Courier"/>
               </a:rPr>
-              <a:t># YOUR </a:t>
-            </a:r>
-            <a:r>
-              <a:rPr>
-                <a:solidFill>
-                  <a:srgbClr val="AD0000"/>
-                </a:solidFill>
-                <a:latin typeface="Courier"/>
-              </a:rPr>
-              <a:t>TASK</a:t>
-            </a:r>
-            <a:r>
-              <a:rPr>
-                <a:solidFill>
-                  <a:srgbClr val="5E5E5E"/>
-                </a:solidFill>
-                <a:latin typeface="Courier"/>
-              </a:rPr>
-              <a:t>: Test normality of windward pine needle lengths</a:t>
+              <a:t>: Test normality of all pine needle lengths</a:t>
             </a:r>
             <a:br/>
             <a:r>
@@ -3929,6 +3798,55 @@
 </p:sld>
 </file>
 
+<file path=ppt/slides/slide12.xml><?xml version="1.0" encoding="utf-8"?>
+<p:sld xmlns:a="http://schemas.openxmlformats.org/drawingml/2006/main" xmlns:r="http://schemas.openxmlformats.org/officeDocument/2006/relationships" xmlns:p="http://schemas.openxmlformats.org/presentationml/2006/main">
+  <p:cSld>
+    <p:spTree>
+      <p:nvGrpSpPr>
+        <p:cNvPr id="1" name=""/>
+        <p:cNvGrpSpPr/>
+        <p:nvPr/>
+      </p:nvGrpSpPr>
+      <p:grpSpPr>
+        <a:xfrm>
+          <a:off x="0" y="0"/>
+          <a:ext cx="0" cy="0"/>
+          <a:chOff x="0" y="0"/>
+          <a:chExt cx="0" cy="0"/>
+        </a:xfrm>
+      </p:grpSpPr>
+      <p:sp>
+        <p:nvSpPr>
+          <p:cNvPr id="3" name="Content Placeholder 2"/>
+          <p:cNvSpPr>
+            <a:spLocks noGrp="1"/>
+          </p:cNvSpPr>
+          <p:nvPr>
+            <p:ph idx="1"/>
+          </p:nvPr>
+        </p:nvSpPr>
+        <p:spPr/>
+        <p:txBody>
+          <a:bodyPr/>
+          <a:lstStyle/>
+          <a:p>
+            <a:pPr lvl="0" indent="0">
+              <a:buNone/>
+            </a:pPr>
+            <a:r>
+              <a:rPr>
+                <a:latin typeface="Courier"/>
+              </a:rPr>
+              <a:t>[1]  8 11</a:t>
+            </a:r>
+          </a:p>
+        </p:txBody>
+      </p:sp>
+    </p:spTree>
+  </p:cSld>
+</p:sld>
+</file>
+
 <file path=ppt/slides/slide13.xml><?xml version="1.0" encoding="utf-8"?>
 <p:sld xmlns:a="http://schemas.openxmlformats.org/drawingml/2006/main" xmlns:r="http://schemas.openxmlformats.org/officeDocument/2006/relationships" xmlns:p="http://schemas.openxmlformats.org/presentationml/2006/main">
   <p:cSld>
@@ -3948,27 +3866,123 @@
       </p:grpSpPr>
       <p:sp>
         <p:nvSpPr>
-          <p:cNvPr id="3" name="Content Placeholder 2"/>
-          <p:cNvSpPr>
-            <a:spLocks noGrp="1"/>
-          </p:cNvSpPr>
-          <p:nvPr>
-            <p:ph idx="1"/>
-          </p:nvPr>
-        </p:nvSpPr>
-        <p:spPr/>
+          <p:cNvPr id="2" name="Title 1"/>
+          <p:cNvSpPr>
+            <a:spLocks noGrp="1"/>
+          </p:cNvSpPr>
+          <p:nvPr>
+            <p:ph type="title"/>
+          </p:nvPr>
+        </p:nvSpPr>
+        <p:spPr>
+          <a:xfrm>
+            <a:off x="0" y="0"/>
+            <a:ext cx="9144000" cy="582780"/>
+          </a:xfrm>
+        </p:spPr>
         <p:txBody>
           <a:bodyPr/>
           <a:lstStyle/>
           <a:p>
+            <a:pPr lvl="0" indent="0" marL="0">
+              <a:buNone/>
+            </a:pPr>
+            <a:r>
+              <a:rPr/>
+              <a:t>Statistical Test of Normality</a:t>
+            </a:r>
+          </a:p>
+        </p:txBody>
+      </p:sp>
+      <p:sp>
+        <p:nvSpPr>
+          <p:cNvPr id="3" name="Content Placeholder 2"/>
+          <p:cNvSpPr>
+            <a:spLocks noGrp="1"/>
+          </p:cNvSpPr>
+          <p:nvPr>
+            <p:ph idx="1"/>
+          </p:nvPr>
+        </p:nvSpPr>
+        <p:spPr/>
+        <p:txBody>
+          <a:bodyPr/>
+          <a:lstStyle/>
+          <a:p>
+            <a:pPr lvl="0" indent="0" marL="0">
+              <a:spcBef>
+                <a:spcPts val="3000"/>
+              </a:spcBef>
+              <a:buNone/>
+            </a:pPr>
+            <a:r>
+              <a:rPr b="1"/>
+              <a:t>Shapiro-Wilk test</a:t>
+            </a:r>
+          </a:p>
+          <a:p>
             <a:pPr lvl="0" indent="0">
               <a:buNone/>
             </a:pPr>
             <a:r>
               <a:rPr>
-                <a:latin typeface="Courier"/>
-              </a:rPr>
-              <a:t>[1]  8 11</a:t>
+                <a:solidFill>
+                  <a:srgbClr val="5E5E5E"/>
+                </a:solidFill>
+                <a:latin typeface="Courier"/>
+              </a:rPr>
+              <a:t># Shapiro-Wilk test</a:t>
+            </a:r>
+            <a:br/>
+            <a:r>
+              <a:rPr>
+                <a:solidFill>
+                  <a:srgbClr val="4758AB"/>
+                </a:solidFill>
+                <a:latin typeface="Courier"/>
+              </a:rPr>
+              <a:t>shapiro.test</a:t>
+            </a:r>
+            <a:r>
+              <a:rPr>
+                <a:solidFill>
+                  <a:srgbClr val="003B4F"/>
+                </a:solidFill>
+                <a:latin typeface="Courier"/>
+              </a:rPr>
+              <a:t>(ps_df</a:t>
+            </a:r>
+            <a:r>
+              <a:rPr>
+                <a:solidFill>
+                  <a:srgbClr val="5E5E5E"/>
+                </a:solidFill>
+                <a:latin typeface="Courier"/>
+              </a:rPr>
+              <a:t>$</a:t>
+            </a:r>
+            <a:r>
+              <a:rPr>
+                <a:solidFill>
+                  <a:srgbClr val="003B4F"/>
+                </a:solidFill>
+                <a:latin typeface="Courier"/>
+              </a:rPr>
+              <a:t>length_mm)</a:t>
+            </a:r>
+          </a:p>
+          <a:p>
+            <a:pPr lvl="0" indent="0">
+              <a:buNone/>
+            </a:pPr>
+            <a:r>
+              <a:rPr>
+                <a:latin typeface="Courier"/>
+              </a:rPr>
+              <a:t>
+    Shapiro-Wilk normality test
+data:  ps_df$length_mm
+W = 0.92754, p-value = 0.2228</a:t>
             </a:r>
           </a:p>
         </p:txBody>
@@ -4008,151 +4022,6 @@
         <p:spPr>
           <a:xfrm>
             <a:off x="0" y="0"/>
-            <a:ext cx="9144000" cy="582780"/>
-          </a:xfrm>
-        </p:spPr>
-        <p:txBody>
-          <a:bodyPr/>
-          <a:lstStyle/>
-          <a:p>
-            <a:pPr lvl="0" indent="0" marL="0">
-              <a:buNone/>
-            </a:pPr>
-            <a:r>
-              <a:rPr/>
-              <a:t>Statistical Test of Normality</a:t>
-            </a:r>
-          </a:p>
-        </p:txBody>
-      </p:sp>
-      <p:sp>
-        <p:nvSpPr>
-          <p:cNvPr id="3" name="Content Placeholder 2"/>
-          <p:cNvSpPr>
-            <a:spLocks noGrp="1"/>
-          </p:cNvSpPr>
-          <p:nvPr>
-            <p:ph idx="1"/>
-          </p:nvPr>
-        </p:nvSpPr>
-        <p:spPr/>
-        <p:txBody>
-          <a:bodyPr/>
-          <a:lstStyle/>
-          <a:p>
-            <a:pPr lvl="0" indent="0" marL="0">
-              <a:spcBef>
-                <a:spcPts val="3000"/>
-              </a:spcBef>
-              <a:buNone/>
-            </a:pPr>
-            <a:r>
-              <a:rPr b="1"/>
-              <a:t>Shapiro-Wilk test</a:t>
-            </a:r>
-          </a:p>
-          <a:p>
-            <a:pPr lvl="0" indent="0">
-              <a:buNone/>
-            </a:pPr>
-            <a:r>
-              <a:rPr>
-                <a:solidFill>
-                  <a:srgbClr val="5E5E5E"/>
-                </a:solidFill>
-                <a:latin typeface="Courier"/>
-              </a:rPr>
-              <a:t># Shapiro-Wilk test</a:t>
-            </a:r>
-            <a:br/>
-            <a:r>
-              <a:rPr>
-                <a:solidFill>
-                  <a:srgbClr val="4758AB"/>
-                </a:solidFill>
-                <a:latin typeface="Courier"/>
-              </a:rPr>
-              <a:t>shapiro.test</a:t>
-            </a:r>
-            <a:r>
-              <a:rPr>
-                <a:solidFill>
-                  <a:srgbClr val="003B4F"/>
-                </a:solidFill>
-                <a:latin typeface="Courier"/>
-              </a:rPr>
-              <a:t>(ps_df</a:t>
-            </a:r>
-            <a:r>
-              <a:rPr>
-                <a:solidFill>
-                  <a:srgbClr val="5E5E5E"/>
-                </a:solidFill>
-                <a:latin typeface="Courier"/>
-              </a:rPr>
-              <a:t>$</a:t>
-            </a:r>
-            <a:r>
-              <a:rPr>
-                <a:solidFill>
-                  <a:srgbClr val="003B4F"/>
-                </a:solidFill>
-                <a:latin typeface="Courier"/>
-              </a:rPr>
-              <a:t>length_mm)</a:t>
-            </a:r>
-          </a:p>
-          <a:p>
-            <a:pPr lvl="0" indent="0">
-              <a:buNone/>
-            </a:pPr>
-            <a:r>
-              <a:rPr>
-                <a:latin typeface="Courier"/>
-              </a:rPr>
-              <a:t>
-    Shapiro-Wilk normality test
-data:  ps_df$length_mm
-W = 0.92754, p-value = 0.2228</a:t>
-            </a:r>
-          </a:p>
-        </p:txBody>
-      </p:sp>
-    </p:spTree>
-  </p:cSld>
-</p:sld>
-</file>
-
-<file path=ppt/slides/slide15.xml><?xml version="1.0" encoding="utf-8"?>
-<p:sld xmlns:a="http://schemas.openxmlformats.org/drawingml/2006/main" xmlns:r="http://schemas.openxmlformats.org/officeDocument/2006/relationships" xmlns:p="http://schemas.openxmlformats.org/presentationml/2006/main">
-  <p:cSld>
-    <p:spTree>
-      <p:nvGrpSpPr>
-        <p:cNvPr id="1" name=""/>
-        <p:cNvGrpSpPr/>
-        <p:nvPr/>
-      </p:nvGrpSpPr>
-      <p:grpSpPr>
-        <a:xfrm>
-          <a:off x="0" y="0"/>
-          <a:ext cx="0" cy="0"/>
-          <a:chOff x="0" y="0"/>
-          <a:chExt cx="0" cy="0"/>
-        </a:xfrm>
-      </p:grpSpPr>
-      <p:sp>
-        <p:nvSpPr>
-          <p:cNvPr id="2" name="Title 1"/>
-          <p:cNvSpPr>
-            <a:spLocks noGrp="1"/>
-          </p:cNvSpPr>
-          <p:nvPr>
-            <p:ph type="title"/>
-          </p:nvPr>
-        </p:nvSpPr>
-        <p:spPr>
-          <a:xfrm>
-            <a:off x="0" y="0"/>
             <a:ext cx="9144000" cy="871538"/>
           </a:xfrm>
         </p:spPr>
@@ -4211,21 +4080,224 @@
             <a:r>
               <a:rPr>
                 <a:solidFill>
-                  <a:srgbClr val="003B4F"/>
-                </a:solidFill>
-                <a:latin typeface="Courier"/>
-              </a:rPr>
-              <a:t>ps_df </a:t>
-            </a:r>
-            <a:r>
-              <a:rPr>
-                <a:solidFill>
                   <a:srgbClr val="5E5E5E"/>
                 </a:solidFill>
                 <a:latin typeface="Courier"/>
               </a:rPr>
+              <a:t># Create a boxplot comparing the two lakes</a:t>
+            </a:r>
+            <a:br/>
+            <a:r>
+              <a:rPr>
+                <a:solidFill>
+                  <a:srgbClr val="003B4F"/>
+                </a:solidFill>
+                <a:latin typeface="Courier"/>
+              </a:rPr>
+              <a:t>shady_sunny_plot &lt;- ps_df </a:t>
+            </a:r>
+            <a:r>
+              <a:rPr>
+                <a:solidFill>
+                  <a:srgbClr val="5E5E5E"/>
+                </a:solidFill>
+                <a:latin typeface="Courier"/>
+              </a:rPr>
               <a:t>%&gt;%</a:t>
             </a:r>
+            <a:br/>
+            <a:r>
+              <a:rPr>
+                <a:solidFill>
+                  <a:srgbClr val="003B4F"/>
+                </a:solidFill>
+                <a:latin typeface="Courier"/>
+              </a:rPr>
+              <a:t>  </a:t>
+            </a:r>
+            <a:r>
+              <a:rPr>
+                <a:solidFill>
+                  <a:srgbClr val="4758AB"/>
+                </a:solidFill>
+                <a:latin typeface="Courier"/>
+              </a:rPr>
+              <a:t>ggplot</a:t>
+            </a:r>
+            <a:r>
+              <a:rPr>
+                <a:solidFill>
+                  <a:srgbClr val="003B4F"/>
+                </a:solidFill>
+                <a:latin typeface="Courier"/>
+              </a:rPr>
+              <a:t>(</a:t>
+            </a:r>
+            <a:r>
+              <a:rPr>
+                <a:solidFill>
+                  <a:srgbClr val="4758AB"/>
+                </a:solidFill>
+                <a:latin typeface="Courier"/>
+              </a:rPr>
+              <a:t>aes</a:t>
+            </a:r>
+            <a:r>
+              <a:rPr>
+                <a:solidFill>
+                  <a:srgbClr val="003B4F"/>
+                </a:solidFill>
+                <a:latin typeface="Courier"/>
+              </a:rPr>
+              <a:t>(</a:t>
+            </a:r>
+            <a:r>
+              <a:rPr>
+                <a:solidFill>
+                  <a:srgbClr val="657422"/>
+                </a:solidFill>
+                <a:latin typeface="Courier"/>
+              </a:rPr>
+              <a:t>x =</a:t>
+            </a:r>
+            <a:r>
+              <a:rPr>
+                <a:solidFill>
+                  <a:srgbClr val="003B4F"/>
+                </a:solidFill>
+                <a:latin typeface="Courier"/>
+              </a:rPr>
+              <a:t> side, </a:t>
+            </a:r>
+            <a:r>
+              <a:rPr>
+                <a:solidFill>
+                  <a:srgbClr val="657422"/>
+                </a:solidFill>
+                <a:latin typeface="Courier"/>
+              </a:rPr>
+              <a:t>y =</a:t>
+            </a:r>
+            <a:r>
+              <a:rPr>
+                <a:solidFill>
+                  <a:srgbClr val="003B4F"/>
+                </a:solidFill>
+                <a:latin typeface="Courier"/>
+              </a:rPr>
+              <a:t> length_mm, </a:t>
+            </a:r>
+            <a:r>
+              <a:rPr>
+                <a:solidFill>
+                  <a:srgbClr val="657422"/>
+                </a:solidFill>
+                <a:latin typeface="Courier"/>
+              </a:rPr>
+              <a:t>fill =</a:t>
+            </a:r>
+            <a:r>
+              <a:rPr>
+                <a:solidFill>
+                  <a:srgbClr val="003B4F"/>
+                </a:solidFill>
+                <a:latin typeface="Courier"/>
+              </a:rPr>
+              <a:t> side)) </a:t>
+            </a:r>
+            <a:r>
+              <a:rPr>
+                <a:solidFill>
+                  <a:srgbClr val="5E5E5E"/>
+                </a:solidFill>
+                <a:latin typeface="Courier"/>
+              </a:rPr>
+              <a:t>+</a:t>
+            </a:r>
+            <a:br/>
+            <a:r>
+              <a:rPr>
+                <a:solidFill>
+                  <a:srgbClr val="003B4F"/>
+                </a:solidFill>
+                <a:latin typeface="Courier"/>
+              </a:rPr>
+              <a:t>  </a:t>
+            </a:r>
+            <a:r>
+              <a:rPr>
+                <a:solidFill>
+                  <a:srgbClr val="4758AB"/>
+                </a:solidFill>
+                <a:latin typeface="Courier"/>
+              </a:rPr>
+              <a:t>geom_boxplot</a:t>
+            </a:r>
+            <a:r>
+              <a:rPr>
+                <a:solidFill>
+                  <a:srgbClr val="003B4F"/>
+                </a:solidFill>
+                <a:latin typeface="Courier"/>
+              </a:rPr>
+              <a:t>() </a:t>
+            </a:r>
+            <a:r>
+              <a:rPr>
+                <a:solidFill>
+                  <a:srgbClr val="5E5E5E"/>
+                </a:solidFill>
+                <a:latin typeface="Courier"/>
+              </a:rPr>
+              <a:t>+</a:t>
+            </a:r>
+            <a:br/>
+            <a:r>
+              <a:rPr>
+                <a:solidFill>
+                  <a:srgbClr val="003B4F"/>
+                </a:solidFill>
+                <a:latin typeface="Courier"/>
+              </a:rPr>
+              <a:t>  </a:t>
+            </a:r>
+            <a:r>
+              <a:rPr>
+                <a:solidFill>
+                  <a:srgbClr val="4758AB"/>
+                </a:solidFill>
+                <a:latin typeface="Courier"/>
+              </a:rPr>
+              <a:t>labs</a:t>
+            </a:r>
+            <a:r>
+              <a:rPr>
+                <a:solidFill>
+                  <a:srgbClr val="003B4F"/>
+                </a:solidFill>
+                <a:latin typeface="Courier"/>
+              </a:rPr>
+              <a:t>(</a:t>
+            </a:r>
+            <a:br/>
+            <a:r>
+              <a:rPr>
+                <a:solidFill>
+                  <a:srgbClr val="003B4F"/>
+                </a:solidFill>
+                <a:latin typeface="Courier"/>
+              </a:rPr>
+              <a:t>       </a:t>
+            </a:r>
+            <a:r>
+              <a:rPr>
+                <a:solidFill>
+                  <a:srgbClr val="657422"/>
+                </a:solidFill>
+                <a:latin typeface="Courier"/>
+              </a:rPr>
+              <a:t>x =</a:t>
+            </a:r>
             <a:r>
               <a:rPr>
                 <a:solidFill>
@@ -4238,65 +4310,122 @@
             <a:r>
               <a:rPr>
                 <a:solidFill>
-                  <a:srgbClr val="4758AB"/>
-                </a:solidFill>
-                <a:latin typeface="Courier"/>
-              </a:rPr>
-              <a:t>ggplot</a:t>
-            </a:r>
-            <a:r>
-              <a:rPr>
-                <a:solidFill>
-                  <a:srgbClr val="003B4F"/>
-                </a:solidFill>
-                <a:latin typeface="Courier"/>
-              </a:rPr>
-              <a:t>(</a:t>
-            </a:r>
-            <a:r>
-              <a:rPr>
-                <a:solidFill>
-                  <a:srgbClr val="4758AB"/>
-                </a:solidFill>
-                <a:latin typeface="Courier"/>
-              </a:rPr>
-              <a:t>aes</a:t>
-            </a:r>
-            <a:r>
-              <a:rPr>
-                <a:solidFill>
-                  <a:srgbClr val="003B4F"/>
-                </a:solidFill>
-                <a:latin typeface="Courier"/>
-              </a:rPr>
-              <a:t>(side, length_mm))</a:t>
-            </a:r>
-            <a:r>
-              <a:rPr>
-                <a:solidFill>
-                  <a:srgbClr val="5E5E5E"/>
-                </a:solidFill>
-                <a:latin typeface="Courier"/>
-              </a:rPr>
-              <a:t>+</a:t>
-            </a:r>
-            <a:r>
-              <a:rPr>
-                <a:solidFill>
-                  <a:srgbClr val="4758AB"/>
-                </a:solidFill>
-                <a:latin typeface="Courier"/>
-              </a:rPr>
-              <a:t>geom_boxplot</a:t>
-            </a:r>
-            <a:r>
-              <a:rPr>
-                <a:solidFill>
-                  <a:srgbClr val="003B4F"/>
-                </a:solidFill>
-                <a:latin typeface="Courier"/>
-              </a:rPr>
-              <a:t>()</a:t>
+                  <a:srgbClr val="20794D"/>
+                </a:solidFill>
+                <a:latin typeface="Courier"/>
+              </a:rPr>
+              <a:t>"side"</a:t>
+            </a:r>
+            <a:r>
+              <a:rPr>
+                <a:solidFill>
+                  <a:srgbClr val="003B4F"/>
+                </a:solidFill>
+                <a:latin typeface="Courier"/>
+              </a:rPr>
+              <a:t>,</a:t>
+            </a:r>
+            <a:br/>
+            <a:r>
+              <a:rPr>
+                <a:solidFill>
+                  <a:srgbClr val="003B4F"/>
+                </a:solidFill>
+                <a:latin typeface="Courier"/>
+              </a:rPr>
+              <a:t>       </a:t>
+            </a:r>
+            <a:r>
+              <a:rPr>
+                <a:solidFill>
+                  <a:srgbClr val="657422"/>
+                </a:solidFill>
+                <a:latin typeface="Courier"/>
+              </a:rPr>
+              <a:t>y =</a:t>
+            </a:r>
+            <a:r>
+              <a:rPr>
+                <a:solidFill>
+                  <a:srgbClr val="003B4F"/>
+                </a:solidFill>
+                <a:latin typeface="Courier"/>
+              </a:rPr>
+              <a:t> </a:t>
+            </a:r>
+            <a:r>
+              <a:rPr>
+                <a:solidFill>
+                  <a:srgbClr val="20794D"/>
+                </a:solidFill>
+                <a:latin typeface="Courier"/>
+              </a:rPr>
+              <a:t>"Length (mm)"</a:t>
+            </a:r>
+            <a:r>
+              <a:rPr>
+                <a:solidFill>
+                  <a:srgbClr val="003B4F"/>
+                </a:solidFill>
+                <a:latin typeface="Courier"/>
+              </a:rPr>
+              <a:t>,</a:t>
+            </a:r>
+            <a:br/>
+            <a:r>
+              <a:rPr>
+                <a:solidFill>
+                  <a:srgbClr val="003B4F"/>
+                </a:solidFill>
+                <a:latin typeface="Courier"/>
+              </a:rPr>
+              <a:t>       </a:t>
+            </a:r>
+            <a:r>
+              <a:rPr>
+                <a:solidFill>
+                  <a:srgbClr val="657422"/>
+                </a:solidFill>
+                <a:latin typeface="Courier"/>
+              </a:rPr>
+              <a:t>fill =</a:t>
+            </a:r>
+            <a:r>
+              <a:rPr>
+                <a:solidFill>
+                  <a:srgbClr val="003B4F"/>
+                </a:solidFill>
+                <a:latin typeface="Courier"/>
+              </a:rPr>
+              <a:t> </a:t>
+            </a:r>
+            <a:r>
+              <a:rPr>
+                <a:solidFill>
+                  <a:srgbClr val="20794D"/>
+                </a:solidFill>
+                <a:latin typeface="Courier"/>
+              </a:rPr>
+              <a:t>"side"</a:t>
+            </a:r>
+            <a:r>
+              <a:rPr>
+                <a:solidFill>
+                  <a:srgbClr val="003B4F"/>
+                </a:solidFill>
+                <a:latin typeface="Courier"/>
+              </a:rPr>
+              <a:t>) </a:t>
+            </a:r>
+            <a:br/>
+            <a:r>
+              <a:rPr>
+                <a:solidFill>
+                  <a:srgbClr val="003B4F"/>
+                </a:solidFill>
+                <a:latin typeface="Courier"/>
+              </a:rPr>
+              <a:t>shady_sunny_plot</a:t>
             </a:r>
           </a:p>
         </p:txBody>
@@ -4336,6 +4465,488 @@
 </p:sld>
 </file>
 
+<file path=ppt/slides/slide15.xml><?xml version="1.0" encoding="utf-8"?>
+<p:sld xmlns:a="http://schemas.openxmlformats.org/drawingml/2006/main" xmlns:r="http://schemas.openxmlformats.org/officeDocument/2006/relationships" xmlns:p="http://schemas.openxmlformats.org/presentationml/2006/main">
+  <p:cSld>
+    <p:spTree>
+      <p:nvGrpSpPr>
+        <p:cNvPr id="1" name=""/>
+        <p:cNvGrpSpPr/>
+        <p:nvPr/>
+      </p:nvGrpSpPr>
+      <p:grpSpPr>
+        <a:xfrm>
+          <a:off x="0" y="0"/>
+          <a:ext cx="0" cy="0"/>
+          <a:chOff x="0" y="0"/>
+          <a:chExt cx="0" cy="0"/>
+        </a:xfrm>
+      </p:grpSpPr>
+      <p:sp>
+        <p:nvSpPr>
+          <p:cNvPr id="2" name="Title 1"/>
+          <p:cNvSpPr>
+            <a:spLocks noGrp="1"/>
+          </p:cNvSpPr>
+          <p:nvPr>
+            <p:ph type="title"/>
+          </p:nvPr>
+        </p:nvSpPr>
+        <p:spPr>
+          <a:xfrm>
+            <a:off x="0" y="0"/>
+            <a:ext cx="9144000" cy="582780"/>
+          </a:xfrm>
+        </p:spPr>
+        <p:txBody>
+          <a:bodyPr/>
+          <a:lstStyle/>
+          <a:p>
+            <a:pPr lvl="0" indent="0" marL="0">
+              <a:buNone/>
+            </a:pPr>
+            <a:r>
+              <a:rPr/>
+              <a:t>Practice Exercise 1: One-Sample t-Test</a:t>
+            </a:r>
+          </a:p>
+        </p:txBody>
+      </p:sp>
+      <p:sp>
+        <p:nvSpPr>
+          <p:cNvPr id="3" name="Content Placeholder 2"/>
+          <p:cNvSpPr>
+            <a:spLocks noGrp="1"/>
+          </p:cNvSpPr>
+          <p:nvPr>
+            <p:ph idx="1"/>
+          </p:nvPr>
+        </p:nvSpPr>
+        <p:spPr/>
+        <p:txBody>
+          <a:bodyPr/>
+          <a:lstStyle/>
+          <a:p>
+            <a:pPr lvl="0" indent="0" marL="1270000">
+              <a:buNone/>
+            </a:pPr>
+            <a:r>
+              <a:rPr sz="2000" b="1"/>
+              <a:t>Practice Exercise 1: One-Sample t-Test</a:t>
+            </a:r>
+          </a:p>
+          <a:p>
+            <a:pPr lvl="0" indent="0" marL="1270000">
+              <a:buNone/>
+            </a:pPr>
+            <a:r>
+              <a:rPr sz="2000"/>
+              <a:t>Let’s perform a one-sample t-test to determine if the mean needle length on the shady side differs from 15 mm:</a:t>
+            </a:r>
+          </a:p>
+          <a:p>
+            <a:pPr lvl="0" indent="0">
+              <a:buNone/>
+            </a:pPr>
+            <a:r>
+              <a:rPr>
+                <a:solidFill>
+                  <a:srgbClr val="5E5E5E"/>
+                </a:solidFill>
+                <a:latin typeface="Courier"/>
+              </a:rPr>
+              <a:t># what is the mean</a:t>
+            </a:r>
+            <a:br/>
+            <a:r>
+              <a:rPr>
+                <a:solidFill>
+                  <a:srgbClr val="003B4F"/>
+                </a:solidFill>
+                <a:latin typeface="Courier"/>
+              </a:rPr>
+              <a:t>ps_shade_mean &lt;- </a:t>
+            </a:r>
+            <a:r>
+              <a:rPr>
+                <a:solidFill>
+                  <a:srgbClr val="4758AB"/>
+                </a:solidFill>
+                <a:latin typeface="Courier"/>
+              </a:rPr>
+              <a:t>mean</a:t>
+            </a:r>
+            <a:r>
+              <a:rPr>
+                <a:solidFill>
+                  <a:srgbClr val="003B4F"/>
+                </a:solidFill>
+                <a:latin typeface="Courier"/>
+              </a:rPr>
+              <a:t>(ps_shady_df</a:t>
+            </a:r>
+            <a:r>
+              <a:rPr>
+                <a:solidFill>
+                  <a:srgbClr val="5E5E5E"/>
+                </a:solidFill>
+                <a:latin typeface="Courier"/>
+              </a:rPr>
+              <a:t>$</a:t>
+            </a:r>
+            <a:r>
+              <a:rPr>
+                <a:solidFill>
+                  <a:srgbClr val="003B4F"/>
+                </a:solidFill>
+                <a:latin typeface="Courier"/>
+              </a:rPr>
+              <a:t>length_mm, </a:t>
+            </a:r>
+            <a:r>
+              <a:rPr>
+                <a:solidFill>
+                  <a:srgbClr val="657422"/>
+                </a:solidFill>
+                <a:latin typeface="Courier"/>
+              </a:rPr>
+              <a:t>na.rm =</a:t>
+            </a:r>
+            <a:r>
+              <a:rPr>
+                <a:solidFill>
+                  <a:srgbClr val="003B4F"/>
+                </a:solidFill>
+                <a:latin typeface="Courier"/>
+              </a:rPr>
+              <a:t> </a:t>
+            </a:r>
+            <a:r>
+              <a:rPr>
+                <a:solidFill>
+                  <a:srgbClr val="8F5902"/>
+                </a:solidFill>
+                <a:latin typeface="Courier"/>
+              </a:rPr>
+              <a:t>TRUE</a:t>
+            </a:r>
+            <a:r>
+              <a:rPr>
+                <a:solidFill>
+                  <a:srgbClr val="003B4F"/>
+                </a:solidFill>
+                <a:latin typeface="Courier"/>
+              </a:rPr>
+              <a:t>)</a:t>
+            </a:r>
+            <a:br/>
+            <a:r>
+              <a:rPr>
+                <a:solidFill>
+                  <a:srgbClr val="4758AB"/>
+                </a:solidFill>
+                <a:latin typeface="Courier"/>
+              </a:rPr>
+              <a:t>cat</a:t>
+            </a:r>
+            <a:r>
+              <a:rPr>
+                <a:solidFill>
+                  <a:srgbClr val="003B4F"/>
+                </a:solidFill>
+                <a:latin typeface="Courier"/>
+              </a:rPr>
+              <a:t>(</a:t>
+            </a:r>
+            <a:r>
+              <a:rPr>
+                <a:solidFill>
+                  <a:srgbClr val="20794D"/>
+                </a:solidFill>
+                <a:latin typeface="Courier"/>
+              </a:rPr>
+              <a:t>"Mean:"</a:t>
+            </a:r>
+            <a:r>
+              <a:rPr>
+                <a:solidFill>
+                  <a:srgbClr val="003B4F"/>
+                </a:solidFill>
+                <a:latin typeface="Courier"/>
+              </a:rPr>
+              <a:t>, </a:t>
+            </a:r>
+            <a:r>
+              <a:rPr>
+                <a:solidFill>
+                  <a:srgbClr val="4758AB"/>
+                </a:solidFill>
+                <a:latin typeface="Courier"/>
+              </a:rPr>
+              <a:t>round</a:t>
+            </a:r>
+            <a:r>
+              <a:rPr>
+                <a:solidFill>
+                  <a:srgbClr val="003B4F"/>
+                </a:solidFill>
+                <a:latin typeface="Courier"/>
+              </a:rPr>
+              <a:t>(ps_shade_mean, </a:t>
+            </a:r>
+            <a:r>
+              <a:rPr>
+                <a:solidFill>
+                  <a:srgbClr val="AD0000"/>
+                </a:solidFill>
+                <a:latin typeface="Courier"/>
+              </a:rPr>
+              <a:t>1</a:t>
+            </a:r>
+            <a:r>
+              <a:rPr>
+                <a:solidFill>
+                  <a:srgbClr val="003B4F"/>
+                </a:solidFill>
+                <a:latin typeface="Courier"/>
+              </a:rPr>
+              <a:t>), </a:t>
+            </a:r>
+            <a:r>
+              <a:rPr>
+                <a:solidFill>
+                  <a:srgbClr val="20794D"/>
+                </a:solidFill>
+                <a:latin typeface="Courier"/>
+              </a:rPr>
+              <a:t>"mm</a:t>
+            </a:r>
+            <a:r>
+              <a:rPr>
+                <a:solidFill>
+                  <a:srgbClr val="5E5E5E"/>
+                </a:solidFill>
+                <a:latin typeface="Courier"/>
+              </a:rPr>
+              <a:t>\n</a:t>
+            </a:r>
+            <a:r>
+              <a:rPr>
+                <a:solidFill>
+                  <a:srgbClr val="20794D"/>
+                </a:solidFill>
+                <a:latin typeface="Courier"/>
+              </a:rPr>
+              <a:t>"</a:t>
+            </a:r>
+            <a:r>
+              <a:rPr>
+                <a:solidFill>
+                  <a:srgbClr val="003B4F"/>
+                </a:solidFill>
+                <a:latin typeface="Courier"/>
+              </a:rPr>
+              <a:t>)</a:t>
+            </a:r>
+          </a:p>
+          <a:p>
+            <a:pPr lvl="0" indent="0">
+              <a:buNone/>
+            </a:pPr>
+            <a:r>
+              <a:rPr sz="2000">
+                <a:latin typeface="Courier"/>
+              </a:rPr>
+              <a:t>Mean: 17.6 mm</a:t>
+            </a:r>
+          </a:p>
+          <a:p>
+            <a:pPr lvl="0" indent="0">
+              <a:buNone/>
+            </a:pPr>
+            <a:r>
+              <a:rPr>
+                <a:solidFill>
+                  <a:srgbClr val="5E5E5E"/>
+                </a:solidFill>
+                <a:latin typeface="Courier"/>
+              </a:rPr>
+              <a:t># Perform a one-sample t-test</a:t>
+            </a:r>
+            <a:br/>
+            <a:r>
+              <a:rPr>
+                <a:solidFill>
+                  <a:srgbClr val="003B4F"/>
+                </a:solidFill>
+                <a:latin typeface="Courier"/>
+              </a:rPr>
+              <a:t>t_test_result &lt;- </a:t>
+            </a:r>
+            <a:r>
+              <a:rPr>
+                <a:solidFill>
+                  <a:srgbClr val="4758AB"/>
+                </a:solidFill>
+                <a:latin typeface="Courier"/>
+              </a:rPr>
+              <a:t>t.test</a:t>
+            </a:r>
+            <a:r>
+              <a:rPr>
+                <a:solidFill>
+                  <a:srgbClr val="003B4F"/>
+                </a:solidFill>
+                <a:latin typeface="Courier"/>
+              </a:rPr>
+              <a:t>(ps_shady_df</a:t>
+            </a:r>
+            <a:r>
+              <a:rPr>
+                <a:solidFill>
+                  <a:srgbClr val="5E5E5E"/>
+                </a:solidFill>
+                <a:latin typeface="Courier"/>
+              </a:rPr>
+              <a:t>$</a:t>
+            </a:r>
+            <a:r>
+              <a:rPr>
+                <a:solidFill>
+                  <a:srgbClr val="003B4F"/>
+                </a:solidFill>
+                <a:latin typeface="Courier"/>
+              </a:rPr>
+              <a:t>length_mm, </a:t>
+            </a:r>
+            <a:r>
+              <a:rPr>
+                <a:solidFill>
+                  <a:srgbClr val="657422"/>
+                </a:solidFill>
+                <a:latin typeface="Courier"/>
+              </a:rPr>
+              <a:t>mu =</a:t>
+            </a:r>
+            <a:r>
+              <a:rPr>
+                <a:solidFill>
+                  <a:srgbClr val="003B4F"/>
+                </a:solidFill>
+                <a:latin typeface="Courier"/>
+              </a:rPr>
+              <a:t> </a:t>
+            </a:r>
+            <a:r>
+              <a:rPr>
+                <a:solidFill>
+                  <a:srgbClr val="AD0000"/>
+                </a:solidFill>
+                <a:latin typeface="Courier"/>
+              </a:rPr>
+              <a:t>15</a:t>
+            </a:r>
+            <a:r>
+              <a:rPr>
+                <a:solidFill>
+                  <a:srgbClr val="003B4F"/>
+                </a:solidFill>
+                <a:latin typeface="Courier"/>
+              </a:rPr>
+              <a:t>)</a:t>
+            </a:r>
+            <a:br/>
+            <a:r>
+              <a:rPr>
+                <a:solidFill>
+                  <a:srgbClr val="003B4F"/>
+                </a:solidFill>
+                <a:latin typeface="Courier"/>
+              </a:rPr>
+              <a:t>t_test_result</a:t>
+            </a:r>
+          </a:p>
+          <a:p>
+            <a:pPr lvl="0" indent="0">
+              <a:buNone/>
+            </a:pPr>
+            <a:r>
+              <a:rPr sz="2000">
+                <a:latin typeface="Courier"/>
+              </a:rPr>
+              <a:t>
+    One Sample t-test
+data:  ps_shady_df$length_mm
+t = 2.9414, df = 7, p-value = 0.02167
+alternative hypothesis: true mean is not equal to 15
+95 percent confidence interval:
+ 15.51092 19.70030
+sample estimates:
+mean of x 
+ 17.60561 </a:t>
+            </a:r>
+          </a:p>
+          <a:p>
+            <a:pPr lvl="0" indent="0" marL="1270000">
+              <a:buNone/>
+            </a:pPr>
+            <a:r>
+              <a:rPr sz="2000"/>
+              <a:t>Interpret this test result by answering these questions:</a:t>
+            </a:r>
+          </a:p>
+          <a:p>
+            <a:pPr lvl="0" indent="-342900" marL="342900">
+              <a:buAutoNum type="arabicPeriod"/>
+            </a:pPr>
+            <a:r>
+              <a:rPr sz="2000"/>
+              <a:t>What was the null hypothesis?</a:t>
+            </a:r>
+          </a:p>
+          <a:p>
+            <a:pPr lvl="0" indent="-342900" marL="342900">
+              <a:buAutoNum type="arabicPeriod"/>
+            </a:pPr>
+            <a:r>
+              <a:rPr sz="2000"/>
+              <a:t>What was the alternative hypothesis?</a:t>
+            </a:r>
+          </a:p>
+          <a:p>
+            <a:pPr lvl="0" indent="-342900" marL="342900">
+              <a:buAutoNum type="arabicPeriod"/>
+            </a:pPr>
+            <a:r>
+              <a:rPr sz="2000"/>
+              <a:t>What does the p-value tell us?</a:t>
+            </a:r>
+          </a:p>
+          <a:p>
+            <a:pPr lvl="0" indent="-342900" marL="342900">
+              <a:buAutoNum type="arabicPeriod"/>
+            </a:pPr>
+            <a:r>
+              <a:rPr sz="2000"/>
+              <a:t>Should we reject or fail to reject the null hypothesis at α = 0.05?</a:t>
+            </a:r>
+          </a:p>
+          <a:p>
+            <a:pPr lvl="0" indent="-342900" marL="342900">
+              <a:buAutoNum type="arabicPeriod"/>
+            </a:pPr>
+            <a:r>
+              <a:rPr sz="2000"/>
+              <a:t>What is the practical interpretation of this result for botanists?</a:t>
+            </a:r>
+          </a:p>
+        </p:txBody>
+      </p:sp>
+    </p:spTree>
+  </p:cSld>
+</p:sld>
+</file>
+
 <file path=ppt/slides/slide16.xml><?xml version="1.0" encoding="utf-8"?>
 <p:sld xmlns:a="http://schemas.openxmlformats.org/drawingml/2006/main" xmlns:r="http://schemas.openxmlformats.org/officeDocument/2006/relationships" xmlns:p="http://schemas.openxmlformats.org/presentationml/2006/main">
   <p:cSld>
@@ -4366,8 +4977,11 @@
         <p:spPr>
           <a:xfrm>
             <a:off x="0" y="0"/>
-            <a:ext cx="9144000" cy="582780"/>
+            <a:ext cx="9144000" cy="602780"/>
           </a:xfrm>
+          <a:solidFill>
+            <a:srgbClr val="70121D"/>
+          </a:solidFill>
         </p:spPr>
         <p:txBody>
           <a:bodyPr/>
@@ -4377,8 +4991,12 @@
               <a:buNone/>
             </a:pPr>
             <a:r>
-              <a:rPr/>
-              <a:t>Practice Exercise 1: One-Sample t-Test</a:t>
+              <a:rPr b="1"/>
+              <a:t>Lecture 5:</a:t>
+            </a:r>
+            <a:r>
+              <a:rPr/>
+              <a:t> Hypothesis Testing Framework</a:t>
             </a:r>
           </a:p>
         </p:txBody>
@@ -4390,7 +5008,7 @@
             <a:spLocks noGrp="1"/>
           </p:cNvSpPr>
           <p:nvPr>
-            <p:ph idx="1"/>
+            <p:ph idx="1" sz="half"/>
           </p:nvPr>
         </p:nvSpPr>
         <p:spPr/>
@@ -4398,372 +5016,21 @@
           <a:bodyPr/>
           <a:lstStyle/>
           <a:p>
-            <a:pPr lvl="0" indent="0" marL="1270000">
-              <a:buNone/>
-            </a:pPr>
-            <a:r>
-              <a:rPr sz="2000" b="1"/>
-              <a:t>Practice Exercise 1: One-Sample t-Test</a:t>
-            </a:r>
-          </a:p>
-          <a:p>
-            <a:pPr lvl="0" indent="0" marL="1270000">
-              <a:buNone/>
-            </a:pPr>
-            <a:r>
-              <a:rPr sz="2000"/>
-              <a:t>Let’s perform a one-sample t-test to determine if the mean fish length in I3 Lake differs from 15 mm:</a:t>
-            </a:r>
-          </a:p>
-          <a:p>
-            <a:pPr lvl="0" indent="0">
-              <a:buNone/>
-            </a:pPr>
-            <a:r>
-              <a:rPr>
-                <a:solidFill>
-                  <a:srgbClr val="5E5E5E"/>
-                </a:solidFill>
-                <a:latin typeface="Courier"/>
-              </a:rPr>
-              <a:t># what is the mean</a:t>
-            </a:r>
-            <a:br/>
-            <a:r>
-              <a:rPr>
-                <a:solidFill>
-                  <a:srgbClr val="003B4F"/>
-                </a:solidFill>
-                <a:latin typeface="Courier"/>
-              </a:rPr>
-              <a:t>ps_shade_mean &lt;- </a:t>
-            </a:r>
-            <a:r>
-              <a:rPr>
-                <a:solidFill>
-                  <a:srgbClr val="4758AB"/>
-                </a:solidFill>
-                <a:latin typeface="Courier"/>
-              </a:rPr>
-              <a:t>mean</a:t>
-            </a:r>
-            <a:r>
-              <a:rPr>
-                <a:solidFill>
-                  <a:srgbClr val="003B4F"/>
-                </a:solidFill>
-                <a:latin typeface="Courier"/>
-              </a:rPr>
-              <a:t>(ps_shady_df</a:t>
-            </a:r>
-            <a:r>
-              <a:rPr>
-                <a:solidFill>
-                  <a:srgbClr val="5E5E5E"/>
-                </a:solidFill>
-                <a:latin typeface="Courier"/>
-              </a:rPr>
-              <a:t>$</a:t>
-            </a:r>
-            <a:r>
-              <a:rPr>
-                <a:solidFill>
-                  <a:srgbClr val="003B4F"/>
-                </a:solidFill>
-                <a:latin typeface="Courier"/>
-              </a:rPr>
-              <a:t>length_mm, </a:t>
-            </a:r>
-            <a:r>
-              <a:rPr>
-                <a:solidFill>
-                  <a:srgbClr val="657422"/>
-                </a:solidFill>
-                <a:latin typeface="Courier"/>
-              </a:rPr>
-              <a:t>na.rm =</a:t>
-            </a:r>
-            <a:r>
-              <a:rPr>
-                <a:solidFill>
-                  <a:srgbClr val="003B4F"/>
-                </a:solidFill>
-                <a:latin typeface="Courier"/>
-              </a:rPr>
-              <a:t> </a:t>
-            </a:r>
-            <a:r>
-              <a:rPr>
-                <a:solidFill>
-                  <a:srgbClr val="8F5902"/>
-                </a:solidFill>
-                <a:latin typeface="Courier"/>
-              </a:rPr>
-              <a:t>TRUE</a:t>
-            </a:r>
-            <a:r>
-              <a:rPr>
-                <a:solidFill>
-                  <a:srgbClr val="003B4F"/>
-                </a:solidFill>
-                <a:latin typeface="Courier"/>
-              </a:rPr>
-              <a:t>)</a:t>
-            </a:r>
-            <a:br/>
-            <a:r>
-              <a:rPr>
-                <a:solidFill>
-                  <a:srgbClr val="4758AB"/>
-                </a:solidFill>
-                <a:latin typeface="Courier"/>
-              </a:rPr>
-              <a:t>cat</a:t>
-            </a:r>
-            <a:r>
-              <a:rPr>
-                <a:solidFill>
-                  <a:srgbClr val="003B4F"/>
-                </a:solidFill>
-                <a:latin typeface="Courier"/>
-              </a:rPr>
-              <a:t>(</a:t>
-            </a:r>
-            <a:r>
-              <a:rPr>
-                <a:solidFill>
-                  <a:srgbClr val="20794D"/>
-                </a:solidFill>
-                <a:latin typeface="Courier"/>
-              </a:rPr>
-              <a:t>"Mean:"</a:t>
-            </a:r>
-            <a:r>
-              <a:rPr>
-                <a:solidFill>
-                  <a:srgbClr val="003B4F"/>
-                </a:solidFill>
-                <a:latin typeface="Courier"/>
-              </a:rPr>
-              <a:t>, </a:t>
-            </a:r>
-            <a:r>
-              <a:rPr>
-                <a:solidFill>
-                  <a:srgbClr val="4758AB"/>
-                </a:solidFill>
-                <a:latin typeface="Courier"/>
-              </a:rPr>
-              <a:t>round</a:t>
-            </a:r>
-            <a:r>
-              <a:rPr>
-                <a:solidFill>
-                  <a:srgbClr val="003B4F"/>
-                </a:solidFill>
-                <a:latin typeface="Courier"/>
-              </a:rPr>
-              <a:t>(ps_shade_mean, </a:t>
-            </a:r>
-            <a:r>
-              <a:rPr>
-                <a:solidFill>
-                  <a:srgbClr val="AD0000"/>
-                </a:solidFill>
-                <a:latin typeface="Courier"/>
-              </a:rPr>
-              <a:t>1</a:t>
-            </a:r>
-            <a:r>
-              <a:rPr>
-                <a:solidFill>
-                  <a:srgbClr val="003B4F"/>
-                </a:solidFill>
-                <a:latin typeface="Courier"/>
-              </a:rPr>
-              <a:t>), </a:t>
-            </a:r>
-            <a:r>
-              <a:rPr>
-                <a:solidFill>
-                  <a:srgbClr val="20794D"/>
-                </a:solidFill>
-                <a:latin typeface="Courier"/>
-              </a:rPr>
-              <a:t>"mm</a:t>
-            </a:r>
-            <a:r>
-              <a:rPr>
-                <a:solidFill>
-                  <a:srgbClr val="5E5E5E"/>
-                </a:solidFill>
-                <a:latin typeface="Courier"/>
-              </a:rPr>
-              <a:t>\n</a:t>
-            </a:r>
-            <a:r>
-              <a:rPr>
-                <a:solidFill>
-                  <a:srgbClr val="20794D"/>
-                </a:solidFill>
-                <a:latin typeface="Courier"/>
-              </a:rPr>
-              <a:t>"</a:t>
-            </a:r>
-            <a:r>
-              <a:rPr>
-                <a:solidFill>
-                  <a:srgbClr val="003B4F"/>
-                </a:solidFill>
-                <a:latin typeface="Courier"/>
-              </a:rPr>
-              <a:t>)</a:t>
-            </a:r>
-          </a:p>
-          <a:p>
-            <a:pPr lvl="0" indent="0">
-              <a:buNone/>
-            </a:pPr>
-            <a:r>
-              <a:rPr sz="2000">
-                <a:latin typeface="Courier"/>
-              </a:rPr>
-              <a:t>Mean: 17.6 mm</a:t>
-            </a:r>
-          </a:p>
-          <a:p>
-            <a:pPr lvl="0" indent="0">
-              <a:buNone/>
-            </a:pPr>
-            <a:r>
-              <a:rPr>
-                <a:solidFill>
-                  <a:srgbClr val="5E5E5E"/>
-                </a:solidFill>
-                <a:latin typeface="Courier"/>
-              </a:rPr>
-              <a:t># Perform a one-sample t-test</a:t>
-            </a:r>
-            <a:br/>
-            <a:r>
-              <a:rPr>
-                <a:solidFill>
-                  <a:srgbClr val="003B4F"/>
-                </a:solidFill>
-                <a:latin typeface="Courier"/>
-              </a:rPr>
-              <a:t>t_test_result &lt;- </a:t>
-            </a:r>
-            <a:r>
-              <a:rPr>
-                <a:solidFill>
-                  <a:srgbClr val="4758AB"/>
-                </a:solidFill>
-                <a:latin typeface="Courier"/>
-              </a:rPr>
-              <a:t>t.test</a:t>
-            </a:r>
-            <a:r>
-              <a:rPr>
-                <a:solidFill>
-                  <a:srgbClr val="003B4F"/>
-                </a:solidFill>
-                <a:latin typeface="Courier"/>
-              </a:rPr>
-              <a:t>(ps_shady_df</a:t>
-            </a:r>
-            <a:r>
-              <a:rPr>
-                <a:solidFill>
-                  <a:srgbClr val="5E5E5E"/>
-                </a:solidFill>
-                <a:latin typeface="Courier"/>
-              </a:rPr>
-              <a:t>$</a:t>
-            </a:r>
-            <a:r>
-              <a:rPr>
-                <a:solidFill>
-                  <a:srgbClr val="003B4F"/>
-                </a:solidFill>
-                <a:latin typeface="Courier"/>
-              </a:rPr>
-              <a:t>length_mm, </a:t>
-            </a:r>
-            <a:r>
-              <a:rPr>
-                <a:solidFill>
-                  <a:srgbClr val="657422"/>
-                </a:solidFill>
-                <a:latin typeface="Courier"/>
-              </a:rPr>
-              <a:t>mu =</a:t>
-            </a:r>
-            <a:r>
-              <a:rPr>
-                <a:solidFill>
-                  <a:srgbClr val="003B4F"/>
-                </a:solidFill>
-                <a:latin typeface="Courier"/>
-              </a:rPr>
-              <a:t> </a:t>
-            </a:r>
-            <a:r>
-              <a:rPr>
-                <a:solidFill>
-                  <a:srgbClr val="AD0000"/>
-                </a:solidFill>
-                <a:latin typeface="Courier"/>
-              </a:rPr>
-              <a:t>15</a:t>
-            </a:r>
-            <a:r>
-              <a:rPr>
-                <a:solidFill>
-                  <a:srgbClr val="003B4F"/>
-                </a:solidFill>
-                <a:latin typeface="Courier"/>
-              </a:rPr>
-              <a:t>)</a:t>
-            </a:r>
-            <a:br/>
-            <a:r>
-              <a:rPr>
-                <a:solidFill>
-                  <a:srgbClr val="003B4F"/>
-                </a:solidFill>
-                <a:latin typeface="Courier"/>
-              </a:rPr>
-              <a:t>t_test_result</a:t>
-            </a:r>
-          </a:p>
-          <a:p>
-            <a:pPr lvl="0" indent="0">
-              <a:buNone/>
-            </a:pPr>
-            <a:r>
-              <a:rPr sz="2000">
-                <a:latin typeface="Courier"/>
-              </a:rPr>
-              <a:t>
-    One Sample t-test
-data:  ps_shady_df$length_mm
-t = 2.9414, df = 7, p-value = 0.02167
-alternative hypothesis: true mean is not equal to 15
-95 percent confidence interval:
- 15.51092 19.70030
-sample estimates:
-mean of x 
- 17.60561 </a:t>
-            </a:r>
-          </a:p>
-          <a:p>
-            <a:pPr lvl="0" indent="0" marL="1270000">
-              <a:buNone/>
-            </a:pPr>
-            <a:r>
-              <a:rPr sz="2000"/>
-              <a:t>Interpret this test result by answering these questions:</a:t>
+            <a:pPr lvl="0" indent="0" marL="0">
+              <a:buNone/>
+            </a:pPr>
+            <a:r>
+              <a:rPr/>
+              <a:t>Hypothesis testing is a systematic way to evaluate research questions using data.</a:t>
+            </a:r>
+          </a:p>
+          <a:p>
+            <a:pPr lvl="0" indent="0" marL="0">
+              <a:buNone/>
+            </a:pPr>
+            <a:r>
+              <a:rPr b="1"/>
+              <a:t>Key components:</a:t>
             </a:r>
           </a:p>
           <a:p>
@@ -4771,8 +5038,12 @@
               <a:buAutoNum type="arabicPeriod"/>
             </a:pPr>
             <a:r>
-              <a:rPr sz="2000"/>
-              <a:t>What was the null hypothesis?</a:t>
+              <a:rPr b="1"/>
+              <a:t>Null hypothesis (Ho)</a:t>
+            </a:r>
+            <a:r>
+              <a:rPr/>
+              <a:t>: Typically assumes “no effect” or “no difference”</a:t>
             </a:r>
           </a:p>
           <a:p>
@@ -4780,8 +5051,12 @@
               <a:buAutoNum type="arabicPeriod"/>
             </a:pPr>
             <a:r>
-              <a:rPr sz="2000"/>
-              <a:t>What was the alternative hypothesis?</a:t>
+              <a:rPr b="1"/>
+              <a:t>Alternative hypothesis (Ha)</a:t>
+            </a:r>
+            <a:r>
+              <a:rPr/>
+              <a:t>: The claim we’re trying to support</a:t>
             </a:r>
           </a:p>
           <a:p>
@@ -4789,8 +5064,12 @@
               <a:buAutoNum type="arabicPeriod"/>
             </a:pPr>
             <a:r>
-              <a:rPr sz="2000"/>
-              <a:t>What does the p-value tell us?</a:t>
+              <a:rPr b="1"/>
+              <a:t>Statistical test</a:t>
+            </a:r>
+            <a:r>
+              <a:rPr/>
+              <a:t>: Method for evaluating evidence against H₀</a:t>
             </a:r>
           </a:p>
           <a:p>
@@ -4798,8 +5077,12 @@
               <a:buAutoNum type="arabicPeriod"/>
             </a:pPr>
             <a:r>
-              <a:rPr sz="2000"/>
-              <a:t>Should we reject or fail to reject the null hypothesis at α = 0.05?</a:t>
+              <a:rPr b="1"/>
+              <a:t>P-value</a:t>
+            </a:r>
+            <a:r>
+              <a:rPr/>
+              <a:t>: Probability of observing our results (or more extreme) if H₀ is true</a:t>
             </a:r>
           </a:p>
           <a:p>
@@ -4807,12 +5090,59 @@
               <a:buAutoNum type="arabicPeriod"/>
             </a:pPr>
             <a:r>
-              <a:rPr sz="2000"/>
-              <a:t>What is the practical interpretation of this result for fish biologists?</a:t>
-            </a:r>
-          </a:p>
-        </p:txBody>
-      </p:sp>
+              <a:rPr b="1"/>
+              <a:t>Significance level (α)</a:t>
+            </a:r>
+            <a:r>
+              <a:rPr/>
+              <a:t>: Threshold for rejecting H₀, typically 0.05</a:t>
+            </a:r>
+          </a:p>
+          <a:p>
+            <a:pPr lvl="0" indent="0" marL="0">
+              <a:buNone/>
+            </a:pPr>
+            <a:r>
+              <a:rPr b="1"/>
+              <a:t>Decision rule</a:t>
+            </a:r>
+            <a:r>
+              <a:rPr/>
+              <a:t>: Reject Ho if p-value less than α or shorthand p &lt; 0.05</a:t>
+            </a:r>
+          </a:p>
+        </p:txBody>
+      </p:sp>
+      <p:pic>
+        <p:nvPicPr>
+          <p:cNvPr descr="05_01_lecture_powerpoint_files/figure-pptx/unnamed-chunk-7-1.png" id="0" name="Picture 1"/>
+          <p:cNvPicPr>
+            <a:picLocks noGrp="1" noChangeAspect="1"/>
+          </p:cNvPicPr>
+          <p:nvPr/>
+        </p:nvPicPr>
+        <p:blipFill>
+          <a:blip r:embed="rId2"/>
+          <a:stretch>
+            <a:fillRect/>
+          </a:stretch>
+        </p:blipFill>
+        <p:spPr bwMode="auto">
+          <a:xfrm>
+            <a:off x="6121400" y="1498600"/>
+            <a:ext cx="2781300" cy="2781300"/>
+          </a:xfrm>
+          <a:prstGeom prst="rect">
+            <a:avLst/>
+          </a:prstGeom>
+          <a:noFill/>
+          <a:ln w="9525">
+            <a:noFill/>
+            <a:headEnd/>
+            <a:tailEnd/>
+          </a:ln>
+        </p:spPr>
+      </p:pic>
     </p:spTree>
   </p:cSld>
 </p:sld>
@@ -4867,7 +5197,7 @@
             </a:r>
             <a:r>
               <a:rPr/>
-              <a:t> Hypothesis Testing Framework</a:t>
+              <a:t> Hypothesis Testing</a:t>
             </a:r>
           </a:p>
         </p:txBody>
@@ -4910,7 +5240,7 @@
             </a:pPr>
             <a:r>
               <a:rPr b="1"/>
-              <a:t>Null hypothesis (Ho)</a:t>
+              <a:t>Null hypothesis (H₀)</a:t>
             </a:r>
             <a:r>
               <a:rPr/>
@@ -4923,7 +5253,7 @@
             </a:pPr>
             <a:r>
               <a:rPr b="1"/>
-              <a:t>Alternative hypothesis (Ha)</a:t>
+              <a:t>Alternative hypothesis (Hₐ)</a:t>
             </a:r>
             <a:r>
               <a:rPr/>
@@ -4979,14 +5309,14 @@
             </a:r>
             <a:r>
               <a:rPr/>
-              <a:t>: Reject Ho if p-value less than α or shorthand p &lt; 0.05</a:t>
+              <a:t>: Reject H₀ if p-value &lt; α</a:t>
             </a:r>
           </a:p>
         </p:txBody>
       </p:sp>
       <p:pic>
         <p:nvPicPr>
-          <p:cNvPr descr="05_01_lecture_powerpoint_files/figure-pptx/unnamed-chunk-7-1.png" id="0" name="Picture 1"/>
+          <p:cNvPr descr="05_01_lecture_powerpoint_files/figure-pptx/unnamed-chunk-8-1.png" id="0" name="Picture 1"/>
           <p:cNvPicPr>
             <a:picLocks noGrp="1" noChangeAspect="1"/>
           </p:cNvPicPr>
@@ -5049,6 +5379,115 @@
         <p:spPr>
           <a:xfrm>
             <a:off x="0" y="0"/>
+            <a:ext cx="9144000" cy="582780"/>
+          </a:xfrm>
+        </p:spPr>
+        <p:txBody>
+          <a:bodyPr/>
+          <a:lstStyle/>
+          <a:p>
+            <a:pPr lvl="0" indent="0" marL="0">
+              <a:buNone/>
+            </a:pPr>
+            <a:r>
+              <a:rPr/>
+              <a:t>Lecture 5: Interpreting One-Sample T-Test Results</a:t>
+            </a:r>
+          </a:p>
+        </p:txBody>
+      </p:sp>
+      <p:sp>
+        <p:nvSpPr>
+          <p:cNvPr id="3" name="Content Placeholder 2"/>
+          <p:cNvSpPr>
+            <a:spLocks noGrp="1"/>
+          </p:cNvSpPr>
+          <p:nvPr>
+            <p:ph idx="1"/>
+          </p:nvPr>
+        </p:nvSpPr>
+        <p:spPr/>
+        <p:txBody>
+          <a:bodyPr/>
+          <a:lstStyle/>
+          <a:p>
+            <a:pPr lvl="0" indent="0" marL="0">
+              <a:buNone/>
+            </a:pPr>
+            <a:r>
+              <a:rPr b="1"/>
+              <a:t>Activity: Interpret the t-test results</a:t>
+            </a:r>
+          </a:p>
+          <a:p>
+            <a:pPr lvl="0"/>
+            <a:r>
+              <a:rPr/>
+              <a:t>What does the p-value tell us?</a:t>
+            </a:r>
+          </a:p>
+          <a:p>
+            <a:pPr lvl="0"/>
+            <a:r>
+              <a:rPr/>
+              <a:t>Should we reject or fail to reject the null hypothesis?</a:t>
+            </a:r>
+          </a:p>
+          <a:p>
+            <a:pPr lvl="0" indent="0" marL="0">
+              <a:buNone/>
+            </a:pPr>
+            <a:r>
+              <a:rPr b="1"/>
+              <a:t>How to report this result in a scientific paper:</a:t>
+            </a:r>
+          </a:p>
+          <a:p>
+            <a:pPr lvl="0" indent="0" marL="0">
+              <a:buNone/>
+            </a:pPr>
+            <a:r>
+              <a:rPr/>
+              <a:t>“A one-sample t-test at α=0.05 showed that the mean needle length (… mm, SD = …) [was/was not] significantly different from the expected 15 mm, t(…) = …, p = …”</a:t>
+            </a:r>
+          </a:p>
+        </p:txBody>
+      </p:sp>
+    </p:spTree>
+  </p:cSld>
+</p:sld>
+</file>
+
+<file path=ppt/slides/slide19.xml><?xml version="1.0" encoding="utf-8"?>
+<p:sld xmlns:a="http://schemas.openxmlformats.org/drawingml/2006/main" xmlns:r="http://schemas.openxmlformats.org/officeDocument/2006/relationships" xmlns:p="http://schemas.openxmlformats.org/presentationml/2006/main">
+  <p:cSld>
+    <p:spTree>
+      <p:nvGrpSpPr>
+        <p:cNvPr id="1" name=""/>
+        <p:cNvGrpSpPr/>
+        <p:nvPr/>
+      </p:nvGrpSpPr>
+      <p:grpSpPr>
+        <a:xfrm>
+          <a:off x="0" y="0"/>
+          <a:ext cx="0" cy="0"/>
+          <a:chOff x="0" y="0"/>
+          <a:chExt cx="0" cy="0"/>
+        </a:xfrm>
+      </p:grpSpPr>
+      <p:sp>
+        <p:nvSpPr>
+          <p:cNvPr id="2" name="Title 1"/>
+          <p:cNvSpPr>
+            <a:spLocks noGrp="1"/>
+          </p:cNvSpPr>
+          <p:nvPr>
+            <p:ph type="title"/>
+          </p:nvPr>
+        </p:nvSpPr>
+        <p:spPr>
+          <a:xfrm>
+            <a:off x="0" y="0"/>
             <a:ext cx="9144000" cy="602780"/>
           </a:xfrm>
           <a:solidFill>
@@ -5068,7 +5507,7 @@
             </a:r>
             <a:r>
               <a:rPr/>
-              <a:t> Hypothesis Testing</a:t>
+              <a:t> Two Sample T-Tests Introduction</a:t>
             </a:r>
           </a:p>
         </p:txBody>
@@ -5093,101 +5532,35 @@
             </a:pPr>
             <a:r>
               <a:rPr/>
-              <a:t>Hypothesis testing is a systematic way to evaluate research questions using data.</a:t>
-            </a:r>
-          </a:p>
-          <a:p>
-            <a:pPr lvl="0" indent="0" marL="0">
-              <a:buNone/>
-            </a:pPr>
-            <a:r>
-              <a:rPr b="1"/>
-              <a:t>Key components:</a:t>
-            </a:r>
-          </a:p>
-          <a:p>
-            <a:pPr lvl="0" indent="-342900" marL="342900">
-              <a:buAutoNum type="arabicPeriod"/>
-            </a:pPr>
-            <a:r>
-              <a:rPr b="1"/>
-              <a:t>Null hypothesis (H₀)</a:t>
-            </a:r>
-            <a:r>
-              <a:rPr/>
-              <a:t>: Typically assumes “no effect” or “no difference”</a:t>
-            </a:r>
-          </a:p>
-          <a:p>
-            <a:pPr lvl="0" indent="-342900" marL="342900">
-              <a:buAutoNum type="arabicPeriod"/>
-            </a:pPr>
-            <a:r>
-              <a:rPr b="1"/>
-              <a:t>Alternative hypothesis (Hₐ)</a:t>
-            </a:r>
-            <a:r>
-              <a:rPr/>
-              <a:t>: The claim we’re trying to support</a:t>
-            </a:r>
-          </a:p>
-          <a:p>
-            <a:pPr lvl="0" indent="-342900" marL="342900">
-              <a:buAutoNum type="arabicPeriod"/>
-            </a:pPr>
-            <a:r>
-              <a:rPr b="1"/>
-              <a:t>Statistical test</a:t>
-            </a:r>
-            <a:r>
-              <a:rPr/>
-              <a:t>: Method for evaluating evidence against H₀</a:t>
-            </a:r>
-          </a:p>
-          <a:p>
-            <a:pPr lvl="0" indent="-342900" marL="342900">
-              <a:buAutoNum type="arabicPeriod"/>
-            </a:pPr>
-            <a:r>
-              <a:rPr b="1"/>
-              <a:t>P-value</a:t>
-            </a:r>
-            <a:r>
-              <a:rPr/>
-              <a:t>: Probability of observing our results (or more extreme) if H₀ is true</a:t>
-            </a:r>
-          </a:p>
-          <a:p>
-            <a:pPr lvl="0" indent="-342900" marL="342900">
-              <a:buAutoNum type="arabicPeriod"/>
-            </a:pPr>
-            <a:r>
-              <a:rPr b="1"/>
-              <a:t>Significance level (α)</a:t>
-            </a:r>
-            <a:r>
-              <a:rPr/>
-              <a:t>: Threshold for rejecting H₀, typically 0.05</a:t>
-            </a:r>
-          </a:p>
-          <a:p>
-            <a:pPr lvl="0" indent="0" marL="0">
-              <a:buNone/>
-            </a:pPr>
-            <a:r>
-              <a:rPr b="1"/>
-              <a:t>Decision rule</a:t>
-            </a:r>
-            <a:r>
-              <a:rPr/>
-              <a:t>: Reject H₀ if p-value &lt; α</a:t>
+              <a:t>For example</a:t>
+            </a:r>
+          </a:p>
+          <a:p>
+            <a:pPr lvl="0"/>
+            <a:r>
+              <a:rPr/>
+              <a:t>what is probability that population X is the same as population Y?</a:t>
+            </a:r>
+          </a:p>
+          <a:p>
+            <a:pPr lvl="0"/>
+            <a:r>
+              <a:rPr/>
+              <a:t>How would you assess this question using what we learned?</a:t>
+            </a:r>
+          </a:p>
+          <a:p>
+            <a:pPr lvl="0"/>
+            <a:r>
+              <a:rPr/>
+              <a:t>This is what we will do with the needle length again…</a:t>
             </a:r>
           </a:p>
         </p:txBody>
       </p:sp>
       <p:pic>
         <p:nvPicPr>
-          <p:cNvPr descr="05_01_lecture_powerpoint_files/figure-pptx/unnamed-chunk-8-1.png" id="0" name="Picture 1"/>
+          <p:cNvPr descr="images/two_branches.jpg" id="0" name="Picture 1"/>
           <p:cNvPicPr>
             <a:picLocks noGrp="1" noChangeAspect="1"/>
           </p:cNvPicPr>
@@ -5220,115 +5593,6 @@
 </p:sld>
 </file>
 
-<file path=ppt/slides/slide19.xml><?xml version="1.0" encoding="utf-8"?>
-<p:sld xmlns:a="http://schemas.openxmlformats.org/drawingml/2006/main" xmlns:r="http://schemas.openxmlformats.org/officeDocument/2006/relationships" xmlns:p="http://schemas.openxmlformats.org/presentationml/2006/main">
-  <p:cSld>
-    <p:spTree>
-      <p:nvGrpSpPr>
-        <p:cNvPr id="1" name=""/>
-        <p:cNvGrpSpPr/>
-        <p:nvPr/>
-      </p:nvGrpSpPr>
-      <p:grpSpPr>
-        <a:xfrm>
-          <a:off x="0" y="0"/>
-          <a:ext cx="0" cy="0"/>
-          <a:chOff x="0" y="0"/>
-          <a:chExt cx="0" cy="0"/>
-        </a:xfrm>
-      </p:grpSpPr>
-      <p:sp>
-        <p:nvSpPr>
-          <p:cNvPr id="2" name="Title 1"/>
-          <p:cNvSpPr>
-            <a:spLocks noGrp="1"/>
-          </p:cNvSpPr>
-          <p:nvPr>
-            <p:ph type="title"/>
-          </p:nvPr>
-        </p:nvSpPr>
-        <p:spPr>
-          <a:xfrm>
-            <a:off x="0" y="0"/>
-            <a:ext cx="9144000" cy="582780"/>
-          </a:xfrm>
-        </p:spPr>
-        <p:txBody>
-          <a:bodyPr/>
-          <a:lstStyle/>
-          <a:p>
-            <a:pPr lvl="0" indent="0" marL="0">
-              <a:buNone/>
-            </a:pPr>
-            <a:r>
-              <a:rPr/>
-              <a:t>Lecture 5: Interpreting One-Sample T-Test Results</a:t>
-            </a:r>
-          </a:p>
-        </p:txBody>
-      </p:sp>
-      <p:sp>
-        <p:nvSpPr>
-          <p:cNvPr id="3" name="Content Placeholder 2"/>
-          <p:cNvSpPr>
-            <a:spLocks noGrp="1"/>
-          </p:cNvSpPr>
-          <p:nvPr>
-            <p:ph idx="1"/>
-          </p:nvPr>
-        </p:nvSpPr>
-        <p:spPr/>
-        <p:txBody>
-          <a:bodyPr/>
-          <a:lstStyle/>
-          <a:p>
-            <a:pPr lvl="0" indent="0" marL="0">
-              <a:buNone/>
-            </a:pPr>
-            <a:r>
-              <a:rPr b="1"/>
-              <a:t>Activity: Interpret the t-test results</a:t>
-            </a:r>
-          </a:p>
-          <a:p>
-            <a:pPr lvl="0"/>
-            <a:r>
-              <a:rPr/>
-              <a:t>What does the p-value tell us?</a:t>
-            </a:r>
-          </a:p>
-          <a:p>
-            <a:pPr lvl="0"/>
-            <a:r>
-              <a:rPr/>
-              <a:t>Should we reject or fail to reject the null hypothesis?</a:t>
-            </a:r>
-          </a:p>
-          <a:p>
-            <a:pPr lvl="0" indent="0" marL="0">
-              <a:buNone/>
-            </a:pPr>
-            <a:r>
-              <a:rPr b="1"/>
-              <a:t>How to report this result in a scientific paper:</a:t>
-            </a:r>
-          </a:p>
-          <a:p>
-            <a:pPr lvl="0" indent="0" marL="0">
-              <a:buNone/>
-            </a:pPr>
-            <a:r>
-              <a:rPr/>
-              <a:t>“A one-sample t-test at α=0.05 showed that the mean needle length (… mm, SD = …) [was/was not] significantly different from the expected 15 mm, t(…) = …, p = …”</a:t>
-            </a:r>
-          </a:p>
-        </p:txBody>
-      </p:sp>
-    </p:spTree>
-  </p:cSld>
-</p:sld>
-</file>
-
 <file path=ppt/slides/slide2.xml><?xml version="1.0" encoding="utf-8"?>
 <p:sld xmlns:a="http://schemas.openxmlformats.org/drawingml/2006/main" xmlns:r="http://schemas.openxmlformats.org/officeDocument/2006/relationships" xmlns:p="http://schemas.openxmlformats.org/presentationml/2006/main">
   <p:cSld>
@@ -5408,24 +5672,10 @@
             </a:r>
           </a:p>
           <a:p>
-            <a:pPr lvl="0"/>
-            <a:r>
-              <a:rPr/>
-              <a:t>Descriptive Statistics</a:t>
-            </a:r>
-          </a:p>
-          <a:p>
             <a:pPr lvl="1"/>
             <a:r>
               <a:rPr/>
-              <a:t>Center - mean, median, mode</a:t>
-            </a:r>
-          </a:p>
-          <a:p>
-            <a:pPr lvl="1"/>
-            <a:r>
-              <a:rPr/>
-              <a:t>Spread - range, variance, standard deviation</a:t>
+              <a:t>Z scores and T scores</a:t>
             </a:r>
           </a:p>
           <a:p>
@@ -5515,145 +5765,6 @@
         </p:nvSpPr>
         <p:spPr>
           <a:xfrm>
-            <a:off x="0" y="0"/>
-            <a:ext cx="9144000" cy="602780"/>
-          </a:xfrm>
-          <a:solidFill>
-            <a:srgbClr val="70121D"/>
-          </a:solidFill>
-        </p:spPr>
-        <p:txBody>
-          <a:bodyPr/>
-          <a:lstStyle/>
-          <a:p>
-            <a:pPr lvl="0" indent="0" marL="0">
-              <a:buNone/>
-            </a:pPr>
-            <a:r>
-              <a:rPr b="1"/>
-              <a:t>Lecture 5:</a:t>
-            </a:r>
-            <a:r>
-              <a:rPr/>
-              <a:t> Two Sample T-Tests Introduction</a:t>
-            </a:r>
-          </a:p>
-        </p:txBody>
-      </p:sp>
-      <p:sp>
-        <p:nvSpPr>
-          <p:cNvPr id="3" name="Content Placeholder 2"/>
-          <p:cNvSpPr>
-            <a:spLocks noGrp="1"/>
-          </p:cNvSpPr>
-          <p:nvPr>
-            <p:ph idx="1" sz="half"/>
-          </p:nvPr>
-        </p:nvSpPr>
-        <p:spPr/>
-        <p:txBody>
-          <a:bodyPr/>
-          <a:lstStyle/>
-          <a:p>
-            <a:pPr lvl="0" indent="0" marL="0">
-              <a:buNone/>
-            </a:pPr>
-            <a:r>
-              <a:rPr/>
-              <a:t>For example</a:t>
-            </a:r>
-          </a:p>
-          <a:p>
-            <a:pPr lvl="0"/>
-            <a:r>
-              <a:rPr/>
-              <a:t>what is probability that population X is the same as population Y?</a:t>
-            </a:r>
-          </a:p>
-          <a:p>
-            <a:pPr lvl="0" indent="0" marL="0">
-              <a:buNone/>
-            </a:pPr>
-            <a:r>
-              <a:rPr/>
-              <a:t>How would you assess this question using what we learned?</a:t>
-            </a:r>
-          </a:p>
-          <a:p>
-            <a:pPr lvl="0" indent="0" marL="0">
-              <a:buNone/>
-            </a:pPr>
-            <a:r>
-              <a:rPr/>
-              <a:t>This is what we will do with the fish length again…</a:t>
-            </a:r>
-          </a:p>
-        </p:txBody>
-      </p:sp>
-      <p:pic>
-        <p:nvPicPr>
-          <p:cNvPr descr="images/two_branches.jpg" id="0" name="Picture 1"/>
-          <p:cNvPicPr>
-            <a:picLocks noGrp="1" noChangeAspect="1"/>
-          </p:cNvPicPr>
-          <p:nvPr/>
-        </p:nvPicPr>
-        <p:blipFill>
-          <a:blip r:embed="rId2"/>
-          <a:stretch>
-            <a:fillRect/>
-          </a:stretch>
-        </p:blipFill>
-        <p:spPr bwMode="auto">
-          <a:xfrm>
-            <a:off x="6121400" y="1498600"/>
-            <a:ext cx="2781300" cy="2781300"/>
-          </a:xfrm>
-          <a:prstGeom prst="rect">
-            <a:avLst/>
-          </a:prstGeom>
-          <a:noFill/>
-          <a:ln w="9525">
-            <a:noFill/>
-            <a:headEnd/>
-            <a:tailEnd/>
-          </a:ln>
-        </p:spPr>
-      </p:pic>
-    </p:spTree>
-  </p:cSld>
-</p:sld>
-</file>
-
-<file path=ppt/slides/slide21.xml><?xml version="1.0" encoding="utf-8"?>
-<p:sld xmlns:a="http://schemas.openxmlformats.org/drawingml/2006/main" xmlns:r="http://schemas.openxmlformats.org/officeDocument/2006/relationships" xmlns:p="http://schemas.openxmlformats.org/presentationml/2006/main">
-  <p:cSld>
-    <p:spTree>
-      <p:nvGrpSpPr>
-        <p:cNvPr id="1" name=""/>
-        <p:cNvGrpSpPr/>
-        <p:nvPr/>
-      </p:nvGrpSpPr>
-      <p:grpSpPr>
-        <a:xfrm>
-          <a:off x="0" y="0"/>
-          <a:ext cx="0" cy="0"/>
-          <a:chOff x="0" y="0"/>
-          <a:chExt cx="0" cy="0"/>
-        </a:xfrm>
-      </p:grpSpPr>
-      <p:sp>
-        <p:nvSpPr>
-          <p:cNvPr id="2" name="Title 1"/>
-          <p:cNvSpPr>
-            <a:spLocks noGrp="1"/>
-          </p:cNvSpPr>
-          <p:nvPr>
-            <p:ph type="title"/>
-          </p:nvPr>
-        </p:nvSpPr>
-        <p:spPr>
-          <a:xfrm>
             <a:off x="139485" y="78119"/>
             <a:ext cx="8229600" cy="607682"/>
           </a:xfrm>
@@ -5735,359 +5846,6 @@
             <a:pPr lvl="0" indent="0">
               <a:buNone/>
             </a:pPr>
-            <a:r>
-              <a:rPr>
-                <a:solidFill>
-                  <a:srgbClr val="5E5E5E"/>
-                </a:solidFill>
-                <a:latin typeface="Courier"/>
-              </a:rPr>
-              <a:t># Now create a boxplot to visualize the difference in fish lengths between these lakes:</a:t>
-            </a:r>
-            <a:br/>
-            <a:br/>
-            <a:br/>
-            <a:r>
-              <a:rPr>
-                <a:solidFill>
-                  <a:srgbClr val="5E5E5E"/>
-                </a:solidFill>
-                <a:latin typeface="Courier"/>
-              </a:rPr>
-              <a:t># Create a boxplot comparing the two lakes</a:t>
-            </a:r>
-            <a:br/>
-            <a:r>
-              <a:rPr>
-                <a:solidFill>
-                  <a:srgbClr val="003B4F"/>
-                </a:solidFill>
-                <a:latin typeface="Courier"/>
-              </a:rPr>
-              <a:t>shady_sunny_plot &lt;- ps_df </a:t>
-            </a:r>
-            <a:r>
-              <a:rPr>
-                <a:solidFill>
-                  <a:srgbClr val="5E5E5E"/>
-                </a:solidFill>
-                <a:latin typeface="Courier"/>
-              </a:rPr>
-              <a:t>%&gt;%</a:t>
-            </a:r>
-            <a:br/>
-            <a:r>
-              <a:rPr>
-                <a:solidFill>
-                  <a:srgbClr val="003B4F"/>
-                </a:solidFill>
-                <a:latin typeface="Courier"/>
-              </a:rPr>
-              <a:t>  </a:t>
-            </a:r>
-            <a:r>
-              <a:rPr>
-                <a:solidFill>
-                  <a:srgbClr val="4758AB"/>
-                </a:solidFill>
-                <a:latin typeface="Courier"/>
-              </a:rPr>
-              <a:t>ggplot</a:t>
-            </a:r>
-            <a:r>
-              <a:rPr>
-                <a:solidFill>
-                  <a:srgbClr val="003B4F"/>
-                </a:solidFill>
-                <a:latin typeface="Courier"/>
-              </a:rPr>
-              <a:t>(</a:t>
-            </a:r>
-            <a:r>
-              <a:rPr>
-                <a:solidFill>
-                  <a:srgbClr val="4758AB"/>
-                </a:solidFill>
-                <a:latin typeface="Courier"/>
-              </a:rPr>
-              <a:t>aes</a:t>
-            </a:r>
-            <a:r>
-              <a:rPr>
-                <a:solidFill>
-                  <a:srgbClr val="003B4F"/>
-                </a:solidFill>
-                <a:latin typeface="Courier"/>
-              </a:rPr>
-              <a:t>(</a:t>
-            </a:r>
-            <a:r>
-              <a:rPr>
-                <a:solidFill>
-                  <a:srgbClr val="657422"/>
-                </a:solidFill>
-                <a:latin typeface="Courier"/>
-              </a:rPr>
-              <a:t>x =</a:t>
-            </a:r>
-            <a:r>
-              <a:rPr>
-                <a:solidFill>
-                  <a:srgbClr val="003B4F"/>
-                </a:solidFill>
-                <a:latin typeface="Courier"/>
-              </a:rPr>
-              <a:t> side, </a:t>
-            </a:r>
-            <a:r>
-              <a:rPr>
-                <a:solidFill>
-                  <a:srgbClr val="657422"/>
-                </a:solidFill>
-                <a:latin typeface="Courier"/>
-              </a:rPr>
-              <a:t>y =</a:t>
-            </a:r>
-            <a:r>
-              <a:rPr>
-                <a:solidFill>
-                  <a:srgbClr val="003B4F"/>
-                </a:solidFill>
-                <a:latin typeface="Courier"/>
-              </a:rPr>
-              <a:t> length_mm, </a:t>
-            </a:r>
-            <a:r>
-              <a:rPr>
-                <a:solidFill>
-                  <a:srgbClr val="657422"/>
-                </a:solidFill>
-                <a:latin typeface="Courier"/>
-              </a:rPr>
-              <a:t>fill =</a:t>
-            </a:r>
-            <a:r>
-              <a:rPr>
-                <a:solidFill>
-                  <a:srgbClr val="003B4F"/>
-                </a:solidFill>
-                <a:latin typeface="Courier"/>
-              </a:rPr>
-              <a:t> side)) </a:t>
-            </a:r>
-            <a:r>
-              <a:rPr>
-                <a:solidFill>
-                  <a:srgbClr val="5E5E5E"/>
-                </a:solidFill>
-                <a:latin typeface="Courier"/>
-              </a:rPr>
-              <a:t>+</a:t>
-            </a:r>
-            <a:br/>
-            <a:r>
-              <a:rPr>
-                <a:solidFill>
-                  <a:srgbClr val="003B4F"/>
-                </a:solidFill>
-                <a:latin typeface="Courier"/>
-              </a:rPr>
-              <a:t>  </a:t>
-            </a:r>
-            <a:r>
-              <a:rPr>
-                <a:solidFill>
-                  <a:srgbClr val="4758AB"/>
-                </a:solidFill>
-                <a:latin typeface="Courier"/>
-              </a:rPr>
-              <a:t>geom_boxplot</a:t>
-            </a:r>
-            <a:r>
-              <a:rPr>
-                <a:solidFill>
-                  <a:srgbClr val="003B4F"/>
-                </a:solidFill>
-                <a:latin typeface="Courier"/>
-              </a:rPr>
-              <a:t>() </a:t>
-            </a:r>
-            <a:r>
-              <a:rPr>
-                <a:solidFill>
-                  <a:srgbClr val="5E5E5E"/>
-                </a:solidFill>
-                <a:latin typeface="Courier"/>
-              </a:rPr>
-              <a:t>+</a:t>
-            </a:r>
-            <a:br/>
-            <a:r>
-              <a:rPr>
-                <a:solidFill>
-                  <a:srgbClr val="003B4F"/>
-                </a:solidFill>
-                <a:latin typeface="Courier"/>
-              </a:rPr>
-              <a:t>  </a:t>
-            </a:r>
-            <a:r>
-              <a:rPr>
-                <a:solidFill>
-                  <a:srgbClr val="4758AB"/>
-                </a:solidFill>
-                <a:latin typeface="Courier"/>
-              </a:rPr>
-              <a:t>labs</a:t>
-            </a:r>
-            <a:r>
-              <a:rPr>
-                <a:solidFill>
-                  <a:srgbClr val="003B4F"/>
-                </a:solidFill>
-                <a:latin typeface="Courier"/>
-              </a:rPr>
-              <a:t>(</a:t>
-            </a:r>
-            <a:br/>
-            <a:r>
-              <a:rPr>
-                <a:solidFill>
-                  <a:srgbClr val="003B4F"/>
-                </a:solidFill>
-                <a:latin typeface="Courier"/>
-              </a:rPr>
-              <a:t>       </a:t>
-            </a:r>
-            <a:r>
-              <a:rPr>
-                <a:solidFill>
-                  <a:srgbClr val="657422"/>
-                </a:solidFill>
-                <a:latin typeface="Courier"/>
-              </a:rPr>
-              <a:t>x =</a:t>
-            </a:r>
-            <a:r>
-              <a:rPr>
-                <a:solidFill>
-                  <a:srgbClr val="003B4F"/>
-                </a:solidFill>
-                <a:latin typeface="Courier"/>
-              </a:rPr>
-              <a:t> </a:t>
-            </a:r>
-            <a:r>
-              <a:rPr>
-                <a:solidFill>
-                  <a:srgbClr val="20794D"/>
-                </a:solidFill>
-                <a:latin typeface="Courier"/>
-              </a:rPr>
-              <a:t>"side"</a:t>
-            </a:r>
-            <a:r>
-              <a:rPr>
-                <a:solidFill>
-                  <a:srgbClr val="003B4F"/>
-                </a:solidFill>
-                <a:latin typeface="Courier"/>
-              </a:rPr>
-              <a:t>,</a:t>
-            </a:r>
-            <a:br/>
-            <a:r>
-              <a:rPr>
-                <a:solidFill>
-                  <a:srgbClr val="003B4F"/>
-                </a:solidFill>
-                <a:latin typeface="Courier"/>
-              </a:rPr>
-              <a:t>       </a:t>
-            </a:r>
-            <a:r>
-              <a:rPr>
-                <a:solidFill>
-                  <a:srgbClr val="657422"/>
-                </a:solidFill>
-                <a:latin typeface="Courier"/>
-              </a:rPr>
-              <a:t>y =</a:t>
-            </a:r>
-            <a:r>
-              <a:rPr>
-                <a:solidFill>
-                  <a:srgbClr val="003B4F"/>
-                </a:solidFill>
-                <a:latin typeface="Courier"/>
-              </a:rPr>
-              <a:t> </a:t>
-            </a:r>
-            <a:r>
-              <a:rPr>
-                <a:solidFill>
-                  <a:srgbClr val="20794D"/>
-                </a:solidFill>
-                <a:latin typeface="Courier"/>
-              </a:rPr>
-              <a:t>"Length (mm)"</a:t>
-            </a:r>
-            <a:r>
-              <a:rPr>
-                <a:solidFill>
-                  <a:srgbClr val="003B4F"/>
-                </a:solidFill>
-                <a:latin typeface="Courier"/>
-              </a:rPr>
-              <a:t>,</a:t>
-            </a:r>
-            <a:br/>
-            <a:r>
-              <a:rPr>
-                <a:solidFill>
-                  <a:srgbClr val="003B4F"/>
-                </a:solidFill>
-                <a:latin typeface="Courier"/>
-              </a:rPr>
-              <a:t>       </a:t>
-            </a:r>
-            <a:r>
-              <a:rPr>
-                <a:solidFill>
-                  <a:srgbClr val="657422"/>
-                </a:solidFill>
-                <a:latin typeface="Courier"/>
-              </a:rPr>
-              <a:t>fill =</a:t>
-            </a:r>
-            <a:r>
-              <a:rPr>
-                <a:solidFill>
-                  <a:srgbClr val="003B4F"/>
-                </a:solidFill>
-                <a:latin typeface="Courier"/>
-              </a:rPr>
-              <a:t> </a:t>
-            </a:r>
-            <a:r>
-              <a:rPr>
-                <a:solidFill>
-                  <a:srgbClr val="20794D"/>
-                </a:solidFill>
-                <a:latin typeface="Courier"/>
-              </a:rPr>
-              <a:t>"side"</a:t>
-            </a:r>
-            <a:r>
-              <a:rPr>
-                <a:solidFill>
-                  <a:srgbClr val="003B4F"/>
-                </a:solidFill>
-                <a:latin typeface="Courier"/>
-              </a:rPr>
-              <a:t>) </a:t>
-            </a:r>
-            <a:br/>
             <a:r>
               <a:rPr>
                 <a:solidFill>
@@ -6175,7 +5933,7 @@
                 </a:solidFill>
                 <a:latin typeface="Courier"/>
               </a:rPr>
-              <a:t># what can you conclude about the fish populations in these two lakes?</a:t>
+              <a:t># what can you conclude about the needle lenght on the two sides?</a:t>
             </a:r>
           </a:p>
         </p:txBody>
@@ -6185,7 +5943,7 @@
 </p:sld>
 </file>
 
-<file path=ppt/slides/slide22.xml><?xml version="1.0" encoding="utf-8"?>
+<file path=ppt/slides/slide21.xml><?xml version="1.0" encoding="utf-8"?>
 <p:sld xmlns:a="http://schemas.openxmlformats.org/drawingml/2006/main" xmlns:r="http://schemas.openxmlformats.org/officeDocument/2006/relationships" xmlns:p="http://schemas.openxmlformats.org/presentationml/2006/main">
   <p:cSld>
     <p:spTree>
@@ -6261,7 +6019,7 @@
             </a:pPr>
             <a:r>
               <a:rPr sz="2000"/>
-              <a:t>For the following research questions about fish lengths write the null and alternative hypotheses:</a:t>
+              <a:t>For the following research questions about needle lengths write the null and alternative hypotheses:</a:t>
             </a:r>
           </a:p>
           <a:p>
@@ -6270,7 +6028,7 @@
             </a:pPr>
             <a:r>
               <a:rPr sz="2000"/>
-              <a:t>Are needle lengths ion shady and sunny sides different?</a:t>
+              <a:t>Are needle lengths on shady and sunny sides different?</a:t>
             </a:r>
           </a:p>
           <a:p>
@@ -6307,7 +6065,7 @@
 </p:sld>
 </file>
 
-<file path=ppt/slides/slide23.xml><?xml version="1.0" encoding="utf-8"?>
+<file path=ppt/slides/slide22.xml><?xml version="1.0" encoding="utf-8"?>
 <p:sld xmlns:a="http://schemas.openxmlformats.org/drawingml/2006/main" xmlns:r="http://schemas.openxmlformats.org/officeDocument/2006/relationships" xmlns:p="http://schemas.openxmlformats.org/presentationml/2006/main">
   <p:cSld>
     <p:spTree>
@@ -6393,7 +6151,7 @@
                 </a:r>
                 <a:r>
                   <a:rPr b="1"/>
-                  <a:t>Is there a significant difference in neele length between the sides?</a:t>
+                  <a:t>Is there a significant difference in needle length between the sides?</a:t>
                 </a:r>
               </a:p>
               <a:p>
@@ -6564,10 +6322,13 @@
               </a:p>
               <a:p>
                 <a:pPr lvl="0" indent="0" marL="0">
+                  <a:spcBef>
+                    <a:spcPts val="3000"/>
+                  </a:spcBef>
                   <a:buNone/>
                 </a:pPr>
                 <a:r>
-                  <a:rPr/>
+                  <a:rPr b="1"/>
                   <a:t>where:</a:t>
                 </a:r>
               </a:p>
@@ -6679,7 +6440,7 @@
 </p:sld>
 </file>
 
-<file path=ppt/slides/slide24.xml><?xml version="1.0" encoding="utf-8"?>
+<file path=ppt/slides/slide23.xml><?xml version="1.0" encoding="utf-8"?>
 <p:sld xmlns:a="http://schemas.openxmlformats.org/drawingml/2006/main" xmlns:r="http://schemas.openxmlformats.org/officeDocument/2006/relationships" xmlns:p="http://schemas.openxmlformats.org/presentationml/2006/main">
   <p:cSld>
     <p:spTree>
@@ -7109,7 +6870,7 @@
 </p:sld>
 </file>
 
-<file path=ppt/slides/slide25.xml><?xml version="1.0" encoding="utf-8"?>
+<file path=ppt/slides/slide24.xml><?xml version="1.0" encoding="utf-8"?>
 <p:sld xmlns:a="http://schemas.openxmlformats.org/drawingml/2006/main" xmlns:r="http://schemas.openxmlformats.org/officeDocument/2006/relationships" xmlns:p="http://schemas.openxmlformats.org/presentationml/2006/main">
   <p:cSld>
     <p:spTree>
@@ -7231,6 +6992,275 @@
 </p:sld>
 </file>
 
+<file path=ppt/slides/slide25.xml><?xml version="1.0" encoding="utf-8"?>
+<p:sld xmlns:a="http://schemas.openxmlformats.org/drawingml/2006/main" xmlns:r="http://schemas.openxmlformats.org/officeDocument/2006/relationships" xmlns:p="http://schemas.openxmlformats.org/presentationml/2006/main">
+  <p:cSld>
+    <p:spTree>
+      <p:nvGrpSpPr>
+        <p:cNvPr id="1" name=""/>
+        <p:cNvGrpSpPr/>
+        <p:nvPr/>
+      </p:nvGrpSpPr>
+      <p:grpSpPr>
+        <a:xfrm>
+          <a:off x="0" y="0"/>
+          <a:ext cx="0" cy="0"/>
+          <a:chOff x="0" y="0"/>
+          <a:chExt cx="0" cy="0"/>
+        </a:xfrm>
+      </p:grpSpPr>
+      <p:sp>
+        <p:nvSpPr>
+          <p:cNvPr id="2" name="Title 1"/>
+          <p:cNvSpPr>
+            <a:spLocks noGrp="1"/>
+          </p:cNvSpPr>
+          <p:nvPr>
+            <p:ph type="title"/>
+          </p:nvPr>
+        </p:nvSpPr>
+        <p:spPr>
+          <a:xfrm>
+            <a:off x="0" y="0"/>
+            <a:ext cx="9144000" cy="582780"/>
+          </a:xfrm>
+        </p:spPr>
+        <p:txBody>
+          <a:bodyPr/>
+          <a:lstStyle/>
+          <a:p>
+            <a:pPr lvl="0" indent="0" marL="0">
+              <a:buNone/>
+            </a:pPr>
+            <a:r>
+              <a:rPr/>
+              <a:t>Practice Exercise 4: Effect Size</a:t>
+            </a:r>
+          </a:p>
+        </p:txBody>
+      </p:sp>
+      <p:sp>
+        <p:nvSpPr>
+          <p:cNvPr id="3" name="Content Placeholder 2"/>
+          <p:cNvSpPr>
+            <a:spLocks noGrp="1"/>
+          </p:cNvSpPr>
+          <p:nvPr>
+            <p:ph idx="1"/>
+          </p:nvPr>
+        </p:nvSpPr>
+        <p:spPr/>
+        <p:txBody>
+          <a:bodyPr/>
+          <a:lstStyle/>
+          <a:p>
+            <a:pPr lvl="0" indent="0" marL="1270000">
+              <a:buNone/>
+            </a:pPr>
+            <a:r>
+              <a:rPr sz="2000" b="1"/>
+              <a:t>Practice Exercise 4: Effect size</a:t>
+            </a:r>
+          </a:p>
+          <a:p>
+            <a:pPr lvl="0" indent="0" marL="1270000">
+              <a:buNone/>
+            </a:pPr>
+            <a:r>
+              <a:rPr sz="2000"/>
+              <a:t>We could also look at the difference in means… some cool code here</a:t>
+            </a:r>
+          </a:p>
+          <a:p>
+            <a:pPr lvl="0" indent="0">
+              <a:buNone/>
+            </a:pPr>
+            <a:r>
+              <a:rPr>
+                <a:solidFill>
+                  <a:srgbClr val="5E5E5E"/>
+                </a:solidFill>
+                <a:latin typeface="Courier"/>
+              </a:rPr>
+              <a:t># Assuming your dataframe is called df</a:t>
+            </a:r>
+            <a:br/>
+            <a:r>
+              <a:rPr>
+                <a:solidFill>
+                  <a:srgbClr val="003B4F"/>
+                </a:solidFill>
+                <a:latin typeface="Courier"/>
+              </a:rPr>
+              <a:t>group_summary </a:t>
+            </a:r>
+            <a:r>
+              <a:rPr>
+                <a:solidFill>
+                  <a:srgbClr val="5E5E5E"/>
+                </a:solidFill>
+                <a:latin typeface="Courier"/>
+              </a:rPr>
+              <a:t>%&gt;%</a:t>
+            </a:r>
+            <a:br/>
+            <a:r>
+              <a:rPr>
+                <a:solidFill>
+                  <a:srgbClr val="003B4F"/>
+                </a:solidFill>
+                <a:latin typeface="Courier"/>
+              </a:rPr>
+              <a:t>  </a:t>
+            </a:r>
+            <a:r>
+              <a:rPr>
+                <a:solidFill>
+                  <a:srgbClr val="4758AB"/>
+                </a:solidFill>
+                <a:latin typeface="Courier"/>
+              </a:rPr>
+              <a:t>summarize</a:t>
+            </a:r>
+            <a:r>
+              <a:rPr>
+                <a:solidFill>
+                  <a:srgbClr val="003B4F"/>
+                </a:solidFill>
+                <a:latin typeface="Courier"/>
+              </a:rPr>
+              <a:t>(</a:t>
+            </a:r>
+            <a:r>
+              <a:rPr>
+                <a:solidFill>
+                  <a:srgbClr val="657422"/>
+                </a:solidFill>
+                <a:latin typeface="Courier"/>
+              </a:rPr>
+              <a:t>difference =</a:t>
+            </a:r>
+            <a:r>
+              <a:rPr>
+                <a:solidFill>
+                  <a:srgbClr val="003B4F"/>
+                </a:solidFill>
+                <a:latin typeface="Courier"/>
+              </a:rPr>
+              <a:t> mean_length[side </a:t>
+            </a:r>
+            <a:r>
+              <a:rPr>
+                <a:solidFill>
+                  <a:srgbClr val="5E5E5E"/>
+                </a:solidFill>
+                <a:latin typeface="Courier"/>
+              </a:rPr>
+              <a:t>==</a:t>
+            </a:r>
+            <a:r>
+              <a:rPr>
+                <a:solidFill>
+                  <a:srgbClr val="003B4F"/>
+                </a:solidFill>
+                <a:latin typeface="Courier"/>
+              </a:rPr>
+              <a:t> </a:t>
+            </a:r>
+            <a:r>
+              <a:rPr>
+                <a:solidFill>
+                  <a:srgbClr val="20794D"/>
+                </a:solidFill>
+                <a:latin typeface="Courier"/>
+              </a:rPr>
+              <a:t>"shady"</a:t>
+            </a:r>
+            <a:r>
+              <a:rPr>
+                <a:solidFill>
+                  <a:srgbClr val="003B4F"/>
+                </a:solidFill>
+                <a:latin typeface="Courier"/>
+              </a:rPr>
+              <a:t>] </a:t>
+            </a:r>
+            <a:r>
+              <a:rPr>
+                <a:solidFill>
+                  <a:srgbClr val="5E5E5E"/>
+                </a:solidFill>
+                <a:latin typeface="Courier"/>
+              </a:rPr>
+              <a:t>-</a:t>
+            </a:r>
+            <a:r>
+              <a:rPr>
+                <a:solidFill>
+                  <a:srgbClr val="003B4F"/>
+                </a:solidFill>
+                <a:latin typeface="Courier"/>
+              </a:rPr>
+              <a:t> mean_length[side </a:t>
+            </a:r>
+            <a:r>
+              <a:rPr>
+                <a:solidFill>
+                  <a:srgbClr val="5E5E5E"/>
+                </a:solidFill>
+                <a:latin typeface="Courier"/>
+              </a:rPr>
+              <a:t>==</a:t>
+            </a:r>
+            <a:r>
+              <a:rPr>
+                <a:solidFill>
+                  <a:srgbClr val="003B4F"/>
+                </a:solidFill>
+                <a:latin typeface="Courier"/>
+              </a:rPr>
+              <a:t> </a:t>
+            </a:r>
+            <a:r>
+              <a:rPr>
+                <a:solidFill>
+                  <a:srgbClr val="20794D"/>
+                </a:solidFill>
+                <a:latin typeface="Courier"/>
+              </a:rPr>
+              <a:t>"sunny"</a:t>
+            </a:r>
+            <a:r>
+              <a:rPr>
+                <a:solidFill>
+                  <a:srgbClr val="003B4F"/>
+                </a:solidFill>
+                <a:latin typeface="Courier"/>
+              </a:rPr>
+              <a:t>])</a:t>
+            </a:r>
+          </a:p>
+          <a:p>
+            <a:pPr lvl="0" indent="0">
+              <a:buNone/>
+            </a:pPr>
+            <a:r>
+              <a:rPr sz="2000">
+                <a:latin typeface="Courier"/>
+              </a:rPr>
+              <a:t># A tibble: 1 × 1
+  difference
+       &lt;dbl&gt;
+1       1.45</a:t>
+            </a:r>
+          </a:p>
+        </p:txBody>
+      </p:sp>
+    </p:spTree>
+  </p:cSld>
+</p:sld>
+</file>
+
 <file path=ppt/slides/slide26.xml><?xml version="1.0" encoding="utf-8"?>
 <p:sld xmlns:a="http://schemas.openxmlformats.org/drawingml/2006/main" xmlns:r="http://schemas.openxmlformats.org/officeDocument/2006/relationships" xmlns:p="http://schemas.openxmlformats.org/presentationml/2006/main">
   <p:cSld>
@@ -7273,7 +7303,7 @@
             </a:pPr>
             <a:r>
               <a:rPr/>
-              <a:t>Practice Exercise 4: Effect Size</a:t>
+              <a:t>Practice Exercise 5: ggplot Summary Statistics</a:t>
             </a:r>
           </a:p>
         </p:txBody>
@@ -7298,7 +7328,7 @@
             </a:pPr>
             <a:r>
               <a:rPr sz="2000" b="1"/>
-              <a:t>Practice Exercise 4: Effect size</a:t>
+              <a:t>Practice Exercise 5: Using GGPLOT to get summary stats</a:t>
             </a:r>
           </a:p>
           <a:p>
@@ -7307,7 +7337,7 @@
             </a:pPr>
             <a:r>
               <a:rPr sz="2000"/>
-              <a:t>We could also look at the difference in means… some cool code here</a:t>
+              <a:t>GGplot also has code to make the mean and standard error plots we are interested in along with a lot of others</a:t>
             </a:r>
           </a:p>
           <a:p>
@@ -7331,7 +7361,97 @@
                 </a:solidFill>
                 <a:latin typeface="Courier"/>
               </a:rPr>
-              <a:t>group_summary </a:t>
+              <a:t>needle_mean_se_plot &lt;- </a:t>
+            </a:r>
+            <a:r>
+              <a:rPr>
+                <a:solidFill>
+                  <a:srgbClr val="4758AB"/>
+                </a:solidFill>
+                <a:latin typeface="Courier"/>
+              </a:rPr>
+              <a:t>ggplot</a:t>
+            </a:r>
+            <a:r>
+              <a:rPr>
+                <a:solidFill>
+                  <a:srgbClr val="003B4F"/>
+                </a:solidFill>
+                <a:latin typeface="Courier"/>
+              </a:rPr>
+              <a:t>(ps_df, </a:t>
+            </a:r>
+            <a:r>
+              <a:rPr>
+                <a:solidFill>
+                  <a:srgbClr val="4758AB"/>
+                </a:solidFill>
+                <a:latin typeface="Courier"/>
+              </a:rPr>
+              <a:t>aes</a:t>
+            </a:r>
+            <a:r>
+              <a:rPr>
+                <a:solidFill>
+                  <a:srgbClr val="003B4F"/>
+                </a:solidFill>
+                <a:latin typeface="Courier"/>
+              </a:rPr>
+              <a:t>(</a:t>
+            </a:r>
+            <a:r>
+              <a:rPr>
+                <a:solidFill>
+                  <a:srgbClr val="657422"/>
+                </a:solidFill>
+                <a:latin typeface="Courier"/>
+              </a:rPr>
+              <a:t>x =</a:t>
+            </a:r>
+            <a:r>
+              <a:rPr>
+                <a:solidFill>
+                  <a:srgbClr val="003B4F"/>
+                </a:solidFill>
+                <a:latin typeface="Courier"/>
+              </a:rPr>
+              <a:t> side, </a:t>
+            </a:r>
+            <a:r>
+              <a:rPr>
+                <a:solidFill>
+                  <a:srgbClr val="657422"/>
+                </a:solidFill>
+                <a:latin typeface="Courier"/>
+              </a:rPr>
+              <a:t>y =</a:t>
+            </a:r>
+            <a:r>
+              <a:rPr>
+                <a:solidFill>
+                  <a:srgbClr val="003B4F"/>
+                </a:solidFill>
+                <a:latin typeface="Courier"/>
+              </a:rPr>
+              <a:t> length_mm, </a:t>
+            </a:r>
+            <a:r>
+              <a:rPr>
+                <a:solidFill>
+                  <a:srgbClr val="657422"/>
+                </a:solidFill>
+                <a:latin typeface="Courier"/>
+              </a:rPr>
+              <a:t>color =</a:t>
+            </a:r>
+            <a:r>
+              <a:rPr>
+                <a:solidFill>
+                  <a:srgbClr val="003B4F"/>
+                </a:solidFill>
+                <a:latin typeface="Courier"/>
+              </a:rPr>
+              <a:t> side)) </a:t>
             </a:r>
             <a:r>
               <a:rPr>
@@ -7340,7 +7460,7 @@
                 </a:solidFill>
                 <a:latin typeface="Courier"/>
               </a:rPr>
-              <a:t>%&gt;%</a:t>
+              <a:t>+</a:t>
             </a:r>
             <a:br/>
             <a:r>
@@ -7359,7 +7479,7 @@
                 </a:solidFill>
                 <a:latin typeface="Courier"/>
               </a:rPr>
-              <a:t>summarize</a:t>
+              <a:t>stat_summary</a:t>
             </a:r>
             <a:r>
               <a:rPr>
@@ -7377,16 +7497,52 @@
                 </a:solidFill>
                 <a:latin typeface="Courier"/>
               </a:rPr>
-              <a:t>difference =</a:t>
-            </a:r>
-            <a:r>
-              <a:rPr>
-                <a:solidFill>
-                  <a:srgbClr val="003B4F"/>
-                </a:solidFill>
-                <a:latin typeface="Courier"/>
-              </a:rPr>
-              <a:t> mean_length[side </a:t>
+              <a:t>fun =</a:t>
+            </a:r>
+            <a:r>
+              <a:rPr>
+                <a:solidFill>
+                  <a:srgbClr val="003B4F"/>
+                </a:solidFill>
+                <a:latin typeface="Courier"/>
+              </a:rPr>
+              <a:t> mean, </a:t>
+            </a:r>
+            <a:r>
+              <a:rPr>
+                <a:solidFill>
+                  <a:srgbClr val="657422"/>
+                </a:solidFill>
+                <a:latin typeface="Courier"/>
+              </a:rPr>
+              <a:t>geom =</a:t>
+            </a:r>
+            <a:r>
+              <a:rPr>
+                <a:solidFill>
+                  <a:srgbClr val="003B4F"/>
+                </a:solidFill>
+                <a:latin typeface="Courier"/>
+              </a:rPr>
+              <a:t> </a:t>
+            </a:r>
+            <a:r>
+              <a:rPr>
+                <a:solidFill>
+                  <a:srgbClr val="20794D"/>
+                </a:solidFill>
+                <a:latin typeface="Courier"/>
+              </a:rPr>
+              <a:t>"point"</a:t>
+            </a:r>
+            <a:r>
+              <a:rPr>
+                <a:solidFill>
+                  <a:srgbClr val="003B4F"/>
+                </a:solidFill>
+                <a:latin typeface="Courier"/>
+              </a:rPr>
+              <a:t>) </a:t>
             </a:r>
             <a:r>
               <a:rPr>
@@ -7395,7 +7551,62 @@
                 </a:solidFill>
                 <a:latin typeface="Courier"/>
               </a:rPr>
-              <a:t>==</a:t>
+              <a:t>+</a:t>
+            </a:r>
+            <a:br/>
+            <a:r>
+              <a:rPr>
+                <a:solidFill>
+                  <a:srgbClr val="003B4F"/>
+                </a:solidFill>
+                <a:latin typeface="Courier"/>
+              </a:rPr>
+              <a:t>  </a:t>
+            </a:r>
+            <a:r>
+              <a:rPr>
+                <a:solidFill>
+                  <a:srgbClr val="4758AB"/>
+                </a:solidFill>
+                <a:latin typeface="Courier"/>
+              </a:rPr>
+              <a:t>stat_summary</a:t>
+            </a:r>
+            <a:r>
+              <a:rPr>
+                <a:solidFill>
+                  <a:srgbClr val="003B4F"/>
+                </a:solidFill>
+                <a:latin typeface="Courier"/>
+              </a:rPr>
+              <a:t>(</a:t>
+            </a:r>
+            <a:r>
+              <a:rPr>
+                <a:solidFill>
+                  <a:srgbClr val="657422"/>
+                </a:solidFill>
+                <a:latin typeface="Courier"/>
+              </a:rPr>
+              <a:t>fun.data =</a:t>
+            </a:r>
+            <a:r>
+              <a:rPr>
+                <a:solidFill>
+                  <a:srgbClr val="003B4F"/>
+                </a:solidFill>
+                <a:latin typeface="Courier"/>
+              </a:rPr>
+              <a:t> mean_se, </a:t>
+            </a:r>
+            <a:r>
+              <a:rPr>
+                <a:solidFill>
+                  <a:srgbClr val="657422"/>
+                </a:solidFill>
+                <a:latin typeface="Courier"/>
+              </a:rPr>
+              <a:t>geom =</a:t>
             </a:r>
             <a:r>
               <a:rPr>
@@ -7413,16 +7624,52 @@
                 </a:solidFill>
                 <a:latin typeface="Courier"/>
               </a:rPr>
-              <a:t>"shady"</a:t>
-            </a:r>
-            <a:r>
-              <a:rPr>
-                <a:solidFill>
-                  <a:srgbClr val="003B4F"/>
-                </a:solidFill>
-                <a:latin typeface="Courier"/>
-              </a:rPr>
-              <a:t>] </a:t>
+              <a:t>"errorbar"</a:t>
+            </a:r>
+            <a:r>
+              <a:rPr>
+                <a:solidFill>
+                  <a:srgbClr val="003B4F"/>
+                </a:solidFill>
+                <a:latin typeface="Courier"/>
+              </a:rPr>
+              <a:t>, </a:t>
+            </a:r>
+            <a:r>
+              <a:rPr>
+                <a:solidFill>
+                  <a:srgbClr val="657422"/>
+                </a:solidFill>
+                <a:latin typeface="Courier"/>
+              </a:rPr>
+              <a:t>width =</a:t>
+            </a:r>
+            <a:r>
+              <a:rPr>
+                <a:solidFill>
+                  <a:srgbClr val="003B4F"/>
+                </a:solidFill>
+                <a:latin typeface="Courier"/>
+              </a:rPr>
+              <a:t> </a:t>
+            </a:r>
+            <a:r>
+              <a:rPr>
+                <a:solidFill>
+                  <a:srgbClr val="AD0000"/>
+                </a:solidFill>
+                <a:latin typeface="Courier"/>
+              </a:rPr>
+              <a:t>0.2</a:t>
+            </a:r>
+            <a:r>
+              <a:rPr>
+                <a:solidFill>
+                  <a:srgbClr val="003B4F"/>
+                </a:solidFill>
+                <a:latin typeface="Courier"/>
+              </a:rPr>
+              <a:t>) </a:t>
             </a:r>
             <a:r>
               <a:rPr>
@@ -7431,16 +7678,127 @@
                 </a:solidFill>
                 <a:latin typeface="Courier"/>
               </a:rPr>
-              <a:t>-</a:t>
-            </a:r>
-            <a:r>
-              <a:rPr>
-                <a:solidFill>
-                  <a:srgbClr val="003B4F"/>
-                </a:solidFill>
-                <a:latin typeface="Courier"/>
-              </a:rPr>
-              <a:t> mean_length[side </a:t>
+              <a:t>+</a:t>
+            </a:r>
+            <a:br/>
+            <a:r>
+              <a:rPr>
+                <a:solidFill>
+                  <a:srgbClr val="003B4F"/>
+                </a:solidFill>
+                <a:latin typeface="Courier"/>
+              </a:rPr>
+              <a:t>  </a:t>
+            </a:r>
+            <a:r>
+              <a:rPr>
+                <a:solidFill>
+                  <a:srgbClr val="4758AB"/>
+                </a:solidFill>
+                <a:latin typeface="Courier"/>
+              </a:rPr>
+              <a:t>labs</a:t>
+            </a:r>
+            <a:r>
+              <a:rPr>
+                <a:solidFill>
+                  <a:srgbClr val="003B4F"/>
+                </a:solidFill>
+                <a:latin typeface="Courier"/>
+              </a:rPr>
+              <a:t>(</a:t>
+            </a:r>
+            <a:br/>
+            <a:r>
+              <a:rPr>
+                <a:solidFill>
+                  <a:srgbClr val="003B4F"/>
+                </a:solidFill>
+                <a:latin typeface="Courier"/>
+              </a:rPr>
+              <a:t>       </a:t>
+            </a:r>
+            <a:r>
+              <a:rPr>
+                <a:solidFill>
+                  <a:srgbClr val="657422"/>
+                </a:solidFill>
+                <a:latin typeface="Courier"/>
+              </a:rPr>
+              <a:t>x =</a:t>
+            </a:r>
+            <a:r>
+              <a:rPr>
+                <a:solidFill>
+                  <a:srgbClr val="003B4F"/>
+                </a:solidFill>
+                <a:latin typeface="Courier"/>
+              </a:rPr>
+              <a:t> </a:t>
+            </a:r>
+            <a:r>
+              <a:rPr>
+                <a:solidFill>
+                  <a:srgbClr val="20794D"/>
+                </a:solidFill>
+                <a:latin typeface="Courier"/>
+              </a:rPr>
+              <a:t>"side"</a:t>
+            </a:r>
+            <a:r>
+              <a:rPr>
+                <a:solidFill>
+                  <a:srgbClr val="003B4F"/>
+                </a:solidFill>
+                <a:latin typeface="Courier"/>
+              </a:rPr>
+              <a:t>,</a:t>
+            </a:r>
+            <a:br/>
+            <a:r>
+              <a:rPr>
+                <a:solidFill>
+                  <a:srgbClr val="003B4F"/>
+                </a:solidFill>
+                <a:latin typeface="Courier"/>
+              </a:rPr>
+              <a:t>       </a:t>
+            </a:r>
+            <a:r>
+              <a:rPr>
+                <a:solidFill>
+                  <a:srgbClr val="657422"/>
+                </a:solidFill>
+                <a:latin typeface="Courier"/>
+              </a:rPr>
+              <a:t>y =</a:t>
+            </a:r>
+            <a:r>
+              <a:rPr>
+                <a:solidFill>
+                  <a:srgbClr val="003B4F"/>
+                </a:solidFill>
+                <a:latin typeface="Courier"/>
+              </a:rPr>
+              <a:t> </a:t>
+            </a:r>
+            <a:r>
+              <a:rPr>
+                <a:solidFill>
+                  <a:srgbClr val="20794D"/>
+                </a:solidFill>
+                <a:latin typeface="Courier"/>
+              </a:rPr>
+              <a:t>"Mean Length (mm)"</a:t>
+            </a:r>
+            <a:r>
+              <a:rPr>
+                <a:solidFill>
+                  <a:srgbClr val="003B4F"/>
+                </a:solidFill>
+                <a:latin typeface="Courier"/>
+              </a:rPr>
+              <a:t>) </a:t>
             </a:r>
             <a:r>
               <a:rPr>
@@ -7449,49 +7807,51 @@
                 </a:solidFill>
                 <a:latin typeface="Courier"/>
               </a:rPr>
-              <a:t>==</a:t>
-            </a:r>
-            <a:r>
-              <a:rPr>
-                <a:solidFill>
-                  <a:srgbClr val="003B4F"/>
-                </a:solidFill>
-                <a:latin typeface="Courier"/>
-              </a:rPr>
-              <a:t> </a:t>
-            </a:r>
-            <a:r>
-              <a:rPr>
-                <a:solidFill>
-                  <a:srgbClr val="20794D"/>
-                </a:solidFill>
-                <a:latin typeface="Courier"/>
-              </a:rPr>
-              <a:t>"sunny"</a:t>
-            </a:r>
-            <a:r>
-              <a:rPr>
-                <a:solidFill>
-                  <a:srgbClr val="003B4F"/>
-                </a:solidFill>
-                <a:latin typeface="Courier"/>
-              </a:rPr>
-              <a:t>])</a:t>
-            </a:r>
-          </a:p>
-          <a:p>
-            <a:pPr lvl="0" indent="0">
-              <a:buNone/>
-            </a:pPr>
-            <a:r>
-              <a:rPr sz="2000">
-                <a:latin typeface="Courier"/>
-              </a:rPr>
-              <a:t># A tibble: 1 × 1
-  difference
-       &lt;dbl&gt;
-1       1.45</a:t>
-            </a:r>
+              <a:t>+</a:t>
+            </a:r>
+            <a:br/>
+            <a:r>
+              <a:rPr>
+                <a:solidFill>
+                  <a:srgbClr val="003B4F"/>
+                </a:solidFill>
+                <a:latin typeface="Courier"/>
+              </a:rPr>
+              <a:t>  </a:t>
+            </a:r>
+            <a:r>
+              <a:rPr>
+                <a:solidFill>
+                  <a:srgbClr val="4758AB"/>
+                </a:solidFill>
+                <a:latin typeface="Courier"/>
+              </a:rPr>
+              <a:t>theme_classic</a:t>
+            </a:r>
+            <a:r>
+              <a:rPr>
+                <a:solidFill>
+                  <a:srgbClr val="003B4F"/>
+                </a:solidFill>
+                <a:latin typeface="Courier"/>
+              </a:rPr>
+              <a:t>()</a:t>
+            </a:r>
+            <a:br/>
+            <a:r>
+              <a:rPr>
+                <a:solidFill>
+                  <a:srgbClr val="003B4F"/>
+                </a:solidFill>
+                <a:latin typeface="Courier"/>
+              </a:rPr>
+              <a:t>needle_mean_se_plot</a:t>
+            </a:r>
+          </a:p>
+          <a:p>
+            <a:pPr lvl="0" indent="0" marL="1270000">
+              <a:buNone/>
+            </a:pPr>
           </a:p>
         </p:txBody>
       </p:sp>
@@ -7541,8 +7901,12 @@
               <a:buNone/>
             </a:pPr>
             <a:r>
-              <a:rPr/>
-              <a:t>Practice Exercise 5: ggplot Summary Statistics</a:t>
+              <a:rPr b="1"/>
+              <a:t>Lecture 5:</a:t>
+            </a:r>
+            <a:r>
+              <a:rPr/>
+              <a:t> Testing Assumptions for Two-Sample T-Test</a:t>
             </a:r>
           </a:p>
         </p:txBody>
@@ -7562,535 +7926,63 @@
           <a:bodyPr/>
           <a:lstStyle/>
           <a:p>
-            <a:pPr lvl="0" indent="0" marL="1270000">
-              <a:buNone/>
-            </a:pPr>
-            <a:r>
-              <a:rPr sz="2000" b="1"/>
-              <a:t>Practice Exercise 5: Using GGPLOT to get summary stats</a:t>
-            </a:r>
-          </a:p>
-          <a:p>
-            <a:pPr lvl="0" indent="0" marL="1270000">
-              <a:buNone/>
-            </a:pPr>
-            <a:r>
-              <a:rPr sz="2000"/>
-              <a:t>GGplot also has code to make the mean and standard error plots we are interested in along with a lot of others</a:t>
-            </a:r>
-          </a:p>
-          <a:p>
-            <a:pPr lvl="0" indent="0">
-              <a:buNone/>
-            </a:pPr>
-            <a:r>
-              <a:rPr>
-                <a:solidFill>
-                  <a:srgbClr val="5E5E5E"/>
-                </a:solidFill>
-                <a:latin typeface="Courier"/>
-              </a:rPr>
-              <a:t># Assuming your dataframe is called df</a:t>
-            </a:r>
-            <a:br/>
-            <a:r>
-              <a:rPr>
-                <a:solidFill>
-                  <a:srgbClr val="003B4F"/>
-                </a:solidFill>
-                <a:latin typeface="Courier"/>
-              </a:rPr>
-              <a:t>neelde_mean_se_plot &lt;- </a:t>
-            </a:r>
-            <a:r>
-              <a:rPr>
-                <a:solidFill>
-                  <a:srgbClr val="4758AB"/>
-                </a:solidFill>
-                <a:latin typeface="Courier"/>
-              </a:rPr>
-              <a:t>ggplot</a:t>
-            </a:r>
-            <a:r>
-              <a:rPr>
-                <a:solidFill>
-                  <a:srgbClr val="003B4F"/>
-                </a:solidFill>
-                <a:latin typeface="Courier"/>
-              </a:rPr>
-              <a:t>(ps_df, </a:t>
-            </a:r>
-            <a:r>
-              <a:rPr>
-                <a:solidFill>
-                  <a:srgbClr val="4758AB"/>
-                </a:solidFill>
-                <a:latin typeface="Courier"/>
-              </a:rPr>
-              <a:t>aes</a:t>
-            </a:r>
-            <a:r>
-              <a:rPr>
-                <a:solidFill>
-                  <a:srgbClr val="003B4F"/>
-                </a:solidFill>
-                <a:latin typeface="Courier"/>
-              </a:rPr>
-              <a:t>(</a:t>
-            </a:r>
-            <a:r>
-              <a:rPr>
-                <a:solidFill>
-                  <a:srgbClr val="657422"/>
-                </a:solidFill>
-                <a:latin typeface="Courier"/>
-              </a:rPr>
-              <a:t>x =</a:t>
-            </a:r>
-            <a:r>
-              <a:rPr>
-                <a:solidFill>
-                  <a:srgbClr val="003B4F"/>
-                </a:solidFill>
-                <a:latin typeface="Courier"/>
-              </a:rPr>
-              <a:t> side, </a:t>
-            </a:r>
-            <a:r>
-              <a:rPr>
-                <a:solidFill>
-                  <a:srgbClr val="657422"/>
-                </a:solidFill>
-                <a:latin typeface="Courier"/>
-              </a:rPr>
-              <a:t>y =</a:t>
-            </a:r>
-            <a:r>
-              <a:rPr>
-                <a:solidFill>
-                  <a:srgbClr val="003B4F"/>
-                </a:solidFill>
-                <a:latin typeface="Courier"/>
-              </a:rPr>
-              <a:t> length_mm, </a:t>
-            </a:r>
-            <a:r>
-              <a:rPr>
-                <a:solidFill>
-                  <a:srgbClr val="657422"/>
-                </a:solidFill>
-                <a:latin typeface="Courier"/>
-              </a:rPr>
-              <a:t>color =</a:t>
-            </a:r>
-            <a:r>
-              <a:rPr>
-                <a:solidFill>
-                  <a:srgbClr val="003B4F"/>
-                </a:solidFill>
-                <a:latin typeface="Courier"/>
-              </a:rPr>
-              <a:t> side)) </a:t>
-            </a:r>
-            <a:r>
-              <a:rPr>
-                <a:solidFill>
-                  <a:srgbClr val="5E5E5E"/>
-                </a:solidFill>
-                <a:latin typeface="Courier"/>
-              </a:rPr>
-              <a:t>+</a:t>
-            </a:r>
-            <a:br/>
-            <a:r>
-              <a:rPr>
-                <a:solidFill>
-                  <a:srgbClr val="003B4F"/>
-                </a:solidFill>
-                <a:latin typeface="Courier"/>
-              </a:rPr>
-              <a:t>  </a:t>
-            </a:r>
-            <a:r>
-              <a:rPr>
-                <a:solidFill>
-                  <a:srgbClr val="4758AB"/>
-                </a:solidFill>
-                <a:latin typeface="Courier"/>
-              </a:rPr>
-              <a:t>stat_summary</a:t>
-            </a:r>
-            <a:r>
-              <a:rPr>
-                <a:solidFill>
-                  <a:srgbClr val="003B4F"/>
-                </a:solidFill>
-                <a:latin typeface="Courier"/>
-              </a:rPr>
-              <a:t>(</a:t>
-            </a:r>
-            <a:r>
-              <a:rPr>
-                <a:solidFill>
-                  <a:srgbClr val="657422"/>
-                </a:solidFill>
-                <a:latin typeface="Courier"/>
-              </a:rPr>
-              <a:t>fun =</a:t>
-            </a:r>
-            <a:r>
-              <a:rPr>
-                <a:solidFill>
-                  <a:srgbClr val="003B4F"/>
-                </a:solidFill>
-                <a:latin typeface="Courier"/>
-              </a:rPr>
-              <a:t> mean, </a:t>
-            </a:r>
-            <a:r>
-              <a:rPr>
-                <a:solidFill>
-                  <a:srgbClr val="657422"/>
-                </a:solidFill>
-                <a:latin typeface="Courier"/>
-              </a:rPr>
-              <a:t>geom =</a:t>
-            </a:r>
-            <a:r>
-              <a:rPr>
-                <a:solidFill>
-                  <a:srgbClr val="003B4F"/>
-                </a:solidFill>
-                <a:latin typeface="Courier"/>
-              </a:rPr>
-              <a:t> </a:t>
-            </a:r>
-            <a:r>
-              <a:rPr>
-                <a:solidFill>
-                  <a:srgbClr val="20794D"/>
-                </a:solidFill>
-                <a:latin typeface="Courier"/>
-              </a:rPr>
-              <a:t>"point"</a:t>
-            </a:r>
-            <a:r>
-              <a:rPr>
-                <a:solidFill>
-                  <a:srgbClr val="003B4F"/>
-                </a:solidFill>
-                <a:latin typeface="Courier"/>
-              </a:rPr>
-              <a:t>) </a:t>
-            </a:r>
-            <a:r>
-              <a:rPr>
-                <a:solidFill>
-                  <a:srgbClr val="5E5E5E"/>
-                </a:solidFill>
-                <a:latin typeface="Courier"/>
-              </a:rPr>
-              <a:t>+</a:t>
-            </a:r>
-            <a:br/>
-            <a:r>
-              <a:rPr>
-                <a:solidFill>
-                  <a:srgbClr val="003B4F"/>
-                </a:solidFill>
-                <a:latin typeface="Courier"/>
-              </a:rPr>
-              <a:t>  </a:t>
-            </a:r>
-            <a:r>
-              <a:rPr>
-                <a:solidFill>
-                  <a:srgbClr val="4758AB"/>
-                </a:solidFill>
-                <a:latin typeface="Courier"/>
-              </a:rPr>
-              <a:t>stat_summary</a:t>
-            </a:r>
-            <a:r>
-              <a:rPr>
-                <a:solidFill>
-                  <a:srgbClr val="003B4F"/>
-                </a:solidFill>
-                <a:latin typeface="Courier"/>
-              </a:rPr>
-              <a:t>(</a:t>
-            </a:r>
-            <a:r>
-              <a:rPr>
-                <a:solidFill>
-                  <a:srgbClr val="657422"/>
-                </a:solidFill>
-                <a:latin typeface="Courier"/>
-              </a:rPr>
-              <a:t>fun.data =</a:t>
-            </a:r>
-            <a:r>
-              <a:rPr>
-                <a:solidFill>
-                  <a:srgbClr val="003B4F"/>
-                </a:solidFill>
-                <a:latin typeface="Courier"/>
-              </a:rPr>
-              <a:t> mean_se, </a:t>
-            </a:r>
-            <a:r>
-              <a:rPr>
-                <a:solidFill>
-                  <a:srgbClr val="657422"/>
-                </a:solidFill>
-                <a:latin typeface="Courier"/>
-              </a:rPr>
-              <a:t>geom =</a:t>
-            </a:r>
-            <a:r>
-              <a:rPr>
-                <a:solidFill>
-                  <a:srgbClr val="003B4F"/>
-                </a:solidFill>
-                <a:latin typeface="Courier"/>
-              </a:rPr>
-              <a:t> </a:t>
-            </a:r>
-            <a:r>
-              <a:rPr>
-                <a:solidFill>
-                  <a:srgbClr val="20794D"/>
-                </a:solidFill>
-                <a:latin typeface="Courier"/>
-              </a:rPr>
-              <a:t>"errorbar"</a:t>
-            </a:r>
-            <a:r>
-              <a:rPr>
-                <a:solidFill>
-                  <a:srgbClr val="003B4F"/>
-                </a:solidFill>
-                <a:latin typeface="Courier"/>
-              </a:rPr>
-              <a:t>, </a:t>
-            </a:r>
-            <a:r>
-              <a:rPr>
-                <a:solidFill>
-                  <a:srgbClr val="657422"/>
-                </a:solidFill>
-                <a:latin typeface="Courier"/>
-              </a:rPr>
-              <a:t>width =</a:t>
-            </a:r>
-            <a:r>
-              <a:rPr>
-                <a:solidFill>
-                  <a:srgbClr val="003B4F"/>
-                </a:solidFill>
-                <a:latin typeface="Courier"/>
-              </a:rPr>
-              <a:t> </a:t>
-            </a:r>
-            <a:r>
-              <a:rPr>
-                <a:solidFill>
-                  <a:srgbClr val="AD0000"/>
-                </a:solidFill>
-                <a:latin typeface="Courier"/>
-              </a:rPr>
-              <a:t>0.2</a:t>
-            </a:r>
-            <a:r>
-              <a:rPr>
-                <a:solidFill>
-                  <a:srgbClr val="003B4F"/>
-                </a:solidFill>
-                <a:latin typeface="Courier"/>
-              </a:rPr>
-              <a:t>) </a:t>
-            </a:r>
-            <a:r>
-              <a:rPr>
-                <a:solidFill>
-                  <a:srgbClr val="5E5E5E"/>
-                </a:solidFill>
-                <a:latin typeface="Courier"/>
-              </a:rPr>
-              <a:t>+</a:t>
-            </a:r>
-            <a:br/>
-            <a:r>
-              <a:rPr>
-                <a:solidFill>
-                  <a:srgbClr val="003B4F"/>
-                </a:solidFill>
-                <a:latin typeface="Courier"/>
-              </a:rPr>
-              <a:t>  </a:t>
-            </a:r>
-            <a:r>
-              <a:rPr>
-                <a:solidFill>
-                  <a:srgbClr val="4758AB"/>
-                </a:solidFill>
-                <a:latin typeface="Courier"/>
-              </a:rPr>
-              <a:t>labs</a:t>
-            </a:r>
-            <a:r>
-              <a:rPr>
-                <a:solidFill>
-                  <a:srgbClr val="003B4F"/>
-                </a:solidFill>
-                <a:latin typeface="Courier"/>
-              </a:rPr>
-              <a:t>(</a:t>
-            </a:r>
-            <a:br/>
-            <a:r>
-              <a:rPr>
-                <a:solidFill>
-                  <a:srgbClr val="003B4F"/>
-                </a:solidFill>
-                <a:latin typeface="Courier"/>
-              </a:rPr>
-              <a:t>       </a:t>
-            </a:r>
-            <a:r>
-              <a:rPr>
-                <a:solidFill>
-                  <a:srgbClr val="657422"/>
-                </a:solidFill>
-                <a:latin typeface="Courier"/>
-              </a:rPr>
-              <a:t>x =</a:t>
-            </a:r>
-            <a:r>
-              <a:rPr>
-                <a:solidFill>
-                  <a:srgbClr val="003B4F"/>
-                </a:solidFill>
-                <a:latin typeface="Courier"/>
-              </a:rPr>
-              <a:t> </a:t>
-            </a:r>
-            <a:r>
-              <a:rPr>
-                <a:solidFill>
-                  <a:srgbClr val="20794D"/>
-                </a:solidFill>
-                <a:latin typeface="Courier"/>
-              </a:rPr>
-              <a:t>"side"</a:t>
-            </a:r>
-            <a:r>
-              <a:rPr>
-                <a:solidFill>
-                  <a:srgbClr val="003B4F"/>
-                </a:solidFill>
-                <a:latin typeface="Courier"/>
-              </a:rPr>
-              <a:t>,</a:t>
-            </a:r>
-            <a:br/>
-            <a:r>
-              <a:rPr>
-                <a:solidFill>
-                  <a:srgbClr val="003B4F"/>
-                </a:solidFill>
-                <a:latin typeface="Courier"/>
-              </a:rPr>
-              <a:t>       </a:t>
-            </a:r>
-            <a:r>
-              <a:rPr>
-                <a:solidFill>
-                  <a:srgbClr val="657422"/>
-                </a:solidFill>
-                <a:latin typeface="Courier"/>
-              </a:rPr>
-              <a:t>y =</a:t>
-            </a:r>
-            <a:r>
-              <a:rPr>
-                <a:solidFill>
-                  <a:srgbClr val="003B4F"/>
-                </a:solidFill>
-                <a:latin typeface="Courier"/>
-              </a:rPr>
-              <a:t> </a:t>
-            </a:r>
-            <a:r>
-              <a:rPr>
-                <a:solidFill>
-                  <a:srgbClr val="20794D"/>
-                </a:solidFill>
-                <a:latin typeface="Courier"/>
-              </a:rPr>
-              <a:t>"Mean Length (mm)"</a:t>
-            </a:r>
-            <a:r>
-              <a:rPr>
-                <a:solidFill>
-                  <a:srgbClr val="003B4F"/>
-                </a:solidFill>
-                <a:latin typeface="Courier"/>
-              </a:rPr>
-              <a:t>) </a:t>
-            </a:r>
-            <a:r>
-              <a:rPr>
-                <a:solidFill>
-                  <a:srgbClr val="5E5E5E"/>
-                </a:solidFill>
-                <a:latin typeface="Courier"/>
-              </a:rPr>
-              <a:t>+</a:t>
-            </a:r>
-            <a:br/>
-            <a:r>
-              <a:rPr>
-                <a:solidFill>
-                  <a:srgbClr val="003B4F"/>
-                </a:solidFill>
-                <a:latin typeface="Courier"/>
-              </a:rPr>
-              <a:t>  </a:t>
-            </a:r>
-            <a:r>
-              <a:rPr>
-                <a:solidFill>
-                  <a:srgbClr val="4758AB"/>
-                </a:solidFill>
-                <a:latin typeface="Courier"/>
-              </a:rPr>
-              <a:t>theme_classic</a:t>
-            </a:r>
-            <a:r>
-              <a:rPr>
-                <a:solidFill>
-                  <a:srgbClr val="003B4F"/>
-                </a:solidFill>
-                <a:latin typeface="Courier"/>
-              </a:rPr>
-              <a:t>()</a:t>
-            </a:r>
-            <a:br/>
-            <a:r>
-              <a:rPr>
-                <a:solidFill>
-                  <a:srgbClr val="003B4F"/>
-                </a:solidFill>
-                <a:latin typeface="Courier"/>
-              </a:rPr>
-              <a:t>neelde_mean_se_plot</a:t>
-            </a:r>
-          </a:p>
-          <a:p>
-            <a:pPr lvl="0" indent="0" marL="1270000">
-              <a:buNone/>
-            </a:pPr>
+            <a:pPr lvl="0" indent="0" marL="0">
+              <a:buNone/>
+            </a:pPr>
+            <a:r>
+              <a:rPr/>
+              <a:t>For a two-sample t-test, we need to check:</a:t>
+            </a:r>
+          </a:p>
+          <a:p>
+            <a:pPr lvl="0" indent="-342900" marL="342900">
+              <a:buAutoNum type="arabicPeriod"/>
+            </a:pPr>
+            <a:r>
+              <a:rPr/>
+              <a:t>Normality within each group</a:t>
+            </a:r>
+          </a:p>
+          <a:p>
+            <a:pPr lvl="0" indent="-342900" marL="342900">
+              <a:buAutoNum type="arabicPeriod"/>
+            </a:pPr>
+            <a:r>
+              <a:rPr/>
+              <a:t>Equal variances between groups (for standard t-test)</a:t>
+            </a:r>
+          </a:p>
+          <a:p>
+            <a:pPr lvl="0" indent="-342900" marL="342900">
+              <a:buAutoNum type="arabicPeriod"/>
+            </a:pPr>
+            <a:r>
+              <a:rPr/>
+              <a:t>Independent observations</a:t>
+            </a:r>
+          </a:p>
+          <a:p>
+            <a:pPr lvl="0" indent="0" marL="0">
+              <a:buNone/>
+            </a:pPr>
+            <a:r>
+              <a:rPr/>
+              <a:t>If assumptions are violated:</a:t>
+            </a:r>
+          </a:p>
+          <a:p>
+            <a:pPr lvl="0"/>
+            <a:r>
+              <a:rPr/>
+              <a:t>Welch’s t-test (unequal variances)</a:t>
+            </a:r>
+          </a:p>
+          <a:p>
+            <a:pPr lvl="0"/>
+            <a:r>
+              <a:rPr/>
+              <a:t>Non-parametric alternatives (Mann-Whitney U test)</a:t>
+            </a:r>
           </a:p>
         </p:txBody>
       </p:sp>
@@ -8140,12 +8032,8 @@
               <a:buNone/>
             </a:pPr>
             <a:r>
-              <a:rPr b="1"/>
-              <a:t>Lecture 5:</a:t>
-            </a:r>
-            <a:r>
-              <a:rPr/>
-              <a:t> Testing Assumptions for Two-Sample T-Test</a:t>
+              <a:rPr/>
+              <a:t>Practice Exercise 6: Creating Group Data</a:t>
             </a:r>
           </a:p>
         </p:txBody>
@@ -8165,63 +8053,63 @@
           <a:bodyPr/>
           <a:lstStyle/>
           <a:p>
+            <a:pPr lvl="0" indent="0" marL="1270000">
+              <a:buNone/>
+            </a:pPr>
+            <a:r>
+              <a:rPr sz="2000" b="1"/>
+              <a:t>Practice Exercise 6: Test normality of sunny pine needle lengths</a:t>
+            </a:r>
+          </a:p>
+          <a:p>
             <a:pPr lvl="0" indent="0" marL="0">
-              <a:buNone/>
-            </a:pPr>
-            <a:r>
-              <a:rPr/>
-              <a:t>For a two-sample t-test, we need to check:</a:t>
-            </a:r>
-          </a:p>
-          <a:p>
-            <a:pPr lvl="0" indent="-342900" marL="342900">
-              <a:buAutoNum type="arabicPeriod"/>
-            </a:pPr>
-            <a:r>
-              <a:rPr/>
-              <a:t>Normality within each group</a:t>
-            </a:r>
-          </a:p>
-          <a:p>
-            <a:pPr lvl="0" indent="-342900" marL="342900">
-              <a:buAutoNum type="arabicPeriod"/>
-            </a:pPr>
-            <a:r>
-              <a:rPr/>
-              <a:t>Equal variances between groups (for standard t-test)</a:t>
-            </a:r>
-          </a:p>
-          <a:p>
-            <a:pPr lvl="0" indent="-342900" marL="342900">
-              <a:buAutoNum type="arabicPeriod"/>
-            </a:pPr>
-            <a:r>
-              <a:rPr/>
-              <a:t>Independent observations</a:t>
-            </a:r>
-          </a:p>
-          <a:p>
-            <a:pPr lvl="0" indent="0" marL="0">
-              <a:buNone/>
-            </a:pPr>
-            <a:r>
-              <a:rPr/>
-              <a:t>If assumptions are violated:</a:t>
-            </a:r>
-          </a:p>
-          <a:p>
-            <a:pPr lvl="0"/>
-            <a:r>
-              <a:rPr/>
-              <a:t>Welch’s t-test (unequal variances)</a:t>
-            </a:r>
-          </a:p>
-          <a:p>
-            <a:pPr lvl="0"/>
-            <a:r>
-              <a:rPr/>
-              <a:t>Non-parametric alternatives (Mann-Whitney U test)</a:t>
-            </a:r>
+              <a:spcBef>
+                <a:spcPts val="3000"/>
+              </a:spcBef>
+              <a:buNone/>
+            </a:pPr>
+            <a:r>
+              <a:rPr sz="2000" b="1"/>
+              <a:t>qqplots</a:t>
+            </a:r>
+          </a:p>
+          <a:p>
+            <a:pPr lvl="0" indent="0" marL="1270000">
+              <a:buNone/>
+            </a:pPr>
+            <a:r>
+              <a:rPr sz="2000"/>
+              <a:t>Note you need to test each groups separately…</a:t>
+            </a:r>
+          </a:p>
+          <a:p>
+            <a:pPr lvl="0" indent="0">
+              <a:buNone/>
+            </a:pPr>
+            <a:r>
+              <a:rPr>
+                <a:solidFill>
+                  <a:srgbClr val="5E5E5E"/>
+                </a:solidFill>
+                <a:latin typeface="Courier"/>
+              </a:rPr>
+              <a:t># Assuming your dataframe is called df</a:t>
+            </a:r>
+            <a:br/>
+            <a:r>
+              <a:rPr>
+                <a:solidFill>
+                  <a:srgbClr val="003B4F"/>
+                </a:solidFill>
+                <a:latin typeface="Courier"/>
+              </a:rPr>
+              <a:t>needle_mean_se_plot</a:t>
+            </a:r>
+          </a:p>
+          <a:p>
+            <a:pPr lvl="0" indent="0" marL="1270000">
+              <a:buNone/>
+            </a:pPr>
           </a:p>
         </p:txBody>
       </p:sp>
@@ -8272,7 +8160,7 @@
             </a:pPr>
             <a:r>
               <a:rPr/>
-              <a:t>Practice Exercise 6: Creating Group Data</a:t>
+              <a:t>Practice Exercise 7: Separate Group Data</a:t>
             </a:r>
           </a:p>
         </p:txBody>
@@ -8297,7 +8185,7 @@
             </a:pPr>
             <a:r>
               <a:rPr sz="2000" b="1"/>
-              <a:t>Practice Exercise 6: Test normality of windward pine needle lengths</a:t>
+              <a:t>Practice Exercise 7: Test normality of sunny pine needle lengths</a:t>
             </a:r>
           </a:p>
           <a:p>
@@ -8329,23 +8217,100 @@
                 </a:solidFill>
                 <a:latin typeface="Courier"/>
               </a:rPr>
-              <a:t># Assuming your dataframe is called df</a:t>
+              <a:t># how do you make separate dataframes to do this on?</a:t>
             </a:r>
             <a:br/>
             <a:r>
               <a:rPr>
                 <a:solidFill>
-                  <a:srgbClr val="003B4F"/>
-                </a:solidFill>
-                <a:latin typeface="Courier"/>
-              </a:rPr>
-              <a:t>neelde_mean_se_plot</a:t>
-            </a:r>
-          </a:p>
-          <a:p>
-            <a:pPr lvl="0" indent="0" marL="1270000">
-              <a:buNone/>
-            </a:pPr>
+                  <a:srgbClr val="5E5E5E"/>
+                </a:solidFill>
+                <a:latin typeface="Courier"/>
+              </a:rPr>
+              <a:t># Separate data by groups</a:t>
+            </a:r>
+            <a:br/>
+            <a:r>
+              <a:rPr>
+                <a:solidFill>
+                  <a:srgbClr val="4758AB"/>
+                </a:solidFill>
+                <a:latin typeface="Courier"/>
+              </a:rPr>
+              <a:t>head</a:t>
+            </a:r>
+            <a:r>
+              <a:rPr>
+                <a:solidFill>
+                  <a:srgbClr val="003B4F"/>
+                </a:solidFill>
+                <a:latin typeface="Courier"/>
+              </a:rPr>
+              <a:t>(ps_shady_df)</a:t>
+            </a:r>
+          </a:p>
+          <a:p>
+            <a:pPr lvl="0" indent="0">
+              <a:buNone/>
+            </a:pPr>
+            <a:r>
+              <a:rPr sz="2000">
+                <a:latin typeface="Courier"/>
+              </a:rPr>
+              <a:t># A tibble: 6 × 5
+# Groups:   group, tree_no, tree_char [6]
+  group                      tree_no tree_char side  length_mm
+  &lt;chr&gt;                        &lt;dbl&gt; &lt;chr&gt;     &lt;chr&gt;     &lt;dbl&gt;
+1 big_fat_fecund_female_fish       2 tree_2    shady      15.4
+2 bill                             3 tree_3    shady      16.7
+3 ciabatta                         5 tree_5    shady      19.1
+4 fake_data                        8 tree_8    shady      17.4
+5 five                             1 tree_1    shady      20.3
+6 moose_walkin                     7 tree_7    shady      20.7</a:t>
+            </a:r>
+          </a:p>
+          <a:p>
+            <a:pPr lvl="0" indent="0">
+              <a:buNone/>
+            </a:pPr>
+            <a:r>
+              <a:rPr>
+                <a:solidFill>
+                  <a:srgbClr val="4758AB"/>
+                </a:solidFill>
+                <a:latin typeface="Courier"/>
+              </a:rPr>
+              <a:t>head</a:t>
+            </a:r>
+            <a:r>
+              <a:rPr>
+                <a:solidFill>
+                  <a:srgbClr val="003B4F"/>
+                </a:solidFill>
+                <a:latin typeface="Courier"/>
+              </a:rPr>
+              <a:t>(ps_sunny_df)</a:t>
+            </a:r>
+          </a:p>
+          <a:p>
+            <a:pPr lvl="0" indent="0">
+              <a:buNone/>
+            </a:pPr>
+            <a:r>
+              <a:rPr sz="2000">
+                <a:latin typeface="Courier"/>
+              </a:rPr>
+              <a:t># A tibble: 6 × 5
+# Groups:   group, tree_no, tree_char [6]
+  group                      tree_no tree_char side  length_mm
+  &lt;chr&gt;                        &lt;dbl&gt; &lt;chr&gt;     &lt;chr&gt;     &lt;dbl&gt;
+1 big_fat_fecund_female_fish       2 tree_2    sunny      13.2
+2 bill                             3 tree_3    sunny      16.0
+3 ciabatta                         5 tree_5    sunny      17.7
+4 fake_data                        8 tree_8    sunny      13.0
+5 five                             1 tree_1    sunny      19.9
+6 moose_walkin                     7 tree_7    sunny      18.4</a:t>
+            </a:r>
           </a:p>
         </p:txBody>
       </p:sp>
@@ -8384,11 +8349,8 @@
         <p:spPr>
           <a:xfrm>
             <a:off x="0" y="0"/>
-            <a:ext cx="9144000" cy="602780"/>
+            <a:ext cx="9144000" cy="582780"/>
           </a:xfrm>
-          <a:solidFill>
-            <a:srgbClr val="70121D"/>
-          </a:solidFill>
         </p:spPr>
         <p:txBody>
           <a:bodyPr/>
@@ -8399,7 +8361,7 @@
             </a:pPr>
             <a:r>
               <a:rPr b="1"/>
-              <a:t>Lecture 4: Review - Statistical Concepts</a:t>
+              <a:t>Lecture 4: Review - Summary Statistics</a:t>
             </a:r>
           </a:p>
         </p:txBody>
@@ -8411,7 +8373,7 @@
             <a:spLocks noGrp="1"/>
           </p:cNvSpPr>
           <p:nvPr>
-            <p:ph idx="1" sz="half"/>
+            <p:ph idx="1"/>
           </p:nvPr>
         </p:nvSpPr>
         <p:spPr/>
@@ -8422,76 +8384,47 @@
             <a:pPr lvl="0"/>
             <a:r>
               <a:rPr/>
-              <a:t>Probability Distribution Functions (PDF)</a:t>
+              <a:t>Tests of means using T-Tests</a:t>
             </a:r>
           </a:p>
           <a:p>
             <a:pPr lvl="1"/>
             <a:r>
               <a:rPr/>
-              <a:t>Z scores and T scores</a:t>
+              <a:t>one sample - is the sample mean different from a hypothesized mean?</a:t>
+            </a:r>
+          </a:p>
+          <a:p>
+            <a:pPr lvl="1"/>
+            <a:r>
+              <a:rPr/>
+              <a:t>two sample - are the sample means from two samples the same or different?</a:t>
             </a:r>
           </a:p>
           <a:p>
             <a:pPr lvl="0"/>
             <a:r>
               <a:rPr/>
-              <a:t>Hypothesis testing</a:t>
-            </a:r>
-          </a:p>
-          <a:p>
-            <a:pPr lvl="0"/>
-            <a:r>
-              <a:rPr/>
-              <a:t>Tests of means using T-Tests</a:t>
-            </a:r>
-          </a:p>
-          <a:p>
-            <a:pPr lvl="1"/>
-            <a:r>
-              <a:rPr/>
-              <a:t>one sample</a:t>
-            </a:r>
-          </a:p>
-          <a:p>
-            <a:pPr lvl="1"/>
-            <a:r>
-              <a:rPr/>
-              <a:t>two sample</a:t>
-            </a:r>
-          </a:p>
-        </p:txBody>
-      </p:sp>
-      <p:pic>
-        <p:nvPicPr>
-          <p:cNvPr descr="images/clipboard-3257239263.png" id="0" name="Picture 1"/>
-          <p:cNvPicPr>
-            <a:picLocks noGrp="1" noChangeAspect="1"/>
-          </p:cNvPicPr>
-          <p:nvPr/>
-        </p:nvPicPr>
-        <p:blipFill>
-          <a:blip r:embed="rId2"/>
-          <a:stretch>
-            <a:fillRect/>
-          </a:stretch>
-        </p:blipFill>
-        <p:spPr bwMode="auto">
-          <a:xfrm>
-            <a:off x="6121400" y="2298700"/>
-            <a:ext cx="2781300" cy="1181100"/>
-          </a:xfrm>
-          <a:prstGeom prst="rect">
-            <a:avLst/>
-          </a:prstGeom>
-          <a:noFill/>
-          <a:ln w="9525">
-            <a:noFill/>
-            <a:headEnd/>
-            <a:tailEnd/>
-          </a:ln>
-        </p:spPr>
-      </p:pic>
+              <a:t>for Two sample T-tests the df = n1+ n2 -2 = 8+8-2=14</a:t>
+            </a:r>
+          </a:p>
+          <a:p>
+            <a:pPr lvl="0" indent="0">
+              <a:buNone/>
+            </a:pPr>
+            <a:r>
+              <a:rPr>
+                <a:latin typeface="Courier"/>
+              </a:rPr>
+              <a:t># A tibble: 2 × 5
+  side  mean_length sd_length se_length count
+  &lt;chr&gt;       &lt;dbl&gt;     &lt;dbl&gt;     &lt;dbl&gt; &lt;int&gt;
+1 shady        17.6      2.51     0.886     8
+2 sunny        16.2      2.64     0.934     8</a:t>
+            </a:r>
+          </a:p>
+        </p:txBody>
+      </p:sp>
     </p:spTree>
   </p:cSld>
 </p:sld>
@@ -8539,7 +8472,7 @@
             </a:pPr>
             <a:r>
               <a:rPr/>
-              <a:t>Practice Exercise 7: Separate Group Data</a:t>
+              <a:t>Practice Exercise 8: QQ Plot for Sunny Data</a:t>
             </a:r>
           </a:p>
         </p:txBody>
@@ -8564,7 +8497,7 @@
             </a:pPr>
             <a:r>
               <a:rPr sz="2000" b="1"/>
-              <a:t>Practice Exercise 7: Test normality of windward pine needle lengths</a:t>
+              <a:t>Practice Exercise 8: Test normality of sunny pine needle lengths</a:t>
             </a:r>
           </a:p>
           <a:p>
@@ -8596,37 +8529,142 @@
                 </a:solidFill>
                 <a:latin typeface="Courier"/>
               </a:rPr>
-              <a:t># how do you make separate dataframes to do this on?</a:t>
+              <a:t># QQ Plot for windward group</a:t>
             </a:r>
             <a:br/>
             <a:r>
               <a:rPr>
                 <a:solidFill>
+                  <a:srgbClr val="4758AB"/>
+                </a:solidFill>
+                <a:latin typeface="Courier"/>
+              </a:rPr>
+              <a:t>qqPlot</a:t>
+            </a:r>
+            <a:r>
+              <a:rPr>
+                <a:solidFill>
+                  <a:srgbClr val="003B4F"/>
+                </a:solidFill>
+                <a:latin typeface="Courier"/>
+              </a:rPr>
+              <a:t>(ps_sunny_df</a:t>
+            </a:r>
+            <a:r>
+              <a:rPr>
+                <a:solidFill>
                   <a:srgbClr val="5E5E5E"/>
                 </a:solidFill>
                 <a:latin typeface="Courier"/>
               </a:rPr>
-              <a:t># Separate data by groups</a:t>
+              <a:t>$</a:t>
+            </a:r>
+            <a:r>
+              <a:rPr>
+                <a:solidFill>
+                  <a:srgbClr val="003B4F"/>
+                </a:solidFill>
+                <a:latin typeface="Courier"/>
+              </a:rPr>
+              <a:t>length_mm, </a:t>
             </a:r>
             <a:br/>
             <a:r>
               <a:rPr>
                 <a:solidFill>
-                  <a:srgbClr val="4758AB"/>
-                </a:solidFill>
-                <a:latin typeface="Courier"/>
-              </a:rPr>
-              <a:t>head</a:t>
-            </a:r>
-            <a:r>
-              <a:rPr>
-                <a:solidFill>
-                  <a:srgbClr val="003B4F"/>
-                </a:solidFill>
-                <a:latin typeface="Courier"/>
-              </a:rPr>
-              <a:t>(ps_shady_df)</a:t>
-            </a:r>
+                  <a:srgbClr val="003B4F"/>
+                </a:solidFill>
+                <a:latin typeface="Courier"/>
+              </a:rPr>
+              <a:t>       </a:t>
+            </a:r>
+            <a:r>
+              <a:rPr>
+                <a:solidFill>
+                  <a:srgbClr val="657422"/>
+                </a:solidFill>
+                <a:latin typeface="Courier"/>
+              </a:rPr>
+              <a:t>main =</a:t>
+            </a:r>
+            <a:r>
+              <a:rPr>
+                <a:solidFill>
+                  <a:srgbClr val="003B4F"/>
+                </a:solidFill>
+                <a:latin typeface="Courier"/>
+              </a:rPr>
+              <a:t> </a:t>
+            </a:r>
+            <a:r>
+              <a:rPr>
+                <a:solidFill>
+                  <a:srgbClr val="20794D"/>
+                </a:solidFill>
+                <a:latin typeface="Courier"/>
+              </a:rPr>
+              <a:t>"QQ Plot for sunny needle length"</a:t>
+            </a:r>
+            <a:r>
+              <a:rPr>
+                <a:solidFill>
+                  <a:srgbClr val="003B4F"/>
+                </a:solidFill>
+                <a:latin typeface="Courier"/>
+              </a:rPr>
+              <a:t>,</a:t>
+            </a:r>
+            <a:br/>
+            <a:r>
+              <a:rPr>
+                <a:solidFill>
+                  <a:srgbClr val="003B4F"/>
+                </a:solidFill>
+                <a:latin typeface="Courier"/>
+              </a:rPr>
+              <a:t>       </a:t>
+            </a:r>
+            <a:r>
+              <a:rPr>
+                <a:solidFill>
+                  <a:srgbClr val="657422"/>
+                </a:solidFill>
+                <a:latin typeface="Courier"/>
+              </a:rPr>
+              <a:t>ylab =</a:t>
+            </a:r>
+            <a:r>
+              <a:rPr>
+                <a:solidFill>
+                  <a:srgbClr val="003B4F"/>
+                </a:solidFill>
+                <a:latin typeface="Courier"/>
+              </a:rPr>
+              <a:t> </a:t>
+            </a:r>
+            <a:r>
+              <a:rPr>
+                <a:solidFill>
+                  <a:srgbClr val="20794D"/>
+                </a:solidFill>
+                <a:latin typeface="Courier"/>
+              </a:rPr>
+              <a:t>"Sample Quantiles"</a:t>
+            </a:r>
+            <a:r>
+              <a:rPr>
+                <a:solidFill>
+                  <a:srgbClr val="003B4F"/>
+                </a:solidFill>
+                <a:latin typeface="Courier"/>
+              </a:rPr>
+              <a:t>)</a:t>
+            </a:r>
+          </a:p>
+          <a:p>
+            <a:pPr lvl="0" indent="0" marL="1270000">
+              <a:buNone/>
+            </a:pPr>
           </a:p>
           <a:p>
             <a:pPr lvl="0" indent="0">
@@ -8636,59 +8674,7 @@
               <a:rPr sz="2000">
                 <a:latin typeface="Courier"/>
               </a:rPr>
-              <a:t># A tibble: 6 × 5
-# Groups:   group, tree_no, tree_char [6]
-  group                      tree_no tree_char side  length_mm
-  &lt;chr&gt;                        &lt;dbl&gt; &lt;chr&gt;     &lt;chr&gt;     &lt;dbl&gt;
-1 big_fat_fecund_female_fish       2 tree_2    shady      15.4
-2 bill                             3 tree_3    shady      16.7
-3 ciabatta                         5 tree_5    shady      19.1
-4 fake_data                        8 tree_8    shady      17.4
-5 five                             1 tree_1    shady      20.3
-6 moose_walkin                     7 tree_7    shady      20.7</a:t>
-            </a:r>
-          </a:p>
-          <a:p>
-            <a:pPr lvl="0" indent="0">
-              <a:buNone/>
-            </a:pPr>
-            <a:r>
-              <a:rPr>
-                <a:solidFill>
-                  <a:srgbClr val="4758AB"/>
-                </a:solidFill>
-                <a:latin typeface="Courier"/>
-              </a:rPr>
-              <a:t>head</a:t>
-            </a:r>
-            <a:r>
-              <a:rPr>
-                <a:solidFill>
-                  <a:srgbClr val="003B4F"/>
-                </a:solidFill>
-                <a:latin typeface="Courier"/>
-              </a:rPr>
-              <a:t>(ps_sunny_df)</a:t>
-            </a:r>
-          </a:p>
-          <a:p>
-            <a:pPr lvl="0" indent="0">
-              <a:buNone/>
-            </a:pPr>
-            <a:r>
-              <a:rPr sz="2000">
-                <a:latin typeface="Courier"/>
-              </a:rPr>
-              <a:t># A tibble: 6 × 5
-# Groups:   group, tree_no, tree_char [6]
-  group                      tree_no tree_char side  length_mm
-  &lt;chr&gt;                        &lt;dbl&gt; &lt;chr&gt;     &lt;chr&gt;     &lt;dbl&gt;
-1 big_fat_fecund_female_fish       2 tree_2    sunny      13.2
-2 bill                             3 tree_3    sunny      16.0
-3 ciabatta                         5 tree_5    sunny      17.7
-4 fake_data                        8 tree_8    sunny      13.0
-5 five                             1 tree_1    sunny      19.9
-6 moose_walkin                     7 tree_7    sunny      18.4</a:t>
+              <a:t>[1] 5 4</a:t>
             </a:r>
           </a:p>
         </p:txBody>
@@ -8740,7 +8726,7 @@
             </a:pPr>
             <a:r>
               <a:rPr/>
-              <a:t>Practice Exercise 8: QQ Plot for Sunny Data</a:t>
+              <a:t>Practice Exercise 9: Shapiro-Wilk Test</a:t>
             </a:r>
           </a:p>
         </p:txBody>
@@ -8765,7 +8751,7 @@
             </a:pPr>
             <a:r>
               <a:rPr sz="2000" b="1"/>
-              <a:t>Practice Exercise 8: Test normality of windward pine needle lengths</a:t>
+              <a:t>Practice Exercise 9: Test normality of I8 lengths</a:t>
             </a:r>
           </a:p>
           <a:p>
@@ -8774,7 +8760,7 @@
             </a:pPr>
             <a:r>
               <a:rPr sz="2000"/>
-              <a:t>qqplots</a:t>
+              <a:t>Shapiro-Wilk test</a:t>
             </a:r>
           </a:p>
           <a:p>
@@ -8797,7 +8783,7 @@
                 </a:solidFill>
                 <a:latin typeface="Courier"/>
               </a:rPr>
-              <a:t># QQ Plot for windward group</a:t>
+              <a:t># Shapiro-Wilk test for sunny group</a:t>
             </a:r>
             <a:br/>
             <a:r>
@@ -8807,7 +8793,7 @@
                 </a:solidFill>
                 <a:latin typeface="Courier"/>
               </a:rPr>
-              <a:t>qqPlot</a:t>
+              <a:t>shapiro.test</a:t>
             </a:r>
             <a:r>
               <a:rPr>
@@ -8834,105 +8820,8 @@
                 </a:solidFill>
                 <a:latin typeface="Courier"/>
               </a:rPr>
-              <a:t>length_mm, </a:t>
-            </a:r>
-            <a:br/>
-            <a:r>
-              <a:rPr>
-                <a:solidFill>
-                  <a:srgbClr val="003B4F"/>
-                </a:solidFill>
-                <a:latin typeface="Courier"/>
-              </a:rPr>
-              <a:t>       </a:t>
-            </a:r>
-            <a:r>
-              <a:rPr>
-                <a:solidFill>
-                  <a:srgbClr val="657422"/>
-                </a:solidFill>
-                <a:latin typeface="Courier"/>
-              </a:rPr>
-              <a:t>main =</a:t>
-            </a:r>
-            <a:r>
-              <a:rPr>
-                <a:solidFill>
-                  <a:srgbClr val="003B4F"/>
-                </a:solidFill>
-                <a:latin typeface="Courier"/>
-              </a:rPr>
-              <a:t> </a:t>
-            </a:r>
-            <a:r>
-              <a:rPr>
-                <a:solidFill>
-                  <a:srgbClr val="20794D"/>
-                </a:solidFill>
-                <a:latin typeface="Courier"/>
-              </a:rPr>
-              <a:t>"QQ Plot for sunny needle length"</a:t>
-            </a:r>
-            <a:r>
-              <a:rPr>
-                <a:solidFill>
-                  <a:srgbClr val="003B4F"/>
-                </a:solidFill>
-                <a:latin typeface="Courier"/>
-              </a:rPr>
-              <a:t>,</a:t>
-            </a:r>
-            <a:br/>
-            <a:r>
-              <a:rPr>
-                <a:solidFill>
-                  <a:srgbClr val="003B4F"/>
-                </a:solidFill>
-                <a:latin typeface="Courier"/>
-              </a:rPr>
-              <a:t>       </a:t>
-            </a:r>
-            <a:r>
-              <a:rPr>
-                <a:solidFill>
-                  <a:srgbClr val="657422"/>
-                </a:solidFill>
-                <a:latin typeface="Courier"/>
-              </a:rPr>
-              <a:t>ylab =</a:t>
-            </a:r>
-            <a:r>
-              <a:rPr>
-                <a:solidFill>
-                  <a:srgbClr val="003B4F"/>
-                </a:solidFill>
-                <a:latin typeface="Courier"/>
-              </a:rPr>
-              <a:t> </a:t>
-            </a:r>
-            <a:r>
-              <a:rPr>
-                <a:solidFill>
-                  <a:srgbClr val="20794D"/>
-                </a:solidFill>
-                <a:latin typeface="Courier"/>
-              </a:rPr>
-              <a:t>"Sample Quantiles"</a:t>
-            </a:r>
-            <a:r>
-              <a:rPr>
-                <a:solidFill>
-                  <a:srgbClr val="003B4F"/>
-                </a:solidFill>
-                <a:latin typeface="Courier"/>
-              </a:rPr>
-              <a:t>)</a:t>
-            </a:r>
-          </a:p>
-          <a:p>
-            <a:pPr lvl="0" indent="0" marL="1270000">
-              <a:buNone/>
-            </a:pPr>
+              <a:t>length_mm)</a:t>
+            </a:r>
           </a:p>
           <a:p>
             <a:pPr lvl="0" indent="0">
@@ -8942,7 +8831,10 @@
               <a:rPr sz="2000">
                 <a:latin typeface="Courier"/>
               </a:rPr>
-              <a:t>[1] 5 4</a:t>
+              <a:t>
+    Shapiro-Wilk normality test
+data:  ps_sunny_df$length_mm
+W = 0.89994, p-value = 0.2886</a:t>
             </a:r>
           </a:p>
         </p:txBody>
@@ -8994,7 +8886,7 @@
             </a:pPr>
             <a:r>
               <a:rPr/>
-              <a:t>Practice Exercise 9: Shapiro-Wilk Test</a:t>
+              <a:t>Practice Exercise 10: QQ Plot for Shady</a:t>
             </a:r>
           </a:p>
         </p:txBody>
@@ -9019,7 +8911,7 @@
             </a:pPr>
             <a:r>
               <a:rPr sz="2000" b="1"/>
-              <a:t>Practice Exercise 9: Test normality of I8 lengths</a:t>
+              <a:t>Practice Exercise 10: Test normality of shady lengths</a:t>
             </a:r>
           </a:p>
           <a:p>
@@ -9028,7 +8920,7 @@
             </a:pPr>
             <a:r>
               <a:rPr sz="2000"/>
-              <a:t>Shapiro-Wilk test</a:t>
+              <a:t>qqplots</a:t>
             </a:r>
           </a:p>
           <a:p>
@@ -9051,26 +8943,36 @@
                 </a:solidFill>
                 <a:latin typeface="Courier"/>
               </a:rPr>
-              <a:t># Shapiro-Wilk test for windward group</a:t>
+              <a:t># You can also test the i3</a:t>
             </a:r>
             <a:br/>
             <a:r>
               <a:rPr>
                 <a:solidFill>
+                  <a:srgbClr val="5E5E5E"/>
+                </a:solidFill>
+                <a:latin typeface="Courier"/>
+              </a:rPr>
+              <a:t># QQ Plot for shady group</a:t>
+            </a:r>
+            <a:br/>
+            <a:r>
+              <a:rPr>
+                <a:solidFill>
                   <a:srgbClr val="4758AB"/>
                 </a:solidFill>
                 <a:latin typeface="Courier"/>
               </a:rPr>
-              <a:t>shapiro.test</a:t>
-            </a:r>
-            <a:r>
-              <a:rPr>
-                <a:solidFill>
-                  <a:srgbClr val="003B4F"/>
-                </a:solidFill>
-                <a:latin typeface="Courier"/>
-              </a:rPr>
-              <a:t>(ps_sunny_df</a:t>
+              <a:t>qqPlot</a:t>
+            </a:r>
+            <a:r>
+              <a:rPr>
+                <a:solidFill>
+                  <a:srgbClr val="003B4F"/>
+                </a:solidFill>
+                <a:latin typeface="Courier"/>
+              </a:rPr>
+              <a:t>(ps_shady_df</a:t>
             </a:r>
             <a:r>
               <a:rPr>
@@ -9088,8 +8990,105 @@
                 </a:solidFill>
                 <a:latin typeface="Courier"/>
               </a:rPr>
-              <a:t>length_mm)</a:t>
-            </a:r>
+              <a:t>length_mm, </a:t>
+            </a:r>
+            <a:br/>
+            <a:r>
+              <a:rPr>
+                <a:solidFill>
+                  <a:srgbClr val="003B4F"/>
+                </a:solidFill>
+                <a:latin typeface="Courier"/>
+              </a:rPr>
+              <a:t>       </a:t>
+            </a:r>
+            <a:r>
+              <a:rPr>
+                <a:solidFill>
+                  <a:srgbClr val="657422"/>
+                </a:solidFill>
+                <a:latin typeface="Courier"/>
+              </a:rPr>
+              <a:t>main =</a:t>
+            </a:r>
+            <a:r>
+              <a:rPr>
+                <a:solidFill>
+                  <a:srgbClr val="003B4F"/>
+                </a:solidFill>
+                <a:latin typeface="Courier"/>
+              </a:rPr>
+              <a:t> </a:t>
+            </a:r>
+            <a:r>
+              <a:rPr>
+                <a:solidFill>
+                  <a:srgbClr val="20794D"/>
+                </a:solidFill>
+                <a:latin typeface="Courier"/>
+              </a:rPr>
+              <a:t>"QQ Plot for shady needle length"</a:t>
+            </a:r>
+            <a:r>
+              <a:rPr>
+                <a:solidFill>
+                  <a:srgbClr val="003B4F"/>
+                </a:solidFill>
+                <a:latin typeface="Courier"/>
+              </a:rPr>
+              <a:t>,</a:t>
+            </a:r>
+            <a:br/>
+            <a:r>
+              <a:rPr>
+                <a:solidFill>
+                  <a:srgbClr val="003B4F"/>
+                </a:solidFill>
+                <a:latin typeface="Courier"/>
+              </a:rPr>
+              <a:t>       </a:t>
+            </a:r>
+            <a:r>
+              <a:rPr>
+                <a:solidFill>
+                  <a:srgbClr val="657422"/>
+                </a:solidFill>
+                <a:latin typeface="Courier"/>
+              </a:rPr>
+              <a:t>ylab =</a:t>
+            </a:r>
+            <a:r>
+              <a:rPr>
+                <a:solidFill>
+                  <a:srgbClr val="003B4F"/>
+                </a:solidFill>
+                <a:latin typeface="Courier"/>
+              </a:rPr>
+              <a:t> </a:t>
+            </a:r>
+            <a:r>
+              <a:rPr>
+                <a:solidFill>
+                  <a:srgbClr val="20794D"/>
+                </a:solidFill>
+                <a:latin typeface="Courier"/>
+              </a:rPr>
+              <a:t>"Sample Quantiles"</a:t>
+            </a:r>
+            <a:r>
+              <a:rPr>
+                <a:solidFill>
+                  <a:srgbClr val="003B4F"/>
+                </a:solidFill>
+                <a:latin typeface="Courier"/>
+              </a:rPr>
+              <a:t>)</a:t>
+            </a:r>
+          </a:p>
+          <a:p>
+            <a:pPr lvl="0" indent="0" marL="1270000">
+              <a:buNone/>
+            </a:pPr>
           </a:p>
           <a:p>
             <a:pPr lvl="0" indent="0">
@@ -9099,10 +9098,7 @@
               <a:rPr sz="2000">
                 <a:latin typeface="Courier"/>
               </a:rPr>
-              <a:t>
-    Shapiro-Wilk normality test
-data:  ps_sunny_df$length_mm
-W = 0.89994, p-value = 0.2886</a:t>
+              <a:t>[1] 7 6</a:t>
             </a:r>
           </a:p>
         </p:txBody>
@@ -9154,7 +9150,7 @@
             </a:pPr>
             <a:r>
               <a:rPr/>
-              <a:t>Practice Exercise 10: QQ Plot for Shady</a:t>
+              <a:t>Practice Exercise 11: Shapiro-Wilk for Shady</a:t>
             </a:r>
           </a:p>
         </p:txBody>
@@ -9179,7 +9175,7 @@
             </a:pPr>
             <a:r>
               <a:rPr sz="2000" b="1"/>
-              <a:t>Practice Exercise 10: Test normality of shady lengths</a:t>
+              <a:t>Practice Exercise 11: Test normality of shady lengths</a:t>
             </a:r>
           </a:p>
           <a:p>
@@ -9188,7 +9184,7 @@
             </a:pPr>
             <a:r>
               <a:rPr sz="2000"/>
-              <a:t>qqplots</a:t>
+              <a:t>Shapiro-Wilk test</a:t>
             </a:r>
           </a:p>
           <a:p>
@@ -9211,44 +9207,43 @@
                 </a:solidFill>
                 <a:latin typeface="Courier"/>
               </a:rPr>
-              <a:t># You can also test the i3</a:t>
+              <a:t># Shapiro-Wilk test for shady group</a:t>
             </a:r>
             <a:br/>
             <a:r>
               <a:rPr>
                 <a:solidFill>
+                  <a:srgbClr val="003B4F"/>
+                </a:solidFill>
+                <a:latin typeface="Courier"/>
+              </a:rPr>
+              <a:t> </a:t>
+            </a:r>
+            <a:r>
+              <a:rPr>
+                <a:solidFill>
+                  <a:srgbClr val="4758AB"/>
+                </a:solidFill>
+                <a:latin typeface="Courier"/>
+              </a:rPr>
+              <a:t>shapiro.test</a:t>
+            </a:r>
+            <a:r>
+              <a:rPr>
+                <a:solidFill>
+                  <a:srgbClr val="003B4F"/>
+                </a:solidFill>
+                <a:latin typeface="Courier"/>
+              </a:rPr>
+              <a:t>(ps_shady_df</a:t>
+            </a:r>
+            <a:r>
+              <a:rPr>
+                <a:solidFill>
                   <a:srgbClr val="5E5E5E"/>
                 </a:solidFill>
                 <a:latin typeface="Courier"/>
               </a:rPr>
-              <a:t># QQ Plot for leeward group</a:t>
-            </a:r>
-            <a:br/>
-            <a:r>
-              <a:rPr>
-                <a:solidFill>
-                  <a:srgbClr val="4758AB"/>
-                </a:solidFill>
-                <a:latin typeface="Courier"/>
-              </a:rPr>
-              <a:t>qqPlot</a:t>
-            </a:r>
-            <a:r>
-              <a:rPr>
-                <a:solidFill>
-                  <a:srgbClr val="003B4F"/>
-                </a:solidFill>
-                <a:latin typeface="Courier"/>
-              </a:rPr>
-              <a:t>(ps_shady_df</a:t>
-            </a:r>
-            <a:r>
-              <a:rPr>
-                <a:solidFill>
-                  <a:srgbClr val="5E5E5E"/>
-                </a:solidFill>
-                <a:latin typeface="Courier"/>
-              </a:rPr>
               <a:t>$</a:t>
             </a:r>
             <a:r>
@@ -9258,105 +9253,8 @@
                 </a:solidFill>
                 <a:latin typeface="Courier"/>
               </a:rPr>
-              <a:t>length_mm, </a:t>
-            </a:r>
-            <a:br/>
-            <a:r>
-              <a:rPr>
-                <a:solidFill>
-                  <a:srgbClr val="003B4F"/>
-                </a:solidFill>
-                <a:latin typeface="Courier"/>
-              </a:rPr>
-              <a:t>       </a:t>
-            </a:r>
-            <a:r>
-              <a:rPr>
-                <a:solidFill>
-                  <a:srgbClr val="657422"/>
-                </a:solidFill>
-                <a:latin typeface="Courier"/>
-              </a:rPr>
-              <a:t>main =</a:t>
-            </a:r>
-            <a:r>
-              <a:rPr>
-                <a:solidFill>
-                  <a:srgbClr val="003B4F"/>
-                </a:solidFill>
-                <a:latin typeface="Courier"/>
-              </a:rPr>
-              <a:t> </a:t>
-            </a:r>
-            <a:r>
-              <a:rPr>
-                <a:solidFill>
-                  <a:srgbClr val="20794D"/>
-                </a:solidFill>
-                <a:latin typeface="Courier"/>
-              </a:rPr>
-              <a:t>"QQ Plot for shady needle length"</a:t>
-            </a:r>
-            <a:r>
-              <a:rPr>
-                <a:solidFill>
-                  <a:srgbClr val="003B4F"/>
-                </a:solidFill>
-                <a:latin typeface="Courier"/>
-              </a:rPr>
-              <a:t>,</a:t>
-            </a:r>
-            <a:br/>
-            <a:r>
-              <a:rPr>
-                <a:solidFill>
-                  <a:srgbClr val="003B4F"/>
-                </a:solidFill>
-                <a:latin typeface="Courier"/>
-              </a:rPr>
-              <a:t>       </a:t>
-            </a:r>
-            <a:r>
-              <a:rPr>
-                <a:solidFill>
-                  <a:srgbClr val="657422"/>
-                </a:solidFill>
-                <a:latin typeface="Courier"/>
-              </a:rPr>
-              <a:t>ylab =</a:t>
-            </a:r>
-            <a:r>
-              <a:rPr>
-                <a:solidFill>
-                  <a:srgbClr val="003B4F"/>
-                </a:solidFill>
-                <a:latin typeface="Courier"/>
-              </a:rPr>
-              <a:t> </a:t>
-            </a:r>
-            <a:r>
-              <a:rPr>
-                <a:solidFill>
-                  <a:srgbClr val="20794D"/>
-                </a:solidFill>
-                <a:latin typeface="Courier"/>
-              </a:rPr>
-              <a:t>"Sample Quantiles"</a:t>
-            </a:r>
-            <a:r>
-              <a:rPr>
-                <a:solidFill>
-                  <a:srgbClr val="003B4F"/>
-                </a:solidFill>
-                <a:latin typeface="Courier"/>
-              </a:rPr>
-              <a:t>)</a:t>
-            </a:r>
-          </a:p>
-          <a:p>
-            <a:pPr lvl="0" indent="0" marL="1270000">
-              <a:buNone/>
-            </a:pPr>
+              <a:t>length_mm)</a:t>
+            </a:r>
           </a:p>
           <a:p>
             <a:pPr lvl="0" indent="0">
@@ -9366,7 +9264,10 @@
               <a:rPr sz="2000">
                 <a:latin typeface="Courier"/>
               </a:rPr>
-              <a:t>[1] 7 6</a:t>
+              <a:t>
+    Shapiro-Wilk normality test
+data:  ps_shady_df$length_mm
+W = 0.96639, p-value = 0.8683</a:t>
             </a:r>
           </a:p>
         </p:txBody>
@@ -9418,7 +9319,7 @@
             </a:pPr>
             <a:r>
               <a:rPr/>
-              <a:t>Practice Exercise 11: Shapiro-Wilk for Shady</a:t>
+              <a:t>Practice Exercise 12: Combined Normality Test</a:t>
             </a:r>
           </a:p>
         </p:txBody>
@@ -9443,7 +9344,7 @@
             </a:pPr>
             <a:r>
               <a:rPr sz="2000" b="1"/>
-              <a:t>Practice Exercise 11: Test normality of shady lengths</a:t>
+              <a:t>Practice Exercise 12: Test Normality at one time</a:t>
             </a:r>
           </a:p>
           <a:p>
@@ -9452,16 +9353,7 @@
             </a:pPr>
             <a:r>
               <a:rPr sz="2000"/>
-              <a:t>Shapiro-Wilk test</a:t>
-            </a:r>
-          </a:p>
-          <a:p>
-            <a:pPr lvl="0" indent="0" marL="1270000">
-              <a:buNone/>
-            </a:pPr>
-            <a:r>
-              <a:rPr sz="2000"/>
-              <a:t>Note you need to test each groups separately…</a:t>
+              <a:t>There are always a lot of ways to do this in R</a:t>
             </a:r>
           </a:p>
           <a:p>
@@ -9475,12 +9367,134 @@
                 </a:solidFill>
                 <a:latin typeface="Courier"/>
               </a:rPr>
-              <a:t># Shapiro-Wilk test for leeward group</a:t>
+              <a:t># there are always two ways</a:t>
             </a:r>
             <a:br/>
             <a:r>
               <a:rPr>
                 <a:solidFill>
+                  <a:srgbClr val="5E5E5E"/>
+                </a:solidFill>
+                <a:latin typeface="Courier"/>
+              </a:rPr>
+              <a:t># Test for normality using Shapiro-Wilk test for each wind group</a:t>
+            </a:r>
+            <a:br/>
+            <a:r>
+              <a:rPr>
+                <a:solidFill>
+                  <a:srgbClr val="5E5E5E"/>
+                </a:solidFill>
+                <a:latin typeface="Courier"/>
+              </a:rPr>
+              <a:t># All in one pipeline using tidyverse approach</a:t>
+            </a:r>
+            <a:br/>
+            <a:r>
+              <a:rPr>
+                <a:solidFill>
+                  <a:srgbClr val="003B4F"/>
+                </a:solidFill>
+                <a:latin typeface="Courier"/>
+              </a:rPr>
+              <a:t>normality_results &lt;- ps_df </a:t>
+            </a:r>
+            <a:r>
+              <a:rPr>
+                <a:solidFill>
+                  <a:srgbClr val="5E5E5E"/>
+                </a:solidFill>
+                <a:latin typeface="Courier"/>
+              </a:rPr>
+              <a:t>%&gt;%</a:t>
+            </a:r>
+            <a:br/>
+            <a:r>
+              <a:rPr>
+                <a:solidFill>
+                  <a:srgbClr val="003B4F"/>
+                </a:solidFill>
+                <a:latin typeface="Courier"/>
+              </a:rPr>
+              <a:t>  </a:t>
+            </a:r>
+            <a:r>
+              <a:rPr>
+                <a:solidFill>
+                  <a:srgbClr val="4758AB"/>
+                </a:solidFill>
+                <a:latin typeface="Courier"/>
+              </a:rPr>
+              <a:t>group_by</a:t>
+            </a:r>
+            <a:r>
+              <a:rPr>
+                <a:solidFill>
+                  <a:srgbClr val="003B4F"/>
+                </a:solidFill>
+                <a:latin typeface="Courier"/>
+              </a:rPr>
+              <a:t>(side) </a:t>
+            </a:r>
+            <a:r>
+              <a:rPr>
+                <a:solidFill>
+                  <a:srgbClr val="5E5E5E"/>
+                </a:solidFill>
+                <a:latin typeface="Courier"/>
+              </a:rPr>
+              <a:t>%&gt;%</a:t>
+            </a:r>
+            <a:br/>
+            <a:r>
+              <a:rPr>
+                <a:solidFill>
+                  <a:srgbClr val="003B4F"/>
+                </a:solidFill>
+                <a:latin typeface="Courier"/>
+              </a:rPr>
+              <a:t>  </a:t>
+            </a:r>
+            <a:r>
+              <a:rPr>
+                <a:solidFill>
+                  <a:srgbClr val="4758AB"/>
+                </a:solidFill>
+                <a:latin typeface="Courier"/>
+              </a:rPr>
+              <a:t>summarize</a:t>
+            </a:r>
+            <a:r>
+              <a:rPr>
+                <a:solidFill>
+                  <a:srgbClr val="003B4F"/>
+                </a:solidFill>
+                <a:latin typeface="Courier"/>
+              </a:rPr>
+              <a:t>(</a:t>
+            </a:r>
+            <a:br/>
+            <a:r>
+              <a:rPr>
+                <a:solidFill>
+                  <a:srgbClr val="003B4F"/>
+                </a:solidFill>
+                <a:latin typeface="Courier"/>
+              </a:rPr>
+              <a:t>    </a:t>
+            </a:r>
+            <a:r>
+              <a:rPr>
+                <a:solidFill>
+                  <a:srgbClr val="657422"/>
+                </a:solidFill>
+                <a:latin typeface="Courier"/>
+              </a:rPr>
+              <a:t>shapiro_stat =</a:t>
+            </a:r>
+            <a:r>
+              <a:rPr>
+                <a:solidFill>
                   <a:srgbClr val="003B4F"/>
                 </a:solidFill>
                 <a:latin typeface="Courier"/>
@@ -9503,7 +9517,7 @@
                 </a:solidFill>
                 <a:latin typeface="Courier"/>
               </a:rPr>
-              <a:t>(ps_shady_df</a:t>
+              <a:t>(length_mm)</a:t>
             </a:r>
             <a:r>
               <a:rPr>
@@ -9521,7 +9535,229 @@
                 </a:solidFill>
                 <a:latin typeface="Courier"/>
               </a:rPr>
-              <a:t>length_mm)</a:t>
+              <a:t>statistic,</a:t>
+            </a:r>
+            <a:br/>
+            <a:r>
+              <a:rPr>
+                <a:solidFill>
+                  <a:srgbClr val="003B4F"/>
+                </a:solidFill>
+                <a:latin typeface="Courier"/>
+              </a:rPr>
+              <a:t>    </a:t>
+            </a:r>
+            <a:r>
+              <a:rPr>
+                <a:solidFill>
+                  <a:srgbClr val="657422"/>
+                </a:solidFill>
+                <a:latin typeface="Courier"/>
+              </a:rPr>
+              <a:t>shapiro_p_value =</a:t>
+            </a:r>
+            <a:r>
+              <a:rPr>
+                <a:solidFill>
+                  <a:srgbClr val="003B4F"/>
+                </a:solidFill>
+                <a:latin typeface="Courier"/>
+              </a:rPr>
+              <a:t> </a:t>
+            </a:r>
+            <a:r>
+              <a:rPr>
+                <a:solidFill>
+                  <a:srgbClr val="4758AB"/>
+                </a:solidFill>
+                <a:latin typeface="Courier"/>
+              </a:rPr>
+              <a:t>shapiro.test</a:t>
+            </a:r>
+            <a:r>
+              <a:rPr>
+                <a:solidFill>
+                  <a:srgbClr val="003B4F"/>
+                </a:solidFill>
+                <a:latin typeface="Courier"/>
+              </a:rPr>
+              <a:t>(length_mm)</a:t>
+            </a:r>
+            <a:r>
+              <a:rPr>
+                <a:solidFill>
+                  <a:srgbClr val="5E5E5E"/>
+                </a:solidFill>
+                <a:latin typeface="Courier"/>
+              </a:rPr>
+              <a:t>$</a:t>
+            </a:r>
+            <a:r>
+              <a:rPr>
+                <a:solidFill>
+                  <a:srgbClr val="003B4F"/>
+                </a:solidFill>
+                <a:latin typeface="Courier"/>
+              </a:rPr>
+              <a:t>p.value,</a:t>
+            </a:r>
+            <a:br/>
+            <a:r>
+              <a:rPr>
+                <a:solidFill>
+                  <a:srgbClr val="003B4F"/>
+                </a:solidFill>
+                <a:latin typeface="Courier"/>
+              </a:rPr>
+              <a:t>    </a:t>
+            </a:r>
+            <a:r>
+              <a:rPr>
+                <a:solidFill>
+                  <a:srgbClr val="657422"/>
+                </a:solidFill>
+                <a:latin typeface="Courier"/>
+              </a:rPr>
+              <a:t>normal_distribution =</a:t>
+            </a:r>
+            <a:r>
+              <a:rPr>
+                <a:solidFill>
+                  <a:srgbClr val="003B4F"/>
+                </a:solidFill>
+                <a:latin typeface="Courier"/>
+              </a:rPr>
+              <a:t> </a:t>
+            </a:r>
+            <a:r>
+              <a:rPr>
+                <a:solidFill>
+                  <a:srgbClr val="4758AB"/>
+                </a:solidFill>
+                <a:latin typeface="Courier"/>
+              </a:rPr>
+              <a:t>if_else</a:t>
+            </a:r>
+            <a:r>
+              <a:rPr>
+                <a:solidFill>
+                  <a:srgbClr val="003B4F"/>
+                </a:solidFill>
+                <a:latin typeface="Courier"/>
+              </a:rPr>
+              <a:t>(shapiro_p_value </a:t>
+            </a:r>
+            <a:r>
+              <a:rPr>
+                <a:solidFill>
+                  <a:srgbClr val="5E5E5E"/>
+                </a:solidFill>
+                <a:latin typeface="Courier"/>
+              </a:rPr>
+              <a:t>&gt;</a:t>
+            </a:r>
+            <a:r>
+              <a:rPr>
+                <a:solidFill>
+                  <a:srgbClr val="003B4F"/>
+                </a:solidFill>
+                <a:latin typeface="Courier"/>
+              </a:rPr>
+              <a:t> </a:t>
+            </a:r>
+            <a:r>
+              <a:rPr>
+                <a:solidFill>
+                  <a:srgbClr val="AD0000"/>
+                </a:solidFill>
+                <a:latin typeface="Courier"/>
+              </a:rPr>
+              <a:t>0.05</a:t>
+            </a:r>
+            <a:r>
+              <a:rPr>
+                <a:solidFill>
+                  <a:srgbClr val="003B4F"/>
+                </a:solidFill>
+                <a:latin typeface="Courier"/>
+              </a:rPr>
+              <a:t>, </a:t>
+            </a:r>
+            <a:r>
+              <a:rPr>
+                <a:solidFill>
+                  <a:srgbClr val="20794D"/>
+                </a:solidFill>
+                <a:latin typeface="Courier"/>
+              </a:rPr>
+              <a:t>"Normal"</a:t>
+            </a:r>
+            <a:r>
+              <a:rPr>
+                <a:solidFill>
+                  <a:srgbClr val="003B4F"/>
+                </a:solidFill>
+                <a:latin typeface="Courier"/>
+              </a:rPr>
+              <a:t>, </a:t>
+            </a:r>
+            <a:r>
+              <a:rPr>
+                <a:solidFill>
+                  <a:srgbClr val="20794D"/>
+                </a:solidFill>
+                <a:latin typeface="Courier"/>
+              </a:rPr>
+              <a:t>"Non-normal"</a:t>
+            </a:r>
+            <a:r>
+              <a:rPr>
+                <a:solidFill>
+                  <a:srgbClr val="003B4F"/>
+                </a:solidFill>
+                <a:latin typeface="Courier"/>
+              </a:rPr>
+              <a:t>)</a:t>
+            </a:r>
+            <a:br/>
+            <a:r>
+              <a:rPr>
+                <a:solidFill>
+                  <a:srgbClr val="003B4F"/>
+                </a:solidFill>
+                <a:latin typeface="Courier"/>
+              </a:rPr>
+              <a:t>  )</a:t>
+            </a:r>
+            <a:br/>
+            <a:br/>
+            <a:r>
+              <a:rPr>
+                <a:solidFill>
+                  <a:srgbClr val="5E5E5E"/>
+                </a:solidFill>
+                <a:latin typeface="Courier"/>
+              </a:rPr>
+              <a:t># Print the results</a:t>
+            </a:r>
+            <a:br/>
+            <a:r>
+              <a:rPr>
+                <a:solidFill>
+                  <a:srgbClr val="4758AB"/>
+                </a:solidFill>
+                <a:latin typeface="Courier"/>
+              </a:rPr>
+              <a:t>print</a:t>
+            </a:r>
+            <a:r>
+              <a:rPr>
+                <a:solidFill>
+                  <a:srgbClr val="003B4F"/>
+                </a:solidFill>
+                <a:latin typeface="Courier"/>
+              </a:rPr>
+              <a:t>(normality_results)</a:t>
             </a:r>
           </a:p>
           <a:p>
@@ -9532,10 +9768,11 @@
               <a:rPr sz="2000">
                 <a:latin typeface="Courier"/>
               </a:rPr>
-              <a:t>
-    Shapiro-Wilk normality test
-data:  ps_shady_df$length_mm
-W = 0.96639, p-value = 0.8683</a:t>
+              <a:t># A tibble: 2 × 4
+  side  shapiro_stat shapiro_p_value normal_distribution
+  &lt;chr&gt;        &lt;dbl&gt;           &lt;dbl&gt; &lt;chr&gt;              
+1 shady        0.966           0.868 Normal             
+2 sunny        0.900           0.289 Normal             </a:t>
             </a:r>
           </a:p>
         </p:txBody>
@@ -9587,7 +9824,7 @@
             </a:pPr>
             <a:r>
               <a:rPr/>
-              <a:t>Practice Exercise 12: Combined Normality Test</a:t>
+              <a:t>Practice Exercise 13: Test Equal Variances</a:t>
             </a:r>
           </a:p>
         </p:txBody>
@@ -9612,7 +9849,7 @@
             </a:pPr>
             <a:r>
               <a:rPr sz="2000" b="1"/>
-              <a:t>Practice Exercise 12: Test Normality at one time</a:t>
+              <a:t>Practice Exercise 13: Test equal variances</a:t>
             </a:r>
           </a:p>
           <a:p>
@@ -9621,7 +9858,7 @@
             </a:pPr>
             <a:r>
               <a:rPr sz="2000"/>
-              <a:t>There are always a lot of ways to do this in R</a:t>
+              <a:t>Levenes test can be done on the original dataframe</a:t>
             </a:r>
           </a:p>
           <a:p>
@@ -9635,7 +9872,7 @@
                 </a:solidFill>
                 <a:latin typeface="Courier"/>
               </a:rPr>
-              <a:t># there are always two ways</a:t>
+              <a:t># Method 1: Using car package's leveneTest</a:t>
             </a:r>
             <a:br/>
             <a:r>
@@ -9645,84 +9882,125 @@
                 </a:solidFill>
                 <a:latin typeface="Courier"/>
               </a:rPr>
-              <a:t># Test for normality using Shapiro-Wilk test for each wind group</a:t>
+              <a:t># This is often preferred as it's more robust to departures from normality</a:t>
             </a:r>
             <a:br/>
             <a:r>
               <a:rPr>
                 <a:solidFill>
+                  <a:srgbClr val="003B4F"/>
+                </a:solidFill>
+                <a:latin typeface="Courier"/>
+              </a:rPr>
+              <a:t>levene_result &lt;- </a:t>
+            </a:r>
+            <a:r>
+              <a:rPr>
+                <a:solidFill>
+                  <a:srgbClr val="4758AB"/>
+                </a:solidFill>
+                <a:latin typeface="Courier"/>
+              </a:rPr>
+              <a:t>leveneTest</a:t>
+            </a:r>
+            <a:r>
+              <a:rPr>
+                <a:solidFill>
+                  <a:srgbClr val="003B4F"/>
+                </a:solidFill>
+                <a:latin typeface="Courier"/>
+              </a:rPr>
+              <a:t>(length_mm </a:t>
+            </a:r>
+            <a:r>
+              <a:rPr>
+                <a:solidFill>
                   <a:srgbClr val="5E5E5E"/>
                 </a:solidFill>
                 <a:latin typeface="Courier"/>
               </a:rPr>
-              <a:t># All in one pipeline using tidyverse approach</a:t>
+              <a:t>~</a:t>
+            </a:r>
+            <a:r>
+              <a:rPr>
+                <a:solidFill>
+                  <a:srgbClr val="003B4F"/>
+                </a:solidFill>
+                <a:latin typeface="Courier"/>
+              </a:rPr>
+              <a:t> side, </a:t>
+            </a:r>
+            <a:r>
+              <a:rPr>
+                <a:solidFill>
+                  <a:srgbClr val="657422"/>
+                </a:solidFill>
+                <a:latin typeface="Courier"/>
+              </a:rPr>
+              <a:t>data =</a:t>
+            </a:r>
+            <a:r>
+              <a:rPr>
+                <a:solidFill>
+                  <a:srgbClr val="003B4F"/>
+                </a:solidFill>
+                <a:latin typeface="Courier"/>
+              </a:rPr>
+              <a:t> ps_df)</a:t>
             </a:r>
             <a:br/>
             <a:r>
               <a:rPr>
                 <a:solidFill>
-                  <a:srgbClr val="003B4F"/>
-                </a:solidFill>
-                <a:latin typeface="Courier"/>
-              </a:rPr>
-              <a:t>normality_results &lt;- ps_df </a:t>
-            </a:r>
-            <a:r>
-              <a:rPr>
-                <a:solidFill>
-                  <a:srgbClr val="5E5E5E"/>
-                </a:solidFill>
-                <a:latin typeface="Courier"/>
-              </a:rPr>
-              <a:t>%&gt;%</a:t>
-            </a:r>
-            <a:br/>
-            <a:r>
-              <a:rPr>
-                <a:solidFill>
-                  <a:srgbClr val="003B4F"/>
-                </a:solidFill>
-                <a:latin typeface="Courier"/>
-              </a:rPr>
-              <a:t>  </a:t>
-            </a:r>
-            <a:r>
-              <a:rPr>
-                <a:solidFill>
                   <a:srgbClr val="4758AB"/>
                 </a:solidFill>
                 <a:latin typeface="Courier"/>
               </a:rPr>
-              <a:t>group_by</a:t>
-            </a:r>
-            <a:r>
-              <a:rPr>
-                <a:solidFill>
-                  <a:srgbClr val="003B4F"/>
-                </a:solidFill>
-                <a:latin typeface="Courier"/>
-              </a:rPr>
-              <a:t>(side) </a:t>
-            </a:r>
-            <a:r>
-              <a:rPr>
-                <a:solidFill>
-                  <a:srgbClr val="5E5E5E"/>
-                </a:solidFill>
-                <a:latin typeface="Courier"/>
-              </a:rPr>
-              <a:t>%&gt;%</a:t>
-            </a:r>
-            <a:br/>
-            <a:r>
-              <a:rPr>
-                <a:solidFill>
-                  <a:srgbClr val="003B4F"/>
-                </a:solidFill>
-                <a:latin typeface="Courier"/>
-              </a:rPr>
-              <a:t>  </a:t>
-            </a:r>
+              <a:t>print</a:t>
+            </a:r>
+            <a:r>
+              <a:rPr>
+                <a:solidFill>
+                  <a:srgbClr val="003B4F"/>
+                </a:solidFill>
+                <a:latin typeface="Courier"/>
+              </a:rPr>
+              <a:t>(</a:t>
+            </a:r>
+            <a:r>
+              <a:rPr>
+                <a:solidFill>
+                  <a:srgbClr val="20794D"/>
+                </a:solidFill>
+                <a:latin typeface="Courier"/>
+              </a:rPr>
+              <a:t>"Levene's Test for Homogeneity of Variance:"</a:t>
+            </a:r>
+            <a:r>
+              <a:rPr>
+                <a:solidFill>
+                  <a:srgbClr val="003B4F"/>
+                </a:solidFill>
+                <a:latin typeface="Courier"/>
+              </a:rPr>
+              <a:t>)</a:t>
+            </a:r>
+          </a:p>
+          <a:p>
+            <a:pPr lvl="0" indent="0">
+              <a:buNone/>
+            </a:pPr>
+            <a:r>
+              <a:rPr sz="2000">
+                <a:latin typeface="Courier"/>
+              </a:rPr>
+              <a:t>[1] "Levene's Test for Homogeneity of Variance:"</a:t>
+            </a:r>
+          </a:p>
+          <a:p>
+            <a:pPr lvl="0" indent="0">
+              <a:buNone/>
+            </a:pPr>
             <a:r>
               <a:rPr>
                 <a:solidFill>
@@ -9730,292 +10008,6 @@
                 </a:solidFill>
                 <a:latin typeface="Courier"/>
               </a:rPr>
-              <a:t>summarize</a:t>
-            </a:r>
-            <a:r>
-              <a:rPr>
-                <a:solidFill>
-                  <a:srgbClr val="003B4F"/>
-                </a:solidFill>
-                <a:latin typeface="Courier"/>
-              </a:rPr>
-              <a:t>(</a:t>
-            </a:r>
-            <a:br/>
-            <a:r>
-              <a:rPr>
-                <a:solidFill>
-                  <a:srgbClr val="003B4F"/>
-                </a:solidFill>
-                <a:latin typeface="Courier"/>
-              </a:rPr>
-              <a:t>    </a:t>
-            </a:r>
-            <a:r>
-              <a:rPr>
-                <a:solidFill>
-                  <a:srgbClr val="657422"/>
-                </a:solidFill>
-                <a:latin typeface="Courier"/>
-              </a:rPr>
-              <a:t>shapiro_stat =</a:t>
-            </a:r>
-            <a:r>
-              <a:rPr>
-                <a:solidFill>
-                  <a:srgbClr val="003B4F"/>
-                </a:solidFill>
-                <a:latin typeface="Courier"/>
-              </a:rPr>
-              <a:t> </a:t>
-            </a:r>
-            <a:r>
-              <a:rPr>
-                <a:solidFill>
-                  <a:srgbClr val="4758AB"/>
-                </a:solidFill>
-                <a:latin typeface="Courier"/>
-              </a:rPr>
-              <a:t>shapiro.test</a:t>
-            </a:r>
-            <a:r>
-              <a:rPr>
-                <a:solidFill>
-                  <a:srgbClr val="003B4F"/>
-                </a:solidFill>
-                <a:latin typeface="Courier"/>
-              </a:rPr>
-              <a:t>(length_mm)</a:t>
-            </a:r>
-            <a:r>
-              <a:rPr>
-                <a:solidFill>
-                  <a:srgbClr val="5E5E5E"/>
-                </a:solidFill>
-                <a:latin typeface="Courier"/>
-              </a:rPr>
-              <a:t>$</a:t>
-            </a:r>
-            <a:r>
-              <a:rPr>
-                <a:solidFill>
-                  <a:srgbClr val="003B4F"/>
-                </a:solidFill>
-                <a:latin typeface="Courier"/>
-              </a:rPr>
-              <a:t>statistic,</a:t>
-            </a:r>
-            <a:br/>
-            <a:r>
-              <a:rPr>
-                <a:solidFill>
-                  <a:srgbClr val="003B4F"/>
-                </a:solidFill>
-                <a:latin typeface="Courier"/>
-              </a:rPr>
-              <a:t>    </a:t>
-            </a:r>
-            <a:r>
-              <a:rPr>
-                <a:solidFill>
-                  <a:srgbClr val="657422"/>
-                </a:solidFill>
-                <a:latin typeface="Courier"/>
-              </a:rPr>
-              <a:t>shapiro_p_value =</a:t>
-            </a:r>
-            <a:r>
-              <a:rPr>
-                <a:solidFill>
-                  <a:srgbClr val="003B4F"/>
-                </a:solidFill>
-                <a:latin typeface="Courier"/>
-              </a:rPr>
-              <a:t> </a:t>
-            </a:r>
-            <a:r>
-              <a:rPr>
-                <a:solidFill>
-                  <a:srgbClr val="4758AB"/>
-                </a:solidFill>
-                <a:latin typeface="Courier"/>
-              </a:rPr>
-              <a:t>shapiro.test</a:t>
-            </a:r>
-            <a:r>
-              <a:rPr>
-                <a:solidFill>
-                  <a:srgbClr val="003B4F"/>
-                </a:solidFill>
-                <a:latin typeface="Courier"/>
-              </a:rPr>
-              <a:t>(length_mm)</a:t>
-            </a:r>
-            <a:r>
-              <a:rPr>
-                <a:solidFill>
-                  <a:srgbClr val="5E5E5E"/>
-                </a:solidFill>
-                <a:latin typeface="Courier"/>
-              </a:rPr>
-              <a:t>$</a:t>
-            </a:r>
-            <a:r>
-              <a:rPr>
-                <a:solidFill>
-                  <a:srgbClr val="003B4F"/>
-                </a:solidFill>
-                <a:latin typeface="Courier"/>
-              </a:rPr>
-              <a:t>p.value,</a:t>
-            </a:r>
-            <a:br/>
-            <a:r>
-              <a:rPr>
-                <a:solidFill>
-                  <a:srgbClr val="003B4F"/>
-                </a:solidFill>
-                <a:latin typeface="Courier"/>
-              </a:rPr>
-              <a:t>    </a:t>
-            </a:r>
-            <a:r>
-              <a:rPr>
-                <a:solidFill>
-                  <a:srgbClr val="657422"/>
-                </a:solidFill>
-                <a:latin typeface="Courier"/>
-              </a:rPr>
-              <a:t>normal_distribution =</a:t>
-            </a:r>
-            <a:r>
-              <a:rPr>
-                <a:solidFill>
-                  <a:srgbClr val="003B4F"/>
-                </a:solidFill>
-                <a:latin typeface="Courier"/>
-              </a:rPr>
-              <a:t> </a:t>
-            </a:r>
-            <a:r>
-              <a:rPr>
-                <a:solidFill>
-                  <a:srgbClr val="4758AB"/>
-                </a:solidFill>
-                <a:latin typeface="Courier"/>
-              </a:rPr>
-              <a:t>if_else</a:t>
-            </a:r>
-            <a:r>
-              <a:rPr>
-                <a:solidFill>
-                  <a:srgbClr val="003B4F"/>
-                </a:solidFill>
-                <a:latin typeface="Courier"/>
-              </a:rPr>
-              <a:t>(shapiro_p_value </a:t>
-            </a:r>
-            <a:r>
-              <a:rPr>
-                <a:solidFill>
-                  <a:srgbClr val="5E5E5E"/>
-                </a:solidFill>
-                <a:latin typeface="Courier"/>
-              </a:rPr>
-              <a:t>&gt;</a:t>
-            </a:r>
-            <a:r>
-              <a:rPr>
-                <a:solidFill>
-                  <a:srgbClr val="003B4F"/>
-                </a:solidFill>
-                <a:latin typeface="Courier"/>
-              </a:rPr>
-              <a:t> </a:t>
-            </a:r>
-            <a:r>
-              <a:rPr>
-                <a:solidFill>
-                  <a:srgbClr val="AD0000"/>
-                </a:solidFill>
-                <a:latin typeface="Courier"/>
-              </a:rPr>
-              <a:t>0.05</a:t>
-            </a:r>
-            <a:r>
-              <a:rPr>
-                <a:solidFill>
-                  <a:srgbClr val="003B4F"/>
-                </a:solidFill>
-                <a:latin typeface="Courier"/>
-              </a:rPr>
-              <a:t>, </a:t>
-            </a:r>
-            <a:r>
-              <a:rPr>
-                <a:solidFill>
-                  <a:srgbClr val="20794D"/>
-                </a:solidFill>
-                <a:latin typeface="Courier"/>
-              </a:rPr>
-              <a:t>"Normal"</a:t>
-            </a:r>
-            <a:r>
-              <a:rPr>
-                <a:solidFill>
-                  <a:srgbClr val="003B4F"/>
-                </a:solidFill>
-                <a:latin typeface="Courier"/>
-              </a:rPr>
-              <a:t>, </a:t>
-            </a:r>
-            <a:r>
-              <a:rPr>
-                <a:solidFill>
-                  <a:srgbClr val="20794D"/>
-                </a:solidFill>
-                <a:latin typeface="Courier"/>
-              </a:rPr>
-              <a:t>"Non-normal"</a:t>
-            </a:r>
-            <a:r>
-              <a:rPr>
-                <a:solidFill>
-                  <a:srgbClr val="003B4F"/>
-                </a:solidFill>
-                <a:latin typeface="Courier"/>
-              </a:rPr>
-              <a:t>)</a:t>
-            </a:r>
-            <a:br/>
-            <a:r>
-              <a:rPr>
-                <a:solidFill>
-                  <a:srgbClr val="003B4F"/>
-                </a:solidFill>
-                <a:latin typeface="Courier"/>
-              </a:rPr>
-              <a:t>  )</a:t>
-            </a:r>
-            <a:br/>
-            <a:br/>
-            <a:r>
-              <a:rPr>
-                <a:solidFill>
-                  <a:srgbClr val="5E5E5E"/>
-                </a:solidFill>
-                <a:latin typeface="Courier"/>
-              </a:rPr>
-              <a:t># Print the results</a:t>
-            </a:r>
-            <a:br/>
-            <a:r>
-              <a:rPr>
-                <a:solidFill>
-                  <a:srgbClr val="4758AB"/>
-                </a:solidFill>
-                <a:latin typeface="Courier"/>
-              </a:rPr>
               <a:t>print</a:t>
             </a:r>
             <a:r>
@@ -10025,7 +10017,7 @@
                 </a:solidFill>
                 <a:latin typeface="Courier"/>
               </a:rPr>
-              <a:t>(normality_results)</a:t>
+              <a:t>(levene_result)</a:t>
             </a:r>
           </a:p>
           <a:p>
@@ -10036,11 +10028,10 @@
               <a:rPr sz="2000">
                 <a:latin typeface="Courier"/>
               </a:rPr>
-              <a:t># A tibble: 2 × 4
-  side  shapiro_stat shapiro_p_value normal_distribution
-  &lt;chr&gt;        &lt;dbl&gt;           &lt;dbl&gt; &lt;chr&gt;              
-1 shady        0.966           0.868 Normal             
-2 sunny        0.900           0.289 Normal             </a:t>
+              <a:t>Levene's Test for Homogeneity of Variance (center = median)
+      Df F value Pr(&gt;F)
+group  1  0.2062 0.6567
+      14               </a:t>
             </a:r>
           </a:p>
         </p:txBody>
@@ -10080,8 +10071,11 @@
         <p:spPr>
           <a:xfrm>
             <a:off x="0" y="0"/>
-            <a:ext cx="9144000" cy="582780"/>
+            <a:ext cx="9144000" cy="602780"/>
           </a:xfrm>
+          <a:solidFill>
+            <a:srgbClr val="70121D"/>
+          </a:solidFill>
         </p:spPr>
         <p:txBody>
           <a:bodyPr/>
@@ -10091,8 +10085,12 @@
               <a:buNone/>
             </a:pPr>
             <a:r>
-              <a:rPr/>
-              <a:t>Practice Exercise 13: Test Equal Variances</a:t>
+              <a:rPr b="1"/>
+              <a:t>Lecture 5:</a:t>
+            </a:r>
+            <a:r>
+              <a:rPr/>
+              <a:t> Conducting the Two-Sample T-Test</a:t>
             </a:r>
           </a:p>
         </p:txBody>
@@ -10104,7 +10102,7 @@
             <a:spLocks noGrp="1"/>
           </p:cNvSpPr>
           <p:nvPr>
-            <p:ph idx="1"/>
+            <p:ph idx="1" sz="half"/>
           </p:nvPr>
         </p:nvSpPr>
         <p:spPr/>
@@ -10112,188 +10110,86 @@
           <a:bodyPr/>
           <a:lstStyle/>
           <a:p>
-            <a:pPr lvl="0" indent="0" marL="1270000">
-              <a:buNone/>
-            </a:pPr>
-            <a:r>
-              <a:rPr sz="2000" b="1"/>
-              <a:t>Practice Exercise 13: Test equal variances</a:t>
-            </a:r>
-          </a:p>
-          <a:p>
-            <a:pPr lvl="0" indent="0" marL="1270000">
-              <a:buNone/>
-            </a:pPr>
-            <a:r>
-              <a:rPr sz="2000"/>
-              <a:t>Levenes test can be done on the original dataframe</a:t>
-            </a:r>
-          </a:p>
+            <a:pPr lvl="0" indent="0" marL="0">
+              <a:buNone/>
+            </a:pPr>
+            <a:r>
+              <a:rPr/>
+              <a:t>Now we can compare the mean needle lengths between shady and sunny sides.</a:t>
+            </a:r>
+          </a:p>
+          <a:p>
+            <a:pPr lvl="0" indent="0" marL="0">
+              <a:buNone/>
+            </a:pPr>
+            <a:r>
+              <a:rPr/>
+              <a:t>Ho: μ₁ = μ₂ (The needle lengths do not differ)</a:t>
+            </a:r>
+          </a:p>
+          <a:p>
+            <a:pPr lvl="0" indent="0" marL="0">
+              <a:buNone/>
+            </a:pPr>
+            <a:r>
+              <a:rPr/>
+              <a:t>Ha: μ₁ ≠ μ₂ (The mean needle lengths differ - direction is not specified)</a:t>
+            </a:r>
+          </a:p>
+          <a:p>
+            <a:pPr lvl="0" indent="0" marL="0">
+              <a:buNone/>
+            </a:pPr>
+            <a:r>
+              <a:rPr/>
+              <a:t>Deciding between:</a:t>
+            </a:r>
+          </a:p>
+          <a:p>
+            <a:pPr lvl="0"/>
+            <a:r>
+              <a:rPr/>
+              <a:t>Standard t-test (equal variances)</a:t>
+            </a:r>
+          </a:p>
+          <a:p>
+            <a:pPr lvl="0"/>
+            <a:r>
+              <a:rPr/>
+              <a:t>Welch’s t-test (unequal variances)</a:t>
+            </a:r>
+          </a:p>
+          <a:p>
+            <a:pPr lvl="0" indent="0" marL="0">
+              <a:buNone/>
+            </a:pPr>
+            <a:r>
+              <a:rPr b="1"/>
+              <a:t>Note the Levenes Test should be NOT SIGNIFICANT - What is the null hypothesis</a:t>
+            </a:r>
+          </a:p>
+        </p:txBody>
+      </p:sp>
+      <p:sp>
+        <p:nvSpPr>
+          <p:cNvPr id="4" name="Content Placeholder 3"/>
+          <p:cNvSpPr>
+            <a:spLocks noGrp="1"/>
+          </p:cNvSpPr>
+          <p:nvPr>
+            <p:ph idx="2" sz="half"/>
+          </p:nvPr>
+        </p:nvSpPr>
+        <p:spPr/>
+        <p:txBody>
+          <a:bodyPr/>
+          <a:lstStyle/>
           <a:p>
             <a:pPr lvl="0" indent="0">
               <a:buNone/>
             </a:pPr>
             <a:r>
               <a:rPr>
-                <a:solidFill>
-                  <a:srgbClr val="5E5E5E"/>
-                </a:solidFill>
-                <a:latin typeface="Courier"/>
-              </a:rPr>
-              <a:t># Method 1: Using car package's leveneTest</a:t>
-            </a:r>
-            <a:br/>
-            <a:r>
-              <a:rPr>
-                <a:solidFill>
-                  <a:srgbClr val="5E5E5E"/>
-                </a:solidFill>
-                <a:latin typeface="Courier"/>
-              </a:rPr>
-              <a:t># This is often preferred as it's more robust to departures from normality</a:t>
-            </a:r>
-            <a:br/>
-            <a:r>
-              <a:rPr>
-                <a:solidFill>
-                  <a:srgbClr val="003B4F"/>
-                </a:solidFill>
-                <a:latin typeface="Courier"/>
-              </a:rPr>
-              <a:t>levene_result &lt;- </a:t>
-            </a:r>
-            <a:r>
-              <a:rPr>
-                <a:solidFill>
-                  <a:srgbClr val="4758AB"/>
-                </a:solidFill>
-                <a:latin typeface="Courier"/>
-              </a:rPr>
-              <a:t>leveneTest</a:t>
-            </a:r>
-            <a:r>
-              <a:rPr>
-                <a:solidFill>
-                  <a:srgbClr val="003B4F"/>
-                </a:solidFill>
-                <a:latin typeface="Courier"/>
-              </a:rPr>
-              <a:t>(length_mm </a:t>
-            </a:r>
-            <a:r>
-              <a:rPr>
-                <a:solidFill>
-                  <a:srgbClr val="5E5E5E"/>
-                </a:solidFill>
-                <a:latin typeface="Courier"/>
-              </a:rPr>
-              <a:t>~</a:t>
-            </a:r>
-            <a:r>
-              <a:rPr>
-                <a:solidFill>
-                  <a:srgbClr val="003B4F"/>
-                </a:solidFill>
-                <a:latin typeface="Courier"/>
-              </a:rPr>
-              <a:t> side, </a:t>
-            </a:r>
-            <a:r>
-              <a:rPr>
-                <a:solidFill>
-                  <a:srgbClr val="657422"/>
-                </a:solidFill>
-                <a:latin typeface="Courier"/>
-              </a:rPr>
-              <a:t>data =</a:t>
-            </a:r>
-            <a:r>
-              <a:rPr>
-                <a:solidFill>
-                  <a:srgbClr val="003B4F"/>
-                </a:solidFill>
-                <a:latin typeface="Courier"/>
-              </a:rPr>
-              <a:t> ps_df)</a:t>
-            </a:r>
-            <a:br/>
-            <a:r>
-              <a:rPr>
-                <a:solidFill>
-                  <a:srgbClr val="4758AB"/>
-                </a:solidFill>
-                <a:latin typeface="Courier"/>
-              </a:rPr>
-              <a:t>print</a:t>
-            </a:r>
-            <a:r>
-              <a:rPr>
-                <a:solidFill>
-                  <a:srgbClr val="003B4F"/>
-                </a:solidFill>
-                <a:latin typeface="Courier"/>
-              </a:rPr>
-              <a:t>(</a:t>
-            </a:r>
-            <a:r>
-              <a:rPr>
-                <a:solidFill>
-                  <a:srgbClr val="20794D"/>
-                </a:solidFill>
-                <a:latin typeface="Courier"/>
-              </a:rPr>
-              <a:t>"Levene's Test for Homogeneity of Variance:"</a:t>
-            </a:r>
-            <a:r>
-              <a:rPr>
-                <a:solidFill>
-                  <a:srgbClr val="003B4F"/>
-                </a:solidFill>
-                <a:latin typeface="Courier"/>
-              </a:rPr>
-              <a:t>)</a:t>
-            </a:r>
-          </a:p>
-          <a:p>
-            <a:pPr lvl="0" indent="0">
-              <a:buNone/>
-            </a:pPr>
-            <a:r>
-              <a:rPr sz="2000">
-                <a:latin typeface="Courier"/>
-              </a:rPr>
-              <a:t>[1] "Levene's Test for Homogeneity of Variance:"</a:t>
-            </a:r>
-          </a:p>
-          <a:p>
-            <a:pPr lvl="0" indent="0">
-              <a:buNone/>
-            </a:pPr>
-            <a:r>
-              <a:rPr>
-                <a:solidFill>
-                  <a:srgbClr val="4758AB"/>
-                </a:solidFill>
-                <a:latin typeface="Courier"/>
-              </a:rPr>
-              <a:t>print</a:t>
-            </a:r>
-            <a:r>
-              <a:rPr>
-                <a:solidFill>
-                  <a:srgbClr val="003B4F"/>
-                </a:solidFill>
-                <a:latin typeface="Courier"/>
-              </a:rPr>
-              <a:t>(levene_result)</a:t>
-            </a:r>
-          </a:p>
-          <a:p>
-            <a:pPr lvl="0" indent="0">
-              <a:buNone/>
-            </a:pPr>
-            <a:r>
-              <a:rPr sz="2000">
                 <a:latin typeface="Courier"/>
               </a:rPr>
               <a:t>Levene's Test for Homogeneity of Variance (center = median)
@@ -10339,11 +10235,8 @@
         <p:spPr>
           <a:xfrm>
             <a:off x="0" y="0"/>
-            <a:ext cx="9144000" cy="602780"/>
+            <a:ext cx="9144000" cy="582780"/>
           </a:xfrm>
-          <a:solidFill>
-            <a:srgbClr val="70121D"/>
-          </a:solidFill>
         </p:spPr>
         <p:txBody>
           <a:bodyPr/>
@@ -10358,7 +10251,7 @@
             </a:r>
             <a:r>
               <a:rPr/>
-              <a:t> Conducting the Two-Sample T-Test</a:t>
+              <a:t> Running the Two-Sample T-Test</a:t>
             </a:r>
           </a:p>
         </p:txBody>
@@ -10370,7 +10263,7 @@
             <a:spLocks noGrp="1"/>
           </p:cNvSpPr>
           <p:nvPr>
-            <p:ph idx="1" sz="half"/>
+            <p:ph idx="1"/>
           </p:nvPr>
         </p:nvSpPr>
         <p:spPr/>
@@ -10383,7 +10276,7 @@
             </a:pPr>
             <a:r>
               <a:rPr/>
-              <a:t>Now we can compare the mean fish lengths between shady and sunny sides.</a:t>
+              <a:t>Now we can do a two sample TTEST</a:t>
             </a:r>
           </a:p>
           <a:p>
@@ -10392,7 +10285,7 @@
             </a:pPr>
             <a:r>
               <a:rPr/>
-              <a:t>Ho: μ₁ = μ₂ (The needle lengths do not differ)</a:t>
+              <a:t>Calculate t-statistic manually (optional)</a:t>
             </a:r>
           </a:p>
           <a:p>
@@ -10401,7 +10294,7 @@
             </a:pPr>
             <a:r>
               <a:rPr/>
-              <a:t>Ha: μ₁ ≠ μ₂ (The mean needle lengths differ - direction is not specified)</a:t>
+              <a:t>YOUR CODE HERE:</a:t>
             </a:r>
           </a:p>
           <a:p>
@@ -10410,60 +10303,284 @@
             </a:pPr>
             <a:r>
               <a:rPr/>
-              <a:t>Deciding between:</a:t>
-            </a:r>
-          </a:p>
-          <a:p>
-            <a:pPr lvl="0"/>
-            <a:r>
-              <a:rPr/>
-              <a:t>Standard t-test (equal variances)</a:t>
-            </a:r>
-          </a:p>
-          <a:p>
-            <a:pPr lvl="0"/>
-            <a:r>
-              <a:rPr/>
-              <a:t>Welch’s t-test (unequal variances)</a:t>
-            </a:r>
-          </a:p>
-          <a:p>
-            <a:pPr lvl="0" indent="0" marL="0">
-              <a:buNone/>
-            </a:pPr>
-            <a:r>
-              <a:rPr b="1"/>
-              <a:t>Note the Levenes Test should be NOT SIGNIFICANT - What is the null hypothesis</a:t>
-            </a:r>
-          </a:p>
-        </p:txBody>
-      </p:sp>
-      <p:sp>
-        <p:nvSpPr>
-          <p:cNvPr id="4" name="Content Placeholder 3"/>
-          <p:cNvSpPr>
-            <a:spLocks noGrp="1"/>
-          </p:cNvSpPr>
-          <p:nvPr>
-            <p:ph idx="2" sz="half"/>
-          </p:nvPr>
-        </p:nvSpPr>
-        <p:spPr/>
-        <p:txBody>
-          <a:bodyPr/>
-          <a:lstStyle/>
+              <a:t>t = (mean1 - mean2) / sqrt((s1^2/n1) + (s2^2/n2))</a:t>
+            </a:r>
+          </a:p>
+          <a:p>
+            <a:pPr lvl="0" indent="0" marL="1270000">
+              <a:buNone/>
+            </a:pPr>
+            <a:r>
+              <a:rPr sz="2000" b="1"/>
+              <a:t>Tip</a:t>
+            </a:r>
+          </a:p>
           <a:p>
             <a:pPr lvl="0" indent="0">
               <a:buNone/>
             </a:pPr>
             <a:r>
               <a:rPr>
-                <a:latin typeface="Courier"/>
-              </a:rPr>
-              <a:t>Levene's Test for Homogeneity of Variance (center = median)
-      Df F value Pr(&gt;F)
-group  1  0.2062 0.6567
-      14               </a:t>
+                <a:solidFill>
+                  <a:srgbClr val="5E5E5E"/>
+                </a:solidFill>
+                <a:latin typeface="Courier"/>
+              </a:rPr>
+              <a:t># YOUR </a:t>
+            </a:r>
+            <a:r>
+              <a:rPr>
+                <a:solidFill>
+                  <a:srgbClr val="AD0000"/>
+                </a:solidFill>
+                <a:latin typeface="Courier"/>
+              </a:rPr>
+              <a:t>TASK</a:t>
+            </a:r>
+            <a:r>
+              <a:rPr>
+                <a:solidFill>
+                  <a:srgbClr val="5E5E5E"/>
+                </a:solidFill>
+                <a:latin typeface="Courier"/>
+              </a:rPr>
+              <a:t>: Conduct a two-sample t-test</a:t>
+            </a:r>
+            <a:br/>
+            <a:r>
+              <a:rPr>
+                <a:solidFill>
+                  <a:srgbClr val="5E5E5E"/>
+                </a:solidFill>
+                <a:latin typeface="Courier"/>
+              </a:rPr>
+              <a:t># Use var.equal=TRUE for standard t-test or var.equal=FALSE for Welch's t-test</a:t>
+            </a:r>
+            <a:br/>
+            <a:br/>
+            <a:r>
+              <a:rPr>
+                <a:solidFill>
+                  <a:srgbClr val="5E5E5E"/>
+                </a:solidFill>
+                <a:latin typeface="Courier"/>
+              </a:rPr>
+              <a:t># Standard t-test (if variances are equal)</a:t>
+            </a:r>
+            <a:br/>
+            <a:r>
+              <a:rPr>
+                <a:solidFill>
+                  <a:srgbClr val="003B4F"/>
+                </a:solidFill>
+                <a:latin typeface="Courier"/>
+              </a:rPr>
+              <a:t>t_test_result &lt;- </a:t>
+            </a:r>
+            <a:r>
+              <a:rPr>
+                <a:solidFill>
+                  <a:srgbClr val="4758AB"/>
+                </a:solidFill>
+                <a:latin typeface="Courier"/>
+              </a:rPr>
+              <a:t>t.test</a:t>
+            </a:r>
+            <a:r>
+              <a:rPr>
+                <a:solidFill>
+                  <a:srgbClr val="003B4F"/>
+                </a:solidFill>
+                <a:latin typeface="Courier"/>
+              </a:rPr>
+              <a:t>(length_mm </a:t>
+            </a:r>
+            <a:r>
+              <a:rPr>
+                <a:solidFill>
+                  <a:srgbClr val="5E5E5E"/>
+                </a:solidFill>
+                <a:latin typeface="Courier"/>
+              </a:rPr>
+              <a:t>~</a:t>
+            </a:r>
+            <a:r>
+              <a:rPr>
+                <a:solidFill>
+                  <a:srgbClr val="003B4F"/>
+                </a:solidFill>
+                <a:latin typeface="Courier"/>
+              </a:rPr>
+              <a:t> side, </a:t>
+            </a:r>
+            <a:r>
+              <a:rPr>
+                <a:solidFill>
+                  <a:srgbClr val="657422"/>
+                </a:solidFill>
+                <a:latin typeface="Courier"/>
+              </a:rPr>
+              <a:t>data =</a:t>
+            </a:r>
+            <a:r>
+              <a:rPr>
+                <a:solidFill>
+                  <a:srgbClr val="003B4F"/>
+                </a:solidFill>
+                <a:latin typeface="Courier"/>
+              </a:rPr>
+              <a:t> ps_df, </a:t>
+            </a:r>
+            <a:r>
+              <a:rPr>
+                <a:solidFill>
+                  <a:srgbClr val="657422"/>
+                </a:solidFill>
+                <a:latin typeface="Courier"/>
+              </a:rPr>
+              <a:t>var.equal =</a:t>
+            </a:r>
+            <a:r>
+              <a:rPr>
+                <a:solidFill>
+                  <a:srgbClr val="003B4F"/>
+                </a:solidFill>
+                <a:latin typeface="Courier"/>
+              </a:rPr>
+              <a:t> </a:t>
+            </a:r>
+            <a:r>
+              <a:rPr>
+                <a:solidFill>
+                  <a:srgbClr val="8F5902"/>
+                </a:solidFill>
+                <a:latin typeface="Courier"/>
+              </a:rPr>
+              <a:t>TRUE</a:t>
+            </a:r>
+            <a:r>
+              <a:rPr>
+                <a:solidFill>
+                  <a:srgbClr val="003B4F"/>
+                </a:solidFill>
+                <a:latin typeface="Courier"/>
+              </a:rPr>
+              <a:t>)</a:t>
+            </a:r>
+            <a:br/>
+            <a:r>
+              <a:rPr>
+                <a:solidFill>
+                  <a:srgbClr val="4758AB"/>
+                </a:solidFill>
+                <a:latin typeface="Courier"/>
+              </a:rPr>
+              <a:t>print</a:t>
+            </a:r>
+            <a:r>
+              <a:rPr>
+                <a:solidFill>
+                  <a:srgbClr val="003B4F"/>
+                </a:solidFill>
+                <a:latin typeface="Courier"/>
+              </a:rPr>
+              <a:t>(</a:t>
+            </a:r>
+            <a:r>
+              <a:rPr>
+                <a:solidFill>
+                  <a:srgbClr val="20794D"/>
+                </a:solidFill>
+                <a:latin typeface="Courier"/>
+              </a:rPr>
+              <a:t>"Standard two-sample t-test:"</a:t>
+            </a:r>
+            <a:r>
+              <a:rPr>
+                <a:solidFill>
+                  <a:srgbClr val="003B4F"/>
+                </a:solidFill>
+                <a:latin typeface="Courier"/>
+              </a:rPr>
+              <a:t>)</a:t>
+            </a:r>
+          </a:p>
+          <a:p>
+            <a:pPr lvl="0" indent="0">
+              <a:buNone/>
+            </a:pPr>
+            <a:r>
+              <a:rPr sz="2000">
+                <a:latin typeface="Courier"/>
+              </a:rPr>
+              <a:t>[1] "Standard two-sample t-test:"</a:t>
+            </a:r>
+          </a:p>
+          <a:p>
+            <a:pPr lvl="0" indent="0">
+              <a:buNone/>
+            </a:pPr>
+            <a:r>
+              <a:rPr>
+                <a:solidFill>
+                  <a:srgbClr val="4758AB"/>
+                </a:solidFill>
+                <a:latin typeface="Courier"/>
+              </a:rPr>
+              <a:t>print</a:t>
+            </a:r>
+            <a:r>
+              <a:rPr>
+                <a:solidFill>
+                  <a:srgbClr val="003B4F"/>
+                </a:solidFill>
+                <a:latin typeface="Courier"/>
+              </a:rPr>
+              <a:t>(t_test_result)</a:t>
+            </a:r>
+          </a:p>
+          <a:p>
+            <a:pPr lvl="0" indent="0">
+              <a:buNone/>
+            </a:pPr>
+            <a:r>
+              <a:rPr sz="2000">
+                <a:latin typeface="Courier"/>
+              </a:rPr>
+              <a:t>
+    Two Sample t-test
+data:  length_mm by side
+t = 1.1279, df = 14, p-value = 0.2783
+alternative hypothesis: true difference in means between group shady and group sunny is not equal to 0
+95 percent confidence interval:
+ -1.309330  4.214005
+sample estimates:
+mean in group shady mean in group sunny 
+           17.60561            16.15328 </a:t>
+            </a:r>
+          </a:p>
+          <a:p>
+            <a:pPr lvl="0" indent="0">
+              <a:buNone/>
+            </a:pPr>
+            <a:r>
+              <a:rPr>
+                <a:solidFill>
+                  <a:srgbClr val="5E5E5E"/>
+                </a:solidFill>
+                <a:latin typeface="Courier"/>
+              </a:rPr>
+              <a:t># Welch's t-test (if variances are unequal)</a:t>
+            </a:r>
+            <a:br/>
+            <a:r>
+              <a:rPr>
+                <a:solidFill>
+                  <a:srgbClr val="5E5E5E"/>
+                </a:solidFill>
+                <a:latin typeface="Courier"/>
+              </a:rPr>
+              <a:t># YOUR CODE HERE</a:t>
             </a:r>
           </a:p>
         </p:txBody>
@@ -10724,7 +10841,7 @@
                 </a:solidFill>
                 <a:latin typeface="Courier"/>
               </a:rPr>
-              <a:t>TRUE</a:t>
+              <a:t>FALSE</a:t>
             </a:r>
             <a:r>
               <a:rPr>
@@ -10816,12 +10933,12 @@
                 <a:latin typeface="Courier"/>
               </a:rPr>
               <a:t>
-    Two Sample t-test
+    Welch Two Sample t-test
 data:  length_mm by side
-t = 1.1279, df = 14, p-value = 0.2783
+t = 1.1279, df = 13.96, p-value = 0.2784
 alternative hypothesis: true difference in means between group shady and group sunny is not equal to 0
 95 percent confidence interval:
- -1.309330  4.214005
+ -1.310069  4.214743
 sample estimates:
 mean in group shady mean in group sunny 
            17.60561            16.15328 </a:t>
@@ -10904,7 +11021,7 @@
             </a:r>
             <a:r>
               <a:rPr/>
-              <a:t> Running the Two-Sample T-Test</a:t>
+              <a:t> Difference between a Two-Sample T and Welch’s T Test</a:t>
             </a:r>
           </a:p>
         </p:txBody>
@@ -10925,315 +11042,153 @@
           <a:lstStyle/>
           <a:p>
             <a:pPr lvl="0" indent="0" marL="0">
-              <a:buNone/>
-            </a:pPr>
-            <a:r>
-              <a:rPr/>
-              <a:t>Now we can do a two sample TTEST</a:t>
+              <a:spcBef>
+                <a:spcPts val="3000"/>
+              </a:spcBef>
+              <a:buNone/>
+            </a:pPr>
+            <a:r>
+              <a:rPr b="1"/>
+              <a:t>Standard t-test (Student’s t-test)</a:t>
+            </a:r>
+          </a:p>
+          <a:p>
+            <a:pPr lvl="0"/>
+            <a:r>
+              <a:rPr b="1"/>
+              <a:t>Assumes equal variances</a:t>
+            </a:r>
+            <a:r>
+              <a:rPr/>
+              <a:t> between the two groups being compared</a:t>
+            </a:r>
+          </a:p>
+          <a:p>
+            <a:pPr lvl="0"/>
+            <a:r>
+              <a:rPr/>
+              <a:t>Uses a </a:t>
+            </a:r>
+            <a:r>
+              <a:rPr b="1"/>
+              <a:t>pooled variance estimate</a:t>
+            </a:r>
+            <a:r>
+              <a:rPr/>
+              <a:t> that combines data from both group</a:t>
+            </a:r>
+          </a:p>
+          <a:p>
+            <a:pPr lvl="0"/>
+            <a:r>
+              <a:rPr/>
+              <a:t>Has </a:t>
+            </a:r>
+            <a:r>
+              <a:rPr b="1"/>
+              <a:t>higher statistical power</a:t>
+            </a:r>
+            <a:r>
+              <a:rPr/>
+              <a:t> when the equal variance assumption is met</a:t>
+            </a:r>
+          </a:p>
+          <a:p>
+            <a:pPr lvl="0"/>
+            <a:r>
+              <a:rPr b="1"/>
+              <a:t>Degrees of freedom</a:t>
+            </a:r>
+            <a:r>
+              <a:rPr/>
+              <a:t> = n₁ + n₂ - 2</a:t>
             </a:r>
           </a:p>
           <a:p>
             <a:pPr lvl="0" indent="0" marL="0">
-              <a:buNone/>
-            </a:pPr>
-            <a:r>
-              <a:rPr/>
-              <a:t>Calculate t-statistic manually (optional)</a:t>
-            </a:r>
-          </a:p>
-          <a:p>
-            <a:pPr lvl="0" indent="0" marL="0">
-              <a:buNone/>
-            </a:pPr>
-            <a:r>
-              <a:rPr/>
-              <a:t>YOUR CODE HERE:</a:t>
-            </a:r>
-          </a:p>
-          <a:p>
-            <a:pPr lvl="0" indent="0" marL="0">
-              <a:buNone/>
-            </a:pPr>
-            <a:r>
-              <a:rPr/>
-              <a:t>t = (mean1 - mean2) / sqrt((s1^2/n1) + (s2^2/n2))</a:t>
-            </a:r>
-          </a:p>
-          <a:p>
-            <a:pPr lvl="0" indent="0" marL="1270000">
-              <a:buNone/>
-            </a:pPr>
-            <a:r>
-              <a:rPr sz="2000" b="1"/>
-              <a:t>Tip</a:t>
-            </a:r>
-          </a:p>
-          <a:p>
-            <a:pPr lvl="0" indent="0">
-              <a:buNone/>
-            </a:pPr>
-            <a:r>
-              <a:rPr>
-                <a:solidFill>
-                  <a:srgbClr val="5E5E5E"/>
-                </a:solidFill>
-                <a:latin typeface="Courier"/>
-              </a:rPr>
-              <a:t># YOUR </a:t>
-            </a:r>
-            <a:r>
-              <a:rPr>
-                <a:solidFill>
-                  <a:srgbClr val="AD0000"/>
-                </a:solidFill>
-                <a:latin typeface="Courier"/>
-              </a:rPr>
-              <a:t>TASK</a:t>
-            </a:r>
-            <a:r>
-              <a:rPr>
-                <a:solidFill>
-                  <a:srgbClr val="5E5E5E"/>
-                </a:solidFill>
-                <a:latin typeface="Courier"/>
-              </a:rPr>
-              <a:t>: Conduct a two-sample t-test</a:t>
-            </a:r>
-            <a:br/>
-            <a:r>
-              <a:rPr>
-                <a:solidFill>
-                  <a:srgbClr val="5E5E5E"/>
-                </a:solidFill>
-                <a:latin typeface="Courier"/>
-              </a:rPr>
-              <a:t># Use var.equal=TRUE for standard t-test or var.equal=FALSE for Welch's t-test</a:t>
-            </a:r>
-            <a:br/>
-            <a:br/>
-            <a:r>
-              <a:rPr>
-                <a:solidFill>
-                  <a:srgbClr val="5E5E5E"/>
-                </a:solidFill>
-                <a:latin typeface="Courier"/>
-              </a:rPr>
-              <a:t># Standard t-test (if variances are equal)</a:t>
-            </a:r>
-            <a:br/>
-            <a:r>
-              <a:rPr>
-                <a:solidFill>
-                  <a:srgbClr val="003B4F"/>
-                </a:solidFill>
-                <a:latin typeface="Courier"/>
-              </a:rPr>
-              <a:t>t_test_result &lt;- </a:t>
-            </a:r>
-            <a:r>
-              <a:rPr>
-                <a:solidFill>
-                  <a:srgbClr val="4758AB"/>
-                </a:solidFill>
-                <a:latin typeface="Courier"/>
-              </a:rPr>
-              <a:t>t.test</a:t>
-            </a:r>
-            <a:r>
-              <a:rPr>
-                <a:solidFill>
-                  <a:srgbClr val="003B4F"/>
-                </a:solidFill>
-                <a:latin typeface="Courier"/>
-              </a:rPr>
-              <a:t>(length_mm </a:t>
-            </a:r>
-            <a:r>
-              <a:rPr>
-                <a:solidFill>
-                  <a:srgbClr val="5E5E5E"/>
-                </a:solidFill>
-                <a:latin typeface="Courier"/>
-              </a:rPr>
-              <a:t>~</a:t>
-            </a:r>
-            <a:r>
-              <a:rPr>
-                <a:solidFill>
-                  <a:srgbClr val="003B4F"/>
-                </a:solidFill>
-                <a:latin typeface="Courier"/>
-              </a:rPr>
-              <a:t> side, </a:t>
-            </a:r>
-            <a:r>
-              <a:rPr>
-                <a:solidFill>
-                  <a:srgbClr val="657422"/>
-                </a:solidFill>
-                <a:latin typeface="Courier"/>
-              </a:rPr>
-              <a:t>data =</a:t>
-            </a:r>
-            <a:r>
-              <a:rPr>
-                <a:solidFill>
-                  <a:srgbClr val="003B4F"/>
-                </a:solidFill>
-                <a:latin typeface="Courier"/>
-              </a:rPr>
-              <a:t> ps_df, </a:t>
-            </a:r>
-            <a:r>
-              <a:rPr>
-                <a:solidFill>
-                  <a:srgbClr val="657422"/>
-                </a:solidFill>
-                <a:latin typeface="Courier"/>
-              </a:rPr>
-              <a:t>var.equal =</a:t>
-            </a:r>
-            <a:r>
-              <a:rPr>
-                <a:solidFill>
-                  <a:srgbClr val="003B4F"/>
-                </a:solidFill>
-                <a:latin typeface="Courier"/>
-              </a:rPr>
-              <a:t> </a:t>
-            </a:r>
-            <a:r>
-              <a:rPr>
-                <a:solidFill>
-                  <a:srgbClr val="8F5902"/>
-                </a:solidFill>
-                <a:latin typeface="Courier"/>
-              </a:rPr>
-              <a:t>FALSE</a:t>
-            </a:r>
-            <a:r>
-              <a:rPr>
-                <a:solidFill>
-                  <a:srgbClr val="003B4F"/>
-                </a:solidFill>
-                <a:latin typeface="Courier"/>
-              </a:rPr>
-              <a:t>)</a:t>
-            </a:r>
-            <a:br/>
-            <a:r>
-              <a:rPr>
-                <a:solidFill>
-                  <a:srgbClr val="4758AB"/>
-                </a:solidFill>
-                <a:latin typeface="Courier"/>
-              </a:rPr>
-              <a:t>print</a:t>
-            </a:r>
-            <a:r>
-              <a:rPr>
-                <a:solidFill>
-                  <a:srgbClr val="003B4F"/>
-                </a:solidFill>
-                <a:latin typeface="Courier"/>
-              </a:rPr>
-              <a:t>(</a:t>
-            </a:r>
-            <a:r>
-              <a:rPr>
-                <a:solidFill>
-                  <a:srgbClr val="20794D"/>
-                </a:solidFill>
-                <a:latin typeface="Courier"/>
-              </a:rPr>
-              <a:t>"Standard two-sample t-test:"</a:t>
-            </a:r>
-            <a:r>
-              <a:rPr>
-                <a:solidFill>
-                  <a:srgbClr val="003B4F"/>
-                </a:solidFill>
-                <a:latin typeface="Courier"/>
-              </a:rPr>
-              <a:t>)</a:t>
-            </a:r>
-          </a:p>
-          <a:p>
-            <a:pPr lvl="0" indent="0">
-              <a:buNone/>
-            </a:pPr>
-            <a:r>
-              <a:rPr sz="2000">
-                <a:latin typeface="Courier"/>
-              </a:rPr>
-              <a:t>[1] "Standard two-sample t-test:"</a:t>
-            </a:r>
-          </a:p>
-          <a:p>
-            <a:pPr lvl="0" indent="0">
-              <a:buNone/>
-            </a:pPr>
-            <a:r>
-              <a:rPr>
-                <a:solidFill>
-                  <a:srgbClr val="4758AB"/>
-                </a:solidFill>
-                <a:latin typeface="Courier"/>
-              </a:rPr>
-              <a:t>print</a:t>
-            </a:r>
-            <a:r>
-              <a:rPr>
-                <a:solidFill>
-                  <a:srgbClr val="003B4F"/>
-                </a:solidFill>
-                <a:latin typeface="Courier"/>
-              </a:rPr>
-              <a:t>(t_test_result)</a:t>
-            </a:r>
-          </a:p>
-          <a:p>
-            <a:pPr lvl="0" indent="0">
-              <a:buNone/>
-            </a:pPr>
-            <a:r>
-              <a:rPr sz="2000">
-                <a:latin typeface="Courier"/>
-              </a:rPr>
-              <a:t>
-    Welch Two Sample t-test
-data:  length_mm by side
-t = 1.1279, df = 13.96, p-value = 0.2784
-alternative hypothesis: true difference in means between group shady and group sunny is not equal to 0
-95 percent confidence interval:
- -1.310069  4.214743
-sample estimates:
-mean in group shady mean in group sunny 
-           17.60561            16.15328 </a:t>
-            </a:r>
-          </a:p>
-          <a:p>
-            <a:pPr lvl="0" indent="0">
-              <a:buNone/>
-            </a:pPr>
-            <a:r>
-              <a:rPr>
-                <a:solidFill>
-                  <a:srgbClr val="5E5E5E"/>
-                </a:solidFill>
-                <a:latin typeface="Courier"/>
-              </a:rPr>
-              <a:t># Welch's t-test (if variances are unequal)</a:t>
-            </a:r>
-            <a:br/>
-            <a:r>
-              <a:rPr>
-                <a:solidFill>
-                  <a:srgbClr val="5E5E5E"/>
-                </a:solidFill>
-                <a:latin typeface="Courier"/>
-              </a:rPr>
-              <a:t># YOUR CODE HERE</a:t>
+              <a:spcBef>
+                <a:spcPts val="3000"/>
+              </a:spcBef>
+              <a:buNone/>
+            </a:pPr>
+            <a:r>
+              <a:rPr b="1"/>
+              <a:t>Welch’s t-test</a:t>
+            </a:r>
+          </a:p>
+          <a:p>
+            <a:pPr lvl="0"/>
+            <a:r>
+              <a:rPr b="1"/>
+              <a:t>Does not assume equal variances</a:t>
+            </a:r>
+            <a:r>
+              <a:rPr/>
+              <a:t> between groups (also called the “unequal variances t-test”)</a:t>
+            </a:r>
+          </a:p>
+          <a:p>
+            <a:pPr lvl="0"/>
+            <a:r>
+              <a:rPr/>
+              <a:t>Uses </a:t>
+            </a:r>
+            <a:r>
+              <a:rPr b="1"/>
+              <a:t>separate variance estimates</a:t>
+            </a:r>
+            <a:r>
+              <a:rPr/>
+              <a:t> for each group</a:t>
+            </a:r>
+          </a:p>
+          <a:p>
+            <a:pPr lvl="0"/>
+            <a:r>
+              <a:rPr/>
+              <a:t>More </a:t>
+            </a:r>
+            <a:r>
+              <a:rPr b="1"/>
+              <a:t>robust</a:t>
+            </a:r>
+            <a:r>
+              <a:rPr/>
+              <a:t> when group variances are different</a:t>
+            </a:r>
+          </a:p>
+          <a:p>
+            <a:pPr lvl="0"/>
+            <a:r>
+              <a:rPr/>
+              <a:t>Uses a more complex </a:t>
+            </a:r>
+            <a:r>
+              <a:rPr b="1"/>
+              <a:t>degrees of freedom calculation</a:t>
+            </a:r>
+            <a:r>
+              <a:rPr/>
+              <a:t> (</a:t>
+            </a:r>
+            <a:r>
+              <a:rPr b="1"/>
+              <a:t>Welch-Satterthwaite equation</a:t>
+            </a:r>
+            <a:r>
+              <a:rPr/>
+              <a:t>) and decimal!!!</a:t>
+            </a:r>
+          </a:p>
+          <a:p>
+            <a:pPr lvl="0"/>
+            <a:r>
+              <a:rPr b="1"/>
+              <a:t>Degrees of freedom</a:t>
+            </a:r>
+            <a:r>
+              <a:rPr/>
+              <a:t> are typically non-integer and usually smaller than the standard t-test</a:t>
             </a:r>
           </a:p>
         </p:txBody>
@@ -11273,8 +11228,11 @@
         <p:spPr>
           <a:xfrm>
             <a:off x="0" y="0"/>
-            <a:ext cx="9144000" cy="582780"/>
+            <a:ext cx="9144000" cy="602780"/>
           </a:xfrm>
+          <a:solidFill>
+            <a:srgbClr val="70121D"/>
+          </a:solidFill>
         </p:spPr>
         <p:txBody>
           <a:bodyPr/>
@@ -11285,7 +11243,7 @@
             </a:pPr>
             <a:r>
               <a:rPr b="1"/>
-              <a:t>Lecture 4: Review - Summary Statistics</a:t>
+              <a:t>Lecture 5: Probability and Statistical Inference</a:t>
             </a:r>
           </a:p>
         </p:txBody>
@@ -11297,7 +11255,7 @@
             <a:spLocks noGrp="1"/>
           </p:cNvSpPr>
           <p:nvPr>
-            <p:ph idx="1"/>
+            <p:ph idx="1" sz="half"/>
           </p:nvPr>
         </p:nvSpPr>
         <p:spPr/>
@@ -11305,50 +11263,98 @@
           <a:bodyPr/>
           <a:lstStyle/>
           <a:p>
+            <a:pPr lvl="0" indent="0" marL="0">
+              <a:spcBef>
+                <a:spcPts val="3000"/>
+              </a:spcBef>
+              <a:buNone/>
+            </a:pPr>
+            <a:r>
+              <a:rPr b="1"/>
+              <a:t>The goals for today</a:t>
+            </a:r>
+          </a:p>
+          <a:p>
             <a:pPr lvl="0"/>
             <a:r>
               <a:rPr/>
-              <a:t>Tests of means using T-Tests</a:t>
-            </a:r>
-          </a:p>
-          <a:p>
-            <a:pPr lvl="1"/>
-            <a:r>
-              <a:rPr/>
-              <a:t>one sample - is the sample mean different from a hypothesized mean?</a:t>
-            </a:r>
-          </a:p>
-          <a:p>
-            <a:pPr lvl="1"/>
-            <a:r>
-              <a:rPr/>
-              <a:t>two sample - are the sample means from two samples the same or different?</a:t>
+              <a:t>Statistical inference fundamentals</a:t>
             </a:r>
           </a:p>
           <a:p>
             <a:pPr lvl="0"/>
             <a:r>
               <a:rPr/>
-              <a:t>for two sample T tests the df = n1+ n2 -2 = 8+8-2=14</a:t>
-            </a:r>
-          </a:p>
-          <a:p>
-            <a:pPr lvl="0" indent="0">
-              <a:buNone/>
-            </a:pPr>
-            <a:r>
-              <a:rPr>
-                <a:latin typeface="Courier"/>
-              </a:rPr>
-              <a:t># A tibble: 2 × 5
-  side  mean_length sd_length se_length count
-  &lt;chr&gt;       &lt;dbl&gt;     &lt;dbl&gt;     &lt;dbl&gt; &lt;int&gt;
-1 shady        17.6      2.51     0.886     8
-2 sunny        16.2      2.64     0.934     8</a:t>
-            </a:r>
-          </a:p>
-        </p:txBody>
-      </p:sp>
+              <a:t>Hypothesis testing principles</a:t>
+            </a:r>
+          </a:p>
+          <a:p>
+            <a:pPr lvl="0"/>
+            <a:r>
+              <a:rPr/>
+              <a:t>T Distributions</a:t>
+            </a:r>
+          </a:p>
+          <a:p>
+            <a:pPr lvl="0"/>
+            <a:r>
+              <a:rPr/>
+              <a:t>One sample T Test</a:t>
+            </a:r>
+          </a:p>
+          <a:p>
+            <a:pPr lvl="0"/>
+            <a:r>
+              <a:rPr/>
+              <a:t>Two sample T Test</a:t>
+            </a:r>
+          </a:p>
+          <a:p>
+            <a:pPr lvl="0"/>
+            <a:r>
+              <a:rPr/>
+              <a:t>Paired T Test</a:t>
+            </a:r>
+          </a:p>
+          <a:p>
+            <a:pPr lvl="0"/>
+            <a:r>
+              <a:rPr/>
+              <a:t>Assumption tests</a:t>
+            </a:r>
+          </a:p>
+        </p:txBody>
+      </p:sp>
+      <p:pic>
+        <p:nvPicPr>
+          <p:cNvPr descr="05_01_lecture_powerpoint_files/figure-pptx/unnamed-chunk-2-1.png" id="0" name="Picture 1"/>
+          <p:cNvPicPr>
+            <a:picLocks noGrp="1" noChangeAspect="1"/>
+          </p:cNvPicPr>
+          <p:nvPr/>
+        </p:nvPicPr>
+        <p:blipFill>
+          <a:blip r:embed="rId2"/>
+          <a:stretch>
+            <a:fillRect/>
+          </a:stretch>
+        </p:blipFill>
+        <p:spPr bwMode="auto">
+          <a:xfrm>
+            <a:off x="6121400" y="1778000"/>
+            <a:ext cx="2781300" cy="2222500"/>
+          </a:xfrm>
+          <a:prstGeom prst="rect">
+            <a:avLst/>
+          </a:prstGeom>
+          <a:noFill/>
+          <a:ln w="9525">
+            <a:noFill/>
+            <a:headEnd/>
+            <a:tailEnd/>
+          </a:ln>
+        </p:spPr>
+      </p:pic>
     </p:spTree>
   </p:cSld>
 </p:sld>
@@ -11384,229 +11390,6 @@
         <p:spPr>
           <a:xfrm>
             <a:off x="0" y="0"/>
-            <a:ext cx="9144000" cy="582780"/>
-          </a:xfrm>
-        </p:spPr>
-        <p:txBody>
-          <a:bodyPr/>
-          <a:lstStyle/>
-          <a:p>
-            <a:pPr lvl="0" indent="0" marL="0">
-              <a:buNone/>
-            </a:pPr>
-            <a:r>
-              <a:rPr b="1"/>
-              <a:t>Lecture 5:</a:t>
-            </a:r>
-            <a:r>
-              <a:rPr/>
-              <a:t> Difference between a Two-Sample T and Welch’s T Test</a:t>
-            </a:r>
-          </a:p>
-        </p:txBody>
-      </p:sp>
-      <p:sp>
-        <p:nvSpPr>
-          <p:cNvPr id="3" name="Content Placeholder 2"/>
-          <p:cNvSpPr>
-            <a:spLocks noGrp="1"/>
-          </p:cNvSpPr>
-          <p:nvPr>
-            <p:ph idx="1"/>
-          </p:nvPr>
-        </p:nvSpPr>
-        <p:spPr/>
-        <p:txBody>
-          <a:bodyPr/>
-          <a:lstStyle/>
-          <a:p>
-            <a:pPr lvl="0" indent="0" marL="0">
-              <a:spcBef>
-                <a:spcPts val="3000"/>
-              </a:spcBef>
-              <a:buNone/>
-            </a:pPr>
-            <a:r>
-              <a:rPr b="1"/>
-              <a:t>Standard t-test (Student’s t-test)</a:t>
-            </a:r>
-          </a:p>
-          <a:p>
-            <a:pPr lvl="0"/>
-            <a:r>
-              <a:rPr b="1"/>
-              <a:t>Assumes equal variances</a:t>
-            </a:r>
-            <a:r>
-              <a:rPr/>
-              <a:t> between the two groups being compared</a:t>
-            </a:r>
-          </a:p>
-          <a:p>
-            <a:pPr lvl="0"/>
-            <a:r>
-              <a:rPr/>
-              <a:t>Uses a </a:t>
-            </a:r>
-            <a:r>
-              <a:rPr b="1"/>
-              <a:t>pooled variance estimate</a:t>
-            </a:r>
-            <a:r>
-              <a:rPr/>
-              <a:t> that combines data from both group</a:t>
-            </a:r>
-          </a:p>
-          <a:p>
-            <a:pPr lvl="0"/>
-            <a:r>
-              <a:rPr/>
-              <a:t>Has </a:t>
-            </a:r>
-            <a:r>
-              <a:rPr b="1"/>
-              <a:t>higher statistical power</a:t>
-            </a:r>
-            <a:r>
-              <a:rPr/>
-              <a:t> when the equal variance assumption is met</a:t>
-            </a:r>
-          </a:p>
-          <a:p>
-            <a:pPr lvl="0"/>
-            <a:r>
-              <a:rPr b="1"/>
-              <a:t>Degrees of freedom</a:t>
-            </a:r>
-            <a:r>
-              <a:rPr/>
-              <a:t> = n₁ + n₂ - 2</a:t>
-            </a:r>
-          </a:p>
-          <a:p>
-            <a:pPr lvl="0" indent="0" marL="0">
-              <a:spcBef>
-                <a:spcPts val="3000"/>
-              </a:spcBef>
-              <a:buNone/>
-            </a:pPr>
-            <a:r>
-              <a:rPr b="1"/>
-              <a:t>Welch’s t-test</a:t>
-            </a:r>
-          </a:p>
-          <a:p>
-            <a:pPr lvl="0"/>
-            <a:r>
-              <a:rPr b="1"/>
-              <a:t>Does not assume equal variances</a:t>
-            </a:r>
-            <a:r>
-              <a:rPr/>
-              <a:t> between groups (also called the “unequal variances t-test”)</a:t>
-            </a:r>
-          </a:p>
-          <a:p>
-            <a:pPr lvl="0"/>
-            <a:r>
-              <a:rPr/>
-              <a:t>Uses </a:t>
-            </a:r>
-            <a:r>
-              <a:rPr b="1"/>
-              <a:t>separate variance estimates</a:t>
-            </a:r>
-            <a:r>
-              <a:rPr/>
-              <a:t> for each group</a:t>
-            </a:r>
-          </a:p>
-          <a:p>
-            <a:pPr lvl="0"/>
-            <a:r>
-              <a:rPr/>
-              <a:t>More </a:t>
-            </a:r>
-            <a:r>
-              <a:rPr b="1"/>
-              <a:t>robust</a:t>
-            </a:r>
-            <a:r>
-              <a:rPr/>
-              <a:t> when group variances are different</a:t>
-            </a:r>
-          </a:p>
-          <a:p>
-            <a:pPr lvl="0"/>
-            <a:r>
-              <a:rPr/>
-              <a:t>Uses a more complex </a:t>
-            </a:r>
-            <a:r>
-              <a:rPr b="1"/>
-              <a:t>degrees of freedom calculation</a:t>
-            </a:r>
-            <a:r>
-              <a:rPr/>
-              <a:t> (</a:t>
-            </a:r>
-            <a:r>
-              <a:rPr b="1"/>
-              <a:t>Welch-Satterthwaite equation</a:t>
-            </a:r>
-            <a:r>
-              <a:rPr/>
-              <a:t>) and decimal!!!</a:t>
-            </a:r>
-          </a:p>
-          <a:p>
-            <a:pPr lvl="0"/>
-            <a:r>
-              <a:rPr b="1"/>
-              <a:t>Degrees of freedom</a:t>
-            </a:r>
-            <a:r>
-              <a:rPr/>
-              <a:t> are typically non-integer and usually smaller than the standard t-test</a:t>
-            </a:r>
-          </a:p>
-        </p:txBody>
-      </p:sp>
-    </p:spTree>
-  </p:cSld>
-</p:sld>
-</file>
-
-<file path=ppt/slides/slide41.xml><?xml version="1.0" encoding="utf-8"?>
-<p:sld xmlns:a="http://schemas.openxmlformats.org/drawingml/2006/main" xmlns:r="http://schemas.openxmlformats.org/officeDocument/2006/relationships" xmlns:p="http://schemas.openxmlformats.org/presentationml/2006/main">
-  <p:cSld>
-    <p:spTree>
-      <p:nvGrpSpPr>
-        <p:cNvPr id="1" name=""/>
-        <p:cNvGrpSpPr/>
-        <p:nvPr/>
-      </p:nvGrpSpPr>
-      <p:grpSpPr>
-        <a:xfrm>
-          <a:off x="0" y="0"/>
-          <a:ext cx="0" cy="0"/>
-          <a:chOff x="0" y="0"/>
-          <a:chExt cx="0" cy="0"/>
-        </a:xfrm>
-      </p:grpSpPr>
-      <p:sp>
-        <p:nvSpPr>
-          <p:cNvPr id="2" name="Title 1"/>
-          <p:cNvSpPr>
-            <a:spLocks noGrp="1"/>
-          </p:cNvSpPr>
-          <p:nvPr>
-            <p:ph type="title"/>
-          </p:nvPr>
-        </p:nvSpPr>
-        <p:spPr>
-          <a:xfrm>
-            <a:off x="0" y="0"/>
             <a:ext cx="9144000" cy="602780"/>
           </a:xfrm>
           <a:solidFill>
@@ -11678,7 +11461,7 @@
             </a:pPr>
             <a:r>
               <a:rPr/>
-              <a:t>“A two-tailed, two-sample t-test at α=0.05 showed [a significant/no significant] difference in needle length between windward (M = …, SD = …) and leeward (M = …, SD = …) sides of pine trees, t(…) = …, p = ….”</a:t>
+              <a:t>“A two-tailed, two-sample t-test at α=0.05 showed [a significant/no significant] difference in needle length between sunny (M = …, SD = …) and shady (M = …, SD = …) sides of pine trees, t(…) = …, p = ….”</a:t>
             </a:r>
           </a:p>
         </p:txBody>
@@ -11718,7 +11501,7 @@
 </p:sld>
 </file>
 
-<file path=ppt/slides/slide42.xml><?xml version="1.0" encoding="utf-8"?>
+<file path=ppt/slides/slide41.xml><?xml version="1.0" encoding="utf-8"?>
 <p:sld xmlns:a="http://schemas.openxmlformats.org/drawingml/2006/main" xmlns:r="http://schemas.openxmlformats.org/officeDocument/2006/relationships" xmlns:p="http://schemas.openxmlformats.org/presentationml/2006/main">
   <p:cSld>
     <p:spTree>
@@ -11819,7 +11602,7 @@
             </a:pPr>
             <a:r>
               <a:rPr/>
-              <a:t>“A two-tailed, two-sample t-test at α=0.05 showed [a significant/no significant] difference in needle length between windward (M = …, SD = …) and leeward (M = …, SD = …) sides of pine trees, t(…) = …, p = ….”</a:t>
+              <a:t>“A two-tailed, two-sample t-test at α=0.05 showed [a significant/no significant] difference in needle length between sunny (M = …, SD = …) and shady (M = …, SD = …) sides of pine trees, t(…) = …, p = ….”</a:t>
             </a:r>
           </a:p>
         </p:txBody>
@@ -11859,7 +11642,7 @@
 </p:sld>
 </file>
 
-<file path=ppt/slides/slide43.xml><?xml version="1.0" encoding="utf-8"?>
+<file path=ppt/slides/slide42.xml><?xml version="1.0" encoding="utf-8"?>
 <p:sld xmlns:a="http://schemas.openxmlformats.org/drawingml/2006/main" xmlns:r="http://schemas.openxmlformats.org/officeDocument/2006/relationships" xmlns:p="http://schemas.openxmlformats.org/presentationml/2006/main">
   <p:cSld>
     <p:spTree>
@@ -12341,7 +12124,7 @@
 </p:sld>
 </file>
 
-<file path=ppt/slides/slide44.xml><?xml version="1.0" encoding="utf-8"?>
+<file path=ppt/slides/slide43.xml><?xml version="1.0" encoding="utf-8"?>
 <p:sld xmlns:a="http://schemas.openxmlformats.org/drawingml/2006/main" xmlns:r="http://schemas.openxmlformats.org/officeDocument/2006/relationships" xmlns:p="http://schemas.openxmlformats.org/presentationml/2006/main">
   <p:cSld>
     <p:spTree>
@@ -12462,6 +12245,162 @@
 </p:sld>
 </file>
 
+<file path=ppt/slides/slide44.xml><?xml version="1.0" encoding="utf-8"?>
+<p:sld xmlns:a="http://schemas.openxmlformats.org/drawingml/2006/main" xmlns:r="http://schemas.openxmlformats.org/officeDocument/2006/relationships" xmlns:p="http://schemas.openxmlformats.org/presentationml/2006/main">
+  <p:cSld>
+    <p:spTree>
+      <p:nvGrpSpPr>
+        <p:cNvPr id="1" name=""/>
+        <p:cNvGrpSpPr/>
+        <p:nvPr/>
+      </p:nvGrpSpPr>
+      <p:grpSpPr>
+        <a:xfrm>
+          <a:off x="0" y="0"/>
+          <a:ext cx="0" cy="0"/>
+          <a:chOff x="0" y="0"/>
+          <a:chExt cx="0" cy="0"/>
+        </a:xfrm>
+      </p:grpSpPr>
+      <p:sp>
+        <p:nvSpPr>
+          <p:cNvPr id="2" name="Title 1"/>
+          <p:cNvSpPr>
+            <a:spLocks noGrp="1"/>
+          </p:cNvSpPr>
+          <p:nvPr>
+            <p:ph type="title"/>
+          </p:nvPr>
+        </p:nvSpPr>
+        <p:spPr>
+          <a:xfrm>
+            <a:off x="0" y="0"/>
+            <a:ext cx="9144000" cy="582780"/>
+          </a:xfrm>
+        </p:spPr>
+        <p:txBody>
+          <a:bodyPr/>
+          <a:lstStyle/>
+          <a:p>
+            <a:pPr lvl="0" indent="0" marL="0">
+              <a:buNone/>
+            </a:pPr>
+            <a:r>
+              <a:rPr b="1"/>
+              <a:t>Lecture 5:</a:t>
+            </a:r>
+            <a:r>
+              <a:rPr/>
+              <a:t> Assumptions of Parametric Tests</a:t>
+            </a:r>
+          </a:p>
+        </p:txBody>
+      </p:sp>
+      <p:sp>
+        <p:nvSpPr>
+          <p:cNvPr id="3" name="Content Placeholder 2"/>
+          <p:cNvSpPr>
+            <a:spLocks noGrp="1"/>
+          </p:cNvSpPr>
+          <p:nvPr>
+            <p:ph idx="1"/>
+          </p:nvPr>
+        </p:nvSpPr>
+        <p:spPr/>
+        <p:txBody>
+          <a:bodyPr/>
+          <a:lstStyle/>
+          <a:p>
+            <a:pPr lvl="0" indent="0" marL="0">
+              <a:buNone/>
+            </a:pPr>
+            <a:r>
+              <a:rPr b="1"/>
+              <a:t>Common assumptions for t-tests:</a:t>
+            </a:r>
+          </a:p>
+          <a:p>
+            <a:pPr lvl="0" indent="-342900" marL="342900">
+              <a:buAutoNum type="arabicPeriod"/>
+            </a:pPr>
+            <a:r>
+              <a:rPr/>
+              <a:t>Normality: Data comes from normally distributed populations</a:t>
+            </a:r>
+          </a:p>
+          <a:p>
+            <a:pPr lvl="0" indent="-342900" marL="342900">
+              <a:buAutoNum type="arabicPeriod"/>
+            </a:pPr>
+            <a:r>
+              <a:rPr/>
+              <a:t>Equal variances (for two-sample tests)</a:t>
+            </a:r>
+          </a:p>
+          <a:p>
+            <a:pPr lvl="0" indent="-342900" marL="342900">
+              <a:buAutoNum type="arabicPeriod"/>
+            </a:pPr>
+            <a:r>
+              <a:rPr/>
+              <a:t>Independence: Observations are independent</a:t>
+            </a:r>
+          </a:p>
+          <a:p>
+            <a:pPr lvl="0" indent="-342900" marL="342900">
+              <a:buAutoNum type="arabicPeriod"/>
+            </a:pPr>
+            <a:r>
+              <a:rPr/>
+              <a:t>No outliers: Extreme values can influence results</a:t>
+            </a:r>
+          </a:p>
+          <a:p>
+            <a:pPr lvl="0" indent="0" marL="0">
+              <a:buNone/>
+            </a:pPr>
+            <a:r>
+              <a:rPr/>
+              <a:t>What can we do if our data violates these assumptions?</a:t>
+            </a:r>
+          </a:p>
+          <a:p>
+            <a:pPr lvl="0" indent="0" marL="0">
+              <a:buNone/>
+            </a:pPr>
+            <a:r>
+              <a:rPr/>
+              <a:t>Alternatives when assumptions are violated:</a:t>
+            </a:r>
+          </a:p>
+          <a:p>
+            <a:pPr lvl="0"/>
+            <a:r>
+              <a:rPr/>
+              <a:t>Data transformation (log, square root, etc.)</a:t>
+            </a:r>
+          </a:p>
+          <a:p>
+            <a:pPr lvl="0"/>
+            <a:r>
+              <a:rPr/>
+              <a:t>Non-parametric tests</a:t>
+            </a:r>
+          </a:p>
+          <a:p>
+            <a:pPr lvl="0"/>
+            <a:r>
+              <a:rPr/>
+              <a:t>Robust statistical methods</a:t>
+            </a:r>
+          </a:p>
+        </p:txBody>
+      </p:sp>
+    </p:spTree>
+  </p:cSld>
+</p:sld>
+</file>
+
 <file path=ppt/slides/slide45.xml><?xml version="1.0" encoding="utf-8"?>
 <p:sld xmlns:a="http://schemas.openxmlformats.org/drawingml/2006/main" xmlns:r="http://schemas.openxmlformats.org/officeDocument/2006/relationships" xmlns:p="http://schemas.openxmlformats.org/presentationml/2006/main">
   <p:cSld>
@@ -12508,162 +12447,6 @@
             </a:r>
             <a:r>
               <a:rPr/>
-              <a:t> Assumptions of Parametric Tests</a:t>
-            </a:r>
-          </a:p>
-        </p:txBody>
-      </p:sp>
-      <p:sp>
-        <p:nvSpPr>
-          <p:cNvPr id="3" name="Content Placeholder 2"/>
-          <p:cNvSpPr>
-            <a:spLocks noGrp="1"/>
-          </p:cNvSpPr>
-          <p:nvPr>
-            <p:ph idx="1"/>
-          </p:nvPr>
-        </p:nvSpPr>
-        <p:spPr/>
-        <p:txBody>
-          <a:bodyPr/>
-          <a:lstStyle/>
-          <a:p>
-            <a:pPr lvl="0" indent="0" marL="0">
-              <a:buNone/>
-            </a:pPr>
-            <a:r>
-              <a:rPr b="1"/>
-              <a:t>Common assumptions for t-tests:</a:t>
-            </a:r>
-          </a:p>
-          <a:p>
-            <a:pPr lvl="0" indent="-342900" marL="342900">
-              <a:buAutoNum type="arabicPeriod"/>
-            </a:pPr>
-            <a:r>
-              <a:rPr/>
-              <a:t>Normality: Data comes from normally distributed populations</a:t>
-            </a:r>
-          </a:p>
-          <a:p>
-            <a:pPr lvl="0" indent="-342900" marL="342900">
-              <a:buAutoNum type="arabicPeriod"/>
-            </a:pPr>
-            <a:r>
-              <a:rPr/>
-              <a:t>Equal variances (for two-sample tests)</a:t>
-            </a:r>
-          </a:p>
-          <a:p>
-            <a:pPr lvl="0" indent="-342900" marL="342900">
-              <a:buAutoNum type="arabicPeriod"/>
-            </a:pPr>
-            <a:r>
-              <a:rPr/>
-              <a:t>Independence: Observations are independent</a:t>
-            </a:r>
-          </a:p>
-          <a:p>
-            <a:pPr lvl="0" indent="-342900" marL="342900">
-              <a:buAutoNum type="arabicPeriod"/>
-            </a:pPr>
-            <a:r>
-              <a:rPr/>
-              <a:t>No outliers: Extreme values can influence results</a:t>
-            </a:r>
-          </a:p>
-          <a:p>
-            <a:pPr lvl="0" indent="0" marL="0">
-              <a:buNone/>
-            </a:pPr>
-            <a:r>
-              <a:rPr/>
-              <a:t>What can we do if our data violates these assumptions?</a:t>
-            </a:r>
-          </a:p>
-          <a:p>
-            <a:pPr lvl="0" indent="0" marL="0">
-              <a:buNone/>
-            </a:pPr>
-            <a:r>
-              <a:rPr/>
-              <a:t>Alternatives when assumptions are violated:</a:t>
-            </a:r>
-          </a:p>
-          <a:p>
-            <a:pPr lvl="0"/>
-            <a:r>
-              <a:rPr/>
-              <a:t>Data transformation (log, square root, etc.)</a:t>
-            </a:r>
-          </a:p>
-          <a:p>
-            <a:pPr lvl="0"/>
-            <a:r>
-              <a:rPr/>
-              <a:t>Non-parametric tests</a:t>
-            </a:r>
-          </a:p>
-          <a:p>
-            <a:pPr lvl="0"/>
-            <a:r>
-              <a:rPr/>
-              <a:t>Robust statistical methods</a:t>
-            </a:r>
-          </a:p>
-        </p:txBody>
-      </p:sp>
-    </p:spTree>
-  </p:cSld>
-</p:sld>
-</file>
-
-<file path=ppt/slides/slide46.xml><?xml version="1.0" encoding="utf-8"?>
-<p:sld xmlns:a="http://schemas.openxmlformats.org/drawingml/2006/main" xmlns:r="http://schemas.openxmlformats.org/officeDocument/2006/relationships" xmlns:p="http://schemas.openxmlformats.org/presentationml/2006/main">
-  <p:cSld>
-    <p:spTree>
-      <p:nvGrpSpPr>
-        <p:cNvPr id="1" name=""/>
-        <p:cNvGrpSpPr/>
-        <p:nvPr/>
-      </p:nvGrpSpPr>
-      <p:grpSpPr>
-        <a:xfrm>
-          <a:off x="0" y="0"/>
-          <a:ext cx="0" cy="0"/>
-          <a:chOff x="0" y="0"/>
-          <a:chExt cx="0" cy="0"/>
-        </a:xfrm>
-      </p:grpSpPr>
-      <p:sp>
-        <p:nvSpPr>
-          <p:cNvPr id="2" name="Title 1"/>
-          <p:cNvSpPr>
-            <a:spLocks noGrp="1"/>
-          </p:cNvSpPr>
-          <p:nvPr>
-            <p:ph type="title"/>
-          </p:nvPr>
-        </p:nvSpPr>
-        <p:spPr>
-          <a:xfrm>
-            <a:off x="0" y="0"/>
-            <a:ext cx="9144000" cy="582780"/>
-          </a:xfrm>
-        </p:spPr>
-        <p:txBody>
-          <a:bodyPr/>
-          <a:lstStyle/>
-          <a:p>
-            <a:pPr lvl="0" indent="0" marL="0">
-              <a:buNone/>
-            </a:pPr>
-            <a:r>
-              <a:rPr b="1"/>
-              <a:t>Lecture 5:</a:t>
-            </a:r>
-            <a:r>
-              <a:rPr/>
               <a:t> Summary and Conclusions</a:t>
             </a:r>
           </a:p>
@@ -12782,161 +12565,6 @@
 </file>
 
 <file path=ppt/slides/slide5.xml><?xml version="1.0" encoding="utf-8"?>
-<p:sld xmlns:a="http://schemas.openxmlformats.org/drawingml/2006/main" xmlns:r="http://schemas.openxmlformats.org/officeDocument/2006/relationships" xmlns:p="http://schemas.openxmlformats.org/presentationml/2006/main">
-  <p:cSld>
-    <p:spTree>
-      <p:nvGrpSpPr>
-        <p:cNvPr id="1" name=""/>
-        <p:cNvGrpSpPr/>
-        <p:nvPr/>
-      </p:nvGrpSpPr>
-      <p:grpSpPr>
-        <a:xfrm>
-          <a:off x="0" y="0"/>
-          <a:ext cx="0" cy="0"/>
-          <a:chOff x="0" y="0"/>
-          <a:chExt cx="0" cy="0"/>
-        </a:xfrm>
-      </p:grpSpPr>
-      <p:sp>
-        <p:nvSpPr>
-          <p:cNvPr id="2" name="Title 1"/>
-          <p:cNvSpPr>
-            <a:spLocks noGrp="1"/>
-          </p:cNvSpPr>
-          <p:nvPr>
-            <p:ph type="title"/>
-          </p:nvPr>
-        </p:nvSpPr>
-        <p:spPr>
-          <a:xfrm>
-            <a:off x="0" y="0"/>
-            <a:ext cx="9144000" cy="602780"/>
-          </a:xfrm>
-          <a:solidFill>
-            <a:srgbClr val="70121D"/>
-          </a:solidFill>
-        </p:spPr>
-        <p:txBody>
-          <a:bodyPr/>
-          <a:lstStyle/>
-          <a:p>
-            <a:pPr lvl="0" indent="0" marL="0">
-              <a:buNone/>
-            </a:pPr>
-            <a:r>
-              <a:rPr b="1"/>
-              <a:t>Lecture 5: Probability and Statistical Inference</a:t>
-            </a:r>
-          </a:p>
-        </p:txBody>
-      </p:sp>
-      <p:sp>
-        <p:nvSpPr>
-          <p:cNvPr id="3" name="Content Placeholder 2"/>
-          <p:cNvSpPr>
-            <a:spLocks noGrp="1"/>
-          </p:cNvSpPr>
-          <p:nvPr>
-            <p:ph idx="1" sz="half"/>
-          </p:nvPr>
-        </p:nvSpPr>
-        <p:spPr/>
-        <p:txBody>
-          <a:bodyPr/>
-          <a:lstStyle/>
-          <a:p>
-            <a:pPr lvl="0" indent="0" marL="0">
-              <a:spcBef>
-                <a:spcPts val="3000"/>
-              </a:spcBef>
-              <a:buNone/>
-            </a:pPr>
-            <a:r>
-              <a:rPr b="1"/>
-              <a:t>The goals for today</a:t>
-            </a:r>
-          </a:p>
-          <a:p>
-            <a:pPr lvl="0"/>
-            <a:r>
-              <a:rPr/>
-              <a:t>Statistical inference fundamentals</a:t>
-            </a:r>
-          </a:p>
-          <a:p>
-            <a:pPr lvl="0"/>
-            <a:r>
-              <a:rPr/>
-              <a:t>Hypothesis testing principles</a:t>
-            </a:r>
-          </a:p>
-          <a:p>
-            <a:pPr lvl="0"/>
-            <a:r>
-              <a:rPr/>
-              <a:t>T Distributions</a:t>
-            </a:r>
-          </a:p>
-          <a:p>
-            <a:pPr lvl="0"/>
-            <a:r>
-              <a:rPr/>
-              <a:t>One sample T Tests</a:t>
-            </a:r>
-          </a:p>
-          <a:p>
-            <a:pPr lvl="0"/>
-            <a:r>
-              <a:rPr/>
-              <a:t>Two sample T Test</a:t>
-            </a:r>
-          </a:p>
-          <a:p>
-            <a:pPr lvl="0"/>
-            <a:r>
-              <a:rPr/>
-              <a:t>Assumption tests</a:t>
-            </a:r>
-          </a:p>
-        </p:txBody>
-      </p:sp>
-      <p:pic>
-        <p:nvPicPr>
-          <p:cNvPr descr="05_01_lecture_powerpoint_files/figure-pptx/unnamed-chunk-2-1.png" id="0" name="Picture 1"/>
-          <p:cNvPicPr>
-            <a:picLocks noGrp="1" noChangeAspect="1"/>
-          </p:cNvPicPr>
-          <p:nvPr/>
-        </p:nvPicPr>
-        <p:blipFill>
-          <a:blip r:embed="rId2"/>
-          <a:stretch>
-            <a:fillRect/>
-          </a:stretch>
-        </p:blipFill>
-        <p:spPr bwMode="auto">
-          <a:xfrm>
-            <a:off x="6121400" y="1778000"/>
-            <a:ext cx="2781300" cy="2222500"/>
-          </a:xfrm>
-          <a:prstGeom prst="rect">
-            <a:avLst/>
-          </a:prstGeom>
-          <a:noFill/>
-          <a:ln w="9525">
-            <a:noFill/>
-            <a:headEnd/>
-            <a:tailEnd/>
-          </a:ln>
-        </p:spPr>
-      </p:pic>
-    </p:spTree>
-  </p:cSld>
-</p:sld>
-</file>
-
-<file path=ppt/slides/slide6.xml><?xml version="1.0" encoding="utf-8"?>
 <p:sld xmlns:a="http://schemas.openxmlformats.org/drawingml/2006/main" xmlns:r="http://schemas.openxmlformats.org/officeDocument/2006/relationships" xmlns:p="http://schemas.openxmlformats.org/presentationml/2006/main">
   <p:cSld>
     <p:spTree>
@@ -13081,7 +12709,7 @@
 </p:sld>
 </file>
 
-<file path=ppt/slides/slide7.xml><?xml version="1.0" encoding="utf-8"?>
+<file path=ppt/slides/slide6.xml><?xml version="1.0" encoding="utf-8"?>
 <p:sld xmlns:a="http://schemas.openxmlformats.org/drawingml/2006/main" xmlns:r="http://schemas.openxmlformats.org/officeDocument/2006/relationships" xmlns:p="http://schemas.openxmlformats.org/presentationml/2006/main">
   <p:cSld>
     <p:spTree>
@@ -13236,7 +12864,7 @@
 </p:sld>
 </file>
 
-<file path=ppt/slides/slide8.xml><?xml version="1.0" encoding="utf-8"?>
+<file path=ppt/slides/slide7.xml><?xml version="1.0" encoding="utf-8"?>
 <p:sld xmlns:a="http://schemas.openxmlformats.org/drawingml/2006/main" xmlns:r="http://schemas.openxmlformats.org/officeDocument/2006/relationships" xmlns:p="http://schemas.openxmlformats.org/presentationml/2006/main">
   <p:cSld>
     <p:spTree>
@@ -13393,37 +13021,12 @@
           </a:ln>
         </p:spPr>
       </p:pic>
-      <p:sp>
-        <p:nvSpPr>
-          <p:cNvPr id="6" name="Content Placeholder 5"/>
-          <p:cNvSpPr>
-            <a:spLocks noGrp="1"/>
-          </p:cNvSpPr>
-          <p:nvPr>
-            <p:ph idx="4" sz="quarter"/>
-          </p:nvPr>
-        </p:nvSpPr>
-        <p:spPr/>
-        <p:txBody>
-          <a:bodyPr/>
-          <a:lstStyle/>
-          <a:p>
-            <a:pPr lvl="0" indent="0" marL="0">
-              <a:buNone/>
-            </a:pPr>
-            <a:r>
-              <a:rPr/>
-              <a:t>xxxxx</a:t>
-            </a:r>
-          </a:p>
-        </p:txBody>
-      </p:sp>
     </p:spTree>
   </p:cSld>
 </p:sld>
 </file>
 
-<file path=ppt/slides/slide9.xml><?xml version="1.0" encoding="utf-8"?>
+<file path=ppt/slides/slide8.xml><?xml version="1.0" encoding="utf-8"?>
 <p:sld xmlns:a="http://schemas.openxmlformats.org/drawingml/2006/main" xmlns:r="http://schemas.openxmlformats.org/officeDocument/2006/relationships" xmlns:p="http://schemas.openxmlformats.org/presentationml/2006/main">
   <p:cSld>
     <p:spTree>
@@ -13634,6 +13237,125 @@
           </a:ln>
         </p:spPr>
       </p:pic>
+    </p:spTree>
+  </p:cSld>
+</p:sld>
+</file>
+
+<file path=ppt/slides/slide9.xml><?xml version="1.0" encoding="utf-8"?>
+<p:sld xmlns:a="http://schemas.openxmlformats.org/drawingml/2006/main" xmlns:r="http://schemas.openxmlformats.org/officeDocument/2006/relationships" xmlns:p="http://schemas.openxmlformats.org/presentationml/2006/main">
+  <p:cSld>
+    <p:spTree>
+      <p:nvGrpSpPr>
+        <p:cNvPr id="1" name=""/>
+        <p:cNvGrpSpPr/>
+        <p:nvPr/>
+      </p:nvGrpSpPr>
+      <p:grpSpPr>
+        <a:xfrm>
+          <a:off x="0" y="0"/>
+          <a:ext cx="0" cy="0"/>
+          <a:chOff x="0" y="0"/>
+          <a:chExt cx="0" cy="0"/>
+        </a:xfrm>
+      </p:grpSpPr>
+      <p:sp>
+        <p:nvSpPr>
+          <p:cNvPr id="2" name="Title 1"/>
+          <p:cNvSpPr>
+            <a:spLocks noGrp="1"/>
+          </p:cNvSpPr>
+          <p:nvPr>
+            <p:ph type="title"/>
+          </p:nvPr>
+        </p:nvSpPr>
+        <p:spPr>
+          <a:xfrm>
+            <a:off x="0" y="0"/>
+            <a:ext cx="9144000" cy="582780"/>
+          </a:xfrm>
+        </p:spPr>
+        <p:txBody>
+          <a:bodyPr/>
+          <a:lstStyle/>
+          <a:p>
+            <a:pPr lvl="0" indent="0" marL="0">
+              <a:buNone/>
+            </a:pPr>
+            <a:r>
+              <a:rPr b="1"/>
+              <a:t>Lecture 5:</a:t>
+            </a:r>
+            <a:r>
+              <a:rPr/>
+              <a:t> Applications of t-distribution</a:t>
+            </a:r>
+          </a:p>
+        </p:txBody>
+      </p:sp>
+      <p:sp>
+        <p:nvSpPr>
+          <p:cNvPr id="3" name="Content Placeholder 2"/>
+          <p:cNvSpPr>
+            <a:spLocks noGrp="1"/>
+          </p:cNvSpPr>
+          <p:nvPr>
+            <p:ph idx="1"/>
+          </p:nvPr>
+        </p:nvSpPr>
+        <p:spPr/>
+        <p:txBody>
+          <a:bodyPr/>
+          <a:lstStyle/>
+          <a:p>
+            <a:pPr lvl="0" indent="0" marL="0">
+              <a:buNone/>
+            </a:pPr>
+            <a:r>
+              <a:rPr/>
+              <a:t>So:</a:t>
+            </a:r>
+          </a:p>
+          <a:p>
+            <a:pPr lvl="0"/>
+            <a:r>
+              <a:rPr/>
+              <a:t>Can assess confidence that population mean is within a certain range</a:t>
+            </a:r>
+          </a:p>
+          <a:p>
+            <a:pPr lvl="0"/>
+            <a:r>
+              <a:rPr/>
+              <a:t>Can use t distribution to ask questions like:</a:t>
+            </a:r>
+          </a:p>
+          <a:p>
+            <a:pPr lvl="1"/>
+            <a:r>
+              <a:rPr/>
+              <a:t>“What is probability of getting sample with mean = ȳ</a:t>
+            </a:r>
+            <a:br/>
+            <a:r>
+              <a:rPr/>
+              <a:t>from population with mean = µ?” (1 sample t-test)</a:t>
+            </a:r>
+          </a:p>
+          <a:p>
+            <a:pPr lvl="1"/>
+            <a:r>
+              <a:rPr/>
+              <a:t>“What is the probability that two samples came from</a:t>
+            </a:r>
+            <a:br/>
+            <a:r>
+              <a:rPr/>
+              <a:t>the same population?” (2 sample t-test)</a:t>
+            </a:r>
+          </a:p>
+        </p:txBody>
+      </p:sp>
     </p:spTree>
   </p:cSld>
 </p:sld>

--- a/docs/ecostats_lectures/lecture_05/05_01_lecture_powerpoint.pptx
+++ b/docs/ecostats_lectures/lecture_05/05_01_lecture_powerpoint.pptx
@@ -42,14 +42,6 @@
     <p:sldId id="290" r:id="rId36"/>
     <p:sldId id="291" r:id="rId37"/>
     <p:sldId id="292" r:id="rId38"/>
-    <p:sldId id="293" r:id="rId39"/>
-    <p:sldId id="294" r:id="rId40"/>
-    <p:sldId id="295" r:id="rId41"/>
-    <p:sldId id="296" r:id="rId42"/>
-    <p:sldId id="297" r:id="rId43"/>
-    <p:sldId id="298" r:id="rId44"/>
-    <p:sldId id="299" r:id="rId45"/>
-    <p:sldId id="300" r:id="rId46"/>
   </p:sldIdLst>
   <p:sldSz cx="9144000" cy="5143500" type="screen16x9"/>
   <p:notesSz cx="6858000" cy="9144000"/>
@@ -6828,24 +6820,14 @@
               <a:t>  )</a:t>
             </a:r>
             <a:br/>
-            <a:br/>
-            <a:r>
-              <a:rPr>
-                <a:solidFill>
-                  <a:srgbClr val="4758AB"/>
-                </a:solidFill>
-                <a:latin typeface="Courier"/>
-              </a:rPr>
-              <a:t>print</a:t>
-            </a:r>
-            <a:r>
-              <a:rPr>
-                <a:solidFill>
-                  <a:srgbClr val="003B4F"/>
-                </a:solidFill>
-                <a:latin typeface="Courier"/>
-              </a:rPr>
-              <a:t>(group_summary)</a:t>
+            <a:r>
+              <a:rPr>
+                <a:solidFill>
+                  <a:srgbClr val="003B4F"/>
+                </a:solidFill>
+                <a:latin typeface="Courier"/>
+              </a:rPr>
+              <a:t>group_summary</a:t>
             </a:r>
           </a:p>
           <a:p>
@@ -6900,7 +6882,7 @@
         <p:spPr>
           <a:xfrm>
             <a:off x="0" y="0"/>
-            <a:ext cx="9144000" cy="871538"/>
+            <a:ext cx="9144000" cy="582780"/>
           </a:xfrm>
         </p:spPr>
         <p:txBody>
@@ -6912,19 +6894,19 @@
             </a:pPr>
             <a:r>
               <a:rPr/>
-              <a:t>Visualizing Group Differences</a:t>
-            </a:r>
-          </a:p>
-        </p:txBody>
-      </p:sp>
-      <p:sp>
-        <p:nvSpPr>
-          <p:cNvPr id="4" name="Text Placeholder 3"/>
-          <p:cNvSpPr>
-            <a:spLocks noGrp="1"/>
-          </p:cNvSpPr>
-          <p:nvPr>
-            <p:ph idx="2" sz="half" type="body"/>
+              <a:t>Practice Exercise 4: Effect Size</a:t>
+            </a:r>
+          </a:p>
+        </p:txBody>
+      </p:sp>
+      <p:sp>
+        <p:nvSpPr>
+          <p:cNvPr id="3" name="Content Placeholder 2"/>
+          <p:cNvSpPr>
+            <a:spLocks noGrp="1"/>
+          </p:cNvSpPr>
+          <p:nvPr>
+            <p:ph idx="1"/>
           </p:nvPr>
         </p:nvSpPr>
         <p:spPr/>
@@ -6932,6 +6914,24 @@
           <a:bodyPr/>
           <a:lstStyle/>
           <a:p>
+            <a:pPr lvl="0" indent="0" marL="1270000">
+              <a:buNone/>
+            </a:pPr>
+            <a:r>
+              <a:rPr sz="2000" b="1"/>
+              <a:t>Practice Exercise 4: Effect size</a:t>
+            </a:r>
+          </a:p>
+          <a:p>
+            <a:pPr lvl="0" indent="0" marL="1270000">
+              <a:buNone/>
+            </a:pPr>
+            <a:r>
+              <a:rPr sz="2000"/>
+              <a:t>We could also look at the difference in means… some cool code here</a:t>
+            </a:r>
+          </a:p>
+          <a:p>
             <a:pPr lvl="0" indent="0">
               <a:buNone/>
             </a:pPr>
@@ -6942,7 +6942,7 @@
                 </a:solidFill>
                 <a:latin typeface="Courier"/>
               </a:rPr>
-              <a:t># Create a boxplot comparing the two sides</a:t>
+              <a:t># Assuming your dataframe is called df</a:t>
             </a:r>
             <a:br/>
             <a:r>
@@ -6952,41 +6952,170 @@
                 </a:solidFill>
                 <a:latin typeface="Courier"/>
               </a:rPr>
-              <a:t>shady_sunny_plot</a:t>
-            </a:r>
-          </a:p>
-        </p:txBody>
-      </p:sp>
-      <p:pic>
-        <p:nvPicPr>
-          <p:cNvPr descr="05_01_lecture_powerpoint_files/figure-pptx/unnamed-chunk-11-1.png" id="0" name="Picture 1"/>
-          <p:cNvPicPr>
-            <a:picLocks noGrp="1" noChangeAspect="1"/>
-          </p:cNvPicPr>
-          <p:nvPr/>
-        </p:nvPicPr>
-        <p:blipFill>
-          <a:blip r:embed="rId2"/>
-          <a:stretch>
-            <a:fillRect/>
-          </a:stretch>
-        </p:blipFill>
-        <p:spPr bwMode="auto">
-          <a:xfrm>
-            <a:off x="3657600" y="1104900"/>
-            <a:ext cx="5232400" cy="3492500"/>
-          </a:xfrm>
-          <a:prstGeom prst="rect">
-            <a:avLst/>
-          </a:prstGeom>
-          <a:noFill/>
-          <a:ln w="9525">
-            <a:noFill/>
-            <a:headEnd/>
-            <a:tailEnd/>
-          </a:ln>
-        </p:spPr>
-      </p:pic>
+              <a:t>group_summary </a:t>
+            </a:r>
+            <a:r>
+              <a:rPr>
+                <a:solidFill>
+                  <a:srgbClr val="5E5E5E"/>
+                </a:solidFill>
+                <a:latin typeface="Courier"/>
+              </a:rPr>
+              <a:t>%&gt;%</a:t>
+            </a:r>
+            <a:br/>
+            <a:r>
+              <a:rPr>
+                <a:solidFill>
+                  <a:srgbClr val="003B4F"/>
+                </a:solidFill>
+                <a:latin typeface="Courier"/>
+              </a:rPr>
+              <a:t>  </a:t>
+            </a:r>
+            <a:r>
+              <a:rPr>
+                <a:solidFill>
+                  <a:srgbClr val="4758AB"/>
+                </a:solidFill>
+                <a:latin typeface="Courier"/>
+              </a:rPr>
+              <a:t>summarize</a:t>
+            </a:r>
+            <a:r>
+              <a:rPr>
+                <a:solidFill>
+                  <a:srgbClr val="003B4F"/>
+                </a:solidFill>
+                <a:latin typeface="Courier"/>
+              </a:rPr>
+              <a:t>(</a:t>
+            </a:r>
+            <a:r>
+              <a:rPr>
+                <a:solidFill>
+                  <a:srgbClr val="657422"/>
+                </a:solidFill>
+                <a:latin typeface="Courier"/>
+              </a:rPr>
+              <a:t>difference =</a:t>
+            </a:r>
+            <a:r>
+              <a:rPr>
+                <a:solidFill>
+                  <a:srgbClr val="003B4F"/>
+                </a:solidFill>
+                <a:latin typeface="Courier"/>
+              </a:rPr>
+              <a:t> mean_length[side </a:t>
+            </a:r>
+            <a:r>
+              <a:rPr>
+                <a:solidFill>
+                  <a:srgbClr val="5E5E5E"/>
+                </a:solidFill>
+                <a:latin typeface="Courier"/>
+              </a:rPr>
+              <a:t>==</a:t>
+            </a:r>
+            <a:r>
+              <a:rPr>
+                <a:solidFill>
+                  <a:srgbClr val="003B4F"/>
+                </a:solidFill>
+                <a:latin typeface="Courier"/>
+              </a:rPr>
+              <a:t> </a:t>
+            </a:r>
+            <a:r>
+              <a:rPr>
+                <a:solidFill>
+                  <a:srgbClr val="20794D"/>
+                </a:solidFill>
+                <a:latin typeface="Courier"/>
+              </a:rPr>
+              <a:t>"shady"</a:t>
+            </a:r>
+            <a:r>
+              <a:rPr>
+                <a:solidFill>
+                  <a:srgbClr val="003B4F"/>
+                </a:solidFill>
+                <a:latin typeface="Courier"/>
+              </a:rPr>
+              <a:t>] </a:t>
+            </a:r>
+            <a:r>
+              <a:rPr>
+                <a:solidFill>
+                  <a:srgbClr val="5E5E5E"/>
+                </a:solidFill>
+                <a:latin typeface="Courier"/>
+              </a:rPr>
+              <a:t>-</a:t>
+            </a:r>
+            <a:r>
+              <a:rPr>
+                <a:solidFill>
+                  <a:srgbClr val="003B4F"/>
+                </a:solidFill>
+                <a:latin typeface="Courier"/>
+              </a:rPr>
+              <a:t> mean_length[side </a:t>
+            </a:r>
+            <a:r>
+              <a:rPr>
+                <a:solidFill>
+                  <a:srgbClr val="5E5E5E"/>
+                </a:solidFill>
+                <a:latin typeface="Courier"/>
+              </a:rPr>
+              <a:t>==</a:t>
+            </a:r>
+            <a:r>
+              <a:rPr>
+                <a:solidFill>
+                  <a:srgbClr val="003B4F"/>
+                </a:solidFill>
+                <a:latin typeface="Courier"/>
+              </a:rPr>
+              <a:t> </a:t>
+            </a:r>
+            <a:r>
+              <a:rPr>
+                <a:solidFill>
+                  <a:srgbClr val="20794D"/>
+                </a:solidFill>
+                <a:latin typeface="Courier"/>
+              </a:rPr>
+              <a:t>"sunny"</a:t>
+            </a:r>
+            <a:r>
+              <a:rPr>
+                <a:solidFill>
+                  <a:srgbClr val="003B4F"/>
+                </a:solidFill>
+                <a:latin typeface="Courier"/>
+              </a:rPr>
+              <a:t>])</a:t>
+            </a:r>
+          </a:p>
+          <a:p>
+            <a:pPr lvl="0" indent="0">
+              <a:buNone/>
+            </a:pPr>
+            <a:r>
+              <a:rPr sz="2000">
+                <a:latin typeface="Courier"/>
+              </a:rPr>
+              <a:t># A tibble: 1 × 1
+  difference
+       &lt;dbl&gt;
+1       1.45</a:t>
+            </a:r>
+          </a:p>
+        </p:txBody>
+      </p:sp>
     </p:spTree>
   </p:cSld>
 </p:sld>
@@ -7034,7 +7163,7 @@
             </a:pPr>
             <a:r>
               <a:rPr/>
-              <a:t>Practice Exercise 4: Effect Size</a:t>
+              <a:t>Practice Exercise 5: ggplot Summary Statistics</a:t>
             </a:r>
           </a:p>
         </p:txBody>
@@ -7059,7 +7188,7 @@
             </a:pPr>
             <a:r>
               <a:rPr sz="2000" b="1"/>
-              <a:t>Practice Exercise 4: Effect size</a:t>
+              <a:t>Practice Exercise 5: Using GGPLOT to get summary plot</a:t>
             </a:r>
           </a:p>
           <a:p>
@@ -7068,7 +7197,7 @@
             </a:pPr>
             <a:r>
               <a:rPr sz="2000"/>
-              <a:t>We could also look at the difference in means… some cool code here</a:t>
+              <a:t>GGplot also has code to make the mean and standard error plots we are interested in along with a lot of others</a:t>
             </a:r>
           </a:p>
           <a:p>
@@ -7092,7 +7221,97 @@
                 </a:solidFill>
                 <a:latin typeface="Courier"/>
               </a:rPr>
-              <a:t>group_summary </a:t>
+              <a:t>needle_mean_se_plot &lt;- </a:t>
+            </a:r>
+            <a:r>
+              <a:rPr>
+                <a:solidFill>
+                  <a:srgbClr val="4758AB"/>
+                </a:solidFill>
+                <a:latin typeface="Courier"/>
+              </a:rPr>
+              <a:t>ggplot</a:t>
+            </a:r>
+            <a:r>
+              <a:rPr>
+                <a:solidFill>
+                  <a:srgbClr val="003B4F"/>
+                </a:solidFill>
+                <a:latin typeface="Courier"/>
+              </a:rPr>
+              <a:t>(ps_df, </a:t>
+            </a:r>
+            <a:r>
+              <a:rPr>
+                <a:solidFill>
+                  <a:srgbClr val="4758AB"/>
+                </a:solidFill>
+                <a:latin typeface="Courier"/>
+              </a:rPr>
+              <a:t>aes</a:t>
+            </a:r>
+            <a:r>
+              <a:rPr>
+                <a:solidFill>
+                  <a:srgbClr val="003B4F"/>
+                </a:solidFill>
+                <a:latin typeface="Courier"/>
+              </a:rPr>
+              <a:t>(</a:t>
+            </a:r>
+            <a:r>
+              <a:rPr>
+                <a:solidFill>
+                  <a:srgbClr val="657422"/>
+                </a:solidFill>
+                <a:latin typeface="Courier"/>
+              </a:rPr>
+              <a:t>x =</a:t>
+            </a:r>
+            <a:r>
+              <a:rPr>
+                <a:solidFill>
+                  <a:srgbClr val="003B4F"/>
+                </a:solidFill>
+                <a:latin typeface="Courier"/>
+              </a:rPr>
+              <a:t> side, </a:t>
+            </a:r>
+            <a:r>
+              <a:rPr>
+                <a:solidFill>
+                  <a:srgbClr val="657422"/>
+                </a:solidFill>
+                <a:latin typeface="Courier"/>
+              </a:rPr>
+              <a:t>y =</a:t>
+            </a:r>
+            <a:r>
+              <a:rPr>
+                <a:solidFill>
+                  <a:srgbClr val="003B4F"/>
+                </a:solidFill>
+                <a:latin typeface="Courier"/>
+              </a:rPr>
+              <a:t> length_mm, </a:t>
+            </a:r>
+            <a:r>
+              <a:rPr>
+                <a:solidFill>
+                  <a:srgbClr val="657422"/>
+                </a:solidFill>
+                <a:latin typeface="Courier"/>
+              </a:rPr>
+              <a:t>color =</a:t>
+            </a:r>
+            <a:r>
+              <a:rPr>
+                <a:solidFill>
+                  <a:srgbClr val="003B4F"/>
+                </a:solidFill>
+                <a:latin typeface="Courier"/>
+              </a:rPr>
+              <a:t> side)) </a:t>
             </a:r>
             <a:r>
               <a:rPr>
@@ -7101,7 +7320,7 @@
                 </a:solidFill>
                 <a:latin typeface="Courier"/>
               </a:rPr>
-              <a:t>%&gt;%</a:t>
+              <a:t>+</a:t>
             </a:r>
             <a:br/>
             <a:r>
@@ -7120,7 +7339,7 @@
                 </a:solidFill>
                 <a:latin typeface="Courier"/>
               </a:rPr>
-              <a:t>summarize</a:t>
+              <a:t>stat_summary</a:t>
             </a:r>
             <a:r>
               <a:rPr>
@@ -7138,16 +7357,52 @@
                 </a:solidFill>
                 <a:latin typeface="Courier"/>
               </a:rPr>
-              <a:t>difference =</a:t>
-            </a:r>
-            <a:r>
-              <a:rPr>
-                <a:solidFill>
-                  <a:srgbClr val="003B4F"/>
-                </a:solidFill>
-                <a:latin typeface="Courier"/>
-              </a:rPr>
-              <a:t> mean_length[side </a:t>
+              <a:t>fun =</a:t>
+            </a:r>
+            <a:r>
+              <a:rPr>
+                <a:solidFill>
+                  <a:srgbClr val="003B4F"/>
+                </a:solidFill>
+                <a:latin typeface="Courier"/>
+              </a:rPr>
+              <a:t> mean, </a:t>
+            </a:r>
+            <a:r>
+              <a:rPr>
+                <a:solidFill>
+                  <a:srgbClr val="657422"/>
+                </a:solidFill>
+                <a:latin typeface="Courier"/>
+              </a:rPr>
+              <a:t>geom =</a:t>
+            </a:r>
+            <a:r>
+              <a:rPr>
+                <a:solidFill>
+                  <a:srgbClr val="003B4F"/>
+                </a:solidFill>
+                <a:latin typeface="Courier"/>
+              </a:rPr>
+              <a:t> </a:t>
+            </a:r>
+            <a:r>
+              <a:rPr>
+                <a:solidFill>
+                  <a:srgbClr val="20794D"/>
+                </a:solidFill>
+                <a:latin typeface="Courier"/>
+              </a:rPr>
+              <a:t>"point"</a:t>
+            </a:r>
+            <a:r>
+              <a:rPr>
+                <a:solidFill>
+                  <a:srgbClr val="003B4F"/>
+                </a:solidFill>
+                <a:latin typeface="Courier"/>
+              </a:rPr>
+              <a:t>) </a:t>
             </a:r>
             <a:r>
               <a:rPr>
@@ -7156,7 +7411,62 @@
                 </a:solidFill>
                 <a:latin typeface="Courier"/>
               </a:rPr>
-              <a:t>==</a:t>
+              <a:t>+</a:t>
+            </a:r>
+            <a:br/>
+            <a:r>
+              <a:rPr>
+                <a:solidFill>
+                  <a:srgbClr val="003B4F"/>
+                </a:solidFill>
+                <a:latin typeface="Courier"/>
+              </a:rPr>
+              <a:t>  </a:t>
+            </a:r>
+            <a:r>
+              <a:rPr>
+                <a:solidFill>
+                  <a:srgbClr val="4758AB"/>
+                </a:solidFill>
+                <a:latin typeface="Courier"/>
+              </a:rPr>
+              <a:t>stat_summary</a:t>
+            </a:r>
+            <a:r>
+              <a:rPr>
+                <a:solidFill>
+                  <a:srgbClr val="003B4F"/>
+                </a:solidFill>
+                <a:latin typeface="Courier"/>
+              </a:rPr>
+              <a:t>(</a:t>
+            </a:r>
+            <a:r>
+              <a:rPr>
+                <a:solidFill>
+                  <a:srgbClr val="657422"/>
+                </a:solidFill>
+                <a:latin typeface="Courier"/>
+              </a:rPr>
+              <a:t>fun.data =</a:t>
+            </a:r>
+            <a:r>
+              <a:rPr>
+                <a:solidFill>
+                  <a:srgbClr val="003B4F"/>
+                </a:solidFill>
+                <a:latin typeface="Courier"/>
+              </a:rPr>
+              <a:t> mean_se, </a:t>
+            </a:r>
+            <a:r>
+              <a:rPr>
+                <a:solidFill>
+                  <a:srgbClr val="657422"/>
+                </a:solidFill>
+                <a:latin typeface="Courier"/>
+              </a:rPr>
+              <a:t>geom =</a:t>
             </a:r>
             <a:r>
               <a:rPr>
@@ -7174,16 +7484,52 @@
                 </a:solidFill>
                 <a:latin typeface="Courier"/>
               </a:rPr>
-              <a:t>"shady"</a:t>
-            </a:r>
-            <a:r>
-              <a:rPr>
-                <a:solidFill>
-                  <a:srgbClr val="003B4F"/>
-                </a:solidFill>
-                <a:latin typeface="Courier"/>
-              </a:rPr>
-              <a:t>] </a:t>
+              <a:t>"errorbar"</a:t>
+            </a:r>
+            <a:r>
+              <a:rPr>
+                <a:solidFill>
+                  <a:srgbClr val="003B4F"/>
+                </a:solidFill>
+                <a:latin typeface="Courier"/>
+              </a:rPr>
+              <a:t>, </a:t>
+            </a:r>
+            <a:r>
+              <a:rPr>
+                <a:solidFill>
+                  <a:srgbClr val="657422"/>
+                </a:solidFill>
+                <a:latin typeface="Courier"/>
+              </a:rPr>
+              <a:t>width =</a:t>
+            </a:r>
+            <a:r>
+              <a:rPr>
+                <a:solidFill>
+                  <a:srgbClr val="003B4F"/>
+                </a:solidFill>
+                <a:latin typeface="Courier"/>
+              </a:rPr>
+              <a:t> </a:t>
+            </a:r>
+            <a:r>
+              <a:rPr>
+                <a:solidFill>
+                  <a:srgbClr val="AD0000"/>
+                </a:solidFill>
+                <a:latin typeface="Courier"/>
+              </a:rPr>
+              <a:t>0.2</a:t>
+            </a:r>
+            <a:r>
+              <a:rPr>
+                <a:solidFill>
+                  <a:srgbClr val="003B4F"/>
+                </a:solidFill>
+                <a:latin typeface="Courier"/>
+              </a:rPr>
+              <a:t>) </a:t>
             </a:r>
             <a:r>
               <a:rPr>
@@ -7192,16 +7538,127 @@
                 </a:solidFill>
                 <a:latin typeface="Courier"/>
               </a:rPr>
-              <a:t>-</a:t>
-            </a:r>
-            <a:r>
-              <a:rPr>
-                <a:solidFill>
-                  <a:srgbClr val="003B4F"/>
-                </a:solidFill>
-                <a:latin typeface="Courier"/>
-              </a:rPr>
-              <a:t> mean_length[side </a:t>
+              <a:t>+</a:t>
+            </a:r>
+            <a:br/>
+            <a:r>
+              <a:rPr>
+                <a:solidFill>
+                  <a:srgbClr val="003B4F"/>
+                </a:solidFill>
+                <a:latin typeface="Courier"/>
+              </a:rPr>
+              <a:t>  </a:t>
+            </a:r>
+            <a:r>
+              <a:rPr>
+                <a:solidFill>
+                  <a:srgbClr val="4758AB"/>
+                </a:solidFill>
+                <a:latin typeface="Courier"/>
+              </a:rPr>
+              <a:t>labs</a:t>
+            </a:r>
+            <a:r>
+              <a:rPr>
+                <a:solidFill>
+                  <a:srgbClr val="003B4F"/>
+                </a:solidFill>
+                <a:latin typeface="Courier"/>
+              </a:rPr>
+              <a:t>(</a:t>
+            </a:r>
+            <a:br/>
+            <a:r>
+              <a:rPr>
+                <a:solidFill>
+                  <a:srgbClr val="003B4F"/>
+                </a:solidFill>
+                <a:latin typeface="Courier"/>
+              </a:rPr>
+              <a:t>       </a:t>
+            </a:r>
+            <a:r>
+              <a:rPr>
+                <a:solidFill>
+                  <a:srgbClr val="657422"/>
+                </a:solidFill>
+                <a:latin typeface="Courier"/>
+              </a:rPr>
+              <a:t>x =</a:t>
+            </a:r>
+            <a:r>
+              <a:rPr>
+                <a:solidFill>
+                  <a:srgbClr val="003B4F"/>
+                </a:solidFill>
+                <a:latin typeface="Courier"/>
+              </a:rPr>
+              <a:t> </a:t>
+            </a:r>
+            <a:r>
+              <a:rPr>
+                <a:solidFill>
+                  <a:srgbClr val="20794D"/>
+                </a:solidFill>
+                <a:latin typeface="Courier"/>
+              </a:rPr>
+              <a:t>"side"</a:t>
+            </a:r>
+            <a:r>
+              <a:rPr>
+                <a:solidFill>
+                  <a:srgbClr val="003B4F"/>
+                </a:solidFill>
+                <a:latin typeface="Courier"/>
+              </a:rPr>
+              <a:t>,</a:t>
+            </a:r>
+            <a:br/>
+            <a:r>
+              <a:rPr>
+                <a:solidFill>
+                  <a:srgbClr val="003B4F"/>
+                </a:solidFill>
+                <a:latin typeface="Courier"/>
+              </a:rPr>
+              <a:t>       </a:t>
+            </a:r>
+            <a:r>
+              <a:rPr>
+                <a:solidFill>
+                  <a:srgbClr val="657422"/>
+                </a:solidFill>
+                <a:latin typeface="Courier"/>
+              </a:rPr>
+              <a:t>y =</a:t>
+            </a:r>
+            <a:r>
+              <a:rPr>
+                <a:solidFill>
+                  <a:srgbClr val="003B4F"/>
+                </a:solidFill>
+                <a:latin typeface="Courier"/>
+              </a:rPr>
+              <a:t> </a:t>
+            </a:r>
+            <a:r>
+              <a:rPr>
+                <a:solidFill>
+                  <a:srgbClr val="20794D"/>
+                </a:solidFill>
+                <a:latin typeface="Courier"/>
+              </a:rPr>
+              <a:t>"Mean Length (mm)"</a:t>
+            </a:r>
+            <a:r>
+              <a:rPr>
+                <a:solidFill>
+                  <a:srgbClr val="003B4F"/>
+                </a:solidFill>
+                <a:latin typeface="Courier"/>
+              </a:rPr>
+              <a:t>) </a:t>
             </a:r>
             <a:r>
               <a:rPr>
@@ -7210,49 +7667,51 @@
                 </a:solidFill>
                 <a:latin typeface="Courier"/>
               </a:rPr>
-              <a:t>==</a:t>
-            </a:r>
-            <a:r>
-              <a:rPr>
-                <a:solidFill>
-                  <a:srgbClr val="003B4F"/>
-                </a:solidFill>
-                <a:latin typeface="Courier"/>
-              </a:rPr>
-              <a:t> </a:t>
-            </a:r>
-            <a:r>
-              <a:rPr>
-                <a:solidFill>
-                  <a:srgbClr val="20794D"/>
-                </a:solidFill>
-                <a:latin typeface="Courier"/>
-              </a:rPr>
-              <a:t>"sunny"</a:t>
-            </a:r>
-            <a:r>
-              <a:rPr>
-                <a:solidFill>
-                  <a:srgbClr val="003B4F"/>
-                </a:solidFill>
-                <a:latin typeface="Courier"/>
-              </a:rPr>
-              <a:t>])</a:t>
-            </a:r>
-          </a:p>
-          <a:p>
-            <a:pPr lvl="0" indent="0">
-              <a:buNone/>
-            </a:pPr>
-            <a:r>
-              <a:rPr sz="2000">
-                <a:latin typeface="Courier"/>
-              </a:rPr>
-              <a:t># A tibble: 1 × 1
-  difference
-       &lt;dbl&gt;
-1       1.45</a:t>
-            </a:r>
+              <a:t>+</a:t>
+            </a:r>
+            <a:br/>
+            <a:r>
+              <a:rPr>
+                <a:solidFill>
+                  <a:srgbClr val="003B4F"/>
+                </a:solidFill>
+                <a:latin typeface="Courier"/>
+              </a:rPr>
+              <a:t>  </a:t>
+            </a:r>
+            <a:r>
+              <a:rPr>
+                <a:solidFill>
+                  <a:srgbClr val="4758AB"/>
+                </a:solidFill>
+                <a:latin typeface="Courier"/>
+              </a:rPr>
+              <a:t>theme_classic</a:t>
+            </a:r>
+            <a:r>
+              <a:rPr>
+                <a:solidFill>
+                  <a:srgbClr val="003B4F"/>
+                </a:solidFill>
+                <a:latin typeface="Courier"/>
+              </a:rPr>
+              <a:t>()</a:t>
+            </a:r>
+            <a:br/>
+            <a:r>
+              <a:rPr>
+                <a:solidFill>
+                  <a:srgbClr val="003B4F"/>
+                </a:solidFill>
+                <a:latin typeface="Courier"/>
+              </a:rPr>
+              <a:t>needle_mean_se_plot</a:t>
+            </a:r>
+          </a:p>
+          <a:p>
+            <a:pPr lvl="0" indent="0" marL="1270000">
+              <a:buNone/>
+            </a:pPr>
           </a:p>
         </p:txBody>
       </p:sp>
@@ -7302,8 +7761,12 @@
               <a:buNone/>
             </a:pPr>
             <a:r>
-              <a:rPr/>
-              <a:t>Practice Exercise 5: ggplot Summary Statistics</a:t>
+              <a:rPr b="1"/>
+              <a:t>Lecture 5:</a:t>
+            </a:r>
+            <a:r>
+              <a:rPr/>
+              <a:t> Testing Assumptions for Two-Sample T-Test</a:t>
             </a:r>
           </a:p>
         </p:txBody>
@@ -7323,535 +7786,63 @@
           <a:bodyPr/>
           <a:lstStyle/>
           <a:p>
-            <a:pPr lvl="0" indent="0" marL="1270000">
-              <a:buNone/>
-            </a:pPr>
-            <a:r>
-              <a:rPr sz="2000" b="1"/>
-              <a:t>Practice Exercise 5: Using GGPLOT to get summary stats</a:t>
-            </a:r>
-          </a:p>
-          <a:p>
-            <a:pPr lvl="0" indent="0" marL="1270000">
-              <a:buNone/>
-            </a:pPr>
-            <a:r>
-              <a:rPr sz="2000"/>
-              <a:t>GGplot also has code to make the mean and standard error plots we are interested in along with a lot of others</a:t>
-            </a:r>
-          </a:p>
-          <a:p>
-            <a:pPr lvl="0" indent="0">
-              <a:buNone/>
-            </a:pPr>
-            <a:r>
-              <a:rPr>
-                <a:solidFill>
-                  <a:srgbClr val="5E5E5E"/>
-                </a:solidFill>
-                <a:latin typeface="Courier"/>
-              </a:rPr>
-              <a:t># Assuming your dataframe is called df</a:t>
-            </a:r>
-            <a:br/>
-            <a:r>
-              <a:rPr>
-                <a:solidFill>
-                  <a:srgbClr val="003B4F"/>
-                </a:solidFill>
-                <a:latin typeface="Courier"/>
-              </a:rPr>
-              <a:t>needle_mean_se_plot &lt;- </a:t>
-            </a:r>
-            <a:r>
-              <a:rPr>
-                <a:solidFill>
-                  <a:srgbClr val="4758AB"/>
-                </a:solidFill>
-                <a:latin typeface="Courier"/>
-              </a:rPr>
-              <a:t>ggplot</a:t>
-            </a:r>
-            <a:r>
-              <a:rPr>
-                <a:solidFill>
-                  <a:srgbClr val="003B4F"/>
-                </a:solidFill>
-                <a:latin typeface="Courier"/>
-              </a:rPr>
-              <a:t>(ps_df, </a:t>
-            </a:r>
-            <a:r>
-              <a:rPr>
-                <a:solidFill>
-                  <a:srgbClr val="4758AB"/>
-                </a:solidFill>
-                <a:latin typeface="Courier"/>
-              </a:rPr>
-              <a:t>aes</a:t>
-            </a:r>
-            <a:r>
-              <a:rPr>
-                <a:solidFill>
-                  <a:srgbClr val="003B4F"/>
-                </a:solidFill>
-                <a:latin typeface="Courier"/>
-              </a:rPr>
-              <a:t>(</a:t>
-            </a:r>
-            <a:r>
-              <a:rPr>
-                <a:solidFill>
-                  <a:srgbClr val="657422"/>
-                </a:solidFill>
-                <a:latin typeface="Courier"/>
-              </a:rPr>
-              <a:t>x =</a:t>
-            </a:r>
-            <a:r>
-              <a:rPr>
-                <a:solidFill>
-                  <a:srgbClr val="003B4F"/>
-                </a:solidFill>
-                <a:latin typeface="Courier"/>
-              </a:rPr>
-              <a:t> side, </a:t>
-            </a:r>
-            <a:r>
-              <a:rPr>
-                <a:solidFill>
-                  <a:srgbClr val="657422"/>
-                </a:solidFill>
-                <a:latin typeface="Courier"/>
-              </a:rPr>
-              <a:t>y =</a:t>
-            </a:r>
-            <a:r>
-              <a:rPr>
-                <a:solidFill>
-                  <a:srgbClr val="003B4F"/>
-                </a:solidFill>
-                <a:latin typeface="Courier"/>
-              </a:rPr>
-              <a:t> length_mm, </a:t>
-            </a:r>
-            <a:r>
-              <a:rPr>
-                <a:solidFill>
-                  <a:srgbClr val="657422"/>
-                </a:solidFill>
-                <a:latin typeface="Courier"/>
-              </a:rPr>
-              <a:t>color =</a:t>
-            </a:r>
-            <a:r>
-              <a:rPr>
-                <a:solidFill>
-                  <a:srgbClr val="003B4F"/>
-                </a:solidFill>
-                <a:latin typeface="Courier"/>
-              </a:rPr>
-              <a:t> side)) </a:t>
-            </a:r>
-            <a:r>
-              <a:rPr>
-                <a:solidFill>
-                  <a:srgbClr val="5E5E5E"/>
-                </a:solidFill>
-                <a:latin typeface="Courier"/>
-              </a:rPr>
-              <a:t>+</a:t>
-            </a:r>
-            <a:br/>
-            <a:r>
-              <a:rPr>
-                <a:solidFill>
-                  <a:srgbClr val="003B4F"/>
-                </a:solidFill>
-                <a:latin typeface="Courier"/>
-              </a:rPr>
-              <a:t>  </a:t>
-            </a:r>
-            <a:r>
-              <a:rPr>
-                <a:solidFill>
-                  <a:srgbClr val="4758AB"/>
-                </a:solidFill>
-                <a:latin typeface="Courier"/>
-              </a:rPr>
-              <a:t>stat_summary</a:t>
-            </a:r>
-            <a:r>
-              <a:rPr>
-                <a:solidFill>
-                  <a:srgbClr val="003B4F"/>
-                </a:solidFill>
-                <a:latin typeface="Courier"/>
-              </a:rPr>
-              <a:t>(</a:t>
-            </a:r>
-            <a:r>
-              <a:rPr>
-                <a:solidFill>
-                  <a:srgbClr val="657422"/>
-                </a:solidFill>
-                <a:latin typeface="Courier"/>
-              </a:rPr>
-              <a:t>fun =</a:t>
-            </a:r>
-            <a:r>
-              <a:rPr>
-                <a:solidFill>
-                  <a:srgbClr val="003B4F"/>
-                </a:solidFill>
-                <a:latin typeface="Courier"/>
-              </a:rPr>
-              <a:t> mean, </a:t>
-            </a:r>
-            <a:r>
-              <a:rPr>
-                <a:solidFill>
-                  <a:srgbClr val="657422"/>
-                </a:solidFill>
-                <a:latin typeface="Courier"/>
-              </a:rPr>
-              <a:t>geom =</a:t>
-            </a:r>
-            <a:r>
-              <a:rPr>
-                <a:solidFill>
-                  <a:srgbClr val="003B4F"/>
-                </a:solidFill>
-                <a:latin typeface="Courier"/>
-              </a:rPr>
-              <a:t> </a:t>
-            </a:r>
-            <a:r>
-              <a:rPr>
-                <a:solidFill>
-                  <a:srgbClr val="20794D"/>
-                </a:solidFill>
-                <a:latin typeface="Courier"/>
-              </a:rPr>
-              <a:t>"point"</a:t>
-            </a:r>
-            <a:r>
-              <a:rPr>
-                <a:solidFill>
-                  <a:srgbClr val="003B4F"/>
-                </a:solidFill>
-                <a:latin typeface="Courier"/>
-              </a:rPr>
-              <a:t>) </a:t>
-            </a:r>
-            <a:r>
-              <a:rPr>
-                <a:solidFill>
-                  <a:srgbClr val="5E5E5E"/>
-                </a:solidFill>
-                <a:latin typeface="Courier"/>
-              </a:rPr>
-              <a:t>+</a:t>
-            </a:r>
-            <a:br/>
-            <a:r>
-              <a:rPr>
-                <a:solidFill>
-                  <a:srgbClr val="003B4F"/>
-                </a:solidFill>
-                <a:latin typeface="Courier"/>
-              </a:rPr>
-              <a:t>  </a:t>
-            </a:r>
-            <a:r>
-              <a:rPr>
-                <a:solidFill>
-                  <a:srgbClr val="4758AB"/>
-                </a:solidFill>
-                <a:latin typeface="Courier"/>
-              </a:rPr>
-              <a:t>stat_summary</a:t>
-            </a:r>
-            <a:r>
-              <a:rPr>
-                <a:solidFill>
-                  <a:srgbClr val="003B4F"/>
-                </a:solidFill>
-                <a:latin typeface="Courier"/>
-              </a:rPr>
-              <a:t>(</a:t>
-            </a:r>
-            <a:r>
-              <a:rPr>
-                <a:solidFill>
-                  <a:srgbClr val="657422"/>
-                </a:solidFill>
-                <a:latin typeface="Courier"/>
-              </a:rPr>
-              <a:t>fun.data =</a:t>
-            </a:r>
-            <a:r>
-              <a:rPr>
-                <a:solidFill>
-                  <a:srgbClr val="003B4F"/>
-                </a:solidFill>
-                <a:latin typeface="Courier"/>
-              </a:rPr>
-              <a:t> mean_se, </a:t>
-            </a:r>
-            <a:r>
-              <a:rPr>
-                <a:solidFill>
-                  <a:srgbClr val="657422"/>
-                </a:solidFill>
-                <a:latin typeface="Courier"/>
-              </a:rPr>
-              <a:t>geom =</a:t>
-            </a:r>
-            <a:r>
-              <a:rPr>
-                <a:solidFill>
-                  <a:srgbClr val="003B4F"/>
-                </a:solidFill>
-                <a:latin typeface="Courier"/>
-              </a:rPr>
-              <a:t> </a:t>
-            </a:r>
-            <a:r>
-              <a:rPr>
-                <a:solidFill>
-                  <a:srgbClr val="20794D"/>
-                </a:solidFill>
-                <a:latin typeface="Courier"/>
-              </a:rPr>
-              <a:t>"errorbar"</a:t>
-            </a:r>
-            <a:r>
-              <a:rPr>
-                <a:solidFill>
-                  <a:srgbClr val="003B4F"/>
-                </a:solidFill>
-                <a:latin typeface="Courier"/>
-              </a:rPr>
-              <a:t>, </a:t>
-            </a:r>
-            <a:r>
-              <a:rPr>
-                <a:solidFill>
-                  <a:srgbClr val="657422"/>
-                </a:solidFill>
-                <a:latin typeface="Courier"/>
-              </a:rPr>
-              <a:t>width =</a:t>
-            </a:r>
-            <a:r>
-              <a:rPr>
-                <a:solidFill>
-                  <a:srgbClr val="003B4F"/>
-                </a:solidFill>
-                <a:latin typeface="Courier"/>
-              </a:rPr>
-              <a:t> </a:t>
-            </a:r>
-            <a:r>
-              <a:rPr>
-                <a:solidFill>
-                  <a:srgbClr val="AD0000"/>
-                </a:solidFill>
-                <a:latin typeface="Courier"/>
-              </a:rPr>
-              <a:t>0.2</a:t>
-            </a:r>
-            <a:r>
-              <a:rPr>
-                <a:solidFill>
-                  <a:srgbClr val="003B4F"/>
-                </a:solidFill>
-                <a:latin typeface="Courier"/>
-              </a:rPr>
-              <a:t>) </a:t>
-            </a:r>
-            <a:r>
-              <a:rPr>
-                <a:solidFill>
-                  <a:srgbClr val="5E5E5E"/>
-                </a:solidFill>
-                <a:latin typeface="Courier"/>
-              </a:rPr>
-              <a:t>+</a:t>
-            </a:r>
-            <a:br/>
-            <a:r>
-              <a:rPr>
-                <a:solidFill>
-                  <a:srgbClr val="003B4F"/>
-                </a:solidFill>
-                <a:latin typeface="Courier"/>
-              </a:rPr>
-              <a:t>  </a:t>
-            </a:r>
-            <a:r>
-              <a:rPr>
-                <a:solidFill>
-                  <a:srgbClr val="4758AB"/>
-                </a:solidFill>
-                <a:latin typeface="Courier"/>
-              </a:rPr>
-              <a:t>labs</a:t>
-            </a:r>
-            <a:r>
-              <a:rPr>
-                <a:solidFill>
-                  <a:srgbClr val="003B4F"/>
-                </a:solidFill>
-                <a:latin typeface="Courier"/>
-              </a:rPr>
-              <a:t>(</a:t>
-            </a:r>
-            <a:br/>
-            <a:r>
-              <a:rPr>
-                <a:solidFill>
-                  <a:srgbClr val="003B4F"/>
-                </a:solidFill>
-                <a:latin typeface="Courier"/>
-              </a:rPr>
-              <a:t>       </a:t>
-            </a:r>
-            <a:r>
-              <a:rPr>
-                <a:solidFill>
-                  <a:srgbClr val="657422"/>
-                </a:solidFill>
-                <a:latin typeface="Courier"/>
-              </a:rPr>
-              <a:t>x =</a:t>
-            </a:r>
-            <a:r>
-              <a:rPr>
-                <a:solidFill>
-                  <a:srgbClr val="003B4F"/>
-                </a:solidFill>
-                <a:latin typeface="Courier"/>
-              </a:rPr>
-              <a:t> </a:t>
-            </a:r>
-            <a:r>
-              <a:rPr>
-                <a:solidFill>
-                  <a:srgbClr val="20794D"/>
-                </a:solidFill>
-                <a:latin typeface="Courier"/>
-              </a:rPr>
-              <a:t>"side"</a:t>
-            </a:r>
-            <a:r>
-              <a:rPr>
-                <a:solidFill>
-                  <a:srgbClr val="003B4F"/>
-                </a:solidFill>
-                <a:latin typeface="Courier"/>
-              </a:rPr>
-              <a:t>,</a:t>
-            </a:r>
-            <a:br/>
-            <a:r>
-              <a:rPr>
-                <a:solidFill>
-                  <a:srgbClr val="003B4F"/>
-                </a:solidFill>
-                <a:latin typeface="Courier"/>
-              </a:rPr>
-              <a:t>       </a:t>
-            </a:r>
-            <a:r>
-              <a:rPr>
-                <a:solidFill>
-                  <a:srgbClr val="657422"/>
-                </a:solidFill>
-                <a:latin typeface="Courier"/>
-              </a:rPr>
-              <a:t>y =</a:t>
-            </a:r>
-            <a:r>
-              <a:rPr>
-                <a:solidFill>
-                  <a:srgbClr val="003B4F"/>
-                </a:solidFill>
-                <a:latin typeface="Courier"/>
-              </a:rPr>
-              <a:t> </a:t>
-            </a:r>
-            <a:r>
-              <a:rPr>
-                <a:solidFill>
-                  <a:srgbClr val="20794D"/>
-                </a:solidFill>
-                <a:latin typeface="Courier"/>
-              </a:rPr>
-              <a:t>"Mean Length (mm)"</a:t>
-            </a:r>
-            <a:r>
-              <a:rPr>
-                <a:solidFill>
-                  <a:srgbClr val="003B4F"/>
-                </a:solidFill>
-                <a:latin typeface="Courier"/>
-              </a:rPr>
-              <a:t>) </a:t>
-            </a:r>
-            <a:r>
-              <a:rPr>
-                <a:solidFill>
-                  <a:srgbClr val="5E5E5E"/>
-                </a:solidFill>
-                <a:latin typeface="Courier"/>
-              </a:rPr>
-              <a:t>+</a:t>
-            </a:r>
-            <a:br/>
-            <a:r>
-              <a:rPr>
-                <a:solidFill>
-                  <a:srgbClr val="003B4F"/>
-                </a:solidFill>
-                <a:latin typeface="Courier"/>
-              </a:rPr>
-              <a:t>  </a:t>
-            </a:r>
-            <a:r>
-              <a:rPr>
-                <a:solidFill>
-                  <a:srgbClr val="4758AB"/>
-                </a:solidFill>
-                <a:latin typeface="Courier"/>
-              </a:rPr>
-              <a:t>theme_classic</a:t>
-            </a:r>
-            <a:r>
-              <a:rPr>
-                <a:solidFill>
-                  <a:srgbClr val="003B4F"/>
-                </a:solidFill>
-                <a:latin typeface="Courier"/>
-              </a:rPr>
-              <a:t>()</a:t>
-            </a:r>
-            <a:br/>
-            <a:r>
-              <a:rPr>
-                <a:solidFill>
-                  <a:srgbClr val="003B4F"/>
-                </a:solidFill>
-                <a:latin typeface="Courier"/>
-              </a:rPr>
-              <a:t>needle_mean_se_plot</a:t>
-            </a:r>
-          </a:p>
-          <a:p>
-            <a:pPr lvl="0" indent="0" marL="1270000">
-              <a:buNone/>
-            </a:pPr>
+            <a:pPr lvl="0" indent="0" marL="0">
+              <a:buNone/>
+            </a:pPr>
+            <a:r>
+              <a:rPr/>
+              <a:t>For a two-sample t-test, we need to check:</a:t>
+            </a:r>
+          </a:p>
+          <a:p>
+            <a:pPr lvl="0" indent="-342900" marL="342900">
+              <a:buAutoNum type="arabicPeriod"/>
+            </a:pPr>
+            <a:r>
+              <a:rPr/>
+              <a:t>Normality within each group</a:t>
+            </a:r>
+          </a:p>
+          <a:p>
+            <a:pPr lvl="0" indent="-342900" marL="342900">
+              <a:buAutoNum type="arabicPeriod"/>
+            </a:pPr>
+            <a:r>
+              <a:rPr/>
+              <a:t>Equal variances between groups (for standard t-test)</a:t>
+            </a:r>
+          </a:p>
+          <a:p>
+            <a:pPr lvl="0" indent="-342900" marL="342900">
+              <a:buAutoNum type="arabicPeriod"/>
+            </a:pPr>
+            <a:r>
+              <a:rPr/>
+              <a:t>Independent observations</a:t>
+            </a:r>
+          </a:p>
+          <a:p>
+            <a:pPr lvl="0" indent="0" marL="0">
+              <a:buNone/>
+            </a:pPr>
+            <a:r>
+              <a:rPr/>
+              <a:t>If assumptions are violated:</a:t>
+            </a:r>
+          </a:p>
+          <a:p>
+            <a:pPr lvl="0"/>
+            <a:r>
+              <a:rPr/>
+              <a:t>Welch’s t-test (unequal variances)</a:t>
+            </a:r>
+          </a:p>
+          <a:p>
+            <a:pPr lvl="0"/>
+            <a:r>
+              <a:rPr/>
+              <a:t>Non-parametric alternatives (Mann-Whitney U test)</a:t>
+            </a:r>
           </a:p>
         </p:txBody>
       </p:sp>
@@ -7901,12 +7892,8 @@
               <a:buNone/>
             </a:pPr>
             <a:r>
-              <a:rPr b="1"/>
-              <a:t>Lecture 5:</a:t>
-            </a:r>
-            <a:r>
-              <a:rPr/>
-              <a:t> Testing Assumptions for Two-Sample T-Test</a:t>
+              <a:rPr/>
+              <a:t>Practice Exercise 6: Separate Group Data</a:t>
             </a:r>
           </a:p>
         </p:txBody>
@@ -7926,62 +7913,127 @@
           <a:bodyPr/>
           <a:lstStyle/>
           <a:p>
-            <a:pPr lvl="0" indent="0" marL="0">
-              <a:buNone/>
-            </a:pPr>
-            <a:r>
-              <a:rPr/>
-              <a:t>For a two-sample t-test, we need to check:</a:t>
-            </a:r>
-          </a:p>
-          <a:p>
-            <a:pPr lvl="0" indent="-342900" marL="342900">
-              <a:buAutoNum type="arabicPeriod"/>
-            </a:pPr>
-            <a:r>
-              <a:rPr/>
-              <a:t>Normality within each group</a:t>
-            </a:r>
-          </a:p>
-          <a:p>
-            <a:pPr lvl="0" indent="-342900" marL="342900">
-              <a:buAutoNum type="arabicPeriod"/>
-            </a:pPr>
-            <a:r>
-              <a:rPr/>
-              <a:t>Equal variances between groups (for standard t-test)</a:t>
-            </a:r>
-          </a:p>
-          <a:p>
-            <a:pPr lvl="0" indent="-342900" marL="342900">
-              <a:buAutoNum type="arabicPeriod"/>
-            </a:pPr>
-            <a:r>
-              <a:rPr/>
-              <a:t>Independent observations</a:t>
-            </a:r>
-          </a:p>
-          <a:p>
-            <a:pPr lvl="0" indent="0" marL="0">
-              <a:buNone/>
-            </a:pPr>
-            <a:r>
-              <a:rPr/>
-              <a:t>If assumptions are violated:</a:t>
-            </a:r>
-          </a:p>
-          <a:p>
-            <a:pPr lvl="0"/>
-            <a:r>
-              <a:rPr/>
-              <a:t>Welch’s t-test (unequal variances)</a:t>
-            </a:r>
-          </a:p>
-          <a:p>
-            <a:pPr lvl="0"/>
-            <a:r>
-              <a:rPr/>
-              <a:t>Non-parametric alternatives (Mann-Whitney U test)</a:t>
+            <a:pPr lvl="0" indent="0" marL="1270000">
+              <a:buNone/>
+            </a:pPr>
+            <a:r>
+              <a:rPr sz="2000" b="1"/>
+              <a:t>Practice Exercise 7: Test normality of sunny pine needle lengths</a:t>
+            </a:r>
+          </a:p>
+          <a:p>
+            <a:pPr lvl="0" indent="0" marL="1270000">
+              <a:buNone/>
+            </a:pPr>
+            <a:r>
+              <a:rPr sz="2000"/>
+              <a:t>Note you need to test each groups separately…</a:t>
+            </a:r>
+          </a:p>
+          <a:p>
+            <a:pPr lvl="0" indent="0">
+              <a:buNone/>
+            </a:pPr>
+            <a:r>
+              <a:rPr>
+                <a:solidFill>
+                  <a:srgbClr val="5E5E5E"/>
+                </a:solidFill>
+                <a:latin typeface="Courier"/>
+              </a:rPr>
+              <a:t># how do you make separate dataframes to do this on?</a:t>
+            </a:r>
+            <a:br/>
+            <a:r>
+              <a:rPr>
+                <a:solidFill>
+                  <a:srgbClr val="5E5E5E"/>
+                </a:solidFill>
+                <a:latin typeface="Courier"/>
+              </a:rPr>
+              <a:t># Separate data by groups</a:t>
+            </a:r>
+            <a:br/>
+            <a:r>
+              <a:rPr>
+                <a:solidFill>
+                  <a:srgbClr val="4758AB"/>
+                </a:solidFill>
+                <a:latin typeface="Courier"/>
+              </a:rPr>
+              <a:t>head</a:t>
+            </a:r>
+            <a:r>
+              <a:rPr>
+                <a:solidFill>
+                  <a:srgbClr val="003B4F"/>
+                </a:solidFill>
+                <a:latin typeface="Courier"/>
+              </a:rPr>
+              <a:t>(ps_shady_df)</a:t>
+            </a:r>
+          </a:p>
+          <a:p>
+            <a:pPr lvl="0" indent="0">
+              <a:buNone/>
+            </a:pPr>
+            <a:r>
+              <a:rPr sz="2000">
+                <a:latin typeface="Courier"/>
+              </a:rPr>
+              <a:t># A tibble: 6 × 5
+# Groups:   group, tree_no, tree_char [6]
+  group                      tree_no tree_char side  length_mm
+  &lt;chr&gt;                        &lt;dbl&gt; &lt;chr&gt;     &lt;chr&gt;     &lt;dbl&gt;
+1 big_fat_fecund_female_fish       2 tree_2    shady      15.4
+2 bill                             3 tree_3    shady      16.7
+3 ciabatta                         5 tree_5    shady      19.1
+4 fake_data                        8 tree_8    shady      17.4
+5 five                             1 tree_1    shady      20.3
+6 moose_walkin                     7 tree_7    shady      20.7</a:t>
+            </a:r>
+          </a:p>
+          <a:p>
+            <a:pPr lvl="0" indent="0">
+              <a:buNone/>
+            </a:pPr>
+            <a:r>
+              <a:rPr>
+                <a:solidFill>
+                  <a:srgbClr val="4758AB"/>
+                </a:solidFill>
+                <a:latin typeface="Courier"/>
+              </a:rPr>
+              <a:t>head</a:t>
+            </a:r>
+            <a:r>
+              <a:rPr>
+                <a:solidFill>
+                  <a:srgbClr val="003B4F"/>
+                </a:solidFill>
+                <a:latin typeface="Courier"/>
+              </a:rPr>
+              <a:t>(ps_sunny_df)</a:t>
+            </a:r>
+          </a:p>
+          <a:p>
+            <a:pPr lvl="0" indent="0">
+              <a:buNone/>
+            </a:pPr>
+            <a:r>
+              <a:rPr sz="2000">
+                <a:latin typeface="Courier"/>
+              </a:rPr>
+              <a:t># A tibble: 6 × 5
+# Groups:   group, tree_no, tree_char [6]
+  group                      tree_no tree_char side  length_mm
+  &lt;chr&gt;                        &lt;dbl&gt; &lt;chr&gt;     &lt;chr&gt;     &lt;dbl&gt;
+1 big_fat_fecund_female_fish       2 tree_2    sunny      13.2
+2 bill                             3 tree_3    sunny      16.0
+3 ciabatta                         5 tree_5    sunny      17.7
+4 fake_data                        8 tree_8    sunny      13.0
+5 five                             1 tree_1    sunny      19.9
+6 moose_walkin                     7 tree_7    sunny      18.4</a:t>
             </a:r>
           </a:p>
         </p:txBody>
@@ -8033,7 +8085,7 @@
             </a:pPr>
             <a:r>
               <a:rPr/>
-              <a:t>Practice Exercise 6: Creating Group Data</a:t>
+              <a:t>Practice Exercise 8: Combined Normality Test</a:t>
             </a:r>
           </a:p>
         </p:txBody>
@@ -8058,19 +8110,7 @@
             </a:pPr>
             <a:r>
               <a:rPr sz="2000" b="1"/>
-              <a:t>Practice Exercise 6: Test normality of sunny pine needle lengths</a:t>
-            </a:r>
-          </a:p>
-          <a:p>
-            <a:pPr lvl="0" indent="0" marL="0">
-              <a:spcBef>
-                <a:spcPts val="3000"/>
-              </a:spcBef>
-              <a:buNone/>
-            </a:pPr>
-            <a:r>
-              <a:rPr sz="2000" b="1"/>
-              <a:t>qqplots</a:t>
+              <a:t>Practice Exercise 8: Test Normality at one time</a:t>
             </a:r>
           </a:p>
           <a:p>
@@ -8079,7 +8119,7 @@
             </a:pPr>
             <a:r>
               <a:rPr sz="2000"/>
-              <a:t>Note you need to test each groups separately…</a:t>
+              <a:t>There are always a lot of ways to do this in R</a:t>
             </a:r>
           </a:p>
           <a:p>
@@ -8093,23 +8133,383 @@
                 </a:solidFill>
                 <a:latin typeface="Courier"/>
               </a:rPr>
-              <a:t># Assuming your dataframe is called df</a:t>
+              <a:t># there are always two ways</a:t>
             </a:r>
             <a:br/>
             <a:r>
               <a:rPr>
                 <a:solidFill>
-                  <a:srgbClr val="003B4F"/>
-                </a:solidFill>
-                <a:latin typeface="Courier"/>
-              </a:rPr>
-              <a:t>needle_mean_se_plot</a:t>
-            </a:r>
-          </a:p>
-          <a:p>
-            <a:pPr lvl="0" indent="0" marL="1270000">
-              <a:buNone/>
-            </a:pPr>
+                  <a:srgbClr val="5E5E5E"/>
+                </a:solidFill>
+                <a:latin typeface="Courier"/>
+              </a:rPr>
+              <a:t># Test for normality using Shapiro-Wilk test for each wind group</a:t>
+            </a:r>
+            <a:br/>
+            <a:r>
+              <a:rPr>
+                <a:solidFill>
+                  <a:srgbClr val="5E5E5E"/>
+                </a:solidFill>
+                <a:latin typeface="Courier"/>
+              </a:rPr>
+              <a:t># All in one pipeline using tidyverse approach</a:t>
+            </a:r>
+            <a:br/>
+            <a:r>
+              <a:rPr>
+                <a:solidFill>
+                  <a:srgbClr val="003B4F"/>
+                </a:solidFill>
+                <a:latin typeface="Courier"/>
+              </a:rPr>
+              <a:t>normality_results &lt;- ps_df </a:t>
+            </a:r>
+            <a:r>
+              <a:rPr>
+                <a:solidFill>
+                  <a:srgbClr val="5E5E5E"/>
+                </a:solidFill>
+                <a:latin typeface="Courier"/>
+              </a:rPr>
+              <a:t>%&gt;%</a:t>
+            </a:r>
+            <a:br/>
+            <a:r>
+              <a:rPr>
+                <a:solidFill>
+                  <a:srgbClr val="003B4F"/>
+                </a:solidFill>
+                <a:latin typeface="Courier"/>
+              </a:rPr>
+              <a:t>  </a:t>
+            </a:r>
+            <a:r>
+              <a:rPr>
+                <a:solidFill>
+                  <a:srgbClr val="4758AB"/>
+                </a:solidFill>
+                <a:latin typeface="Courier"/>
+              </a:rPr>
+              <a:t>group_by</a:t>
+            </a:r>
+            <a:r>
+              <a:rPr>
+                <a:solidFill>
+                  <a:srgbClr val="003B4F"/>
+                </a:solidFill>
+                <a:latin typeface="Courier"/>
+              </a:rPr>
+              <a:t>(side) </a:t>
+            </a:r>
+            <a:r>
+              <a:rPr>
+                <a:solidFill>
+                  <a:srgbClr val="5E5E5E"/>
+                </a:solidFill>
+                <a:latin typeface="Courier"/>
+              </a:rPr>
+              <a:t>%&gt;%</a:t>
+            </a:r>
+            <a:br/>
+            <a:r>
+              <a:rPr>
+                <a:solidFill>
+                  <a:srgbClr val="003B4F"/>
+                </a:solidFill>
+                <a:latin typeface="Courier"/>
+              </a:rPr>
+              <a:t>  </a:t>
+            </a:r>
+            <a:r>
+              <a:rPr>
+                <a:solidFill>
+                  <a:srgbClr val="4758AB"/>
+                </a:solidFill>
+                <a:latin typeface="Courier"/>
+              </a:rPr>
+              <a:t>summarize</a:t>
+            </a:r>
+            <a:r>
+              <a:rPr>
+                <a:solidFill>
+                  <a:srgbClr val="003B4F"/>
+                </a:solidFill>
+                <a:latin typeface="Courier"/>
+              </a:rPr>
+              <a:t>(</a:t>
+            </a:r>
+            <a:br/>
+            <a:r>
+              <a:rPr>
+                <a:solidFill>
+                  <a:srgbClr val="003B4F"/>
+                </a:solidFill>
+                <a:latin typeface="Courier"/>
+              </a:rPr>
+              <a:t>    </a:t>
+            </a:r>
+            <a:r>
+              <a:rPr>
+                <a:solidFill>
+                  <a:srgbClr val="657422"/>
+                </a:solidFill>
+                <a:latin typeface="Courier"/>
+              </a:rPr>
+              <a:t>shapiro_stat =</a:t>
+            </a:r>
+            <a:r>
+              <a:rPr>
+                <a:solidFill>
+                  <a:srgbClr val="003B4F"/>
+                </a:solidFill>
+                <a:latin typeface="Courier"/>
+              </a:rPr>
+              <a:t> </a:t>
+            </a:r>
+            <a:r>
+              <a:rPr>
+                <a:solidFill>
+                  <a:srgbClr val="4758AB"/>
+                </a:solidFill>
+                <a:latin typeface="Courier"/>
+              </a:rPr>
+              <a:t>shapiro.test</a:t>
+            </a:r>
+            <a:r>
+              <a:rPr>
+                <a:solidFill>
+                  <a:srgbClr val="003B4F"/>
+                </a:solidFill>
+                <a:latin typeface="Courier"/>
+              </a:rPr>
+              <a:t>(length_mm)</a:t>
+            </a:r>
+            <a:r>
+              <a:rPr>
+                <a:solidFill>
+                  <a:srgbClr val="5E5E5E"/>
+                </a:solidFill>
+                <a:latin typeface="Courier"/>
+              </a:rPr>
+              <a:t>$</a:t>
+            </a:r>
+            <a:r>
+              <a:rPr>
+                <a:solidFill>
+                  <a:srgbClr val="003B4F"/>
+                </a:solidFill>
+                <a:latin typeface="Courier"/>
+              </a:rPr>
+              <a:t>statistic,</a:t>
+            </a:r>
+            <a:br/>
+            <a:r>
+              <a:rPr>
+                <a:solidFill>
+                  <a:srgbClr val="003B4F"/>
+                </a:solidFill>
+                <a:latin typeface="Courier"/>
+              </a:rPr>
+              <a:t>    </a:t>
+            </a:r>
+            <a:r>
+              <a:rPr>
+                <a:solidFill>
+                  <a:srgbClr val="657422"/>
+                </a:solidFill>
+                <a:latin typeface="Courier"/>
+              </a:rPr>
+              <a:t>shapiro_p_value =</a:t>
+            </a:r>
+            <a:r>
+              <a:rPr>
+                <a:solidFill>
+                  <a:srgbClr val="003B4F"/>
+                </a:solidFill>
+                <a:latin typeface="Courier"/>
+              </a:rPr>
+              <a:t> </a:t>
+            </a:r>
+            <a:r>
+              <a:rPr>
+                <a:solidFill>
+                  <a:srgbClr val="4758AB"/>
+                </a:solidFill>
+                <a:latin typeface="Courier"/>
+              </a:rPr>
+              <a:t>shapiro.test</a:t>
+            </a:r>
+            <a:r>
+              <a:rPr>
+                <a:solidFill>
+                  <a:srgbClr val="003B4F"/>
+                </a:solidFill>
+                <a:latin typeface="Courier"/>
+              </a:rPr>
+              <a:t>(length_mm)</a:t>
+            </a:r>
+            <a:r>
+              <a:rPr>
+                <a:solidFill>
+                  <a:srgbClr val="5E5E5E"/>
+                </a:solidFill>
+                <a:latin typeface="Courier"/>
+              </a:rPr>
+              <a:t>$</a:t>
+            </a:r>
+            <a:r>
+              <a:rPr>
+                <a:solidFill>
+                  <a:srgbClr val="003B4F"/>
+                </a:solidFill>
+                <a:latin typeface="Courier"/>
+              </a:rPr>
+              <a:t>p.value,</a:t>
+            </a:r>
+            <a:br/>
+            <a:r>
+              <a:rPr>
+                <a:solidFill>
+                  <a:srgbClr val="003B4F"/>
+                </a:solidFill>
+                <a:latin typeface="Courier"/>
+              </a:rPr>
+              <a:t>    </a:t>
+            </a:r>
+            <a:r>
+              <a:rPr>
+                <a:solidFill>
+                  <a:srgbClr val="657422"/>
+                </a:solidFill>
+                <a:latin typeface="Courier"/>
+              </a:rPr>
+              <a:t>normal_distribution =</a:t>
+            </a:r>
+            <a:r>
+              <a:rPr>
+                <a:solidFill>
+                  <a:srgbClr val="003B4F"/>
+                </a:solidFill>
+                <a:latin typeface="Courier"/>
+              </a:rPr>
+              <a:t> </a:t>
+            </a:r>
+            <a:r>
+              <a:rPr>
+                <a:solidFill>
+                  <a:srgbClr val="4758AB"/>
+                </a:solidFill>
+                <a:latin typeface="Courier"/>
+              </a:rPr>
+              <a:t>if_else</a:t>
+            </a:r>
+            <a:r>
+              <a:rPr>
+                <a:solidFill>
+                  <a:srgbClr val="003B4F"/>
+                </a:solidFill>
+                <a:latin typeface="Courier"/>
+              </a:rPr>
+              <a:t>(shapiro_p_value </a:t>
+            </a:r>
+            <a:r>
+              <a:rPr>
+                <a:solidFill>
+                  <a:srgbClr val="5E5E5E"/>
+                </a:solidFill>
+                <a:latin typeface="Courier"/>
+              </a:rPr>
+              <a:t>&gt;</a:t>
+            </a:r>
+            <a:r>
+              <a:rPr>
+                <a:solidFill>
+                  <a:srgbClr val="003B4F"/>
+                </a:solidFill>
+                <a:latin typeface="Courier"/>
+              </a:rPr>
+              <a:t> </a:t>
+            </a:r>
+            <a:r>
+              <a:rPr>
+                <a:solidFill>
+                  <a:srgbClr val="AD0000"/>
+                </a:solidFill>
+                <a:latin typeface="Courier"/>
+              </a:rPr>
+              <a:t>0.05</a:t>
+            </a:r>
+            <a:r>
+              <a:rPr>
+                <a:solidFill>
+                  <a:srgbClr val="003B4F"/>
+                </a:solidFill>
+                <a:latin typeface="Courier"/>
+              </a:rPr>
+              <a:t>, </a:t>
+            </a:r>
+            <a:r>
+              <a:rPr>
+                <a:solidFill>
+                  <a:srgbClr val="20794D"/>
+                </a:solidFill>
+                <a:latin typeface="Courier"/>
+              </a:rPr>
+              <a:t>"Normal"</a:t>
+            </a:r>
+            <a:r>
+              <a:rPr>
+                <a:solidFill>
+                  <a:srgbClr val="003B4F"/>
+                </a:solidFill>
+                <a:latin typeface="Courier"/>
+              </a:rPr>
+              <a:t>, </a:t>
+            </a:r>
+            <a:r>
+              <a:rPr>
+                <a:solidFill>
+                  <a:srgbClr val="20794D"/>
+                </a:solidFill>
+                <a:latin typeface="Courier"/>
+              </a:rPr>
+              <a:t>"Non-normal"</a:t>
+            </a:r>
+            <a:r>
+              <a:rPr>
+                <a:solidFill>
+                  <a:srgbClr val="003B4F"/>
+                </a:solidFill>
+                <a:latin typeface="Courier"/>
+              </a:rPr>
+              <a:t>))</a:t>
+            </a:r>
+            <a:br/>
+            <a:r>
+              <a:rPr>
+                <a:solidFill>
+                  <a:srgbClr val="003B4F"/>
+                </a:solidFill>
+                <a:latin typeface="Courier"/>
+              </a:rPr>
+              <a:t>normality_results</a:t>
+            </a:r>
+          </a:p>
+          <a:p>
+            <a:pPr lvl="0" indent="0">
+              <a:buNone/>
+            </a:pPr>
+            <a:r>
+              <a:rPr sz="2000">
+                <a:latin typeface="Courier"/>
+              </a:rPr>
+              <a:t># A tibble: 2 × 4
+  side  shapiro_stat shapiro_p_value normal_distribution
+  &lt;chr&gt;        &lt;dbl&gt;           &lt;dbl&gt; &lt;chr&gt;              
+1 shady        0.966           0.868 Normal             
+2 sunny        0.900           0.289 Normal             </a:t>
+            </a:r>
           </a:p>
         </p:txBody>
       </p:sp>
@@ -8160,7 +8560,7 @@
             </a:pPr>
             <a:r>
               <a:rPr/>
-              <a:t>Practice Exercise 7: Separate Group Data</a:t>
+              <a:t>Practice Exercise 13: Test Equal Variances</a:t>
             </a:r>
           </a:p>
         </p:txBody>
@@ -8185,7 +8585,7 @@
             </a:pPr>
             <a:r>
               <a:rPr sz="2000" b="1"/>
-              <a:t>Practice Exercise 7: Test normality of sunny pine needle lengths</a:t>
+              <a:t>Practice Exercise 13: Test equal variances</a:t>
             </a:r>
           </a:p>
           <a:p>
@@ -8194,7 +8594,7 @@
             </a:pPr>
             <a:r>
               <a:rPr sz="2000"/>
-              <a:t>qqplots</a:t>
+              <a:t>Levenes test can be done on the original dataframe</a:t>
             </a:r>
           </a:p>
           <a:p>
@@ -8202,8 +8602,8 @@
               <a:buNone/>
             </a:pPr>
             <a:r>
-              <a:rPr sz="2000"/>
-              <a:t>Note you need to test each groups separately…</a:t>
+              <a:rPr sz="2000" b="1"/>
+              <a:t>Note: the Levenes Test should be NOT SIGNIFICANT - What is the null hypothesis</a:t>
             </a:r>
           </a:p>
           <a:p>
@@ -8217,7 +8617,7 @@
                 </a:solidFill>
                 <a:latin typeface="Courier"/>
               </a:rPr>
-              <a:t># how do you make separate dataframes to do this on?</a:t>
+              <a:t># Method 1: Using car package's leveneTest</a:t>
             </a:r>
             <a:br/>
             <a:r>
@@ -8227,26 +8627,108 @@
                 </a:solidFill>
                 <a:latin typeface="Courier"/>
               </a:rPr>
-              <a:t># Separate data by groups</a:t>
+              <a:t># This is often preferred as it's more robust to departures from normality</a:t>
             </a:r>
             <a:br/>
             <a:r>
               <a:rPr>
                 <a:solidFill>
+                  <a:srgbClr val="003B4F"/>
+                </a:solidFill>
+                <a:latin typeface="Courier"/>
+              </a:rPr>
+              <a:t>levene_result &lt;- </a:t>
+            </a:r>
+            <a:r>
+              <a:rPr>
+                <a:solidFill>
                   <a:srgbClr val="4758AB"/>
                 </a:solidFill>
                 <a:latin typeface="Courier"/>
               </a:rPr>
-              <a:t>head</a:t>
-            </a:r>
-            <a:r>
-              <a:rPr>
-                <a:solidFill>
-                  <a:srgbClr val="003B4F"/>
-                </a:solidFill>
-                <a:latin typeface="Courier"/>
-              </a:rPr>
-              <a:t>(ps_shady_df)</a:t>
+              <a:t>leveneTest</a:t>
+            </a:r>
+            <a:r>
+              <a:rPr>
+                <a:solidFill>
+                  <a:srgbClr val="003B4F"/>
+                </a:solidFill>
+                <a:latin typeface="Courier"/>
+              </a:rPr>
+              <a:t>(length_mm </a:t>
+            </a:r>
+            <a:r>
+              <a:rPr>
+                <a:solidFill>
+                  <a:srgbClr val="5E5E5E"/>
+                </a:solidFill>
+                <a:latin typeface="Courier"/>
+              </a:rPr>
+              <a:t>~</a:t>
+            </a:r>
+            <a:r>
+              <a:rPr>
+                <a:solidFill>
+                  <a:srgbClr val="003B4F"/>
+                </a:solidFill>
+                <a:latin typeface="Courier"/>
+              </a:rPr>
+              <a:t> side, </a:t>
+            </a:r>
+            <a:r>
+              <a:rPr>
+                <a:solidFill>
+                  <a:srgbClr val="657422"/>
+                </a:solidFill>
+                <a:latin typeface="Courier"/>
+              </a:rPr>
+              <a:t>data =</a:t>
+            </a:r>
+            <a:r>
+              <a:rPr>
+                <a:solidFill>
+                  <a:srgbClr val="003B4F"/>
+                </a:solidFill>
+                <a:latin typeface="Courier"/>
+              </a:rPr>
+              <a:t> ps_df)</a:t>
+            </a:r>
+            <a:br/>
+            <a:r>
+              <a:rPr>
+                <a:solidFill>
+                  <a:srgbClr val="4758AB"/>
+                </a:solidFill>
+                <a:latin typeface="Courier"/>
+              </a:rPr>
+              <a:t>print</a:t>
+            </a:r>
+            <a:r>
+              <a:rPr>
+                <a:solidFill>
+                  <a:srgbClr val="003B4F"/>
+                </a:solidFill>
+                <a:latin typeface="Courier"/>
+              </a:rPr>
+              <a:t>(</a:t>
+            </a:r>
+            <a:r>
+              <a:rPr>
+                <a:solidFill>
+                  <a:srgbClr val="20794D"/>
+                </a:solidFill>
+                <a:latin typeface="Courier"/>
+              </a:rPr>
+              <a:t>"Levene's Test for Homogeneity of Variance:"</a:t>
+            </a:r>
+            <a:r>
+              <a:rPr>
+                <a:solidFill>
+                  <a:srgbClr val="003B4F"/>
+                </a:solidFill>
+                <a:latin typeface="Courier"/>
+              </a:rPr>
+              <a:t>)</a:t>
             </a:r>
           </a:p>
           <a:p>
@@ -8257,16 +8739,7 @@
               <a:rPr sz="2000">
                 <a:latin typeface="Courier"/>
               </a:rPr>
-              <a:t># A tibble: 6 × 5
-# Groups:   group, tree_no, tree_char [6]
-  group                      tree_no tree_char side  length_mm
-  &lt;chr&gt;                        &lt;dbl&gt; &lt;chr&gt;     &lt;chr&gt;     &lt;dbl&gt;
-1 big_fat_fecund_female_fish       2 tree_2    shady      15.4
-2 bill                             3 tree_3    shady      16.7
-3 ciabatta                         5 tree_5    shady      19.1
-4 fake_data                        8 tree_8    shady      17.4
-5 five                             1 tree_1    shady      20.3
-6 moose_walkin                     7 tree_7    shady      20.7</a:t>
+              <a:t>[1] "Levene's Test for Homogeneity of Variance:"</a:t>
             </a:r>
           </a:p>
           <a:p>
@@ -8280,16 +8753,16 @@
                 </a:solidFill>
                 <a:latin typeface="Courier"/>
               </a:rPr>
-              <a:t>head</a:t>
-            </a:r>
-            <a:r>
-              <a:rPr>
-                <a:solidFill>
-                  <a:srgbClr val="003B4F"/>
-                </a:solidFill>
-                <a:latin typeface="Courier"/>
-              </a:rPr>
-              <a:t>(ps_sunny_df)</a:t>
+              <a:t>print</a:t>
+            </a:r>
+            <a:r>
+              <a:rPr>
+                <a:solidFill>
+                  <a:srgbClr val="003B4F"/>
+                </a:solidFill>
+                <a:latin typeface="Courier"/>
+              </a:rPr>
+              <a:t>(levene_result)</a:t>
             </a:r>
           </a:p>
           <a:p>
@@ -8300,16 +8773,10 @@
               <a:rPr sz="2000">
                 <a:latin typeface="Courier"/>
               </a:rPr>
-              <a:t># A tibble: 6 × 5
-# Groups:   group, tree_no, tree_char [6]
-  group                      tree_no tree_char side  length_mm
-  &lt;chr&gt;                        &lt;dbl&gt; &lt;chr&gt;     &lt;chr&gt;     &lt;dbl&gt;
-1 big_fat_fecund_female_fish       2 tree_2    sunny      13.2
-2 bill                             3 tree_3    sunny      16.0
-3 ciabatta                         5 tree_5    sunny      17.7
-4 fake_data                        8 tree_8    sunny      13.0
-5 five                             1 tree_1    sunny      19.9
-6 moose_walkin                     7 tree_7    sunny      18.4</a:t>
+              <a:t>Levene's Test for Homogeneity of Variance (center = median)
+      Df F value Pr(&gt;F)
+group  1  0.2062 0.6567
+      14               </a:t>
             </a:r>
           </a:p>
         </p:txBody>
@@ -8338,36 +8805,6 @@
       </p:grpSpPr>
       <p:sp>
         <p:nvSpPr>
-          <p:cNvPr id="2" name="Title 1"/>
-          <p:cNvSpPr>
-            <a:spLocks noGrp="1"/>
-          </p:cNvSpPr>
-          <p:nvPr>
-            <p:ph type="title"/>
-          </p:nvPr>
-        </p:nvSpPr>
-        <p:spPr>
-          <a:xfrm>
-            <a:off x="0" y="0"/>
-            <a:ext cx="9144000" cy="582780"/>
-          </a:xfrm>
-        </p:spPr>
-        <p:txBody>
-          <a:bodyPr/>
-          <a:lstStyle/>
-          <a:p>
-            <a:pPr lvl="0" indent="0" marL="0">
-              <a:buNone/>
-            </a:pPr>
-            <a:r>
-              <a:rPr b="1"/>
-              <a:t>Lecture 4: Review - Summary Statistics</a:t>
-            </a:r>
-          </a:p>
-        </p:txBody>
-      </p:sp>
-      <p:sp>
-        <p:nvSpPr>
           <p:cNvPr id="3" name="Content Placeholder 2"/>
           <p:cNvSpPr>
             <a:spLocks noGrp="1"/>
@@ -8460,8 +8897,11 @@
         <p:spPr>
           <a:xfrm>
             <a:off x="0" y="0"/>
-            <a:ext cx="9144000" cy="582780"/>
+            <a:ext cx="9144000" cy="602780"/>
           </a:xfrm>
+          <a:solidFill>
+            <a:srgbClr val="70121D"/>
+          </a:solidFill>
         </p:spPr>
         <p:txBody>
           <a:bodyPr/>
@@ -8471,8 +8911,12 @@
               <a:buNone/>
             </a:pPr>
             <a:r>
-              <a:rPr/>
-              <a:t>Practice Exercise 8: QQ Plot for Sunny Data</a:t>
+              <a:rPr b="1"/>
+              <a:t>Lecture 5:</a:t>
+            </a:r>
+            <a:r>
+              <a:rPr/>
+              <a:t> Conducting the Two-Sample T-Test</a:t>
             </a:r>
           </a:p>
         </p:txBody>
@@ -8484,7 +8928,7 @@
             <a:spLocks noGrp="1"/>
           </p:cNvSpPr>
           <p:nvPr>
-            <p:ph idx="1"/>
+            <p:ph idx="1" sz="half"/>
           </p:nvPr>
         </p:nvSpPr>
         <p:spPr/>
@@ -8492,32 +8936,89 @@
           <a:bodyPr/>
           <a:lstStyle/>
           <a:p>
-            <a:pPr lvl="0" indent="0" marL="1270000">
-              <a:buNone/>
-            </a:pPr>
-            <a:r>
-              <a:rPr sz="2000" b="1"/>
-              <a:t>Practice Exercise 8: Test normality of sunny pine needle lengths</a:t>
-            </a:r>
-          </a:p>
-          <a:p>
-            <a:pPr lvl="0" indent="0" marL="1270000">
-              <a:buNone/>
-            </a:pPr>
-            <a:r>
-              <a:rPr sz="2000"/>
-              <a:t>qqplots</a:t>
-            </a:r>
-          </a:p>
-          <a:p>
-            <a:pPr lvl="0" indent="0" marL="1270000">
-              <a:buNone/>
-            </a:pPr>
-            <a:r>
-              <a:rPr sz="2000"/>
-              <a:t>Note you need to test each groups separately…</a:t>
-            </a:r>
-          </a:p>
+            <a:pPr lvl="0" indent="0" marL="0">
+              <a:buNone/>
+            </a:pPr>
+            <a:r>
+              <a:rPr/>
+              <a:t>Now we can compare the mean needle lengths between shady and sunny sides.</a:t>
+            </a:r>
+          </a:p>
+          <a:p>
+            <a:pPr lvl="0" indent="0" marL="0">
+              <a:buNone/>
+            </a:pPr>
+            <a:r>
+              <a:rPr/>
+              <a:t>Ho: μ₁ = μ₂ (The needle lengths do not differ)</a:t>
+            </a:r>
+          </a:p>
+          <a:p>
+            <a:pPr lvl="0" indent="0" marL="0">
+              <a:buNone/>
+            </a:pPr>
+            <a:r>
+              <a:rPr/>
+              <a:t>Ha: μ₁ ≠ μ₂ (The mean needle lengths differ - direction is not specified)</a:t>
+            </a:r>
+          </a:p>
+          <a:p>
+            <a:pPr lvl="0" indent="0" marL="0">
+              <a:buNone/>
+            </a:pPr>
+            <a:r>
+              <a:rPr/>
+              <a:t>Calculate t-statistic manually (optional) - YOUR CODE HERE:</a:t>
+            </a:r>
+          </a:p>
+          <a:p>
+            <a:pPr lvl="0" indent="0" marL="0">
+              <a:buNone/>
+            </a:pPr>
+            <a:r>
+              <a:rPr/>
+              <a:t>t = (mean1 - mean2) / sqrt((s1^2/n1) + (s2^2/n2))</a:t>
+            </a:r>
+          </a:p>
+          <a:p>
+            <a:pPr lvl="0" indent="0" marL="0">
+              <a:buNone/>
+            </a:pPr>
+            <a:r>
+              <a:rPr/>
+              <a:t>Deciding between:</a:t>
+            </a:r>
+          </a:p>
+          <a:p>
+            <a:pPr lvl="0"/>
+            <a:r>
+              <a:rPr b="1"/>
+              <a:t>Standard t-test (equal variances)</a:t>
+            </a:r>
+          </a:p>
+          <a:p>
+            <a:pPr lvl="0"/>
+            <a:r>
+              <a:rPr/>
+              <a:t>Welch’s t-test (unequal variances)</a:t>
+            </a:r>
+          </a:p>
+        </p:txBody>
+      </p:sp>
+      <p:sp>
+        <p:nvSpPr>
+          <p:cNvPr id="4" name="Content Placeholder 3"/>
+          <p:cNvSpPr>
+            <a:spLocks noGrp="1"/>
+          </p:cNvSpPr>
+          <p:nvPr>
+            <p:ph idx="2" sz="half"/>
+          </p:nvPr>
+        </p:nvSpPr>
+        <p:spPr/>
+        <p:txBody>
+          <a:bodyPr/>
+          <a:lstStyle/>
           <a:p>
             <a:pPr lvl="0" indent="0">
               <a:buNone/>
@@ -8529,26 +9030,74 @@
                 </a:solidFill>
                 <a:latin typeface="Courier"/>
               </a:rPr>
-              <a:t># QQ Plot for windward group</a:t>
+              <a:t># YOUR </a:t>
+            </a:r>
+            <a:r>
+              <a:rPr>
+                <a:solidFill>
+                  <a:srgbClr val="AD0000"/>
+                </a:solidFill>
+                <a:latin typeface="Courier"/>
+              </a:rPr>
+              <a:t>TASK</a:t>
+            </a:r>
+            <a:r>
+              <a:rPr>
+                <a:solidFill>
+                  <a:srgbClr val="5E5E5E"/>
+                </a:solidFill>
+                <a:latin typeface="Courier"/>
+              </a:rPr>
+              <a:t>: Conduct a two-sample t-test</a:t>
             </a:r>
             <a:br/>
             <a:r>
               <a:rPr>
                 <a:solidFill>
+                  <a:srgbClr val="5E5E5E"/>
+                </a:solidFill>
+                <a:latin typeface="Courier"/>
+              </a:rPr>
+              <a:t># Use var.equal=TRUE for standard t-test or var.equal=FALSE for Welch's t-test</a:t>
+            </a:r>
+            <a:br/>
+            <a:br/>
+            <a:r>
+              <a:rPr>
+                <a:solidFill>
+                  <a:srgbClr val="5E5E5E"/>
+                </a:solidFill>
+                <a:latin typeface="Courier"/>
+              </a:rPr>
+              <a:t># Standard t-test (if variances are equal)</a:t>
+            </a:r>
+            <a:br/>
+            <a:r>
+              <a:rPr>
+                <a:solidFill>
+                  <a:srgbClr val="003B4F"/>
+                </a:solidFill>
+                <a:latin typeface="Courier"/>
+              </a:rPr>
+              <a:t>t_test_result &lt;- </a:t>
+            </a:r>
+            <a:r>
+              <a:rPr>
+                <a:solidFill>
                   <a:srgbClr val="4758AB"/>
                 </a:solidFill>
                 <a:latin typeface="Courier"/>
               </a:rPr>
-              <a:t>qqPlot</a:t>
-            </a:r>
-            <a:r>
-              <a:rPr>
-                <a:solidFill>
-                  <a:srgbClr val="003B4F"/>
-                </a:solidFill>
-                <a:latin typeface="Courier"/>
-              </a:rPr>
-              <a:t>(ps_sunny_df</a:t>
+              <a:t>t.test</a:t>
+            </a:r>
+            <a:r>
+              <a:rPr>
+                <a:solidFill>
+                  <a:srgbClr val="003B4F"/>
+                </a:solidFill>
+                <a:latin typeface="Courier"/>
+              </a:rPr>
+              <a:t>(length_mm </a:t>
             </a:r>
             <a:r>
               <a:rPr>
@@ -8557,44 +9106,89 @@
                 </a:solidFill>
                 <a:latin typeface="Courier"/>
               </a:rPr>
-              <a:t>$</a:t>
-            </a:r>
-            <a:r>
-              <a:rPr>
-                <a:solidFill>
-                  <a:srgbClr val="003B4F"/>
-                </a:solidFill>
-                <a:latin typeface="Courier"/>
-              </a:rPr>
-              <a:t>length_mm, </a:t>
+              <a:t>~</a:t>
+            </a:r>
+            <a:r>
+              <a:rPr>
+                <a:solidFill>
+                  <a:srgbClr val="003B4F"/>
+                </a:solidFill>
+                <a:latin typeface="Courier"/>
+              </a:rPr>
+              <a:t> side, </a:t>
+            </a:r>
+            <a:r>
+              <a:rPr>
+                <a:solidFill>
+                  <a:srgbClr val="657422"/>
+                </a:solidFill>
+                <a:latin typeface="Courier"/>
+              </a:rPr>
+              <a:t>data =</a:t>
+            </a:r>
+            <a:r>
+              <a:rPr>
+                <a:solidFill>
+                  <a:srgbClr val="003B4F"/>
+                </a:solidFill>
+                <a:latin typeface="Courier"/>
+              </a:rPr>
+              <a:t> ps_df, </a:t>
+            </a:r>
+            <a:r>
+              <a:rPr>
+                <a:solidFill>
+                  <a:srgbClr val="657422"/>
+                </a:solidFill>
+                <a:latin typeface="Courier"/>
+              </a:rPr>
+              <a:t>var.equal =</a:t>
+            </a:r>
+            <a:r>
+              <a:rPr>
+                <a:solidFill>
+                  <a:srgbClr val="003B4F"/>
+                </a:solidFill>
+                <a:latin typeface="Courier"/>
+              </a:rPr>
+              <a:t> </a:t>
+            </a:r>
+            <a:r>
+              <a:rPr>
+                <a:solidFill>
+                  <a:srgbClr val="8F5902"/>
+                </a:solidFill>
+                <a:latin typeface="Courier"/>
+              </a:rPr>
+              <a:t>TRUE</a:t>
+            </a:r>
+            <a:r>
+              <a:rPr>
+                <a:solidFill>
+                  <a:srgbClr val="003B4F"/>
+                </a:solidFill>
+                <a:latin typeface="Courier"/>
+              </a:rPr>
+              <a:t>)</a:t>
             </a:r>
             <a:br/>
             <a:r>
               <a:rPr>
                 <a:solidFill>
-                  <a:srgbClr val="003B4F"/>
-                </a:solidFill>
-                <a:latin typeface="Courier"/>
-              </a:rPr>
-              <a:t>       </a:t>
-            </a:r>
-            <a:r>
-              <a:rPr>
-                <a:solidFill>
-                  <a:srgbClr val="657422"/>
-                </a:solidFill>
-                <a:latin typeface="Courier"/>
-              </a:rPr>
-              <a:t>main =</a:t>
-            </a:r>
-            <a:r>
-              <a:rPr>
-                <a:solidFill>
-                  <a:srgbClr val="003B4F"/>
-                </a:solidFill>
-                <a:latin typeface="Courier"/>
-              </a:rPr>
-              <a:t> </a:t>
+                  <a:srgbClr val="4758AB"/>
+                </a:solidFill>
+                <a:latin typeface="Courier"/>
+              </a:rPr>
+              <a:t>print</a:t>
+            </a:r>
+            <a:r>
+              <a:rPr>
+                <a:solidFill>
+                  <a:srgbClr val="003B4F"/>
+                </a:solidFill>
+                <a:latin typeface="Courier"/>
+              </a:rPr>
+              <a:t>(</a:t>
             </a:r>
             <a:r>
               <a:rPr>
@@ -8603,53 +9197,7 @@
                 </a:solidFill>
                 <a:latin typeface="Courier"/>
               </a:rPr>
-              <a:t>"QQ Plot for sunny needle length"</a:t>
-            </a:r>
-            <a:r>
-              <a:rPr>
-                <a:solidFill>
-                  <a:srgbClr val="003B4F"/>
-                </a:solidFill>
-                <a:latin typeface="Courier"/>
-              </a:rPr>
-              <a:t>,</a:t>
-            </a:r>
-            <a:br/>
-            <a:r>
-              <a:rPr>
-                <a:solidFill>
-                  <a:srgbClr val="003B4F"/>
-                </a:solidFill>
-                <a:latin typeface="Courier"/>
-              </a:rPr>
-              <a:t>       </a:t>
-            </a:r>
-            <a:r>
-              <a:rPr>
-                <a:solidFill>
-                  <a:srgbClr val="657422"/>
-                </a:solidFill>
-                <a:latin typeface="Courier"/>
-              </a:rPr>
-              <a:t>ylab =</a:t>
-            </a:r>
-            <a:r>
-              <a:rPr>
-                <a:solidFill>
-                  <a:srgbClr val="003B4F"/>
-                </a:solidFill>
-                <a:latin typeface="Courier"/>
-              </a:rPr>
-              <a:t> </a:t>
-            </a:r>
-            <a:r>
-              <a:rPr>
-                <a:solidFill>
-                  <a:srgbClr val="20794D"/>
-                </a:solidFill>
-                <a:latin typeface="Courier"/>
-              </a:rPr>
-              <a:t>"Sample Quantiles"</a:t>
+              <a:t>"Standard two-sample t-test:"</a:t>
             </a:r>
             <a:r>
               <a:rPr>
@@ -8662,19 +9210,57 @@
             </a:r>
           </a:p>
           <a:p>
-            <a:pPr lvl="0" indent="0" marL="1270000">
-              <a:buNone/>
-            </a:pPr>
-          </a:p>
-          <a:p>
             <a:pPr lvl="0" indent="0">
               <a:buNone/>
             </a:pPr>
             <a:r>
-              <a:rPr sz="2000">
-                <a:latin typeface="Courier"/>
-              </a:rPr>
-              <a:t>[1] 5 4</a:t>
+              <a:rPr>
+                <a:latin typeface="Courier"/>
+              </a:rPr>
+              <a:t>[1] "Standard two-sample t-test:"</a:t>
+            </a:r>
+          </a:p>
+          <a:p>
+            <a:pPr lvl="0" indent="0">
+              <a:buNone/>
+            </a:pPr>
+            <a:r>
+              <a:rPr>
+                <a:solidFill>
+                  <a:srgbClr val="4758AB"/>
+                </a:solidFill>
+                <a:latin typeface="Courier"/>
+              </a:rPr>
+              <a:t>print</a:t>
+            </a:r>
+            <a:r>
+              <a:rPr>
+                <a:solidFill>
+                  <a:srgbClr val="003B4F"/>
+                </a:solidFill>
+                <a:latin typeface="Courier"/>
+              </a:rPr>
+              <a:t>(t_test_result)</a:t>
+            </a:r>
+          </a:p>
+          <a:p>
+            <a:pPr lvl="0" indent="0">
+              <a:buNone/>
+            </a:pPr>
+            <a:r>
+              <a:rPr>
+                <a:latin typeface="Courier"/>
+              </a:rPr>
+              <a:t>
+    Two Sample t-test
+data:  length_mm by side
+t = 1.1279, df = 14, p-value = 0.2783
+alternative hypothesis: true difference in means between group shady and group sunny is not equal to 0
+95 percent confidence interval:
+ -1.309330  4.214005
+sample estimates:
+mean in group shady mean in group sunny 
+           17.60561            16.15328 </a:t>
             </a:r>
           </a:p>
         </p:txBody>
@@ -8714,8 +9300,11 @@
         <p:spPr>
           <a:xfrm>
             <a:off x="0" y="0"/>
-            <a:ext cx="9144000" cy="582780"/>
+            <a:ext cx="9144000" cy="602780"/>
           </a:xfrm>
+          <a:solidFill>
+            <a:srgbClr val="70121D"/>
+          </a:solidFill>
         </p:spPr>
         <p:txBody>
           <a:bodyPr/>
@@ -8725,8 +9314,12 @@
               <a:buNone/>
             </a:pPr>
             <a:r>
-              <a:rPr/>
-              <a:t>Practice Exercise 9: Shapiro-Wilk Test</a:t>
+              <a:rPr b="1"/>
+              <a:t>Lecture 5:</a:t>
+            </a:r>
+            <a:r>
+              <a:rPr/>
+              <a:t> Conducting the Two-Sample T-Test</a:t>
             </a:r>
           </a:p>
         </p:txBody>
@@ -8738,7 +9331,7 @@
             <a:spLocks noGrp="1"/>
           </p:cNvSpPr>
           <p:nvPr>
-            <p:ph idx="1"/>
+            <p:ph idx="1" sz="half"/>
           </p:nvPr>
         </p:nvSpPr>
         <p:spPr/>
@@ -8746,32 +9339,89 @@
           <a:bodyPr/>
           <a:lstStyle/>
           <a:p>
-            <a:pPr lvl="0" indent="0" marL="1270000">
-              <a:buNone/>
-            </a:pPr>
-            <a:r>
-              <a:rPr sz="2000" b="1"/>
-              <a:t>Practice Exercise 9: Test normality of I8 lengths</a:t>
-            </a:r>
-          </a:p>
-          <a:p>
-            <a:pPr lvl="0" indent="0" marL="1270000">
-              <a:buNone/>
-            </a:pPr>
-            <a:r>
-              <a:rPr sz="2000"/>
-              <a:t>Shapiro-Wilk test</a:t>
-            </a:r>
-          </a:p>
-          <a:p>
-            <a:pPr lvl="0" indent="0" marL="1270000">
-              <a:buNone/>
-            </a:pPr>
-            <a:r>
-              <a:rPr sz="2000"/>
-              <a:t>Note you need to test each groups separately…</a:t>
-            </a:r>
-          </a:p>
+            <a:pPr lvl="0" indent="0" marL="0">
+              <a:buNone/>
+            </a:pPr>
+            <a:r>
+              <a:rPr/>
+              <a:t>Now we can compare the mean needle lengths between shady and sunny sides.</a:t>
+            </a:r>
+          </a:p>
+          <a:p>
+            <a:pPr lvl="0" indent="0" marL="0">
+              <a:buNone/>
+            </a:pPr>
+            <a:r>
+              <a:rPr/>
+              <a:t>Ho: μ₁ = μ₂ (The needle lengths do not differ)</a:t>
+            </a:r>
+          </a:p>
+          <a:p>
+            <a:pPr lvl="0" indent="0" marL="0">
+              <a:buNone/>
+            </a:pPr>
+            <a:r>
+              <a:rPr/>
+              <a:t>Ha: μ₁ ≠ μ₂ (The mean needle lengths differ - direction is not specified)</a:t>
+            </a:r>
+          </a:p>
+          <a:p>
+            <a:pPr lvl="0" indent="0" marL="0">
+              <a:buNone/>
+            </a:pPr>
+            <a:r>
+              <a:rPr/>
+              <a:t>Calculate t-statistic manually (optional) - YOUR CODE HERE:</a:t>
+            </a:r>
+          </a:p>
+          <a:p>
+            <a:pPr lvl="0" indent="0" marL="0">
+              <a:buNone/>
+            </a:pPr>
+            <a:r>
+              <a:rPr/>
+              <a:t>t = (mean1 - mean2) / sqrt((s1^2/n1) + (s2^2/n2))</a:t>
+            </a:r>
+          </a:p>
+          <a:p>
+            <a:pPr lvl="0" indent="0" marL="0">
+              <a:buNone/>
+            </a:pPr>
+            <a:r>
+              <a:rPr/>
+              <a:t>Deciding between:</a:t>
+            </a:r>
+          </a:p>
+          <a:p>
+            <a:pPr lvl="0"/>
+            <a:r>
+              <a:rPr/>
+              <a:t>Standard t-test (equal variances)</a:t>
+            </a:r>
+          </a:p>
+          <a:p>
+            <a:pPr lvl="0"/>
+            <a:r>
+              <a:rPr b="1"/>
+              <a:t>Welches t-test (unequal variances)</a:t>
+            </a:r>
+          </a:p>
+        </p:txBody>
+      </p:sp>
+      <p:sp>
+        <p:nvSpPr>
+          <p:cNvPr id="4" name="Content Placeholder 3"/>
+          <p:cNvSpPr>
+            <a:spLocks noGrp="1"/>
+          </p:cNvSpPr>
+          <p:nvPr>
+            <p:ph idx="2" sz="half"/>
+          </p:nvPr>
+        </p:nvSpPr>
+        <p:spPr/>
+        <p:txBody>
+          <a:bodyPr/>
+          <a:lstStyle/>
           <a:p>
             <a:pPr lvl="0" indent="0">
               <a:buNone/>
@@ -8783,26 +9433,74 @@
                 </a:solidFill>
                 <a:latin typeface="Courier"/>
               </a:rPr>
-              <a:t># Shapiro-Wilk test for sunny group</a:t>
+              <a:t># YOUR </a:t>
+            </a:r>
+            <a:r>
+              <a:rPr>
+                <a:solidFill>
+                  <a:srgbClr val="AD0000"/>
+                </a:solidFill>
+                <a:latin typeface="Courier"/>
+              </a:rPr>
+              <a:t>TASK</a:t>
+            </a:r>
+            <a:r>
+              <a:rPr>
+                <a:solidFill>
+                  <a:srgbClr val="5E5E5E"/>
+                </a:solidFill>
+                <a:latin typeface="Courier"/>
+              </a:rPr>
+              <a:t>: Conduct a two-sample t-test</a:t>
             </a:r>
             <a:br/>
             <a:r>
               <a:rPr>
                 <a:solidFill>
+                  <a:srgbClr val="5E5E5E"/>
+                </a:solidFill>
+                <a:latin typeface="Courier"/>
+              </a:rPr>
+              <a:t># Use var.equal=TRUE for standard t-test or var.equal=FALSE for Welch's t-test</a:t>
+            </a:r>
+            <a:br/>
+            <a:br/>
+            <a:r>
+              <a:rPr>
+                <a:solidFill>
+                  <a:srgbClr val="5E5E5E"/>
+                </a:solidFill>
+                <a:latin typeface="Courier"/>
+              </a:rPr>
+              <a:t># Standard t-test (if variances are equal)</a:t>
+            </a:r>
+            <a:br/>
+            <a:r>
+              <a:rPr>
+                <a:solidFill>
+                  <a:srgbClr val="003B4F"/>
+                </a:solidFill>
+                <a:latin typeface="Courier"/>
+              </a:rPr>
+              <a:t>t_test_result &lt;- </a:t>
+            </a:r>
+            <a:r>
+              <a:rPr>
+                <a:solidFill>
                   <a:srgbClr val="4758AB"/>
                 </a:solidFill>
                 <a:latin typeface="Courier"/>
               </a:rPr>
-              <a:t>shapiro.test</a:t>
-            </a:r>
-            <a:r>
-              <a:rPr>
-                <a:solidFill>
-                  <a:srgbClr val="003B4F"/>
-                </a:solidFill>
-                <a:latin typeface="Courier"/>
-              </a:rPr>
-              <a:t>(ps_sunny_df</a:t>
+              <a:t>t.test</a:t>
+            </a:r>
+            <a:r>
+              <a:rPr>
+                <a:solidFill>
+                  <a:srgbClr val="003B4F"/>
+                </a:solidFill>
+                <a:latin typeface="Courier"/>
+              </a:rPr>
+              <a:t>(length_mm </a:t>
             </a:r>
             <a:r>
               <a:rPr>
@@ -8811,16 +9509,107 @@
                 </a:solidFill>
                 <a:latin typeface="Courier"/>
               </a:rPr>
-              <a:t>$</a:t>
-            </a:r>
-            <a:r>
-              <a:rPr>
-                <a:solidFill>
-                  <a:srgbClr val="003B4F"/>
-                </a:solidFill>
-                <a:latin typeface="Courier"/>
-              </a:rPr>
-              <a:t>length_mm)</a:t>
+              <a:t>~</a:t>
+            </a:r>
+            <a:r>
+              <a:rPr>
+                <a:solidFill>
+                  <a:srgbClr val="003B4F"/>
+                </a:solidFill>
+                <a:latin typeface="Courier"/>
+              </a:rPr>
+              <a:t> side, </a:t>
+            </a:r>
+            <a:r>
+              <a:rPr>
+                <a:solidFill>
+                  <a:srgbClr val="657422"/>
+                </a:solidFill>
+                <a:latin typeface="Courier"/>
+              </a:rPr>
+              <a:t>data =</a:t>
+            </a:r>
+            <a:r>
+              <a:rPr>
+                <a:solidFill>
+                  <a:srgbClr val="003B4F"/>
+                </a:solidFill>
+                <a:latin typeface="Courier"/>
+              </a:rPr>
+              <a:t> ps_df, </a:t>
+            </a:r>
+            <a:r>
+              <a:rPr>
+                <a:solidFill>
+                  <a:srgbClr val="657422"/>
+                </a:solidFill>
+                <a:latin typeface="Courier"/>
+              </a:rPr>
+              <a:t>var.equal =</a:t>
+            </a:r>
+            <a:r>
+              <a:rPr>
+                <a:solidFill>
+                  <a:srgbClr val="003B4F"/>
+                </a:solidFill>
+                <a:latin typeface="Courier"/>
+              </a:rPr>
+              <a:t> </a:t>
+            </a:r>
+            <a:r>
+              <a:rPr>
+                <a:solidFill>
+                  <a:srgbClr val="8F5902"/>
+                </a:solidFill>
+                <a:latin typeface="Courier"/>
+              </a:rPr>
+              <a:t>FALSE</a:t>
+            </a:r>
+            <a:r>
+              <a:rPr>
+                <a:solidFill>
+                  <a:srgbClr val="003B4F"/>
+                </a:solidFill>
+                <a:latin typeface="Courier"/>
+              </a:rPr>
+              <a:t>)</a:t>
+            </a:r>
+            <a:br/>
+            <a:r>
+              <a:rPr>
+                <a:solidFill>
+                  <a:srgbClr val="4758AB"/>
+                </a:solidFill>
+                <a:latin typeface="Courier"/>
+              </a:rPr>
+              <a:t>print</a:t>
+            </a:r>
+            <a:r>
+              <a:rPr>
+                <a:solidFill>
+                  <a:srgbClr val="003B4F"/>
+                </a:solidFill>
+                <a:latin typeface="Courier"/>
+              </a:rPr>
+              <a:t>(</a:t>
+            </a:r>
+            <a:r>
+              <a:rPr>
+                <a:solidFill>
+                  <a:srgbClr val="20794D"/>
+                </a:solidFill>
+                <a:latin typeface="Courier"/>
+              </a:rPr>
+              <a:t>"Welches two-sample t-test:"</a:t>
+            </a:r>
+            <a:r>
+              <a:rPr>
+                <a:solidFill>
+                  <a:srgbClr val="003B4F"/>
+                </a:solidFill>
+                <a:latin typeface="Courier"/>
+              </a:rPr>
+              <a:t>)</a:t>
             </a:r>
           </a:p>
           <a:p>
@@ -8828,13 +9617,53 @@
               <a:buNone/>
             </a:pPr>
             <a:r>
-              <a:rPr sz="2000">
+              <a:rPr>
+                <a:latin typeface="Courier"/>
+              </a:rPr>
+              <a:t>[1] "Welches two-sample t-test:"</a:t>
+            </a:r>
+          </a:p>
+          <a:p>
+            <a:pPr lvl="0" indent="0">
+              <a:buNone/>
+            </a:pPr>
+            <a:r>
+              <a:rPr>
+                <a:solidFill>
+                  <a:srgbClr val="4758AB"/>
+                </a:solidFill>
+                <a:latin typeface="Courier"/>
+              </a:rPr>
+              <a:t>print</a:t>
+            </a:r>
+            <a:r>
+              <a:rPr>
+                <a:solidFill>
+                  <a:srgbClr val="003B4F"/>
+                </a:solidFill>
+                <a:latin typeface="Courier"/>
+              </a:rPr>
+              <a:t>(t_test_result)</a:t>
+            </a:r>
+          </a:p>
+          <a:p>
+            <a:pPr lvl="0" indent="0">
+              <a:buNone/>
+            </a:pPr>
+            <a:r>
+              <a:rPr>
                 <a:latin typeface="Courier"/>
               </a:rPr>
               <a:t>
-    Shapiro-Wilk normality test
-data:  ps_sunny_df$length_mm
-W = 0.89994, p-value = 0.2886</a:t>
+    Welch Two Sample t-test
+data:  length_mm by side
+t = 1.1279, df = 13.96, p-value = 0.2784
+alternative hypothesis: true difference in means between group shady and group sunny is not equal to 0
+95 percent confidence interval:
+ -1.310069  4.214743
+sample estimates:
+mean in group shady mean in group sunny 
+           17.60561            16.15328 </a:t>
             </a:r>
           </a:p>
         </p:txBody>
@@ -8885,8 +9714,12 @@
               <a:buNone/>
             </a:pPr>
             <a:r>
-              <a:rPr/>
-              <a:t>Practice Exercise 10: QQ Plot for Shady</a:t>
+              <a:rPr b="1"/>
+              <a:t>Lecture 5:</a:t>
+            </a:r>
+            <a:r>
+              <a:rPr/>
+              <a:t> Difference between a Two-Sample T and Welch’s T Test</a:t>
             </a:r>
           </a:p>
         </p:txBody>
@@ -8906,199 +9739,154 @@
           <a:bodyPr/>
           <a:lstStyle/>
           <a:p>
-            <a:pPr lvl="0" indent="0" marL="1270000">
-              <a:buNone/>
-            </a:pPr>
-            <a:r>
-              <a:rPr sz="2000" b="1"/>
-              <a:t>Practice Exercise 10: Test normality of shady lengths</a:t>
-            </a:r>
-          </a:p>
-          <a:p>
-            <a:pPr lvl="0" indent="0" marL="1270000">
-              <a:buNone/>
-            </a:pPr>
-            <a:r>
-              <a:rPr sz="2000"/>
-              <a:t>qqplots</a:t>
-            </a:r>
-          </a:p>
-          <a:p>
-            <a:pPr lvl="0" indent="0" marL="1270000">
-              <a:buNone/>
-            </a:pPr>
-            <a:r>
-              <a:rPr sz="2000"/>
-              <a:t>Note you need to test each groups separately…</a:t>
-            </a:r>
-          </a:p>
-          <a:p>
-            <a:pPr lvl="0" indent="0">
-              <a:buNone/>
-            </a:pPr>
-            <a:r>
-              <a:rPr>
-                <a:solidFill>
-                  <a:srgbClr val="5E5E5E"/>
-                </a:solidFill>
-                <a:latin typeface="Courier"/>
-              </a:rPr>
-              <a:t># You can also test the i3</a:t>
-            </a:r>
-            <a:br/>
-            <a:r>
-              <a:rPr>
-                <a:solidFill>
-                  <a:srgbClr val="5E5E5E"/>
-                </a:solidFill>
-                <a:latin typeface="Courier"/>
-              </a:rPr>
-              <a:t># QQ Plot for shady group</a:t>
-            </a:r>
-            <a:br/>
-            <a:r>
-              <a:rPr>
-                <a:solidFill>
-                  <a:srgbClr val="4758AB"/>
-                </a:solidFill>
-                <a:latin typeface="Courier"/>
-              </a:rPr>
-              <a:t>qqPlot</a:t>
-            </a:r>
-            <a:r>
-              <a:rPr>
-                <a:solidFill>
-                  <a:srgbClr val="003B4F"/>
-                </a:solidFill>
-                <a:latin typeface="Courier"/>
-              </a:rPr>
-              <a:t>(ps_shady_df</a:t>
-            </a:r>
-            <a:r>
-              <a:rPr>
-                <a:solidFill>
-                  <a:srgbClr val="5E5E5E"/>
-                </a:solidFill>
-                <a:latin typeface="Courier"/>
-              </a:rPr>
-              <a:t>$</a:t>
-            </a:r>
-            <a:r>
-              <a:rPr>
-                <a:solidFill>
-                  <a:srgbClr val="003B4F"/>
-                </a:solidFill>
-                <a:latin typeface="Courier"/>
-              </a:rPr>
-              <a:t>length_mm, </a:t>
-            </a:r>
-            <a:br/>
-            <a:r>
-              <a:rPr>
-                <a:solidFill>
-                  <a:srgbClr val="003B4F"/>
-                </a:solidFill>
-                <a:latin typeface="Courier"/>
-              </a:rPr>
-              <a:t>       </a:t>
-            </a:r>
-            <a:r>
-              <a:rPr>
-                <a:solidFill>
-                  <a:srgbClr val="657422"/>
-                </a:solidFill>
-                <a:latin typeface="Courier"/>
-              </a:rPr>
-              <a:t>main =</a:t>
-            </a:r>
-            <a:r>
-              <a:rPr>
-                <a:solidFill>
-                  <a:srgbClr val="003B4F"/>
-                </a:solidFill>
-                <a:latin typeface="Courier"/>
-              </a:rPr>
-              <a:t> </a:t>
-            </a:r>
-            <a:r>
-              <a:rPr>
-                <a:solidFill>
-                  <a:srgbClr val="20794D"/>
-                </a:solidFill>
-                <a:latin typeface="Courier"/>
-              </a:rPr>
-              <a:t>"QQ Plot for shady needle length"</a:t>
-            </a:r>
-            <a:r>
-              <a:rPr>
-                <a:solidFill>
-                  <a:srgbClr val="003B4F"/>
-                </a:solidFill>
-                <a:latin typeface="Courier"/>
-              </a:rPr>
-              <a:t>,</a:t>
-            </a:r>
-            <a:br/>
-            <a:r>
-              <a:rPr>
-                <a:solidFill>
-                  <a:srgbClr val="003B4F"/>
-                </a:solidFill>
-                <a:latin typeface="Courier"/>
-              </a:rPr>
-              <a:t>       </a:t>
-            </a:r>
-            <a:r>
-              <a:rPr>
-                <a:solidFill>
-                  <a:srgbClr val="657422"/>
-                </a:solidFill>
-                <a:latin typeface="Courier"/>
-              </a:rPr>
-              <a:t>ylab =</a:t>
-            </a:r>
-            <a:r>
-              <a:rPr>
-                <a:solidFill>
-                  <a:srgbClr val="003B4F"/>
-                </a:solidFill>
-                <a:latin typeface="Courier"/>
-              </a:rPr>
-              <a:t> </a:t>
-            </a:r>
-            <a:r>
-              <a:rPr>
-                <a:solidFill>
-                  <a:srgbClr val="20794D"/>
-                </a:solidFill>
-                <a:latin typeface="Courier"/>
-              </a:rPr>
-              <a:t>"Sample Quantiles"</a:t>
-            </a:r>
-            <a:r>
-              <a:rPr>
-                <a:solidFill>
-                  <a:srgbClr val="003B4F"/>
-                </a:solidFill>
-                <a:latin typeface="Courier"/>
-              </a:rPr>
-              <a:t>)</a:t>
-            </a:r>
-          </a:p>
-          <a:p>
-            <a:pPr lvl="0" indent="0" marL="1270000">
-              <a:buNone/>
-            </a:pPr>
-          </a:p>
-          <a:p>
-            <a:pPr lvl="0" indent="0">
-              <a:buNone/>
-            </a:pPr>
-            <a:r>
-              <a:rPr sz="2000">
-                <a:latin typeface="Courier"/>
-              </a:rPr>
-              <a:t>[1] 7 6</a:t>
+            <a:pPr lvl="0" indent="0" marL="0">
+              <a:spcBef>
+                <a:spcPts val="3000"/>
+              </a:spcBef>
+              <a:buNone/>
+            </a:pPr>
+            <a:r>
+              <a:rPr b="1"/>
+              <a:t>Standard t-test (Student’s t-test)</a:t>
+            </a:r>
+          </a:p>
+          <a:p>
+            <a:pPr lvl="0"/>
+            <a:r>
+              <a:rPr b="1"/>
+              <a:t>Assumes equal variances</a:t>
+            </a:r>
+            <a:r>
+              <a:rPr/>
+              <a:t> between the two groups being compared</a:t>
+            </a:r>
+          </a:p>
+          <a:p>
+            <a:pPr lvl="0"/>
+            <a:r>
+              <a:rPr/>
+              <a:t>Uses a </a:t>
+            </a:r>
+            <a:r>
+              <a:rPr b="1"/>
+              <a:t>pooled variance estimate</a:t>
+            </a:r>
+            <a:r>
+              <a:rPr/>
+              <a:t> that combines data from both group</a:t>
+            </a:r>
+          </a:p>
+          <a:p>
+            <a:pPr lvl="0"/>
+            <a:r>
+              <a:rPr/>
+              <a:t>Has </a:t>
+            </a:r>
+            <a:r>
+              <a:rPr b="1"/>
+              <a:t>higher statistical power</a:t>
+            </a:r>
+            <a:r>
+              <a:rPr/>
+              <a:t> when the equal variance assumption is met</a:t>
+            </a:r>
+          </a:p>
+          <a:p>
+            <a:pPr lvl="0"/>
+            <a:r>
+              <a:rPr b="1"/>
+              <a:t>Degrees of freedom</a:t>
+            </a:r>
+            <a:r>
+              <a:rPr/>
+              <a:t> = n₁ + n₂ - 2</a:t>
+            </a:r>
+          </a:p>
+          <a:p>
+            <a:pPr lvl="0" indent="0" marL="0">
+              <a:spcBef>
+                <a:spcPts val="3000"/>
+              </a:spcBef>
+              <a:buNone/>
+            </a:pPr>
+            <a:r>
+              <a:rPr b="1"/>
+              <a:t>Welch’s t-test</a:t>
+            </a:r>
+          </a:p>
+          <a:p>
+            <a:pPr lvl="0"/>
+            <a:r>
+              <a:rPr b="1"/>
+              <a:t>Does not assume equal variances</a:t>
+            </a:r>
+            <a:r>
+              <a:rPr/>
+              <a:t> between groups (also called the “unequal variances t-test”)</a:t>
+            </a:r>
+          </a:p>
+          <a:p>
+            <a:pPr lvl="0"/>
+            <a:r>
+              <a:rPr/>
+              <a:t>Uses </a:t>
+            </a:r>
+            <a:r>
+              <a:rPr b="1"/>
+              <a:t>separate variance estimates</a:t>
+            </a:r>
+            <a:r>
+              <a:rPr/>
+              <a:t> for each group</a:t>
+            </a:r>
+          </a:p>
+          <a:p>
+            <a:pPr lvl="0"/>
+            <a:r>
+              <a:rPr/>
+              <a:t>More </a:t>
+            </a:r>
+            <a:r>
+              <a:rPr b="1"/>
+              <a:t>robust</a:t>
+            </a:r>
+            <a:r>
+              <a:rPr/>
+              <a:t> when group variances are different</a:t>
+            </a:r>
+          </a:p>
+          <a:p>
+            <a:pPr lvl="0"/>
+            <a:r>
+              <a:rPr/>
+              <a:t>Uses a more complex </a:t>
+            </a:r>
+            <a:r>
+              <a:rPr b="1"/>
+              <a:t>degrees of freedom calculation</a:t>
+            </a:r>
+            <a:r>
+              <a:rPr/>
+              <a:t> (</a:t>
+            </a:r>
+            <a:r>
+              <a:rPr b="1"/>
+              <a:t>Welch-Satterthwaite equation</a:t>
+            </a:r>
+            <a:r>
+              <a:rPr/>
+              <a:t>) and decimal!!!</a:t>
+            </a:r>
+          </a:p>
+          <a:p>
+            <a:pPr lvl="0"/>
+            <a:r>
+              <a:rPr b="1"/>
+              <a:t>Degrees of freedom</a:t>
+            </a:r>
+            <a:r>
+              <a:rPr/>
+              <a:t> are typically non-integer and usually smaller than the standard t-test</a:t>
             </a:r>
           </a:p>
         </p:txBody>
@@ -9138,8 +9926,11 @@
         <p:spPr>
           <a:xfrm>
             <a:off x="0" y="0"/>
-            <a:ext cx="9144000" cy="582780"/>
+            <a:ext cx="9144000" cy="602780"/>
           </a:xfrm>
+          <a:solidFill>
+            <a:srgbClr val="70121D"/>
+          </a:solidFill>
         </p:spPr>
         <p:txBody>
           <a:bodyPr/>
@@ -9149,8 +9940,12 @@
               <a:buNone/>
             </a:pPr>
             <a:r>
-              <a:rPr/>
-              <a:t>Practice Exercise 11: Shapiro-Wilk for Shady</a:t>
+              <a:rPr b="1"/>
+              <a:t>Lecture 5:</a:t>
+            </a:r>
+            <a:r>
+              <a:rPr/>
+              <a:t> Interpreting Two-Sample T-Test Results</a:t>
             </a:r>
           </a:p>
         </p:txBody>
@@ -9162,7 +9957,7 @@
             <a:spLocks noGrp="1"/>
           </p:cNvSpPr>
           <p:nvPr>
-            <p:ph idx="1"/>
+            <p:ph idx="1" sz="half"/>
           </p:nvPr>
         </p:nvSpPr>
         <p:spPr/>
@@ -9170,108 +9965,73 @@
           <a:bodyPr/>
           <a:lstStyle/>
           <a:p>
-            <a:pPr lvl="0" indent="0" marL="1270000">
-              <a:buNone/>
-            </a:pPr>
-            <a:r>
-              <a:rPr sz="2000" b="1"/>
-              <a:t>Practice Exercise 11: Test normality of shady lengths</a:t>
-            </a:r>
-          </a:p>
-          <a:p>
-            <a:pPr lvl="0" indent="0" marL="1270000">
-              <a:buNone/>
-            </a:pPr>
-            <a:r>
-              <a:rPr sz="2000"/>
-              <a:t>Shapiro-Wilk test</a:t>
-            </a:r>
-          </a:p>
-          <a:p>
-            <a:pPr lvl="0" indent="0" marL="1270000">
-              <a:buNone/>
-            </a:pPr>
-            <a:r>
-              <a:rPr sz="2000"/>
-              <a:t>Note you need to test each groups separately…</a:t>
-            </a:r>
-          </a:p>
-          <a:p>
-            <a:pPr lvl="0" indent="0">
-              <a:buNone/>
-            </a:pPr>
-            <a:r>
-              <a:rPr>
-                <a:solidFill>
-                  <a:srgbClr val="5E5E5E"/>
-                </a:solidFill>
-                <a:latin typeface="Courier"/>
-              </a:rPr>
-              <a:t># Shapiro-Wilk test for shady group</a:t>
-            </a:r>
-            <a:br/>
-            <a:r>
-              <a:rPr>
-                <a:solidFill>
-                  <a:srgbClr val="003B4F"/>
-                </a:solidFill>
-                <a:latin typeface="Courier"/>
-              </a:rPr>
-              <a:t> </a:t>
-            </a:r>
-            <a:r>
-              <a:rPr>
-                <a:solidFill>
-                  <a:srgbClr val="4758AB"/>
-                </a:solidFill>
-                <a:latin typeface="Courier"/>
-              </a:rPr>
-              <a:t>shapiro.test</a:t>
-            </a:r>
-            <a:r>
-              <a:rPr>
-                <a:solidFill>
-                  <a:srgbClr val="003B4F"/>
-                </a:solidFill>
-                <a:latin typeface="Courier"/>
-              </a:rPr>
-              <a:t>(ps_shady_df</a:t>
-            </a:r>
-            <a:r>
-              <a:rPr>
-                <a:solidFill>
-                  <a:srgbClr val="5E5E5E"/>
-                </a:solidFill>
-                <a:latin typeface="Courier"/>
-              </a:rPr>
-              <a:t>$</a:t>
-            </a:r>
-            <a:r>
-              <a:rPr>
-                <a:solidFill>
-                  <a:srgbClr val="003B4F"/>
-                </a:solidFill>
-                <a:latin typeface="Courier"/>
-              </a:rPr>
-              <a:t>length_mm)</a:t>
-            </a:r>
-          </a:p>
-          <a:p>
-            <a:pPr lvl="0" indent="0">
-              <a:buNone/>
-            </a:pPr>
-            <a:r>
-              <a:rPr sz="2000">
-                <a:latin typeface="Courier"/>
-              </a:rPr>
-              <a:t>
-    Shapiro-Wilk normality test
-data:  ps_shady_df$length_mm
-W = 0.96639, p-value = 0.8683</a:t>
-            </a:r>
-          </a:p>
-        </p:txBody>
-      </p:sp>
+            <a:pPr lvl="0" indent="0" marL="0">
+              <a:buNone/>
+            </a:pPr>
+            <a:r>
+              <a:rPr b="1"/>
+              <a:t>Interpret the results of the two-sample t-test</a:t>
+            </a:r>
+          </a:p>
+          <a:p>
+            <a:pPr lvl="0" indent="0" marL="0">
+              <a:buNone/>
+            </a:pPr>
+            <a:r>
+              <a:rPr/>
+              <a:t>What can we conclude about the needle lengths on sunny vs shady sides?</a:t>
+            </a:r>
+          </a:p>
+          <a:p>
+            <a:pPr lvl="0" indent="0" marL="0">
+              <a:buNone/>
+            </a:pPr>
+            <a:r>
+              <a:rPr b="1"/>
+              <a:t>How to report this result in a scientific paper:</a:t>
+            </a:r>
+          </a:p>
+          <a:p>
+            <a:pPr lvl="0" indent="0" marL="0">
+              <a:buNone/>
+            </a:pPr>
+            <a:r>
+              <a:rPr/>
+              <a:t>“A two-tailed, two-sample t-test at α=0.05 showed [a significant/no significant] difference in needle length between sunny (M = …, SD = …) and shady (M = …, SD = …) sides of pine trees, t(…) = …, p = ….”</a:t>
+            </a:r>
+          </a:p>
+        </p:txBody>
+      </p:sp>
+      <p:pic>
+        <p:nvPicPr>
+          <p:cNvPr descr="05_01_lecture_powerpoint_files/figure-pptx/unnamed-chunk-16-1.png" id="0" name="Picture 1"/>
+          <p:cNvPicPr>
+            <a:picLocks noGrp="1" noChangeAspect="1"/>
+          </p:cNvPicPr>
+          <p:nvPr/>
+        </p:nvPicPr>
+        <p:blipFill>
+          <a:blip r:embed="rId2"/>
+          <a:stretch>
+            <a:fillRect/>
+          </a:stretch>
+        </p:blipFill>
+        <p:spPr bwMode="auto">
+          <a:xfrm>
+            <a:off x="6121400" y="1778000"/>
+            <a:ext cx="2781300" cy="2222500"/>
+          </a:xfrm>
+          <a:prstGeom prst="rect">
+            <a:avLst/>
+          </a:prstGeom>
+          <a:noFill/>
+          <a:ln w="9525">
+            <a:noFill/>
+            <a:headEnd/>
+            <a:tailEnd/>
+          </a:ln>
+        </p:spPr>
+      </p:pic>
     </p:spTree>
   </p:cSld>
 </p:sld>
@@ -9307,8 +10067,11 @@
         <p:spPr>
           <a:xfrm>
             <a:off x="0" y="0"/>
-            <a:ext cx="9144000" cy="582780"/>
+            <a:ext cx="9144000" cy="602780"/>
           </a:xfrm>
+          <a:solidFill>
+            <a:srgbClr val="70121D"/>
+          </a:solidFill>
         </p:spPr>
         <p:txBody>
           <a:bodyPr/>
@@ -9318,8 +10081,12 @@
               <a:buNone/>
             </a:pPr>
             <a:r>
-              <a:rPr/>
-              <a:t>Practice Exercise 12: Combined Normality Test</a:t>
+              <a:rPr b="1"/>
+              <a:t>Lecture 5:</a:t>
+            </a:r>
+            <a:r>
+              <a:rPr/>
+              <a:t> Now what does a paired T test tell us</a:t>
             </a:r>
           </a:p>
         </p:txBody>
@@ -9331,7 +10098,7 @@
             <a:spLocks noGrp="1"/>
           </p:cNvSpPr>
           <p:nvPr>
-            <p:ph idx="1"/>
+            <p:ph idx="1" sz="half"/>
           </p:nvPr>
         </p:nvSpPr>
         <p:spPr/>
@@ -9339,23 +10106,39 @@
           <a:bodyPr/>
           <a:lstStyle/>
           <a:p>
-            <a:pPr lvl="0" indent="0" marL="1270000">
-              <a:buNone/>
-            </a:pPr>
-            <a:r>
-              <a:rPr sz="2000" b="1"/>
-              <a:t>Practice Exercise 12: Test Normality at one time</a:t>
-            </a:r>
-          </a:p>
-          <a:p>
-            <a:pPr lvl="0" indent="0" marL="1270000">
-              <a:buNone/>
-            </a:pPr>
-            <a:r>
-              <a:rPr sz="2000"/>
-              <a:t>There are always a lot of ways to do this in R</a:t>
-            </a:r>
-          </a:p>
+            <a:pPr lvl="0" indent="0" marL="0">
+              <a:buNone/>
+            </a:pPr>
+            <a:r>
+              <a:rPr/>
+              <a:t>Paired t-test:</a:t>
+            </a:r>
+          </a:p>
+          <a:p>
+            <a:pPr lvl="0" indent="0" marL="0">
+              <a:buNone/>
+            </a:pPr>
+            <a:r>
+              <a:rPr/>
+              <a:t>Compares two measurements from the same subjects or matched pairs Tests whether the mean difference between paired observations equals zero Examples: before/after measurements on the same people, left vs right measurements, matched case-control studies Uses the differences between pairs as the data points Generally more powerful because it controls for individual variation</a:t>
+            </a:r>
+          </a:p>
+        </p:txBody>
+      </p:sp>
+      <p:sp>
+        <p:nvSpPr>
+          <p:cNvPr id="4" name="Content Placeholder 3"/>
+          <p:cNvSpPr>
+            <a:spLocks noGrp="1"/>
+          </p:cNvSpPr>
+          <p:nvPr>
+            <p:ph idx="2" sz="half"/>
+          </p:nvPr>
+        </p:nvSpPr>
+        <p:spPr/>
+        <p:txBody>
+          <a:bodyPr/>
+          <a:lstStyle/>
           <a:p>
             <a:pPr lvl="0" indent="0">
               <a:buNone/>
@@ -9367,7 +10150,25 @@
                 </a:solidFill>
                 <a:latin typeface="Courier"/>
               </a:rPr>
-              <a:t># there are always two ways</a:t>
+              <a:t># YOUR </a:t>
+            </a:r>
+            <a:r>
+              <a:rPr>
+                <a:solidFill>
+                  <a:srgbClr val="AD0000"/>
+                </a:solidFill>
+                <a:latin typeface="Courier"/>
+              </a:rPr>
+              <a:t>TASK</a:t>
+            </a:r>
+            <a:r>
+              <a:rPr>
+                <a:solidFill>
+                  <a:srgbClr val="5E5E5E"/>
+                </a:solidFill>
+                <a:latin typeface="Courier"/>
+              </a:rPr>
+              <a:t>: Conduct a two-sample t-test</a:t>
             </a:r>
             <a:br/>
             <a:r>
@@ -9377,377 +10178,260 @@
                 </a:solidFill>
                 <a:latin typeface="Courier"/>
               </a:rPr>
-              <a:t># Test for normality using Shapiro-Wilk test for each wind group</a:t>
-            </a:r>
-            <a:br/>
-            <a:r>
-              <a:rPr>
-                <a:solidFill>
-                  <a:srgbClr val="5E5E5E"/>
-                </a:solidFill>
-                <a:latin typeface="Courier"/>
-              </a:rPr>
-              <a:t># All in one pipeline using tidyverse approach</a:t>
-            </a:r>
-            <a:br/>
-            <a:r>
-              <a:rPr>
-                <a:solidFill>
-                  <a:srgbClr val="003B4F"/>
-                </a:solidFill>
-                <a:latin typeface="Courier"/>
-              </a:rPr>
-              <a:t>normality_results &lt;- ps_df </a:t>
-            </a:r>
-            <a:r>
-              <a:rPr>
-                <a:solidFill>
-                  <a:srgbClr val="5E5E5E"/>
-                </a:solidFill>
-                <a:latin typeface="Courier"/>
-              </a:rPr>
-              <a:t>%&gt;%</a:t>
-            </a:r>
-            <a:br/>
-            <a:r>
-              <a:rPr>
-                <a:solidFill>
-                  <a:srgbClr val="003B4F"/>
-                </a:solidFill>
-                <a:latin typeface="Courier"/>
-              </a:rPr>
-              <a:t>  </a:t>
-            </a:r>
-            <a:r>
-              <a:rPr>
-                <a:solidFill>
-                  <a:srgbClr val="4758AB"/>
-                </a:solidFill>
-                <a:latin typeface="Courier"/>
-              </a:rPr>
-              <a:t>group_by</a:t>
-            </a:r>
-            <a:r>
-              <a:rPr>
-                <a:solidFill>
-                  <a:srgbClr val="003B4F"/>
-                </a:solidFill>
-                <a:latin typeface="Courier"/>
-              </a:rPr>
-              <a:t>(side) </a:t>
-            </a:r>
-            <a:r>
-              <a:rPr>
-                <a:solidFill>
-                  <a:srgbClr val="5E5E5E"/>
-                </a:solidFill>
-                <a:latin typeface="Courier"/>
-              </a:rPr>
-              <a:t>%&gt;%</a:t>
-            </a:r>
-            <a:br/>
-            <a:r>
-              <a:rPr>
-                <a:solidFill>
-                  <a:srgbClr val="003B4F"/>
-                </a:solidFill>
-                <a:latin typeface="Courier"/>
-              </a:rPr>
-              <a:t>  </a:t>
-            </a:r>
-            <a:r>
-              <a:rPr>
-                <a:solidFill>
-                  <a:srgbClr val="4758AB"/>
-                </a:solidFill>
-                <a:latin typeface="Courier"/>
-              </a:rPr>
-              <a:t>summarize</a:t>
-            </a:r>
-            <a:r>
-              <a:rPr>
-                <a:solidFill>
-                  <a:srgbClr val="003B4F"/>
-                </a:solidFill>
-                <a:latin typeface="Courier"/>
-              </a:rPr>
-              <a:t>(</a:t>
-            </a:r>
-            <a:br/>
-            <a:r>
-              <a:rPr>
-                <a:solidFill>
-                  <a:srgbClr val="003B4F"/>
-                </a:solidFill>
-                <a:latin typeface="Courier"/>
-              </a:rPr>
-              <a:t>    </a:t>
-            </a:r>
-            <a:r>
-              <a:rPr>
-                <a:solidFill>
-                  <a:srgbClr val="657422"/>
-                </a:solidFill>
-                <a:latin typeface="Courier"/>
-              </a:rPr>
-              <a:t>shapiro_stat =</a:t>
-            </a:r>
-            <a:r>
-              <a:rPr>
-                <a:solidFill>
-                  <a:srgbClr val="003B4F"/>
-                </a:solidFill>
-                <a:latin typeface="Courier"/>
-              </a:rPr>
-              <a:t> </a:t>
-            </a:r>
-            <a:r>
-              <a:rPr>
-                <a:solidFill>
-                  <a:srgbClr val="4758AB"/>
-                </a:solidFill>
-                <a:latin typeface="Courier"/>
-              </a:rPr>
-              <a:t>shapiro.test</a:t>
-            </a:r>
-            <a:r>
-              <a:rPr>
-                <a:solidFill>
-                  <a:srgbClr val="003B4F"/>
-                </a:solidFill>
-                <a:latin typeface="Courier"/>
-              </a:rPr>
-              <a:t>(length_mm)</a:t>
-            </a:r>
-            <a:r>
-              <a:rPr>
-                <a:solidFill>
-                  <a:srgbClr val="5E5E5E"/>
-                </a:solidFill>
-                <a:latin typeface="Courier"/>
-              </a:rPr>
-              <a:t>$</a:t>
-            </a:r>
-            <a:r>
-              <a:rPr>
-                <a:solidFill>
-                  <a:srgbClr val="003B4F"/>
-                </a:solidFill>
-                <a:latin typeface="Courier"/>
-              </a:rPr>
-              <a:t>statistic,</a:t>
-            </a:r>
-            <a:br/>
-            <a:r>
-              <a:rPr>
-                <a:solidFill>
-                  <a:srgbClr val="003B4F"/>
-                </a:solidFill>
-                <a:latin typeface="Courier"/>
-              </a:rPr>
-              <a:t>    </a:t>
-            </a:r>
-            <a:r>
-              <a:rPr>
-                <a:solidFill>
-                  <a:srgbClr val="657422"/>
-                </a:solidFill>
-                <a:latin typeface="Courier"/>
-              </a:rPr>
-              <a:t>shapiro_p_value =</a:t>
-            </a:r>
-            <a:r>
-              <a:rPr>
-                <a:solidFill>
-                  <a:srgbClr val="003B4F"/>
-                </a:solidFill>
-                <a:latin typeface="Courier"/>
-              </a:rPr>
-              <a:t> </a:t>
-            </a:r>
-            <a:r>
-              <a:rPr>
-                <a:solidFill>
-                  <a:srgbClr val="4758AB"/>
-                </a:solidFill>
-                <a:latin typeface="Courier"/>
-              </a:rPr>
-              <a:t>shapiro.test</a:t>
-            </a:r>
-            <a:r>
-              <a:rPr>
-                <a:solidFill>
-                  <a:srgbClr val="003B4F"/>
-                </a:solidFill>
-                <a:latin typeface="Courier"/>
-              </a:rPr>
-              <a:t>(length_mm)</a:t>
-            </a:r>
-            <a:r>
-              <a:rPr>
-                <a:solidFill>
-                  <a:srgbClr val="5E5E5E"/>
-                </a:solidFill>
-                <a:latin typeface="Courier"/>
-              </a:rPr>
-              <a:t>$</a:t>
-            </a:r>
-            <a:r>
-              <a:rPr>
-                <a:solidFill>
-                  <a:srgbClr val="003B4F"/>
-                </a:solidFill>
-                <a:latin typeface="Courier"/>
-              </a:rPr>
-              <a:t>p.value,</a:t>
-            </a:r>
-            <a:br/>
-            <a:r>
-              <a:rPr>
-                <a:solidFill>
-                  <a:srgbClr val="003B4F"/>
-                </a:solidFill>
-                <a:latin typeface="Courier"/>
-              </a:rPr>
-              <a:t>    </a:t>
-            </a:r>
-            <a:r>
-              <a:rPr>
-                <a:solidFill>
-                  <a:srgbClr val="657422"/>
-                </a:solidFill>
-                <a:latin typeface="Courier"/>
-              </a:rPr>
-              <a:t>normal_distribution =</a:t>
-            </a:r>
-            <a:r>
-              <a:rPr>
-                <a:solidFill>
-                  <a:srgbClr val="003B4F"/>
-                </a:solidFill>
-                <a:latin typeface="Courier"/>
-              </a:rPr>
-              <a:t> </a:t>
-            </a:r>
-            <a:r>
-              <a:rPr>
-                <a:solidFill>
-                  <a:srgbClr val="4758AB"/>
-                </a:solidFill>
-                <a:latin typeface="Courier"/>
-              </a:rPr>
-              <a:t>if_else</a:t>
-            </a:r>
-            <a:r>
-              <a:rPr>
-                <a:solidFill>
-                  <a:srgbClr val="003B4F"/>
-                </a:solidFill>
-                <a:latin typeface="Courier"/>
-              </a:rPr>
-              <a:t>(shapiro_p_value </a:t>
-            </a:r>
-            <a:r>
-              <a:rPr>
-                <a:solidFill>
-                  <a:srgbClr val="5E5E5E"/>
-                </a:solidFill>
-                <a:latin typeface="Courier"/>
-              </a:rPr>
-              <a:t>&gt;</a:t>
-            </a:r>
-            <a:r>
-              <a:rPr>
-                <a:solidFill>
-                  <a:srgbClr val="003B4F"/>
-                </a:solidFill>
-                <a:latin typeface="Courier"/>
-              </a:rPr>
-              <a:t> </a:t>
-            </a:r>
-            <a:r>
-              <a:rPr>
-                <a:solidFill>
-                  <a:srgbClr val="AD0000"/>
-                </a:solidFill>
-                <a:latin typeface="Courier"/>
-              </a:rPr>
-              <a:t>0.05</a:t>
-            </a:r>
-            <a:r>
-              <a:rPr>
-                <a:solidFill>
-                  <a:srgbClr val="003B4F"/>
-                </a:solidFill>
-                <a:latin typeface="Courier"/>
-              </a:rPr>
-              <a:t>, </a:t>
-            </a:r>
-            <a:r>
-              <a:rPr>
-                <a:solidFill>
-                  <a:srgbClr val="20794D"/>
-                </a:solidFill>
-                <a:latin typeface="Courier"/>
-              </a:rPr>
-              <a:t>"Normal"</a:t>
-            </a:r>
-            <a:r>
-              <a:rPr>
-                <a:solidFill>
-                  <a:srgbClr val="003B4F"/>
-                </a:solidFill>
-                <a:latin typeface="Courier"/>
-              </a:rPr>
-              <a:t>, </a:t>
-            </a:r>
-            <a:r>
-              <a:rPr>
-                <a:solidFill>
-                  <a:srgbClr val="20794D"/>
-                </a:solidFill>
-                <a:latin typeface="Courier"/>
-              </a:rPr>
-              <a:t>"Non-normal"</a:t>
-            </a:r>
-            <a:r>
-              <a:rPr>
-                <a:solidFill>
-                  <a:srgbClr val="003B4F"/>
-                </a:solidFill>
-                <a:latin typeface="Courier"/>
-              </a:rPr>
-              <a:t>)</a:t>
-            </a:r>
-            <a:br/>
-            <a:r>
-              <a:rPr>
-                <a:solidFill>
-                  <a:srgbClr val="003B4F"/>
-                </a:solidFill>
-                <a:latin typeface="Courier"/>
-              </a:rPr>
-              <a:t>  )</a:t>
+              <a:t># Use var.equal=TRUE for standard t-test or var.equal=FALSE for Welch's t-test</a:t>
             </a:r>
             <a:br/>
             <a:br/>
             <a:r>
               <a:rPr>
                 <a:solidFill>
+                  <a:srgbClr val="003B4F"/>
+                </a:solidFill>
+                <a:latin typeface="Courier"/>
+              </a:rPr>
+              <a:t>ps_wide_df &lt;- ps_df </a:t>
+            </a:r>
+            <a:r>
+              <a:rPr>
+                <a:solidFill>
                   <a:srgbClr val="5E5E5E"/>
                 </a:solidFill>
                 <a:latin typeface="Courier"/>
               </a:rPr>
-              <a:t># Print the results</a:t>
+              <a:t>%&gt;%</a:t>
             </a:r>
             <a:br/>
             <a:r>
               <a:rPr>
                 <a:solidFill>
+                  <a:srgbClr val="003B4F"/>
+                </a:solidFill>
+                <a:latin typeface="Courier"/>
+              </a:rPr>
+              <a:t>  </a:t>
+            </a:r>
+            <a:r>
+              <a:rPr>
+                <a:solidFill>
                   <a:srgbClr val="4758AB"/>
                 </a:solidFill>
                 <a:latin typeface="Courier"/>
               </a:rPr>
+              <a:t>pivot_wider</a:t>
+            </a:r>
+            <a:r>
+              <a:rPr>
+                <a:solidFill>
+                  <a:srgbClr val="003B4F"/>
+                </a:solidFill>
+                <a:latin typeface="Courier"/>
+              </a:rPr>
+              <a:t>(</a:t>
+            </a:r>
+            <a:br/>
+            <a:r>
+              <a:rPr>
+                <a:solidFill>
+                  <a:srgbClr val="003B4F"/>
+                </a:solidFill>
+                <a:latin typeface="Courier"/>
+              </a:rPr>
+              <a:t>    </a:t>
+            </a:r>
+            <a:r>
+              <a:rPr>
+                <a:solidFill>
+                  <a:srgbClr val="657422"/>
+                </a:solidFill>
+                <a:latin typeface="Courier"/>
+              </a:rPr>
+              <a:t>names_from =</a:t>
+            </a:r>
+            <a:r>
+              <a:rPr>
+                <a:solidFill>
+                  <a:srgbClr val="003B4F"/>
+                </a:solidFill>
+                <a:latin typeface="Courier"/>
+              </a:rPr>
+              <a:t> </a:t>
+            </a:r>
+            <a:r>
+              <a:rPr>
+                <a:solidFill>
+                  <a:srgbClr val="20794D"/>
+                </a:solidFill>
+                <a:latin typeface="Courier"/>
+              </a:rPr>
+              <a:t>"side"</a:t>
+            </a:r>
+            <a:r>
+              <a:rPr>
+                <a:solidFill>
+                  <a:srgbClr val="003B4F"/>
+                </a:solidFill>
+                <a:latin typeface="Courier"/>
+              </a:rPr>
+              <a:t>,</a:t>
+            </a:r>
+            <a:br/>
+            <a:r>
+              <a:rPr>
+                <a:solidFill>
+                  <a:srgbClr val="003B4F"/>
+                </a:solidFill>
+                <a:latin typeface="Courier"/>
+              </a:rPr>
+              <a:t>    </a:t>
+            </a:r>
+            <a:r>
+              <a:rPr>
+                <a:solidFill>
+                  <a:srgbClr val="657422"/>
+                </a:solidFill>
+                <a:latin typeface="Courier"/>
+              </a:rPr>
+              <a:t>values_from =</a:t>
+            </a:r>
+            <a:r>
+              <a:rPr>
+                <a:solidFill>
+                  <a:srgbClr val="003B4F"/>
+                </a:solidFill>
+                <a:latin typeface="Courier"/>
+              </a:rPr>
+              <a:t> length_mm</a:t>
+            </a:r>
+            <a:br/>
+            <a:r>
+              <a:rPr>
+                <a:solidFill>
+                  <a:srgbClr val="003B4F"/>
+                </a:solidFill>
+                <a:latin typeface="Courier"/>
+              </a:rPr>
+              <a:t>  )</a:t>
+            </a:r>
+            <a:br/>
+            <a:br/>
+            <a:br/>
+            <a:r>
+              <a:rPr>
+                <a:solidFill>
+                  <a:srgbClr val="5E5E5E"/>
+                </a:solidFill>
+                <a:latin typeface="Courier"/>
+              </a:rPr>
+              <a:t># Standard t-test (if variances are equal)</a:t>
+            </a:r>
+            <a:br/>
+            <a:r>
+              <a:rPr>
+                <a:solidFill>
+                  <a:srgbClr val="003B4F"/>
+                </a:solidFill>
+                <a:latin typeface="Courier"/>
+              </a:rPr>
+              <a:t>paired_t_test_result &lt;- </a:t>
+            </a:r>
+            <a:r>
+              <a:rPr>
+                <a:solidFill>
+                  <a:srgbClr val="4758AB"/>
+                </a:solidFill>
+                <a:latin typeface="Courier"/>
+              </a:rPr>
+              <a:t>t.test</a:t>
+            </a:r>
+            <a:r>
+              <a:rPr>
+                <a:solidFill>
+                  <a:srgbClr val="003B4F"/>
+                </a:solidFill>
+                <a:latin typeface="Courier"/>
+              </a:rPr>
+              <a:t>(ps_wide_df</a:t>
+            </a:r>
+            <a:r>
+              <a:rPr>
+                <a:solidFill>
+                  <a:srgbClr val="5E5E5E"/>
+                </a:solidFill>
+                <a:latin typeface="Courier"/>
+              </a:rPr>
+              <a:t>$</a:t>
+            </a:r>
+            <a:r>
+              <a:rPr>
+                <a:solidFill>
+                  <a:srgbClr val="003B4F"/>
+                </a:solidFill>
+                <a:latin typeface="Courier"/>
+              </a:rPr>
+              <a:t>sunny, ps_wide_df</a:t>
+            </a:r>
+            <a:r>
+              <a:rPr>
+                <a:solidFill>
+                  <a:srgbClr val="5E5E5E"/>
+                </a:solidFill>
+                <a:latin typeface="Courier"/>
+              </a:rPr>
+              <a:t>$</a:t>
+            </a:r>
+            <a:r>
+              <a:rPr>
+                <a:solidFill>
+                  <a:srgbClr val="003B4F"/>
+                </a:solidFill>
+                <a:latin typeface="Courier"/>
+              </a:rPr>
+              <a:t>shady, </a:t>
+            </a:r>
+            <a:r>
+              <a:rPr>
+                <a:solidFill>
+                  <a:srgbClr val="657422"/>
+                </a:solidFill>
+                <a:latin typeface="Courier"/>
+              </a:rPr>
+              <a:t>paired =</a:t>
+            </a:r>
+            <a:r>
+              <a:rPr>
+                <a:solidFill>
+                  <a:srgbClr val="003B4F"/>
+                </a:solidFill>
+                <a:latin typeface="Courier"/>
+              </a:rPr>
+              <a:t> </a:t>
+            </a:r>
+            <a:r>
+              <a:rPr>
+                <a:solidFill>
+                  <a:srgbClr val="8F5902"/>
+                </a:solidFill>
+                <a:latin typeface="Courier"/>
+              </a:rPr>
+              <a:t>TRUE</a:t>
+            </a:r>
+            <a:r>
+              <a:rPr>
+                <a:solidFill>
+                  <a:srgbClr val="003B4F"/>
+                </a:solidFill>
+                <a:latin typeface="Courier"/>
+              </a:rPr>
+              <a:t>)</a:t>
+            </a:r>
+            <a:br/>
+            <a:r>
+              <a:rPr>
+                <a:solidFill>
+                  <a:srgbClr val="4758AB"/>
+                </a:solidFill>
+                <a:latin typeface="Courier"/>
+              </a:rPr>
               <a:t>print</a:t>
             </a:r>
             <a:r>
@@ -9757,7 +10441,25 @@
                 </a:solidFill>
                 <a:latin typeface="Courier"/>
               </a:rPr>
-              <a:t>(normality_results)</a:t>
+              <a:t>(</a:t>
+            </a:r>
+            <a:r>
+              <a:rPr>
+                <a:solidFill>
+                  <a:srgbClr val="20794D"/>
+                </a:solidFill>
+                <a:latin typeface="Courier"/>
+              </a:rPr>
+              <a:t>"Standard two-sample t-test:"</a:t>
+            </a:r>
+            <a:r>
+              <a:rPr>
+                <a:solidFill>
+                  <a:srgbClr val="003B4F"/>
+                </a:solidFill>
+                <a:latin typeface="Courier"/>
+              </a:rPr>
+              <a:t>)</a:t>
             </a:r>
           </a:p>
           <a:p>
@@ -9765,14 +10467,77 @@
               <a:buNone/>
             </a:pPr>
             <a:r>
-              <a:rPr sz="2000">
-                <a:latin typeface="Courier"/>
-              </a:rPr>
-              <a:t># A tibble: 2 × 4
-  side  shapiro_stat shapiro_p_value normal_distribution
-  &lt;chr&gt;        &lt;dbl&gt;           &lt;dbl&gt; &lt;chr&gt;              
-1 shady        0.966           0.868 Normal             
-2 sunny        0.900           0.289 Normal             </a:t>
+              <a:rPr>
+                <a:latin typeface="Courier"/>
+              </a:rPr>
+              <a:t>[1] "Standard two-sample t-test:"</a:t>
+            </a:r>
+          </a:p>
+          <a:p>
+            <a:pPr lvl="0" indent="0">
+              <a:buNone/>
+            </a:pPr>
+            <a:r>
+              <a:rPr>
+                <a:solidFill>
+                  <a:srgbClr val="4758AB"/>
+                </a:solidFill>
+                <a:latin typeface="Courier"/>
+              </a:rPr>
+              <a:t>print</a:t>
+            </a:r>
+            <a:r>
+              <a:rPr>
+                <a:solidFill>
+                  <a:srgbClr val="003B4F"/>
+                </a:solidFill>
+                <a:latin typeface="Courier"/>
+              </a:rPr>
+              <a:t>(paired_t_test_result)</a:t>
+            </a:r>
+          </a:p>
+          <a:p>
+            <a:pPr lvl="0" indent="0">
+              <a:buNone/>
+            </a:pPr>
+            <a:r>
+              <a:rPr>
+                <a:latin typeface="Courier"/>
+              </a:rPr>
+              <a:t>
+    Paired t-test
+data:  ps_wide_df$sunny and ps_wide_df$shady
+t = -2.7818, df = 7, p-value = 0.02723
+alternative hypothesis: true mean difference is not equal to 0
+95 percent confidence interval:
+ -2.6868652 -0.2178092
+sample estimates:
+mean difference 
+      -1.452337 </a:t>
+            </a:r>
+          </a:p>
+          <a:p>
+            <a:pPr lvl="0" indent="0">
+              <a:buNone/>
+            </a:pPr>
+            <a:r>
+              <a:rPr>
+                <a:solidFill>
+                  <a:srgbClr val="5E5E5E"/>
+                </a:solidFill>
+                <a:latin typeface="Courier"/>
+              </a:rPr>
+              <a:t># Welch's t-test (if variances are unequal)</a:t>
+            </a:r>
+            <a:br/>
+            <a:r>
+              <a:rPr>
+                <a:solidFill>
+                  <a:srgbClr val="5E5E5E"/>
+                </a:solidFill>
+                <a:latin typeface="Courier"/>
+              </a:rPr>
+              <a:t># YOUR CODE HERE</a:t>
             </a:r>
           </a:p>
         </p:txBody>
@@ -9812,7 +10577,7 @@
         <p:spPr>
           <a:xfrm>
             <a:off x="0" y="0"/>
-            <a:ext cx="9144000" cy="582780"/>
+            <a:ext cx="9144000" cy="871538"/>
           </a:xfrm>
         </p:spPr>
         <p:txBody>
@@ -9824,19 +10589,19 @@
             </a:pPr>
             <a:r>
               <a:rPr/>
-              <a:t>Practice Exercise 13: Test Equal Variances</a:t>
-            </a:r>
-          </a:p>
-        </p:txBody>
-      </p:sp>
-      <p:sp>
-        <p:nvSpPr>
-          <p:cNvPr id="3" name="Content Placeholder 2"/>
-          <p:cNvSpPr>
-            <a:spLocks noGrp="1"/>
-          </p:cNvSpPr>
-          <p:nvPr>
-            <p:ph idx="1"/>
+              <a:t>Lecture 5: What is going on??</a:t>
+            </a:r>
+          </a:p>
+        </p:txBody>
+      </p:sp>
+      <p:sp>
+        <p:nvSpPr>
+          <p:cNvPr id="4" name="Text Placeholder 3"/>
+          <p:cNvSpPr>
+            <a:spLocks noGrp="1"/>
+          </p:cNvSpPr>
+          <p:nvPr>
+            <p:ph idx="2" sz="half" type="body"/>
           </p:nvPr>
         </p:nvSpPr>
         <p:spPr/>
@@ -9844,21 +10609,12 @@
           <a:bodyPr/>
           <a:lstStyle/>
           <a:p>
-            <a:pPr lvl="0" indent="0" marL="1270000">
-              <a:buNone/>
-            </a:pPr>
-            <a:r>
-              <a:rPr sz="2000" b="1"/>
-              <a:t>Practice Exercise 13: Test equal variances</a:t>
-            </a:r>
-          </a:p>
-          <a:p>
-            <a:pPr lvl="0" indent="0" marL="1270000">
-              <a:buNone/>
-            </a:pPr>
-            <a:r>
-              <a:rPr sz="2000"/>
-              <a:t>Levenes test can be done on the original dataframe</a:t>
+            <a:pPr lvl="0" indent="0" marL="0">
+              <a:buNone/>
+            </a:pPr>
+            <a:r>
+              <a:rPr/>
+              <a:t>Note that thee is a lot of variation within trees but the trend is the same</a:t>
             </a:r>
           </a:p>
           <a:p>
@@ -9868,174 +10624,45 @@
             <a:r>
               <a:rPr>
                 <a:solidFill>
-                  <a:srgbClr val="5E5E5E"/>
-                </a:solidFill>
-                <a:latin typeface="Courier"/>
-              </a:rPr>
-              <a:t># Method 1: Using car package's leveneTest</a:t>
-            </a:r>
-            <a:br/>
-            <a:r>
-              <a:rPr>
-                <a:solidFill>
-                  <a:srgbClr val="5E5E5E"/>
-                </a:solidFill>
-                <a:latin typeface="Courier"/>
-              </a:rPr>
-              <a:t># This is often preferred as it's more robust to departures from normality</a:t>
-            </a:r>
-            <a:br/>
-            <a:r>
-              <a:rPr>
-                <a:solidFill>
-                  <a:srgbClr val="003B4F"/>
-                </a:solidFill>
-                <a:latin typeface="Courier"/>
-              </a:rPr>
-              <a:t>levene_result &lt;- </a:t>
-            </a:r>
-            <a:r>
-              <a:rPr>
-                <a:solidFill>
-                  <a:srgbClr val="4758AB"/>
-                </a:solidFill>
-                <a:latin typeface="Courier"/>
-              </a:rPr>
-              <a:t>leveneTest</a:t>
-            </a:r>
-            <a:r>
-              <a:rPr>
-                <a:solidFill>
-                  <a:srgbClr val="003B4F"/>
-                </a:solidFill>
-                <a:latin typeface="Courier"/>
-              </a:rPr>
-              <a:t>(length_mm </a:t>
-            </a:r>
-            <a:r>
-              <a:rPr>
-                <a:solidFill>
-                  <a:srgbClr val="5E5E5E"/>
-                </a:solidFill>
-                <a:latin typeface="Courier"/>
-              </a:rPr>
-              <a:t>~</a:t>
-            </a:r>
-            <a:r>
-              <a:rPr>
-                <a:solidFill>
-                  <a:srgbClr val="003B4F"/>
-                </a:solidFill>
-                <a:latin typeface="Courier"/>
-              </a:rPr>
-              <a:t> side, </a:t>
-            </a:r>
-            <a:r>
-              <a:rPr>
-                <a:solidFill>
-                  <a:srgbClr val="657422"/>
-                </a:solidFill>
-                <a:latin typeface="Courier"/>
-              </a:rPr>
-              <a:t>data =</a:t>
-            </a:r>
-            <a:r>
-              <a:rPr>
-                <a:solidFill>
-                  <a:srgbClr val="003B4F"/>
-                </a:solidFill>
-                <a:latin typeface="Courier"/>
-              </a:rPr>
-              <a:t> ps_df)</a:t>
-            </a:r>
-            <a:br/>
-            <a:r>
-              <a:rPr>
-                <a:solidFill>
-                  <a:srgbClr val="4758AB"/>
-                </a:solidFill>
-                <a:latin typeface="Courier"/>
-              </a:rPr>
-              <a:t>print</a:t>
-            </a:r>
-            <a:r>
-              <a:rPr>
-                <a:solidFill>
-                  <a:srgbClr val="003B4F"/>
-                </a:solidFill>
-                <a:latin typeface="Courier"/>
-              </a:rPr>
-              <a:t>(</a:t>
-            </a:r>
-            <a:r>
-              <a:rPr>
-                <a:solidFill>
-                  <a:srgbClr val="20794D"/>
-                </a:solidFill>
-                <a:latin typeface="Courier"/>
-              </a:rPr>
-              <a:t>"Levene's Test for Homogeneity of Variance:"</a:t>
-            </a:r>
-            <a:r>
-              <a:rPr>
-                <a:solidFill>
-                  <a:srgbClr val="003B4F"/>
-                </a:solidFill>
-                <a:latin typeface="Courier"/>
-              </a:rPr>
-              <a:t>)</a:t>
-            </a:r>
-          </a:p>
-          <a:p>
-            <a:pPr lvl="0" indent="0">
-              <a:buNone/>
-            </a:pPr>
-            <a:r>
-              <a:rPr sz="2000">
-                <a:latin typeface="Courier"/>
-              </a:rPr>
-              <a:t>[1] "Levene's Test for Homogeneity of Variance:"</a:t>
-            </a:r>
-          </a:p>
-          <a:p>
-            <a:pPr lvl="0" indent="0">
-              <a:buNone/>
-            </a:pPr>
-            <a:r>
-              <a:rPr>
-                <a:solidFill>
-                  <a:srgbClr val="4758AB"/>
-                </a:solidFill>
-                <a:latin typeface="Courier"/>
-              </a:rPr>
-              <a:t>print</a:t>
-            </a:r>
-            <a:r>
-              <a:rPr>
-                <a:solidFill>
-                  <a:srgbClr val="003B4F"/>
-                </a:solidFill>
-                <a:latin typeface="Courier"/>
-              </a:rPr>
-              <a:t>(levene_result)</a:t>
-            </a:r>
-          </a:p>
-          <a:p>
-            <a:pPr lvl="0" indent="0">
-              <a:buNone/>
-            </a:pPr>
-            <a:r>
-              <a:rPr sz="2000">
-                <a:latin typeface="Courier"/>
-              </a:rPr>
-              <a:t>Levene's Test for Homogeneity of Variance (center = median)
-      Df F value Pr(&gt;F)
-group  1  0.2062 0.6567
-      14               </a:t>
-            </a:r>
-          </a:p>
-        </p:txBody>
-      </p:sp>
+                  <a:srgbClr val="003B4F"/>
+                </a:solidFill>
+                <a:latin typeface="Courier"/>
+              </a:rPr>
+              <a:t>ps_plot</a:t>
+            </a:r>
+          </a:p>
+        </p:txBody>
+      </p:sp>
+      <p:pic>
+        <p:nvPicPr>
+          <p:cNvPr descr="05_01_lecture_powerpoint_files/figure-pptx/unnamed-chunk-18-1.png" id="0" name="Picture 1"/>
+          <p:cNvPicPr>
+            <a:picLocks noGrp="1" noChangeAspect="1"/>
+          </p:cNvPicPr>
+          <p:nvPr/>
+        </p:nvPicPr>
+        <p:blipFill>
+          <a:blip r:embed="rId2"/>
+          <a:stretch>
+            <a:fillRect/>
+          </a:stretch>
+        </p:blipFill>
+        <p:spPr bwMode="auto">
+          <a:xfrm>
+            <a:off x="3657600" y="1244600"/>
+            <a:ext cx="5232400" cy="3225800"/>
+          </a:xfrm>
+          <a:prstGeom prst="rect">
+            <a:avLst/>
+          </a:prstGeom>
+          <a:noFill/>
+          <a:ln w="9525">
+            <a:noFill/>
+            <a:headEnd/>
+            <a:tailEnd/>
+          </a:ln>
+        </p:spPr>
+      </p:pic>
     </p:spTree>
   </p:cSld>
 </p:sld>
@@ -10071,11 +10698,8 @@
         <p:spPr>
           <a:xfrm>
             <a:off x="0" y="0"/>
-            <a:ext cx="9144000" cy="602780"/>
+            <a:ext cx="9144000" cy="582780"/>
           </a:xfrm>
-          <a:solidFill>
-            <a:srgbClr val="70121D"/>
-          </a:solidFill>
         </p:spPr>
         <p:txBody>
           <a:bodyPr/>
@@ -10090,7 +10714,7 @@
             </a:r>
             <a:r>
               <a:rPr/>
-              <a:t> Conducting the Two-Sample T-Test</a:t>
+              <a:t> Assumptions of Parametric Tests</a:t>
             </a:r>
           </a:p>
         </p:txBody>
@@ -10102,7 +10726,7 @@
             <a:spLocks noGrp="1"/>
           </p:cNvSpPr>
           <p:nvPr>
-            <p:ph idx="1" sz="half"/>
+            <p:ph idx="1"/>
           </p:nvPr>
         </p:nvSpPr>
         <p:spPr/>
@@ -10114,8 +10738,44 @@
               <a:buNone/>
             </a:pPr>
             <a:r>
-              <a:rPr/>
-              <a:t>Now we can compare the mean needle lengths between shady and sunny sides.</a:t>
+              <a:rPr b="1"/>
+              <a:t>Common assumptions for t-tests:</a:t>
+            </a:r>
+          </a:p>
+          <a:p>
+            <a:pPr lvl="0" indent="-342900" marL="342900">
+              <a:buAutoNum type="arabicPeriod"/>
+            </a:pPr>
+            <a:r>
+              <a:rPr/>
+              <a:t>Normality: Data comes from normally distributed populations</a:t>
+            </a:r>
+          </a:p>
+          <a:p>
+            <a:pPr lvl="0" indent="-342900" marL="342900">
+              <a:buAutoNum type="arabicPeriod"/>
+            </a:pPr>
+            <a:r>
+              <a:rPr/>
+              <a:t>Equal variances (for two-sample tests)</a:t>
+            </a:r>
+          </a:p>
+          <a:p>
+            <a:pPr lvl="0" indent="-342900" marL="342900">
+              <a:buAutoNum type="arabicPeriod"/>
+            </a:pPr>
+            <a:r>
+              <a:rPr/>
+              <a:t>Independence: Observations are independent</a:t>
+            </a:r>
+          </a:p>
+          <a:p>
+            <a:pPr lvl="0" indent="-342900" marL="342900">
+              <a:buAutoNum type="arabicPeriod"/>
+            </a:pPr>
+            <a:r>
+              <a:rPr/>
+              <a:t>No outliers: Extreme values can influence results</a:t>
             </a:r>
           </a:p>
           <a:p>
@@ -10124,7 +10784,7 @@
             </a:pPr>
             <a:r>
               <a:rPr/>
-              <a:t>Ho: μ₁ = μ₂ (The needle lengths do not differ)</a:t>
+              <a:t>What can we do if our data violates these assumptions?</a:t>
             </a:r>
           </a:p>
           <a:p>
@@ -10133,69 +10793,28 @@
             </a:pPr>
             <a:r>
               <a:rPr/>
-              <a:t>Ha: μ₁ ≠ μ₂ (The mean needle lengths differ - direction is not specified)</a:t>
-            </a:r>
-          </a:p>
-          <a:p>
-            <a:pPr lvl="0" indent="0" marL="0">
-              <a:buNone/>
-            </a:pPr>
-            <a:r>
-              <a:rPr/>
-              <a:t>Deciding between:</a:t>
+              <a:t>Alternatives when assumptions are violated:</a:t>
             </a:r>
           </a:p>
           <a:p>
             <a:pPr lvl="0"/>
             <a:r>
               <a:rPr/>
-              <a:t>Standard t-test (equal variances)</a:t>
+              <a:t>Data transformation (log, square root, etc.)</a:t>
             </a:r>
           </a:p>
           <a:p>
             <a:pPr lvl="0"/>
             <a:r>
               <a:rPr/>
-              <a:t>Welch’s t-test (unequal variances)</a:t>
-            </a:r>
-          </a:p>
-          <a:p>
-            <a:pPr lvl="0" indent="0" marL="0">
-              <a:buNone/>
-            </a:pPr>
-            <a:r>
-              <a:rPr b="1"/>
-              <a:t>Note the Levenes Test should be NOT SIGNIFICANT - What is the null hypothesis</a:t>
-            </a:r>
-          </a:p>
-        </p:txBody>
-      </p:sp>
-      <p:sp>
-        <p:nvSpPr>
-          <p:cNvPr id="4" name="Content Placeholder 3"/>
-          <p:cNvSpPr>
-            <a:spLocks noGrp="1"/>
-          </p:cNvSpPr>
-          <p:nvPr>
-            <p:ph idx="2" sz="half"/>
-          </p:nvPr>
-        </p:nvSpPr>
-        <p:spPr/>
-        <p:txBody>
-          <a:bodyPr/>
-          <a:lstStyle/>
-          <a:p>
-            <a:pPr lvl="0" indent="0">
-              <a:buNone/>
-            </a:pPr>
-            <a:r>
-              <a:rPr>
-                <a:latin typeface="Courier"/>
-              </a:rPr>
-              <a:t>Levene's Test for Homogeneity of Variance (center = median)
-      Df F value Pr(&gt;F)
-group  1  0.2062 0.6567
-      14               </a:t>
+              <a:t>Non-parametric tests</a:t>
+            </a:r>
+          </a:p>
+          <a:p>
+            <a:pPr lvl="0"/>
+            <a:r>
+              <a:rPr/>
+              <a:t>Robust statistical methods</a:t>
             </a:r>
           </a:p>
         </p:txBody>
@@ -10251,7 +10870,7 @@
             </a:r>
             <a:r>
               <a:rPr/>
-              <a:t> Running the Two-Sample T-Test</a:t>
+              <a:t> Summary and Conclusions</a:t>
             </a:r>
           </a:p>
         </p:txBody>
@@ -10276,7 +10895,52 @@
             </a:pPr>
             <a:r>
               <a:rPr/>
-              <a:t>Now we can do a two sample TTEST</a:t>
+              <a:t>In this activity, we’ve:</a:t>
+            </a:r>
+          </a:p>
+          <a:p>
+            <a:pPr lvl="0" indent="-342900" marL="342900">
+              <a:buAutoNum type="arabicPeriod"/>
+            </a:pPr>
+            <a:r>
+              <a:rPr/>
+              <a:t>Formulated hypotheses about pine needle length</a:t>
+            </a:r>
+          </a:p>
+          <a:p>
+            <a:pPr lvl="0" indent="-342900" marL="342900">
+              <a:buAutoNum type="arabicPeriod"/>
+            </a:pPr>
+            <a:r>
+              <a:rPr/>
+              <a:t>Tested assumptions for parametric tests</a:t>
+            </a:r>
+          </a:p>
+          <a:p>
+            <a:pPr lvl="0" indent="-342900" marL="342900">
+              <a:buAutoNum type="arabicPeriod"/>
+            </a:pPr>
+            <a:r>
+              <a:rPr/>
+              <a:t>Conducted one-sample and two-sample t-tests</a:t>
+            </a:r>
+          </a:p>
+          <a:p>
+            <a:pPr lvl="0" indent="-342900" marL="342900">
+              <a:buAutoNum type="arabicPeriod"/>
+            </a:pPr>
+            <a:r>
+              <a:rPr/>
+              <a:t>Visualized data using appropriate methods</a:t>
+            </a:r>
+          </a:p>
+          <a:p>
+            <a:pPr lvl="0" indent="-342900" marL="342900">
+              <a:buAutoNum type="arabicPeriod"/>
+            </a:pPr>
+            <a:r>
+              <a:rPr/>
+              <a:t>Learned how to interpret and report t-test results</a:t>
             </a:r>
           </a:p>
           <a:p>
@@ -10284,911 +10948,36 @@
               <a:buNone/>
             </a:pPr>
             <a:r>
-              <a:rPr/>
-              <a:t>Calculate t-statistic manually (optional)</a:t>
-            </a:r>
-          </a:p>
-          <a:p>
-            <a:pPr lvl="0" indent="0" marL="0">
-              <a:buNone/>
-            </a:pPr>
-            <a:r>
-              <a:rPr/>
-              <a:t>YOUR CODE HERE:</a:t>
-            </a:r>
-          </a:p>
-          <a:p>
-            <a:pPr lvl="0" indent="0" marL="0">
-              <a:buNone/>
-            </a:pPr>
-            <a:r>
-              <a:rPr/>
-              <a:t>t = (mean1 - mean2) / sqrt((s1^2/n1) + (s2^2/n2))</a:t>
-            </a:r>
-          </a:p>
-          <a:p>
-            <a:pPr lvl="0" indent="0" marL="1270000">
-              <a:buNone/>
-            </a:pPr>
-            <a:r>
-              <a:rPr sz="2000" b="1"/>
-              <a:t>Tip</a:t>
-            </a:r>
-          </a:p>
-          <a:p>
-            <a:pPr lvl="0" indent="0">
-              <a:buNone/>
-            </a:pPr>
-            <a:r>
-              <a:rPr>
-                <a:solidFill>
-                  <a:srgbClr val="5E5E5E"/>
-                </a:solidFill>
-                <a:latin typeface="Courier"/>
-              </a:rPr>
-              <a:t># YOUR </a:t>
-            </a:r>
-            <a:r>
-              <a:rPr>
-                <a:solidFill>
-                  <a:srgbClr val="AD0000"/>
-                </a:solidFill>
-                <a:latin typeface="Courier"/>
-              </a:rPr>
-              <a:t>TASK</a:t>
-            </a:r>
-            <a:r>
-              <a:rPr>
-                <a:solidFill>
-                  <a:srgbClr val="5E5E5E"/>
-                </a:solidFill>
-                <a:latin typeface="Courier"/>
-              </a:rPr>
-              <a:t>: Conduct a two-sample t-test</a:t>
-            </a:r>
-            <a:br/>
-            <a:r>
-              <a:rPr>
-                <a:solidFill>
-                  <a:srgbClr val="5E5E5E"/>
-                </a:solidFill>
-                <a:latin typeface="Courier"/>
-              </a:rPr>
-              <a:t># Use var.equal=TRUE for standard t-test or var.equal=FALSE for Welch's t-test</a:t>
-            </a:r>
-            <a:br/>
-            <a:br/>
-            <a:r>
-              <a:rPr>
-                <a:solidFill>
-                  <a:srgbClr val="5E5E5E"/>
-                </a:solidFill>
-                <a:latin typeface="Courier"/>
-              </a:rPr>
-              <a:t># Standard t-test (if variances are equal)</a:t>
-            </a:r>
-            <a:br/>
-            <a:r>
-              <a:rPr>
-                <a:solidFill>
-                  <a:srgbClr val="003B4F"/>
-                </a:solidFill>
-                <a:latin typeface="Courier"/>
-              </a:rPr>
-              <a:t>t_test_result &lt;- </a:t>
-            </a:r>
-            <a:r>
-              <a:rPr>
-                <a:solidFill>
-                  <a:srgbClr val="4758AB"/>
-                </a:solidFill>
-                <a:latin typeface="Courier"/>
-              </a:rPr>
-              <a:t>t.test</a:t>
-            </a:r>
-            <a:r>
-              <a:rPr>
-                <a:solidFill>
-                  <a:srgbClr val="003B4F"/>
-                </a:solidFill>
-                <a:latin typeface="Courier"/>
-              </a:rPr>
-              <a:t>(length_mm </a:t>
-            </a:r>
-            <a:r>
-              <a:rPr>
-                <a:solidFill>
-                  <a:srgbClr val="5E5E5E"/>
-                </a:solidFill>
-                <a:latin typeface="Courier"/>
-              </a:rPr>
-              <a:t>~</a:t>
-            </a:r>
-            <a:r>
-              <a:rPr>
-                <a:solidFill>
-                  <a:srgbClr val="003B4F"/>
-                </a:solidFill>
-                <a:latin typeface="Courier"/>
-              </a:rPr>
-              <a:t> side, </a:t>
-            </a:r>
-            <a:r>
-              <a:rPr>
-                <a:solidFill>
-                  <a:srgbClr val="657422"/>
-                </a:solidFill>
-                <a:latin typeface="Courier"/>
-              </a:rPr>
-              <a:t>data =</a:t>
-            </a:r>
-            <a:r>
-              <a:rPr>
-                <a:solidFill>
-                  <a:srgbClr val="003B4F"/>
-                </a:solidFill>
-                <a:latin typeface="Courier"/>
-              </a:rPr>
-              <a:t> ps_df, </a:t>
-            </a:r>
-            <a:r>
-              <a:rPr>
-                <a:solidFill>
-                  <a:srgbClr val="657422"/>
-                </a:solidFill>
-                <a:latin typeface="Courier"/>
-              </a:rPr>
-              <a:t>var.equal =</a:t>
-            </a:r>
-            <a:r>
-              <a:rPr>
-                <a:solidFill>
-                  <a:srgbClr val="003B4F"/>
-                </a:solidFill>
-                <a:latin typeface="Courier"/>
-              </a:rPr>
-              <a:t> </a:t>
-            </a:r>
-            <a:r>
-              <a:rPr>
-                <a:solidFill>
-                  <a:srgbClr val="8F5902"/>
-                </a:solidFill>
-                <a:latin typeface="Courier"/>
-              </a:rPr>
-              <a:t>TRUE</a:t>
-            </a:r>
-            <a:r>
-              <a:rPr>
-                <a:solidFill>
-                  <a:srgbClr val="003B4F"/>
-                </a:solidFill>
-                <a:latin typeface="Courier"/>
-              </a:rPr>
-              <a:t>)</a:t>
-            </a:r>
-            <a:br/>
-            <a:r>
-              <a:rPr>
-                <a:solidFill>
-                  <a:srgbClr val="4758AB"/>
-                </a:solidFill>
-                <a:latin typeface="Courier"/>
-              </a:rPr>
-              <a:t>print</a:t>
-            </a:r>
-            <a:r>
-              <a:rPr>
-                <a:solidFill>
-                  <a:srgbClr val="003B4F"/>
-                </a:solidFill>
-                <a:latin typeface="Courier"/>
-              </a:rPr>
-              <a:t>(</a:t>
-            </a:r>
-            <a:r>
-              <a:rPr>
-                <a:solidFill>
-                  <a:srgbClr val="20794D"/>
-                </a:solidFill>
-                <a:latin typeface="Courier"/>
-              </a:rPr>
-              <a:t>"Standard two-sample t-test:"</a:t>
-            </a:r>
-            <a:r>
-              <a:rPr>
-                <a:solidFill>
-                  <a:srgbClr val="003B4F"/>
-                </a:solidFill>
-                <a:latin typeface="Courier"/>
-              </a:rPr>
-              <a:t>)</a:t>
-            </a:r>
-          </a:p>
-          <a:p>
-            <a:pPr lvl="0" indent="0">
-              <a:buNone/>
-            </a:pPr>
-            <a:r>
-              <a:rPr sz="2000">
-                <a:latin typeface="Courier"/>
-              </a:rPr>
-              <a:t>[1] "Standard two-sample t-test:"</a:t>
-            </a:r>
-          </a:p>
-          <a:p>
-            <a:pPr lvl="0" indent="0">
-              <a:buNone/>
-            </a:pPr>
-            <a:r>
-              <a:rPr>
-                <a:solidFill>
-                  <a:srgbClr val="4758AB"/>
-                </a:solidFill>
-                <a:latin typeface="Courier"/>
-              </a:rPr>
-              <a:t>print</a:t>
-            </a:r>
-            <a:r>
-              <a:rPr>
-                <a:solidFill>
-                  <a:srgbClr val="003B4F"/>
-                </a:solidFill>
-                <a:latin typeface="Courier"/>
-              </a:rPr>
-              <a:t>(t_test_result)</a:t>
-            </a:r>
-          </a:p>
-          <a:p>
-            <a:pPr lvl="0" indent="0">
-              <a:buNone/>
-            </a:pPr>
-            <a:r>
-              <a:rPr sz="2000">
-                <a:latin typeface="Courier"/>
-              </a:rPr>
-              <a:t>
-    Two Sample t-test
-data:  length_mm by side
-t = 1.1279, df = 14, p-value = 0.2783
-alternative hypothesis: true difference in means between group shady and group sunny is not equal to 0
-95 percent confidence interval:
- -1.309330  4.214005
-sample estimates:
-mean in group shady mean in group sunny 
-           17.60561            16.15328 </a:t>
-            </a:r>
-          </a:p>
-          <a:p>
-            <a:pPr lvl="0" indent="0">
-              <a:buNone/>
-            </a:pPr>
-            <a:r>
-              <a:rPr>
-                <a:solidFill>
-                  <a:srgbClr val="5E5E5E"/>
-                </a:solidFill>
-                <a:latin typeface="Courier"/>
-              </a:rPr>
-              <a:t># Welch's t-test (if variances are unequal)</a:t>
-            </a:r>
-            <a:br/>
-            <a:r>
-              <a:rPr>
-                <a:solidFill>
-                  <a:srgbClr val="5E5E5E"/>
-                </a:solidFill>
-                <a:latin typeface="Courier"/>
-              </a:rPr>
-              <a:t># YOUR CODE HERE</a:t>
-            </a:r>
-          </a:p>
-        </p:txBody>
-      </p:sp>
-    </p:spTree>
-  </p:cSld>
-</p:sld>
-</file>
-
-<file path=ppt/slides/slide38.xml><?xml version="1.0" encoding="utf-8"?>
-<p:sld xmlns:a="http://schemas.openxmlformats.org/drawingml/2006/main" xmlns:r="http://schemas.openxmlformats.org/officeDocument/2006/relationships" xmlns:p="http://schemas.openxmlformats.org/presentationml/2006/main">
-  <p:cSld>
-    <p:spTree>
-      <p:nvGrpSpPr>
-        <p:cNvPr id="1" name=""/>
-        <p:cNvGrpSpPr/>
-        <p:nvPr/>
-      </p:nvGrpSpPr>
-      <p:grpSpPr>
-        <a:xfrm>
-          <a:off x="0" y="0"/>
-          <a:ext cx="0" cy="0"/>
-          <a:chOff x="0" y="0"/>
-          <a:chExt cx="0" cy="0"/>
-        </a:xfrm>
-      </p:grpSpPr>
-      <p:sp>
-        <p:nvSpPr>
-          <p:cNvPr id="2" name="Title 1"/>
-          <p:cNvSpPr>
-            <a:spLocks noGrp="1"/>
-          </p:cNvSpPr>
-          <p:nvPr>
-            <p:ph type="title"/>
-          </p:nvPr>
-        </p:nvSpPr>
-        <p:spPr>
-          <a:xfrm>
-            <a:off x="0" y="0"/>
-            <a:ext cx="9144000" cy="582780"/>
-          </a:xfrm>
-        </p:spPr>
-        <p:txBody>
-          <a:bodyPr/>
-          <a:lstStyle/>
-          <a:p>
-            <a:pPr lvl="0" indent="0" marL="0">
-              <a:buNone/>
-            </a:pPr>
-            <a:r>
               <a:rPr b="1"/>
-              <a:t>Lecture 5:</a:t>
-            </a:r>
-            <a:r>
-              <a:rPr/>
-              <a:t> Running the Two-Sample T-Test</a:t>
-            </a:r>
-          </a:p>
-        </p:txBody>
-      </p:sp>
-      <p:sp>
-        <p:nvSpPr>
-          <p:cNvPr id="3" name="Content Placeholder 2"/>
-          <p:cNvSpPr>
-            <a:spLocks noGrp="1"/>
-          </p:cNvSpPr>
-          <p:nvPr>
-            <p:ph idx="1"/>
-          </p:nvPr>
-        </p:nvSpPr>
-        <p:spPr/>
-        <p:txBody>
-          <a:bodyPr/>
-          <a:lstStyle/>
-          <a:p>
-            <a:pPr lvl="0" indent="0" marL="0">
-              <a:buNone/>
-            </a:pPr>
-            <a:r>
-              <a:rPr/>
-              <a:t>Now we can do a two sample TTEST</a:t>
-            </a:r>
-          </a:p>
-          <a:p>
-            <a:pPr lvl="0" indent="0" marL="0">
-              <a:buNone/>
-            </a:pPr>
-            <a:r>
-              <a:rPr/>
-              <a:t>Calculate t-statistic manually (optional)</a:t>
-            </a:r>
-          </a:p>
-          <a:p>
-            <a:pPr lvl="0" indent="0" marL="0">
-              <a:buNone/>
-            </a:pPr>
-            <a:r>
-              <a:rPr/>
-              <a:t>YOUR CODE HERE:</a:t>
-            </a:r>
-          </a:p>
-          <a:p>
-            <a:pPr lvl="0" indent="0" marL="0">
-              <a:buNone/>
-            </a:pPr>
-            <a:r>
-              <a:rPr/>
-              <a:t>t = (mean1 - mean2) / sqrt((s1^2/n1) + (s2^2/n2))</a:t>
-            </a:r>
-          </a:p>
-          <a:p>
-            <a:pPr lvl="0" indent="0" marL="1270000">
-              <a:buNone/>
-            </a:pPr>
-            <a:r>
-              <a:rPr sz="2000" b="1"/>
-              <a:t>Tip</a:t>
-            </a:r>
-          </a:p>
-          <a:p>
-            <a:pPr lvl="0" indent="0">
-              <a:buNone/>
-            </a:pPr>
-            <a:r>
-              <a:rPr>
-                <a:solidFill>
-                  <a:srgbClr val="5E5E5E"/>
-                </a:solidFill>
-                <a:latin typeface="Courier"/>
-              </a:rPr>
-              <a:t># YOUR </a:t>
-            </a:r>
-            <a:r>
-              <a:rPr>
-                <a:solidFill>
-                  <a:srgbClr val="AD0000"/>
-                </a:solidFill>
-                <a:latin typeface="Courier"/>
-              </a:rPr>
-              <a:t>TASK</a:t>
-            </a:r>
-            <a:r>
-              <a:rPr>
-                <a:solidFill>
-                  <a:srgbClr val="5E5E5E"/>
-                </a:solidFill>
-                <a:latin typeface="Courier"/>
-              </a:rPr>
-              <a:t>: Conduct a two-sample t-test</a:t>
-            </a:r>
-            <a:br/>
-            <a:r>
-              <a:rPr>
-                <a:solidFill>
-                  <a:srgbClr val="5E5E5E"/>
-                </a:solidFill>
-                <a:latin typeface="Courier"/>
-              </a:rPr>
-              <a:t># Use var.equal=TRUE for standard t-test or var.equal=FALSE for Welch's t-test</a:t>
-            </a:r>
-            <a:br/>
-            <a:br/>
-            <a:r>
-              <a:rPr>
-                <a:solidFill>
-                  <a:srgbClr val="5E5E5E"/>
-                </a:solidFill>
-                <a:latin typeface="Courier"/>
-              </a:rPr>
-              <a:t># Standard t-test (if variances are equal)</a:t>
-            </a:r>
-            <a:br/>
-            <a:r>
-              <a:rPr>
-                <a:solidFill>
-                  <a:srgbClr val="003B4F"/>
-                </a:solidFill>
-                <a:latin typeface="Courier"/>
-              </a:rPr>
-              <a:t>t_test_result &lt;- </a:t>
-            </a:r>
-            <a:r>
-              <a:rPr>
-                <a:solidFill>
-                  <a:srgbClr val="4758AB"/>
-                </a:solidFill>
-                <a:latin typeface="Courier"/>
-              </a:rPr>
-              <a:t>t.test</a:t>
-            </a:r>
-            <a:r>
-              <a:rPr>
-                <a:solidFill>
-                  <a:srgbClr val="003B4F"/>
-                </a:solidFill>
-                <a:latin typeface="Courier"/>
-              </a:rPr>
-              <a:t>(length_mm </a:t>
-            </a:r>
-            <a:r>
-              <a:rPr>
-                <a:solidFill>
-                  <a:srgbClr val="5E5E5E"/>
-                </a:solidFill>
-                <a:latin typeface="Courier"/>
-              </a:rPr>
-              <a:t>~</a:t>
-            </a:r>
-            <a:r>
-              <a:rPr>
-                <a:solidFill>
-                  <a:srgbClr val="003B4F"/>
-                </a:solidFill>
-                <a:latin typeface="Courier"/>
-              </a:rPr>
-              <a:t> side, </a:t>
-            </a:r>
-            <a:r>
-              <a:rPr>
-                <a:solidFill>
-                  <a:srgbClr val="657422"/>
-                </a:solidFill>
-                <a:latin typeface="Courier"/>
-              </a:rPr>
-              <a:t>data =</a:t>
-            </a:r>
-            <a:r>
-              <a:rPr>
-                <a:solidFill>
-                  <a:srgbClr val="003B4F"/>
-                </a:solidFill>
-                <a:latin typeface="Courier"/>
-              </a:rPr>
-              <a:t> ps_df, </a:t>
-            </a:r>
-            <a:r>
-              <a:rPr>
-                <a:solidFill>
-                  <a:srgbClr val="657422"/>
-                </a:solidFill>
-                <a:latin typeface="Courier"/>
-              </a:rPr>
-              <a:t>var.equal =</a:t>
-            </a:r>
-            <a:r>
-              <a:rPr>
-                <a:solidFill>
-                  <a:srgbClr val="003B4F"/>
-                </a:solidFill>
-                <a:latin typeface="Courier"/>
-              </a:rPr>
-              <a:t> </a:t>
-            </a:r>
-            <a:r>
-              <a:rPr>
-                <a:solidFill>
-                  <a:srgbClr val="8F5902"/>
-                </a:solidFill>
-                <a:latin typeface="Courier"/>
-              </a:rPr>
-              <a:t>FALSE</a:t>
-            </a:r>
-            <a:r>
-              <a:rPr>
-                <a:solidFill>
-                  <a:srgbClr val="003B4F"/>
-                </a:solidFill>
-                <a:latin typeface="Courier"/>
-              </a:rPr>
-              <a:t>)</a:t>
-            </a:r>
-            <a:br/>
-            <a:r>
-              <a:rPr>
-                <a:solidFill>
-                  <a:srgbClr val="4758AB"/>
-                </a:solidFill>
-                <a:latin typeface="Courier"/>
-              </a:rPr>
-              <a:t>print</a:t>
-            </a:r>
-            <a:r>
-              <a:rPr>
-                <a:solidFill>
-                  <a:srgbClr val="003B4F"/>
-                </a:solidFill>
-                <a:latin typeface="Courier"/>
-              </a:rPr>
-              <a:t>(</a:t>
-            </a:r>
-            <a:r>
-              <a:rPr>
-                <a:solidFill>
-                  <a:srgbClr val="20794D"/>
-                </a:solidFill>
-                <a:latin typeface="Courier"/>
-              </a:rPr>
-              <a:t>"Standard two-sample t-test:"</a:t>
-            </a:r>
-            <a:r>
-              <a:rPr>
-                <a:solidFill>
-                  <a:srgbClr val="003B4F"/>
-                </a:solidFill>
-                <a:latin typeface="Courier"/>
-              </a:rPr>
-              <a:t>)</a:t>
-            </a:r>
-          </a:p>
-          <a:p>
-            <a:pPr lvl="0" indent="0">
-              <a:buNone/>
-            </a:pPr>
-            <a:r>
-              <a:rPr sz="2000">
-                <a:latin typeface="Courier"/>
-              </a:rPr>
-              <a:t>[1] "Standard two-sample t-test:"</a:t>
-            </a:r>
-          </a:p>
-          <a:p>
-            <a:pPr lvl="0" indent="0">
-              <a:buNone/>
-            </a:pPr>
-            <a:r>
-              <a:rPr>
-                <a:solidFill>
-                  <a:srgbClr val="4758AB"/>
-                </a:solidFill>
-                <a:latin typeface="Courier"/>
-              </a:rPr>
-              <a:t>print</a:t>
-            </a:r>
-            <a:r>
-              <a:rPr>
-                <a:solidFill>
-                  <a:srgbClr val="003B4F"/>
-                </a:solidFill>
-                <a:latin typeface="Courier"/>
-              </a:rPr>
-              <a:t>(t_test_result)</a:t>
-            </a:r>
-          </a:p>
-          <a:p>
-            <a:pPr lvl="0" indent="0">
-              <a:buNone/>
-            </a:pPr>
-            <a:r>
-              <a:rPr sz="2000">
-                <a:latin typeface="Courier"/>
-              </a:rPr>
-              <a:t>
-    Welch Two Sample t-test
-data:  length_mm by side
-t = 1.1279, df = 13.96, p-value = 0.2784
-alternative hypothesis: true difference in means between group shady and group sunny is not equal to 0
-95 percent confidence interval:
- -1.310069  4.214743
-sample estimates:
-mean in group shady mean in group sunny 
-           17.60561            16.15328 </a:t>
-            </a:r>
-          </a:p>
-          <a:p>
-            <a:pPr lvl="0" indent="0">
-              <a:buNone/>
-            </a:pPr>
-            <a:r>
-              <a:rPr>
-                <a:solidFill>
-                  <a:srgbClr val="5E5E5E"/>
-                </a:solidFill>
-                <a:latin typeface="Courier"/>
-              </a:rPr>
-              <a:t># Welch's t-test (if variances are unequal)</a:t>
-            </a:r>
-            <a:br/>
-            <a:r>
-              <a:rPr>
-                <a:solidFill>
-                  <a:srgbClr val="5E5E5E"/>
-                </a:solidFill>
-                <a:latin typeface="Courier"/>
-              </a:rPr>
-              <a:t># YOUR CODE HERE</a:t>
-            </a:r>
-          </a:p>
-        </p:txBody>
-      </p:sp>
-    </p:spTree>
-  </p:cSld>
-</p:sld>
-</file>
-
-<file path=ppt/slides/slide39.xml><?xml version="1.0" encoding="utf-8"?>
-<p:sld xmlns:a="http://schemas.openxmlformats.org/drawingml/2006/main" xmlns:r="http://schemas.openxmlformats.org/officeDocument/2006/relationships" xmlns:p="http://schemas.openxmlformats.org/presentationml/2006/main">
-  <p:cSld>
-    <p:spTree>
-      <p:nvGrpSpPr>
-        <p:cNvPr id="1" name=""/>
-        <p:cNvGrpSpPr/>
-        <p:nvPr/>
-      </p:nvGrpSpPr>
-      <p:grpSpPr>
-        <a:xfrm>
-          <a:off x="0" y="0"/>
-          <a:ext cx="0" cy="0"/>
-          <a:chOff x="0" y="0"/>
-          <a:chExt cx="0" cy="0"/>
-        </a:xfrm>
-      </p:grpSpPr>
-      <p:sp>
-        <p:nvSpPr>
-          <p:cNvPr id="2" name="Title 1"/>
-          <p:cNvSpPr>
-            <a:spLocks noGrp="1"/>
-          </p:cNvSpPr>
-          <p:nvPr>
-            <p:ph type="title"/>
-          </p:nvPr>
-        </p:nvSpPr>
-        <p:spPr>
-          <a:xfrm>
-            <a:off x="0" y="0"/>
-            <a:ext cx="9144000" cy="582780"/>
-          </a:xfrm>
-        </p:spPr>
-        <p:txBody>
-          <a:bodyPr/>
-          <a:lstStyle/>
-          <a:p>
-            <a:pPr lvl="0" indent="0" marL="0">
-              <a:buNone/>
-            </a:pPr>
-            <a:r>
-              <a:rPr b="1"/>
-              <a:t>Lecture 5:</a:t>
-            </a:r>
-            <a:r>
-              <a:rPr/>
-              <a:t> Difference between a Two-Sample T and Welch’s T Test</a:t>
-            </a:r>
-          </a:p>
-        </p:txBody>
-      </p:sp>
-      <p:sp>
-        <p:nvSpPr>
-          <p:cNvPr id="3" name="Content Placeholder 2"/>
-          <p:cNvSpPr>
-            <a:spLocks noGrp="1"/>
-          </p:cNvSpPr>
-          <p:nvPr>
-            <p:ph idx="1"/>
-          </p:nvPr>
-        </p:nvSpPr>
-        <p:spPr/>
-        <p:txBody>
-          <a:bodyPr/>
-          <a:lstStyle/>
-          <a:p>
-            <a:pPr lvl="0" indent="0" marL="0">
-              <a:spcBef>
-                <a:spcPts val="3000"/>
-              </a:spcBef>
-              <a:buNone/>
-            </a:pPr>
-            <a:r>
-              <a:rPr b="1"/>
-              <a:t>Standard t-test (Student’s t-test)</a:t>
+              <a:t>Key takeaways:</a:t>
             </a:r>
           </a:p>
           <a:p>
             <a:pPr lvl="0"/>
             <a:r>
-              <a:rPr b="1"/>
-              <a:t>Assumes equal variances</a:t>
-            </a:r>
-            <a:r>
-              <a:rPr/>
-              <a:t> between the two groups being compared</a:t>
+              <a:rPr/>
+              <a:t>Always check assumptions before conducting tests</a:t>
             </a:r>
           </a:p>
           <a:p>
             <a:pPr lvl="0"/>
             <a:r>
               <a:rPr/>
-              <a:t>Uses a </a:t>
-            </a:r>
-            <a:r>
-              <a:rPr b="1"/>
-              <a:t>pooled variance estimate</a:t>
-            </a:r>
-            <a:r>
-              <a:rPr/>
-              <a:t> that combines data from both group</a:t>
+              <a:t>Visualize your data to understand patterns</a:t>
             </a:r>
           </a:p>
           <a:p>
             <a:pPr lvl="0"/>
             <a:r>
               <a:rPr/>
-              <a:t>Has </a:t>
-            </a:r>
-            <a:r>
-              <a:rPr b="1"/>
-              <a:t>higher statistical power</a:t>
-            </a:r>
-            <a:r>
-              <a:rPr/>
-              <a:t> when the equal variance assumption is met</a:t>
+              <a:t>Report results comprehensively</a:t>
             </a:r>
           </a:p>
           <a:p>
             <a:pPr lvl="0"/>
             <a:r>
-              <a:rPr b="1"/>
-              <a:t>Degrees of freedom</a:t>
-            </a:r>
-            <a:r>
-              <a:rPr/>
-              <a:t> = n₁ + n₂ - 2</a:t>
-            </a:r>
-          </a:p>
-          <a:p>
-            <a:pPr lvl="0" indent="0" marL="0">
-              <a:spcBef>
-                <a:spcPts val="3000"/>
-              </a:spcBef>
-              <a:buNone/>
-            </a:pPr>
-            <a:r>
-              <a:rPr b="1"/>
-              <a:t>Welch’s t-test</a:t>
-            </a:r>
-          </a:p>
-          <a:p>
-            <a:pPr lvl="0"/>
-            <a:r>
-              <a:rPr b="1"/>
-              <a:t>Does not assume equal variances</a:t>
-            </a:r>
-            <a:r>
-              <a:rPr/>
-              <a:t> between groups (also called the “unequal variances t-test”)</a:t>
-            </a:r>
-          </a:p>
-          <a:p>
-            <a:pPr lvl="0"/>
-            <a:r>
-              <a:rPr/>
-              <a:t>Uses </a:t>
-            </a:r>
-            <a:r>
-              <a:rPr b="1"/>
-              <a:t>separate variance estimates</a:t>
-            </a:r>
-            <a:r>
-              <a:rPr/>
-              <a:t> for each group</a:t>
-            </a:r>
-          </a:p>
-          <a:p>
-            <a:pPr lvl="0"/>
-            <a:r>
-              <a:rPr/>
-              <a:t>More </a:t>
-            </a:r>
-            <a:r>
-              <a:rPr b="1"/>
-              <a:t>robust</a:t>
-            </a:r>
-            <a:r>
-              <a:rPr/>
-              <a:t> when group variances are different</a:t>
-            </a:r>
-          </a:p>
-          <a:p>
-            <a:pPr lvl="0"/>
-            <a:r>
-              <a:rPr/>
-              <a:t>Uses a more complex </a:t>
-            </a:r>
-            <a:r>
-              <a:rPr b="1"/>
-              <a:t>degrees of freedom calculation</a:t>
-            </a:r>
-            <a:r>
-              <a:rPr/>
-              <a:t> (</a:t>
-            </a:r>
-            <a:r>
-              <a:rPr b="1"/>
-              <a:t>Welch-Satterthwaite equation</a:t>
-            </a:r>
-            <a:r>
-              <a:rPr/>
-              <a:t>) and decimal!!!</a:t>
-            </a:r>
-          </a:p>
-          <a:p>
-            <a:pPr lvl="0"/>
-            <a:r>
-              <a:rPr b="1"/>
-              <a:t>Degrees of freedom</a:t>
-            </a:r>
-            <a:r>
-              <a:rPr/>
-              <a:t> are typically non-integer and usually smaller than the standard t-test</a:t>
+              <a:rPr/>
+              <a:t>Consider alternatives when assumptions are violated - non parametric tests…</a:t>
             </a:r>
           </a:p>
         </p:txBody>
@@ -11360,1210 +11149,6 @@
 </p:sld>
 </file>
 
-<file path=ppt/slides/slide40.xml><?xml version="1.0" encoding="utf-8"?>
-<p:sld xmlns:a="http://schemas.openxmlformats.org/drawingml/2006/main" xmlns:r="http://schemas.openxmlformats.org/officeDocument/2006/relationships" xmlns:p="http://schemas.openxmlformats.org/presentationml/2006/main">
-  <p:cSld>
-    <p:spTree>
-      <p:nvGrpSpPr>
-        <p:cNvPr id="1" name=""/>
-        <p:cNvGrpSpPr/>
-        <p:nvPr/>
-      </p:nvGrpSpPr>
-      <p:grpSpPr>
-        <a:xfrm>
-          <a:off x="0" y="0"/>
-          <a:ext cx="0" cy="0"/>
-          <a:chOff x="0" y="0"/>
-          <a:chExt cx="0" cy="0"/>
-        </a:xfrm>
-      </p:grpSpPr>
-      <p:sp>
-        <p:nvSpPr>
-          <p:cNvPr id="2" name="Title 1"/>
-          <p:cNvSpPr>
-            <a:spLocks noGrp="1"/>
-          </p:cNvSpPr>
-          <p:nvPr>
-            <p:ph type="title"/>
-          </p:nvPr>
-        </p:nvSpPr>
-        <p:spPr>
-          <a:xfrm>
-            <a:off x="0" y="0"/>
-            <a:ext cx="9144000" cy="602780"/>
-          </a:xfrm>
-          <a:solidFill>
-            <a:srgbClr val="70121D"/>
-          </a:solidFill>
-        </p:spPr>
-        <p:txBody>
-          <a:bodyPr/>
-          <a:lstStyle/>
-          <a:p>
-            <a:pPr lvl="0" indent="0" marL="0">
-              <a:buNone/>
-            </a:pPr>
-            <a:r>
-              <a:rPr b="1"/>
-              <a:t>Lecture 5:</a:t>
-            </a:r>
-            <a:r>
-              <a:rPr/>
-              <a:t> Interpreting Two-Sample T-Test Results</a:t>
-            </a:r>
-          </a:p>
-        </p:txBody>
-      </p:sp>
-      <p:sp>
-        <p:nvSpPr>
-          <p:cNvPr id="3" name="Content Placeholder 2"/>
-          <p:cNvSpPr>
-            <a:spLocks noGrp="1"/>
-          </p:cNvSpPr>
-          <p:nvPr>
-            <p:ph idx="1" sz="half"/>
-          </p:nvPr>
-        </p:nvSpPr>
-        <p:spPr/>
-        <p:txBody>
-          <a:bodyPr/>
-          <a:lstStyle/>
-          <a:p>
-            <a:pPr lvl="0" indent="0" marL="0">
-              <a:buNone/>
-            </a:pPr>
-            <a:r>
-              <a:rPr b="1"/>
-              <a:t>Interpret the results of the two-sample t-test</a:t>
-            </a:r>
-          </a:p>
-          <a:p>
-            <a:pPr lvl="0" indent="0" marL="0">
-              <a:buNone/>
-            </a:pPr>
-            <a:r>
-              <a:rPr/>
-              <a:t>What can we conclude about the needle lengths on sunny vs shady sides?</a:t>
-            </a:r>
-          </a:p>
-          <a:p>
-            <a:pPr lvl="0" indent="0" marL="0">
-              <a:buNone/>
-            </a:pPr>
-            <a:r>
-              <a:rPr b="1"/>
-              <a:t>How to report this result in a scientific paper:</a:t>
-            </a:r>
-          </a:p>
-          <a:p>
-            <a:pPr lvl="0" indent="0" marL="0">
-              <a:buNone/>
-            </a:pPr>
-            <a:r>
-              <a:rPr/>
-              <a:t>“A two-tailed, two-sample t-test at α=0.05 showed [a significant/no significant] difference in needle length between sunny (M = …, SD = …) and shady (M = …, SD = …) sides of pine trees, t(…) = …, p = ….”</a:t>
-            </a:r>
-          </a:p>
-        </p:txBody>
-      </p:sp>
-      <p:pic>
-        <p:nvPicPr>
-          <p:cNvPr descr="05_01_lecture_powerpoint_files/figure-pptx/unnamed-chunk-23-1.png" id="0" name="Picture 1"/>
-          <p:cNvPicPr>
-            <a:picLocks noGrp="1" noChangeAspect="1"/>
-          </p:cNvPicPr>
-          <p:nvPr/>
-        </p:nvPicPr>
-        <p:blipFill>
-          <a:blip r:embed="rId2"/>
-          <a:stretch>
-            <a:fillRect/>
-          </a:stretch>
-        </p:blipFill>
-        <p:spPr bwMode="auto">
-          <a:xfrm>
-            <a:off x="6121400" y="1778000"/>
-            <a:ext cx="2781300" cy="2222500"/>
-          </a:xfrm>
-          <a:prstGeom prst="rect">
-            <a:avLst/>
-          </a:prstGeom>
-          <a:noFill/>
-          <a:ln w="9525">
-            <a:noFill/>
-            <a:headEnd/>
-            <a:tailEnd/>
-          </a:ln>
-        </p:spPr>
-      </p:pic>
-    </p:spTree>
-  </p:cSld>
-</p:sld>
-</file>
-
-<file path=ppt/slides/slide41.xml><?xml version="1.0" encoding="utf-8"?>
-<p:sld xmlns:a="http://schemas.openxmlformats.org/drawingml/2006/main" xmlns:r="http://schemas.openxmlformats.org/officeDocument/2006/relationships" xmlns:p="http://schemas.openxmlformats.org/presentationml/2006/main">
-  <p:cSld>
-    <p:spTree>
-      <p:nvGrpSpPr>
-        <p:cNvPr id="1" name=""/>
-        <p:cNvGrpSpPr/>
-        <p:nvPr/>
-      </p:nvGrpSpPr>
-      <p:grpSpPr>
-        <a:xfrm>
-          <a:off x="0" y="0"/>
-          <a:ext cx="0" cy="0"/>
-          <a:chOff x="0" y="0"/>
-          <a:chExt cx="0" cy="0"/>
-        </a:xfrm>
-      </p:grpSpPr>
-      <p:sp>
-        <p:nvSpPr>
-          <p:cNvPr id="2" name="Title 1"/>
-          <p:cNvSpPr>
-            <a:spLocks noGrp="1"/>
-          </p:cNvSpPr>
-          <p:nvPr>
-            <p:ph type="title"/>
-          </p:nvPr>
-        </p:nvSpPr>
-        <p:spPr>
-          <a:xfrm>
-            <a:off x="0" y="0"/>
-            <a:ext cx="9144000" cy="602780"/>
-          </a:xfrm>
-          <a:solidFill>
-            <a:srgbClr val="70121D"/>
-          </a:solidFill>
-        </p:spPr>
-        <p:txBody>
-          <a:bodyPr/>
-          <a:lstStyle/>
-          <a:p>
-            <a:pPr lvl="0" indent="0" marL="0">
-              <a:buNone/>
-            </a:pPr>
-            <a:r>
-              <a:rPr b="1"/>
-              <a:t>Lecture 5:</a:t>
-            </a:r>
-            <a:r>
-              <a:rPr/>
-              <a:t> Visualizing the Results</a:t>
-            </a:r>
-          </a:p>
-        </p:txBody>
-      </p:sp>
-      <p:sp>
-        <p:nvSpPr>
-          <p:cNvPr id="3" name="Content Placeholder 2"/>
-          <p:cNvSpPr>
-            <a:spLocks noGrp="1"/>
-          </p:cNvSpPr>
-          <p:nvPr>
-            <p:ph idx="1" sz="half"/>
-          </p:nvPr>
-        </p:nvSpPr>
-        <p:spPr/>
-        <p:txBody>
-          <a:bodyPr/>
-          <a:lstStyle/>
-          <a:p>
-            <a:pPr lvl="0" indent="0" marL="0">
-              <a:buNone/>
-            </a:pPr>
-            <a:r>
-              <a:rPr b="1"/>
-              <a:t>Interpret the results of the two-sample t-test</a:t>
-            </a:r>
-          </a:p>
-          <a:p>
-            <a:pPr lvl="0" indent="0" marL="0">
-              <a:buNone/>
-            </a:pPr>
-            <a:r>
-              <a:rPr/>
-              <a:t>What can we conclude about the needle lengths on sunny vs shady sides?</a:t>
-            </a:r>
-          </a:p>
-          <a:p>
-            <a:pPr lvl="0" indent="0" marL="0">
-              <a:buNone/>
-            </a:pPr>
-            <a:r>
-              <a:rPr b="1"/>
-              <a:t>How to report this result in a scientific paper:</a:t>
-            </a:r>
-          </a:p>
-          <a:p>
-            <a:pPr lvl="0" indent="0" marL="0">
-              <a:buNone/>
-            </a:pPr>
-            <a:r>
-              <a:rPr/>
-              <a:t>“A two-tailed, two-sample t-test at α=0.05 showed [a significant/no significant] difference in needle length between sunny (M = …, SD = …) and shady (M = …, SD = …) sides of pine trees, t(…) = …, p = ….”</a:t>
-            </a:r>
-          </a:p>
-        </p:txBody>
-      </p:sp>
-      <p:pic>
-        <p:nvPicPr>
-          <p:cNvPr descr="05_01_lecture_powerpoint_files/figure-pptx/unnamed-chunk-24-1.png" id="0" name="Picture 1"/>
-          <p:cNvPicPr>
-            <a:picLocks noGrp="1" noChangeAspect="1"/>
-          </p:cNvPicPr>
-          <p:nvPr/>
-        </p:nvPicPr>
-        <p:blipFill>
-          <a:blip r:embed="rId2"/>
-          <a:stretch>
-            <a:fillRect/>
-          </a:stretch>
-        </p:blipFill>
-        <p:spPr bwMode="auto">
-          <a:xfrm>
-            <a:off x="6121400" y="1498600"/>
-            <a:ext cx="2781300" cy="2781300"/>
-          </a:xfrm>
-          <a:prstGeom prst="rect">
-            <a:avLst/>
-          </a:prstGeom>
-          <a:noFill/>
-          <a:ln w="9525">
-            <a:noFill/>
-            <a:headEnd/>
-            <a:tailEnd/>
-          </a:ln>
-        </p:spPr>
-      </p:pic>
-    </p:spTree>
-  </p:cSld>
-</p:sld>
-</file>
-
-<file path=ppt/slides/slide42.xml><?xml version="1.0" encoding="utf-8"?>
-<p:sld xmlns:a="http://schemas.openxmlformats.org/drawingml/2006/main" xmlns:r="http://schemas.openxmlformats.org/officeDocument/2006/relationships" xmlns:p="http://schemas.openxmlformats.org/presentationml/2006/main">
-  <p:cSld>
-    <p:spTree>
-      <p:nvGrpSpPr>
-        <p:cNvPr id="1" name=""/>
-        <p:cNvGrpSpPr/>
-        <p:nvPr/>
-      </p:nvGrpSpPr>
-      <p:grpSpPr>
-        <a:xfrm>
-          <a:off x="0" y="0"/>
-          <a:ext cx="0" cy="0"/>
-          <a:chOff x="0" y="0"/>
-          <a:chExt cx="0" cy="0"/>
-        </a:xfrm>
-      </p:grpSpPr>
-      <p:sp>
-        <p:nvSpPr>
-          <p:cNvPr id="2" name="Title 1"/>
-          <p:cNvSpPr>
-            <a:spLocks noGrp="1"/>
-          </p:cNvSpPr>
-          <p:nvPr>
-            <p:ph type="title"/>
-          </p:nvPr>
-        </p:nvSpPr>
-        <p:spPr>
-          <a:xfrm>
-            <a:off x="0" y="0"/>
-            <a:ext cx="9144000" cy="582780"/>
-          </a:xfrm>
-        </p:spPr>
-        <p:txBody>
-          <a:bodyPr/>
-          <a:lstStyle/>
-          <a:p>
-            <a:pPr lvl="0" indent="0" marL="0">
-              <a:buNone/>
-            </a:pPr>
-            <a:r>
-              <a:rPr b="1"/>
-              <a:t>Lecture 5:</a:t>
-            </a:r>
-            <a:r>
-              <a:rPr/>
-              <a:t> Now what does a paired T test tell us</a:t>
-            </a:r>
-          </a:p>
-        </p:txBody>
-      </p:sp>
-      <p:sp>
-        <p:nvSpPr>
-          <p:cNvPr id="3" name="Content Placeholder 2"/>
-          <p:cNvSpPr>
-            <a:spLocks noGrp="1"/>
-          </p:cNvSpPr>
-          <p:nvPr>
-            <p:ph idx="1"/>
-          </p:nvPr>
-        </p:nvSpPr>
-        <p:spPr/>
-        <p:txBody>
-          <a:bodyPr/>
-          <a:lstStyle/>
-          <a:p>
-            <a:pPr lvl="0" indent="0" marL="0">
-              <a:buNone/>
-            </a:pPr>
-            <a:r>
-              <a:rPr/>
-              <a:t>Why do a paired T test</a:t>
-            </a:r>
-          </a:p>
-          <a:p>
-            <a:pPr lvl="0" indent="0">
-              <a:buNone/>
-            </a:pPr>
-            <a:r>
-              <a:rPr>
-                <a:solidFill>
-                  <a:srgbClr val="5E5E5E"/>
-                </a:solidFill>
-                <a:latin typeface="Courier"/>
-              </a:rPr>
-              <a:t># YOUR </a:t>
-            </a:r>
-            <a:r>
-              <a:rPr>
-                <a:solidFill>
-                  <a:srgbClr val="AD0000"/>
-                </a:solidFill>
-                <a:latin typeface="Courier"/>
-              </a:rPr>
-              <a:t>TASK</a:t>
-            </a:r>
-            <a:r>
-              <a:rPr>
-                <a:solidFill>
-                  <a:srgbClr val="5E5E5E"/>
-                </a:solidFill>
-                <a:latin typeface="Courier"/>
-              </a:rPr>
-              <a:t>: Conduct a two-sample t-test</a:t>
-            </a:r>
-            <a:br/>
-            <a:r>
-              <a:rPr>
-                <a:solidFill>
-                  <a:srgbClr val="5E5E5E"/>
-                </a:solidFill>
-                <a:latin typeface="Courier"/>
-              </a:rPr>
-              <a:t># Use var.equal=TRUE for standard t-test or var.equal=FALSE for Welch's t-test</a:t>
-            </a:r>
-            <a:br/>
-            <a:br/>
-            <a:r>
-              <a:rPr>
-                <a:solidFill>
-                  <a:srgbClr val="003B4F"/>
-                </a:solidFill>
-                <a:latin typeface="Courier"/>
-              </a:rPr>
-              <a:t>ps_wide_df &lt;- ps_df </a:t>
-            </a:r>
-            <a:r>
-              <a:rPr>
-                <a:solidFill>
-                  <a:srgbClr val="5E5E5E"/>
-                </a:solidFill>
-                <a:latin typeface="Courier"/>
-              </a:rPr>
-              <a:t>%&gt;%</a:t>
-            </a:r>
-            <a:br/>
-            <a:r>
-              <a:rPr>
-                <a:solidFill>
-                  <a:srgbClr val="003B4F"/>
-                </a:solidFill>
-                <a:latin typeface="Courier"/>
-              </a:rPr>
-              <a:t>  </a:t>
-            </a:r>
-            <a:r>
-              <a:rPr>
-                <a:solidFill>
-                  <a:srgbClr val="4758AB"/>
-                </a:solidFill>
-                <a:latin typeface="Courier"/>
-              </a:rPr>
-              <a:t>pivot_wider</a:t>
-            </a:r>
-            <a:r>
-              <a:rPr>
-                <a:solidFill>
-                  <a:srgbClr val="003B4F"/>
-                </a:solidFill>
-                <a:latin typeface="Courier"/>
-              </a:rPr>
-              <a:t>(</a:t>
-            </a:r>
-            <a:br/>
-            <a:r>
-              <a:rPr>
-                <a:solidFill>
-                  <a:srgbClr val="003B4F"/>
-                </a:solidFill>
-                <a:latin typeface="Courier"/>
-              </a:rPr>
-              <a:t>    </a:t>
-            </a:r>
-            <a:r>
-              <a:rPr>
-                <a:solidFill>
-                  <a:srgbClr val="657422"/>
-                </a:solidFill>
-                <a:latin typeface="Courier"/>
-              </a:rPr>
-              <a:t>names_from =</a:t>
-            </a:r>
-            <a:r>
-              <a:rPr>
-                <a:solidFill>
-                  <a:srgbClr val="003B4F"/>
-                </a:solidFill>
-                <a:latin typeface="Courier"/>
-              </a:rPr>
-              <a:t> </a:t>
-            </a:r>
-            <a:r>
-              <a:rPr>
-                <a:solidFill>
-                  <a:srgbClr val="20794D"/>
-                </a:solidFill>
-                <a:latin typeface="Courier"/>
-              </a:rPr>
-              <a:t>"side"</a:t>
-            </a:r>
-            <a:r>
-              <a:rPr>
-                <a:solidFill>
-                  <a:srgbClr val="003B4F"/>
-                </a:solidFill>
-                <a:latin typeface="Courier"/>
-              </a:rPr>
-              <a:t>,</a:t>
-            </a:r>
-            <a:br/>
-            <a:r>
-              <a:rPr>
-                <a:solidFill>
-                  <a:srgbClr val="003B4F"/>
-                </a:solidFill>
-                <a:latin typeface="Courier"/>
-              </a:rPr>
-              <a:t>    </a:t>
-            </a:r>
-            <a:r>
-              <a:rPr>
-                <a:solidFill>
-                  <a:srgbClr val="657422"/>
-                </a:solidFill>
-                <a:latin typeface="Courier"/>
-              </a:rPr>
-              <a:t>values_from =</a:t>
-            </a:r>
-            <a:r>
-              <a:rPr>
-                <a:solidFill>
-                  <a:srgbClr val="003B4F"/>
-                </a:solidFill>
-                <a:latin typeface="Courier"/>
-              </a:rPr>
-              <a:t> length_mm</a:t>
-            </a:r>
-            <a:br/>
-            <a:r>
-              <a:rPr>
-                <a:solidFill>
-                  <a:srgbClr val="003B4F"/>
-                </a:solidFill>
-                <a:latin typeface="Courier"/>
-              </a:rPr>
-              <a:t>  )</a:t>
-            </a:r>
-            <a:br/>
-            <a:br/>
-            <a:br/>
-            <a:r>
-              <a:rPr>
-                <a:solidFill>
-                  <a:srgbClr val="5E5E5E"/>
-                </a:solidFill>
-                <a:latin typeface="Courier"/>
-              </a:rPr>
-              <a:t># Standard t-test (if variances are equal)</a:t>
-            </a:r>
-            <a:br/>
-            <a:r>
-              <a:rPr>
-                <a:solidFill>
-                  <a:srgbClr val="003B4F"/>
-                </a:solidFill>
-                <a:latin typeface="Courier"/>
-              </a:rPr>
-              <a:t>paired_t_test_result &lt;- </a:t>
-            </a:r>
-            <a:r>
-              <a:rPr>
-                <a:solidFill>
-                  <a:srgbClr val="4758AB"/>
-                </a:solidFill>
-                <a:latin typeface="Courier"/>
-              </a:rPr>
-              <a:t>t.test</a:t>
-            </a:r>
-            <a:r>
-              <a:rPr>
-                <a:solidFill>
-                  <a:srgbClr val="003B4F"/>
-                </a:solidFill>
-                <a:latin typeface="Courier"/>
-              </a:rPr>
-              <a:t>(ps_wide_df</a:t>
-            </a:r>
-            <a:r>
-              <a:rPr>
-                <a:solidFill>
-                  <a:srgbClr val="5E5E5E"/>
-                </a:solidFill>
-                <a:latin typeface="Courier"/>
-              </a:rPr>
-              <a:t>$</a:t>
-            </a:r>
-            <a:r>
-              <a:rPr>
-                <a:solidFill>
-                  <a:srgbClr val="003B4F"/>
-                </a:solidFill>
-                <a:latin typeface="Courier"/>
-              </a:rPr>
-              <a:t>sunny, ps_wide_df</a:t>
-            </a:r>
-            <a:r>
-              <a:rPr>
-                <a:solidFill>
-                  <a:srgbClr val="5E5E5E"/>
-                </a:solidFill>
-                <a:latin typeface="Courier"/>
-              </a:rPr>
-              <a:t>$</a:t>
-            </a:r>
-            <a:r>
-              <a:rPr>
-                <a:solidFill>
-                  <a:srgbClr val="003B4F"/>
-                </a:solidFill>
-                <a:latin typeface="Courier"/>
-              </a:rPr>
-              <a:t>shady, </a:t>
-            </a:r>
-            <a:r>
-              <a:rPr>
-                <a:solidFill>
-                  <a:srgbClr val="657422"/>
-                </a:solidFill>
-                <a:latin typeface="Courier"/>
-              </a:rPr>
-              <a:t>paired =</a:t>
-            </a:r>
-            <a:r>
-              <a:rPr>
-                <a:solidFill>
-                  <a:srgbClr val="003B4F"/>
-                </a:solidFill>
-                <a:latin typeface="Courier"/>
-              </a:rPr>
-              <a:t> </a:t>
-            </a:r>
-            <a:r>
-              <a:rPr>
-                <a:solidFill>
-                  <a:srgbClr val="8F5902"/>
-                </a:solidFill>
-                <a:latin typeface="Courier"/>
-              </a:rPr>
-              <a:t>TRUE</a:t>
-            </a:r>
-            <a:r>
-              <a:rPr>
-                <a:solidFill>
-                  <a:srgbClr val="003B4F"/>
-                </a:solidFill>
-                <a:latin typeface="Courier"/>
-              </a:rPr>
-              <a:t>)</a:t>
-            </a:r>
-            <a:br/>
-            <a:r>
-              <a:rPr>
-                <a:solidFill>
-                  <a:srgbClr val="4758AB"/>
-                </a:solidFill>
-                <a:latin typeface="Courier"/>
-              </a:rPr>
-              <a:t>print</a:t>
-            </a:r>
-            <a:r>
-              <a:rPr>
-                <a:solidFill>
-                  <a:srgbClr val="003B4F"/>
-                </a:solidFill>
-                <a:latin typeface="Courier"/>
-              </a:rPr>
-              <a:t>(</a:t>
-            </a:r>
-            <a:r>
-              <a:rPr>
-                <a:solidFill>
-                  <a:srgbClr val="20794D"/>
-                </a:solidFill>
-                <a:latin typeface="Courier"/>
-              </a:rPr>
-              <a:t>"Standard two-sample t-test:"</a:t>
-            </a:r>
-            <a:r>
-              <a:rPr>
-                <a:solidFill>
-                  <a:srgbClr val="003B4F"/>
-                </a:solidFill>
-                <a:latin typeface="Courier"/>
-              </a:rPr>
-              <a:t>)</a:t>
-            </a:r>
-          </a:p>
-          <a:p>
-            <a:pPr lvl="0" indent="0">
-              <a:buNone/>
-            </a:pPr>
-            <a:r>
-              <a:rPr>
-                <a:latin typeface="Courier"/>
-              </a:rPr>
-              <a:t>[1] "Standard two-sample t-test:"</a:t>
-            </a:r>
-          </a:p>
-          <a:p>
-            <a:pPr lvl="0" indent="0">
-              <a:buNone/>
-            </a:pPr>
-            <a:r>
-              <a:rPr>
-                <a:solidFill>
-                  <a:srgbClr val="4758AB"/>
-                </a:solidFill>
-                <a:latin typeface="Courier"/>
-              </a:rPr>
-              <a:t>print</a:t>
-            </a:r>
-            <a:r>
-              <a:rPr>
-                <a:solidFill>
-                  <a:srgbClr val="003B4F"/>
-                </a:solidFill>
-                <a:latin typeface="Courier"/>
-              </a:rPr>
-              <a:t>(paired_t_test_result)</a:t>
-            </a:r>
-          </a:p>
-          <a:p>
-            <a:pPr lvl="0" indent="0">
-              <a:buNone/>
-            </a:pPr>
-            <a:r>
-              <a:rPr>
-                <a:latin typeface="Courier"/>
-              </a:rPr>
-              <a:t>
-    Paired t-test
-data:  ps_wide_df$sunny and ps_wide_df$shady
-t = -2.7818, df = 7, p-value = 0.02723
-alternative hypothesis: true mean difference is not equal to 0
-95 percent confidence interval:
- -2.6868652 -0.2178092
-sample estimates:
-mean difference 
-      -1.452337 </a:t>
-            </a:r>
-          </a:p>
-          <a:p>
-            <a:pPr lvl="0" indent="0">
-              <a:buNone/>
-            </a:pPr>
-            <a:r>
-              <a:rPr>
-                <a:solidFill>
-                  <a:srgbClr val="5E5E5E"/>
-                </a:solidFill>
-                <a:latin typeface="Courier"/>
-              </a:rPr>
-              <a:t># Welch's t-test (if variances are unequal)</a:t>
-            </a:r>
-            <a:br/>
-            <a:r>
-              <a:rPr>
-                <a:solidFill>
-                  <a:srgbClr val="5E5E5E"/>
-                </a:solidFill>
-                <a:latin typeface="Courier"/>
-              </a:rPr>
-              <a:t># YOUR CODE HERE</a:t>
-            </a:r>
-          </a:p>
-        </p:txBody>
-      </p:sp>
-    </p:spTree>
-  </p:cSld>
-</p:sld>
-</file>
-
-<file path=ppt/slides/slide43.xml><?xml version="1.0" encoding="utf-8"?>
-<p:sld xmlns:a="http://schemas.openxmlformats.org/drawingml/2006/main" xmlns:r="http://schemas.openxmlformats.org/officeDocument/2006/relationships" xmlns:p="http://schemas.openxmlformats.org/presentationml/2006/main">
-  <p:cSld>
-    <p:spTree>
-      <p:nvGrpSpPr>
-        <p:cNvPr id="1" name=""/>
-        <p:cNvGrpSpPr/>
-        <p:nvPr/>
-      </p:nvGrpSpPr>
-      <p:grpSpPr>
-        <a:xfrm>
-          <a:off x="0" y="0"/>
-          <a:ext cx="0" cy="0"/>
-          <a:chOff x="0" y="0"/>
-          <a:chExt cx="0" cy="0"/>
-        </a:xfrm>
-      </p:grpSpPr>
-      <p:sp>
-        <p:nvSpPr>
-          <p:cNvPr id="2" name="Title 1"/>
-          <p:cNvSpPr>
-            <a:spLocks noGrp="1"/>
-          </p:cNvSpPr>
-          <p:nvPr>
-            <p:ph type="title"/>
-          </p:nvPr>
-        </p:nvSpPr>
-        <p:spPr>
-          <a:xfrm>
-            <a:off x="0" y="0"/>
-            <a:ext cx="9144000" cy="871538"/>
-          </a:xfrm>
-        </p:spPr>
-        <p:txBody>
-          <a:bodyPr/>
-          <a:lstStyle/>
-          <a:p>
-            <a:pPr lvl="0" indent="0" marL="0">
-              <a:buNone/>
-            </a:pPr>
-            <a:r>
-              <a:rPr/>
-              <a:t>Lecture 5: What is going on??</a:t>
-            </a:r>
-          </a:p>
-        </p:txBody>
-      </p:sp>
-      <p:sp>
-        <p:nvSpPr>
-          <p:cNvPr id="4" name="Text Placeholder 3"/>
-          <p:cNvSpPr>
-            <a:spLocks noGrp="1"/>
-          </p:cNvSpPr>
-          <p:nvPr>
-            <p:ph idx="2" sz="half" type="body"/>
-          </p:nvPr>
-        </p:nvSpPr>
-        <p:spPr/>
-        <p:txBody>
-          <a:bodyPr/>
-          <a:lstStyle/>
-          <a:p>
-            <a:pPr lvl="0" indent="0" marL="0">
-              <a:buNone/>
-            </a:pPr>
-            <a:r>
-              <a:rPr/>
-              <a:t>Note that thee is a lot of variation within trees but the trend is the same</a:t>
-            </a:r>
-          </a:p>
-          <a:p>
-            <a:pPr lvl="0" indent="0">
-              <a:buNone/>
-            </a:pPr>
-            <a:r>
-              <a:rPr>
-                <a:solidFill>
-                  <a:srgbClr val="003B4F"/>
-                </a:solidFill>
-                <a:latin typeface="Courier"/>
-              </a:rPr>
-              <a:t>ps_plot</a:t>
-            </a:r>
-          </a:p>
-        </p:txBody>
-      </p:sp>
-      <p:pic>
-        <p:nvPicPr>
-          <p:cNvPr descr="05_01_lecture_powerpoint_files/figure-pptx/unnamed-chunk-26-1.png" id="0" name="Picture 1"/>
-          <p:cNvPicPr>
-            <a:picLocks noGrp="1" noChangeAspect="1"/>
-          </p:cNvPicPr>
-          <p:nvPr/>
-        </p:nvPicPr>
-        <p:blipFill>
-          <a:blip r:embed="rId2"/>
-          <a:stretch>
-            <a:fillRect/>
-          </a:stretch>
-        </p:blipFill>
-        <p:spPr bwMode="auto">
-          <a:xfrm>
-            <a:off x="3657600" y="1244600"/>
-            <a:ext cx="5232400" cy="3225800"/>
-          </a:xfrm>
-          <a:prstGeom prst="rect">
-            <a:avLst/>
-          </a:prstGeom>
-          <a:noFill/>
-          <a:ln w="9525">
-            <a:noFill/>
-            <a:headEnd/>
-            <a:tailEnd/>
-          </a:ln>
-        </p:spPr>
-      </p:pic>
-    </p:spTree>
-  </p:cSld>
-</p:sld>
-</file>
-
-<file path=ppt/slides/slide44.xml><?xml version="1.0" encoding="utf-8"?>
-<p:sld xmlns:a="http://schemas.openxmlformats.org/drawingml/2006/main" xmlns:r="http://schemas.openxmlformats.org/officeDocument/2006/relationships" xmlns:p="http://schemas.openxmlformats.org/presentationml/2006/main">
-  <p:cSld>
-    <p:spTree>
-      <p:nvGrpSpPr>
-        <p:cNvPr id="1" name=""/>
-        <p:cNvGrpSpPr/>
-        <p:nvPr/>
-      </p:nvGrpSpPr>
-      <p:grpSpPr>
-        <a:xfrm>
-          <a:off x="0" y="0"/>
-          <a:ext cx="0" cy="0"/>
-          <a:chOff x="0" y="0"/>
-          <a:chExt cx="0" cy="0"/>
-        </a:xfrm>
-      </p:grpSpPr>
-      <p:sp>
-        <p:nvSpPr>
-          <p:cNvPr id="2" name="Title 1"/>
-          <p:cNvSpPr>
-            <a:spLocks noGrp="1"/>
-          </p:cNvSpPr>
-          <p:nvPr>
-            <p:ph type="title"/>
-          </p:nvPr>
-        </p:nvSpPr>
-        <p:spPr>
-          <a:xfrm>
-            <a:off x="0" y="0"/>
-            <a:ext cx="9144000" cy="582780"/>
-          </a:xfrm>
-        </p:spPr>
-        <p:txBody>
-          <a:bodyPr/>
-          <a:lstStyle/>
-          <a:p>
-            <a:pPr lvl="0" indent="0" marL="0">
-              <a:buNone/>
-            </a:pPr>
-            <a:r>
-              <a:rPr b="1"/>
-              <a:t>Lecture 5:</a:t>
-            </a:r>
-            <a:r>
-              <a:rPr/>
-              <a:t> Assumptions of Parametric Tests</a:t>
-            </a:r>
-          </a:p>
-        </p:txBody>
-      </p:sp>
-      <p:sp>
-        <p:nvSpPr>
-          <p:cNvPr id="3" name="Content Placeholder 2"/>
-          <p:cNvSpPr>
-            <a:spLocks noGrp="1"/>
-          </p:cNvSpPr>
-          <p:nvPr>
-            <p:ph idx="1"/>
-          </p:nvPr>
-        </p:nvSpPr>
-        <p:spPr/>
-        <p:txBody>
-          <a:bodyPr/>
-          <a:lstStyle/>
-          <a:p>
-            <a:pPr lvl="0" indent="0" marL="0">
-              <a:buNone/>
-            </a:pPr>
-            <a:r>
-              <a:rPr b="1"/>
-              <a:t>Common assumptions for t-tests:</a:t>
-            </a:r>
-          </a:p>
-          <a:p>
-            <a:pPr lvl="0" indent="-342900" marL="342900">
-              <a:buAutoNum type="arabicPeriod"/>
-            </a:pPr>
-            <a:r>
-              <a:rPr/>
-              <a:t>Normality: Data comes from normally distributed populations</a:t>
-            </a:r>
-          </a:p>
-          <a:p>
-            <a:pPr lvl="0" indent="-342900" marL="342900">
-              <a:buAutoNum type="arabicPeriod"/>
-            </a:pPr>
-            <a:r>
-              <a:rPr/>
-              <a:t>Equal variances (for two-sample tests)</a:t>
-            </a:r>
-          </a:p>
-          <a:p>
-            <a:pPr lvl="0" indent="-342900" marL="342900">
-              <a:buAutoNum type="arabicPeriod"/>
-            </a:pPr>
-            <a:r>
-              <a:rPr/>
-              <a:t>Independence: Observations are independent</a:t>
-            </a:r>
-          </a:p>
-          <a:p>
-            <a:pPr lvl="0" indent="-342900" marL="342900">
-              <a:buAutoNum type="arabicPeriod"/>
-            </a:pPr>
-            <a:r>
-              <a:rPr/>
-              <a:t>No outliers: Extreme values can influence results</a:t>
-            </a:r>
-          </a:p>
-          <a:p>
-            <a:pPr lvl="0" indent="0" marL="0">
-              <a:buNone/>
-            </a:pPr>
-            <a:r>
-              <a:rPr/>
-              <a:t>What can we do if our data violates these assumptions?</a:t>
-            </a:r>
-          </a:p>
-          <a:p>
-            <a:pPr lvl="0" indent="0" marL="0">
-              <a:buNone/>
-            </a:pPr>
-            <a:r>
-              <a:rPr/>
-              <a:t>Alternatives when assumptions are violated:</a:t>
-            </a:r>
-          </a:p>
-          <a:p>
-            <a:pPr lvl="0"/>
-            <a:r>
-              <a:rPr/>
-              <a:t>Data transformation (log, square root, etc.)</a:t>
-            </a:r>
-          </a:p>
-          <a:p>
-            <a:pPr lvl="0"/>
-            <a:r>
-              <a:rPr/>
-              <a:t>Non-parametric tests</a:t>
-            </a:r>
-          </a:p>
-          <a:p>
-            <a:pPr lvl="0"/>
-            <a:r>
-              <a:rPr/>
-              <a:t>Robust statistical methods</a:t>
-            </a:r>
-          </a:p>
-        </p:txBody>
-      </p:sp>
-    </p:spTree>
-  </p:cSld>
-</p:sld>
-</file>
-
-<file path=ppt/slides/slide45.xml><?xml version="1.0" encoding="utf-8"?>
-<p:sld xmlns:a="http://schemas.openxmlformats.org/drawingml/2006/main" xmlns:r="http://schemas.openxmlformats.org/officeDocument/2006/relationships" xmlns:p="http://schemas.openxmlformats.org/presentationml/2006/main">
-  <p:cSld>
-    <p:spTree>
-      <p:nvGrpSpPr>
-        <p:cNvPr id="1" name=""/>
-        <p:cNvGrpSpPr/>
-        <p:nvPr/>
-      </p:nvGrpSpPr>
-      <p:grpSpPr>
-        <a:xfrm>
-          <a:off x="0" y="0"/>
-          <a:ext cx="0" cy="0"/>
-          <a:chOff x="0" y="0"/>
-          <a:chExt cx="0" cy="0"/>
-        </a:xfrm>
-      </p:grpSpPr>
-      <p:sp>
-        <p:nvSpPr>
-          <p:cNvPr id="2" name="Title 1"/>
-          <p:cNvSpPr>
-            <a:spLocks noGrp="1"/>
-          </p:cNvSpPr>
-          <p:nvPr>
-            <p:ph type="title"/>
-          </p:nvPr>
-        </p:nvSpPr>
-        <p:spPr>
-          <a:xfrm>
-            <a:off x="0" y="0"/>
-            <a:ext cx="9144000" cy="582780"/>
-          </a:xfrm>
-        </p:spPr>
-        <p:txBody>
-          <a:bodyPr/>
-          <a:lstStyle/>
-          <a:p>
-            <a:pPr lvl="0" indent="0" marL="0">
-              <a:buNone/>
-            </a:pPr>
-            <a:r>
-              <a:rPr b="1"/>
-              <a:t>Lecture 5:</a:t>
-            </a:r>
-            <a:r>
-              <a:rPr/>
-              <a:t> Summary and Conclusions</a:t>
-            </a:r>
-          </a:p>
-        </p:txBody>
-      </p:sp>
-      <p:sp>
-        <p:nvSpPr>
-          <p:cNvPr id="3" name="Content Placeholder 2"/>
-          <p:cNvSpPr>
-            <a:spLocks noGrp="1"/>
-          </p:cNvSpPr>
-          <p:nvPr>
-            <p:ph idx="1"/>
-          </p:nvPr>
-        </p:nvSpPr>
-        <p:spPr/>
-        <p:txBody>
-          <a:bodyPr/>
-          <a:lstStyle/>
-          <a:p>
-            <a:pPr lvl="0" indent="0" marL="0">
-              <a:buNone/>
-            </a:pPr>
-            <a:r>
-              <a:rPr/>
-              <a:t>In this activity, we’ve:</a:t>
-            </a:r>
-          </a:p>
-          <a:p>
-            <a:pPr lvl="0" indent="-342900" marL="342900">
-              <a:buAutoNum type="arabicPeriod"/>
-            </a:pPr>
-            <a:r>
-              <a:rPr/>
-              <a:t>Formulated hypotheses about pine needle length</a:t>
-            </a:r>
-          </a:p>
-          <a:p>
-            <a:pPr lvl="0" indent="-342900" marL="342900">
-              <a:buAutoNum type="arabicPeriod"/>
-            </a:pPr>
-            <a:r>
-              <a:rPr/>
-              <a:t>Tested assumptions for parametric tests</a:t>
-            </a:r>
-          </a:p>
-          <a:p>
-            <a:pPr lvl="0" indent="-342900" marL="342900">
-              <a:buAutoNum type="arabicPeriod"/>
-            </a:pPr>
-            <a:r>
-              <a:rPr/>
-              <a:t>Conducted one-sample and two-sample t-tests</a:t>
-            </a:r>
-          </a:p>
-          <a:p>
-            <a:pPr lvl="0" indent="-342900" marL="342900">
-              <a:buAutoNum type="arabicPeriod"/>
-            </a:pPr>
-            <a:r>
-              <a:rPr/>
-              <a:t>Visualized data using appropriate methods</a:t>
-            </a:r>
-          </a:p>
-          <a:p>
-            <a:pPr lvl="0" indent="-342900" marL="342900">
-              <a:buAutoNum type="arabicPeriod"/>
-            </a:pPr>
-            <a:r>
-              <a:rPr/>
-              <a:t>Learned how to interpret and report t-test results</a:t>
-            </a:r>
-          </a:p>
-          <a:p>
-            <a:pPr lvl="0" indent="0" marL="0">
-              <a:buNone/>
-            </a:pPr>
-            <a:r>
-              <a:rPr b="1"/>
-              <a:t>Key takeaways:</a:t>
-            </a:r>
-          </a:p>
-          <a:p>
-            <a:pPr lvl="0"/>
-            <a:r>
-              <a:rPr/>
-              <a:t>Always check assumptions before conducting tests</a:t>
-            </a:r>
-          </a:p>
-          <a:p>
-            <a:pPr lvl="0"/>
-            <a:r>
-              <a:rPr/>
-              <a:t>Visualize your data to understand patterns</a:t>
-            </a:r>
-          </a:p>
-          <a:p>
-            <a:pPr lvl="0"/>
-            <a:r>
-              <a:rPr/>
-              <a:t>Report results comprehensively</a:t>
-            </a:r>
-          </a:p>
-          <a:p>
-            <a:pPr lvl="0"/>
-            <a:r>
-              <a:rPr/>
-              <a:t>Consider alternatives when assumptions are violated - non parametric tests…</a:t>
-            </a:r>
-          </a:p>
-        </p:txBody>
-      </p:sp>
-    </p:spTree>
-  </p:cSld>
-</p:sld>
-</file>
-
 <file path=ppt/slides/slide5.xml><?xml version="1.0" encoding="utf-8"?>
 <p:sld xmlns:a="http://schemas.openxmlformats.org/drawingml/2006/main" xmlns:r="http://schemas.openxmlformats.org/officeDocument/2006/relationships" xmlns:p="http://schemas.openxmlformats.org/presentationml/2006/main">
   <p:cSld>
@@ -12662,7 +11247,7 @@
             <a:pPr lvl="0"/>
             <a:r>
               <a:rPr/>
-              <a:t>One sample T Tests</a:t>
+              <a:t>One sample T Test</a:t>
             </a:r>
           </a:p>
           <a:p>
@@ -12670,6 +11255,13 @@
             <a:r>
               <a:rPr/>
               <a:t>Two sample T Test</a:t>
+            </a:r>
+          </a:p>
+          <a:p>
+            <a:pPr lvl="0"/>
+            <a:r>
+              <a:rPr/>
+              <a:t>Paired T Test</a:t>
             </a:r>
           </a:p>
         </p:txBody>
